--- a/Lectures/01.Foundations/Lecture02.pptx
+++ b/Lectures/01.Foundations/Lecture02.pptx
@@ -5,10 +5,10 @@
     <p:sldMasterId id="2147483648" r:id="rId1"/>
   </p:sldMasterIdLst>
   <p:notesMasterIdLst>
-    <p:notesMasterId r:id="rId25"/>
+    <p:notesMasterId r:id="rId27"/>
   </p:notesMasterIdLst>
   <p:handoutMasterIdLst>
-    <p:handoutMasterId r:id="rId26"/>
+    <p:handoutMasterId r:id="rId28"/>
   </p:handoutMasterIdLst>
   <p:sldIdLst>
     <p:sldId id="256" r:id="rId2"/>
@@ -32,8 +32,10 @@
     <p:sldId id="280" r:id="rId20"/>
     <p:sldId id="1013" r:id="rId21"/>
     <p:sldId id="1015" r:id="rId22"/>
-    <p:sldId id="1016" r:id="rId23"/>
-    <p:sldId id="1014" r:id="rId24"/>
+    <p:sldId id="1021" r:id="rId23"/>
+    <p:sldId id="1022" r:id="rId24"/>
+    <p:sldId id="1023" r:id="rId25"/>
+    <p:sldId id="1014" r:id="rId26"/>
   </p:sldIdLst>
   <p:sldSz cx="9144000" cy="6858000" type="letter"/>
   <p:notesSz cx="9601200" cy="7315200"/>
@@ -3722,8 +3724,8 @@
           <a:chExt cx="0" cy="0"/>
         </a:xfrm>
       </p:grpSpPr>
-      <mc:AlternateContent xmlns:mc="http://schemas.openxmlformats.org/markup-compatibility/2006" xmlns:a14="http://schemas.microsoft.com/office/drawing/2010/main">
-        <mc:Choice Requires="a14">
+      <mc:AlternateContent xmlns:mc="http://schemas.openxmlformats.org/markup-compatibility/2006">
+        <mc:Choice xmlns:a14="http://schemas.microsoft.com/office/drawing/2010/main" Requires="a14">
           <p:sp>
             <p:nvSpPr>
               <p:cNvPr id="4" name="Content Placeholder 3">
@@ -4131,7 +4133,7 @@
                 </a:pPr>
                 <a:r>
                   <a:rPr lang="en-US" dirty="0"/>
-                  <a:t>However, because </a:t>
+                  <a:t>However, </a:t>
                 </a:r>
                 <a14:m>
                   <m:oMath xmlns:m="http://schemas.openxmlformats.org/officeDocument/2006/math">
@@ -4225,13 +4227,13 @@
                 </a14:m>
                 <a:r>
                   <a:rPr lang="en-US" dirty="0"/>
-                  <a:t>, any useful result derived for the risk functional pertains, at least approximately, to the empirical risk. </a:t>
+                  <a:t>, so any useful result derived for the risk functional pertains, at least approximately, to the empirical risk. </a:t>
                 </a:r>
               </a:p>
             </p:txBody>
           </p:sp>
         </mc:Choice>
-        <mc:Fallback xmlns="">
+        <mc:Fallback>
           <p:sp>
             <p:nvSpPr>
               <p:cNvPr id="4" name="Content Placeholder 3">
@@ -4252,7 +4254,7 @@
               <a:blipFill>
                 <a:blip r:embed="rId2"/>
                 <a:stretch>
-                  <a:fillRect l="-1309" t="-15789" r="-164"/>
+                  <a:fillRect l="-1309" t="-15789" r="-818"/>
                 </a:stretch>
               </a:blipFill>
             </p:spPr>
@@ -4457,8 +4459,8 @@
           <a:chExt cx="0" cy="0"/>
         </a:xfrm>
       </p:grpSpPr>
-      <mc:AlternateContent xmlns:mc="http://schemas.openxmlformats.org/markup-compatibility/2006">
-        <mc:Choice xmlns:a14="http://schemas.microsoft.com/office/drawing/2010/main" Requires="a14">
+      <mc:AlternateContent xmlns:mc="http://schemas.openxmlformats.org/markup-compatibility/2006" xmlns:a14="http://schemas.microsoft.com/office/drawing/2010/main">
+        <mc:Choice Requires="a14">
           <p:sp>
             <p:nvSpPr>
               <p:cNvPr id="4" name="Content Placeholder 3">
@@ -5251,7 +5253,7 @@
             </p:txBody>
           </p:sp>
         </mc:Choice>
-        <mc:Fallback>
+        <mc:Fallback xmlns="">
           <p:sp>
             <p:nvSpPr>
               <p:cNvPr id="4" name="Content Placeholder 3">
@@ -5527,8 +5529,8 @@
           <a:chExt cx="0" cy="0"/>
         </a:xfrm>
       </p:grpSpPr>
-      <mc:AlternateContent xmlns:mc="http://schemas.openxmlformats.org/markup-compatibility/2006">
-        <mc:Choice xmlns:a14="http://schemas.microsoft.com/office/drawing/2010/main" Requires="a14">
+      <mc:AlternateContent xmlns:mc="http://schemas.openxmlformats.org/markup-compatibility/2006" xmlns:a14="http://schemas.microsoft.com/office/drawing/2010/main">
+        <mc:Choice Requires="a14">
           <p:sp>
             <p:nvSpPr>
               <p:cNvPr id="4" name="Content Placeholder 3">
@@ -5979,14 +5981,7 @@
                           <a:latin typeface="Cambria Math" panose="02040503050406030204" pitchFamily="18" charset="0"/>
                           <a:ea typeface="Cambria Math" panose="02040503050406030204" pitchFamily="18" charset="0"/>
                         </a:rPr>
-                        <m:t> </m:t>
-                      </m:r>
-                      <m:r>
-                        <a:rPr lang="en-US" b="0" i="1" smtClean="0">
-                          <a:latin typeface="Cambria Math" panose="02040503050406030204" pitchFamily="18" charset="0"/>
-                          <a:ea typeface="Cambria Math" panose="02040503050406030204" pitchFamily="18" charset="0"/>
-                        </a:rPr>
-                        <m:t>=</m:t>
+                        <m:t> =</m:t>
                       </m:r>
                       <m:nary>
                         <m:naryPr>
@@ -6501,7 +6496,7 @@
             </p:txBody>
           </p:sp>
         </mc:Choice>
-        <mc:Fallback>
+        <mc:Fallback xmlns="">
           <p:sp>
             <p:nvSpPr>
               <p:cNvPr id="4" name="Content Placeholder 3">
@@ -6792,7 +6787,12 @@
                 <p:ph sz="half" idx="1"/>
               </p:nvPr>
             </p:nvSpPr>
-            <p:spPr/>
+            <p:spPr>
+              <a:xfrm>
+                <a:off x="711200" y="1295400"/>
+                <a:ext cx="8128000" cy="4819650"/>
+              </a:xfrm>
+            </p:spPr>
             <p:txBody>
               <a:bodyPr/>
               <a:lstStyle/>
@@ -6802,7 +6802,7 @@
                 </a:pPr>
                 <a:r>
                   <a:rPr lang="en-US" dirty="0"/>
-                  <a:t>Rearranging, and taking standard part* of both sides, we find</a:t>
+                  <a:t>Rearranging, and taking the standard part* of both sides, we find</a:t>
                 </a:r>
               </a:p>
               <a:p>
@@ -7153,7 +7153,15 @@
                 </a:pPr>
                 <a:r>
                   <a:rPr lang="en-US" dirty="0"/>
-                  <a:t>The lefthand side defines the </a:t>
+                  <a:t>The lefthand side </a:t>
+                </a:r>
+                <a:r>
+                  <a:rPr lang="en-US" i="1" dirty="0"/>
+                  <a:t>defines</a:t>
+                </a:r>
+                <a:r>
+                  <a:rPr lang="en-US" dirty="0"/>
+                  <a:t> the </a:t>
                 </a:r>
                 <a:r>
                   <a:rPr lang="en-US" b="1" dirty="0">
@@ -7762,10 +7770,14 @@
               </p:nvPr>
             </p:nvSpPr>
             <p:spPr>
+              <a:xfrm>
+                <a:off x="711200" y="1295400"/>
+                <a:ext cx="8128000" cy="4819650"/>
+              </a:xfrm>
               <a:blipFill>
                 <a:blip r:embed="rId2"/>
                 <a:stretch>
-                  <a:fillRect l="-1309" t="-14474" b="-28947"/>
+                  <a:fillRect l="-1250" t="-14474" r="-625" b="-28947"/>
                 </a:stretch>
               </a:blipFill>
             </p:spPr>
@@ -8253,6 +8265,12 @@
                 <a:pPr marL="0" indent="0">
                   <a:buNone/>
                 </a:pPr>
+                <a:endParaRPr lang="en-US" dirty="0"/>
+              </a:p>
+              <a:p>
+                <a:pPr marL="0" indent="0">
+                  <a:buNone/>
+                </a:pPr>
                 <a:r>
                   <a:rPr lang="en-US" dirty="0"/>
                   <a:t>This can happen </a:t>
@@ -8341,290 +8359,226 @@
                   <a:buNone/>
                 </a:pPr>
                 <a:r>
-                  <a:rPr lang="en-US" dirty="0"/>
-                  <a:t>Assuming the integral and partial derivative operations commute, and recalling that </a:t>
-                </a:r>
-                <a14:m>
-                  <m:oMath xmlns:m="http://schemas.openxmlformats.org/officeDocument/2006/math">
-                    <m:r>
-                      <a:rPr lang="en-US" b="0" i="1" smtClean="0">
-                        <a:solidFill>
-                          <a:srgbClr val="0033CC"/>
-                        </a:solidFill>
-                        <a:latin typeface="Cambria Math" panose="02040503050406030204" pitchFamily="18" charset="0"/>
-                        <a:ea typeface="Cambria Math" panose="02040503050406030204" pitchFamily="18" charset="0"/>
-                      </a:rPr>
-                      <m:t>ℒ</m:t>
-                    </m:r>
-                    <m:d>
-                      <m:dPr>
-                        <m:ctrlPr>
-                          <a:rPr lang="en-US" b="0" i="1">
-                            <a:solidFill>
-                              <a:srgbClr val="0033CC"/>
-                            </a:solidFill>
-                            <a:latin typeface="Cambria Math" panose="02040503050406030204" pitchFamily="18" charset="0"/>
-                            <a:ea typeface="Cambria Math" panose="02040503050406030204" pitchFamily="18" charset="0"/>
-                          </a:rPr>
-                        </m:ctrlPr>
-                      </m:dPr>
-                      <m:e>
-                        <m:r>
-                          <a:rPr lang="en-US" b="0" i="1">
-                            <a:solidFill>
-                              <a:srgbClr val="0033CC"/>
-                            </a:solidFill>
-                            <a:latin typeface="Cambria Math" panose="02040503050406030204" pitchFamily="18" charset="0"/>
-                            <a:ea typeface="Cambria Math" panose="02040503050406030204" pitchFamily="18" charset="0"/>
-                          </a:rPr>
-                          <m:t>𝑥</m:t>
-                        </m:r>
-                        <m:r>
-                          <a:rPr lang="en-US" b="0" i="1">
-                            <a:solidFill>
-                              <a:srgbClr val="0033CC"/>
-                            </a:solidFill>
-                            <a:latin typeface="Cambria Math" panose="02040503050406030204" pitchFamily="18" charset="0"/>
-                            <a:ea typeface="Cambria Math" panose="02040503050406030204" pitchFamily="18" charset="0"/>
-                          </a:rPr>
-                          <m:t>, </m:t>
-                        </m:r>
-                        <m:r>
-                          <a:rPr lang="en-US" b="0" i="1">
-                            <a:solidFill>
-                              <a:srgbClr val="0033CC"/>
-                            </a:solidFill>
-                            <a:latin typeface="Cambria Math" panose="02040503050406030204" pitchFamily="18" charset="0"/>
-                            <a:ea typeface="Cambria Math" panose="02040503050406030204" pitchFamily="18" charset="0"/>
-                          </a:rPr>
-                          <m:t>𝑓</m:t>
-                        </m:r>
-                      </m:e>
-                    </m:d>
-                    <m:r>
-                      <a:rPr lang="en-US" b="0" i="1">
-                        <a:solidFill>
-                          <a:srgbClr val="0033CC"/>
-                        </a:solidFill>
-                        <a:latin typeface="Cambria Math" panose="02040503050406030204" pitchFamily="18" charset="0"/>
-                        <a:ea typeface="Cambria Math" panose="02040503050406030204" pitchFamily="18" charset="0"/>
-                      </a:rPr>
-                      <m:t>=</m:t>
-                    </m:r>
-                    <m:nary>
-                      <m:naryPr>
-                        <m:limLoc m:val="undOvr"/>
-                        <m:subHide m:val="on"/>
-                        <m:supHide m:val="on"/>
-                        <m:ctrlPr>
-                          <a:rPr lang="en-US" i="1">
-                            <a:solidFill>
-                              <a:srgbClr val="0033CC"/>
-                            </a:solidFill>
-                            <a:latin typeface="Cambria Math" panose="02040503050406030204" pitchFamily="18" charset="0"/>
-                          </a:rPr>
-                        </m:ctrlPr>
-                      </m:naryPr>
-                      <m:sub/>
-                      <m:sup/>
-                      <m:e>
-                        <m:r>
-                          <a:rPr lang="en-US" b="0" i="1">
-                            <a:solidFill>
-                              <a:srgbClr val="0033CC"/>
-                            </a:solidFill>
-                            <a:latin typeface="Cambria Math" panose="02040503050406030204" pitchFamily="18" charset="0"/>
-                          </a:rPr>
-                          <m:t>𝑑𝑦</m:t>
-                        </m:r>
-                        <m:r>
-                          <a:rPr lang="en-US" b="0" i="1">
-                            <a:solidFill>
-                              <a:srgbClr val="0033CC"/>
-                            </a:solidFill>
-                            <a:latin typeface="Cambria Math" panose="02040503050406030204" pitchFamily="18" charset="0"/>
-                          </a:rPr>
-                          <m:t> </m:t>
-                        </m:r>
-                        <m:r>
-                          <a:rPr lang="en-US" b="0" i="1">
-                            <a:solidFill>
-                              <a:srgbClr val="0033CC"/>
-                            </a:solidFill>
-                            <a:latin typeface="Cambria Math" panose="02040503050406030204" pitchFamily="18" charset="0"/>
-                          </a:rPr>
-                          <m:t>𝐿</m:t>
-                        </m:r>
-                        <m:d>
-                          <m:dPr>
-                            <m:ctrlPr>
-                              <a:rPr lang="en-US" b="0" i="1">
-                                <a:solidFill>
-                                  <a:srgbClr val="0033CC"/>
-                                </a:solidFill>
-                                <a:latin typeface="Cambria Math" panose="02040503050406030204" pitchFamily="18" charset="0"/>
-                              </a:rPr>
-                            </m:ctrlPr>
-                          </m:dPr>
-                          <m:e>
-                            <m:r>
-                              <a:rPr lang="en-US" b="0" i="1">
-                                <a:solidFill>
-                                  <a:srgbClr val="0033CC"/>
-                                </a:solidFill>
-                                <a:latin typeface="Cambria Math" panose="02040503050406030204" pitchFamily="18" charset="0"/>
-                              </a:rPr>
-                              <m:t>𝑦</m:t>
-                            </m:r>
-                            <m:r>
-                              <a:rPr lang="en-US" b="0" i="1">
-                                <a:solidFill>
-                                  <a:srgbClr val="0033CC"/>
-                                </a:solidFill>
-                                <a:latin typeface="Cambria Math" panose="02040503050406030204" pitchFamily="18" charset="0"/>
-                              </a:rPr>
-                              <m:t>, </m:t>
-                            </m:r>
-                            <m:r>
-                              <a:rPr lang="en-US" b="0" i="1">
-                                <a:solidFill>
-                                  <a:srgbClr val="0033CC"/>
-                                </a:solidFill>
-                                <a:latin typeface="Cambria Math" panose="02040503050406030204" pitchFamily="18" charset="0"/>
-                              </a:rPr>
-                              <m:t>𝑓</m:t>
-                            </m:r>
-                          </m:e>
-                        </m:d>
-                        <m:r>
-                          <a:rPr lang="en-US" b="0" i="1">
-                            <a:solidFill>
-                              <a:srgbClr val="0033CC"/>
-                            </a:solidFill>
-                            <a:latin typeface="Cambria Math" panose="02040503050406030204" pitchFamily="18" charset="0"/>
-                          </a:rPr>
-                          <m:t> </m:t>
-                        </m:r>
-                        <m:r>
-                          <a:rPr lang="en-US" b="0" i="1">
-                            <a:solidFill>
-                              <a:srgbClr val="0033CC"/>
-                            </a:solidFill>
-                            <a:latin typeface="Cambria Math" panose="02040503050406030204" pitchFamily="18" charset="0"/>
-                          </a:rPr>
-                          <m:t>𝑝</m:t>
-                        </m:r>
-                        <m:d>
-                          <m:dPr>
-                            <m:ctrlPr>
-                              <a:rPr lang="en-US" b="0" i="1">
-                                <a:solidFill>
-                                  <a:srgbClr val="0033CC"/>
-                                </a:solidFill>
-                                <a:latin typeface="Cambria Math" panose="02040503050406030204" pitchFamily="18" charset="0"/>
-                              </a:rPr>
-                            </m:ctrlPr>
-                          </m:dPr>
-                          <m:e>
-                            <m:r>
-                              <a:rPr lang="en-US" b="0" i="1">
-                                <a:solidFill>
-                                  <a:srgbClr val="0033CC"/>
-                                </a:solidFill>
-                                <a:latin typeface="Cambria Math" panose="02040503050406030204" pitchFamily="18" charset="0"/>
-                              </a:rPr>
-                              <m:t>𝑦</m:t>
-                            </m:r>
-                            <m:r>
-                              <a:rPr lang="en-US" b="0" i="1">
-                                <a:solidFill>
-                                  <a:srgbClr val="0033CC"/>
-                                </a:solidFill>
-                                <a:latin typeface="Cambria Math" panose="02040503050406030204" pitchFamily="18" charset="0"/>
-                              </a:rPr>
-                              <m:t>| </m:t>
-                            </m:r>
-                            <m:r>
-                              <a:rPr lang="en-US" b="0" i="1">
-                                <a:solidFill>
-                                  <a:srgbClr val="0033CC"/>
-                                </a:solidFill>
-                                <a:latin typeface="Cambria Math" panose="02040503050406030204" pitchFamily="18" charset="0"/>
-                              </a:rPr>
-                              <m:t>𝑥</m:t>
-                            </m:r>
-                          </m:e>
-                        </m:d>
-                      </m:e>
-                    </m:nary>
-                  </m:oMath>
-                </a14:m>
-                <a:r>
-                  <a:rPr lang="en-US" dirty="0"/>
-                  <a:t>, we arrive at the</a:t>
+                  <a:rPr lang="en-US" dirty="0">
+                    <a:latin typeface="+mn-lt"/>
+                    <a:ea typeface="Cambria Math" panose="02040503050406030204" pitchFamily="18" charset="0"/>
+                  </a:rPr>
+                  <a:t>that is,</a:t>
                 </a:r>
               </a:p>
               <a:p>
                 <a:pPr marL="0" indent="0">
                   <a:buNone/>
                 </a:pPr>
-                <a:r>
-                  <a:rPr lang="en-US" b="1" dirty="0">
-                    <a:solidFill>
-                      <a:srgbClr val="0033CC"/>
-                    </a:solidFill>
-                  </a:rPr>
-                  <a:t>V</a:t>
-                </a:r>
-                <a:r>
-                  <a:rPr lang="en-US" dirty="0">
-                    <a:solidFill>
-                      <a:srgbClr val="0033CC"/>
-                    </a:solidFill>
-                  </a:rPr>
-                  <a:t>ery </a:t>
-                </a:r>
-                <a:r>
-                  <a:rPr lang="en-US" b="1" dirty="0">
-                    <a:solidFill>
-                      <a:srgbClr val="0033CC"/>
-                    </a:solidFill>
-                  </a:rPr>
-                  <a:t>I</a:t>
-                </a:r>
-                <a:r>
-                  <a:rPr lang="en-US" dirty="0">
-                    <a:solidFill>
-                      <a:srgbClr val="0033CC"/>
-                    </a:solidFill>
-                  </a:rPr>
-                  <a:t>mportant </a:t>
-                </a:r>
-                <a:r>
-                  <a:rPr lang="en-US" b="1" dirty="0">
-                    <a:solidFill>
-                      <a:srgbClr val="0033CC"/>
-                    </a:solidFill>
-                  </a:rPr>
-                  <a:t>R</a:t>
-                </a:r>
-                <a:r>
-                  <a:rPr lang="en-US" dirty="0">
-                    <a:solidFill>
-                      <a:srgbClr val="0033CC"/>
-                    </a:solidFill>
-                  </a:rPr>
-                  <a:t>esult</a:t>
-                </a:r>
-                <a:r>
-                  <a:rPr lang="en-US" dirty="0"/>
-                  <a:t>:</a:t>
-                </a:r>
-              </a:p>
-              <a:p>
-                <a:pPr marL="0" indent="0">
-                  <a:buNone/>
-                </a:pPr>
+                <a14:m>
+                  <m:oMathPara xmlns:m="http://schemas.openxmlformats.org/officeDocument/2006/math">
+                    <m:oMath>
+                      <m:f>
+                        <m:fPr>
+                          <m:ctrlPr>
+                            <a:rPr lang="en-US" b="0" i="1" smtClean="0">
+                              <a:solidFill>
+                                <a:schemeClr val="tx1"/>
+                              </a:solidFill>
+                              <a:latin typeface="Cambria Math" panose="02040503050406030204" pitchFamily="18" charset="0"/>
+                              <a:ea typeface="Cambria Math" panose="02040503050406030204" pitchFamily="18" charset="0"/>
+                            </a:rPr>
+                          </m:ctrlPr>
+                        </m:fPr>
+                        <m:num>
+                          <m:r>
+                            <a:rPr lang="en-US" b="0" i="1" smtClean="0">
+                              <a:solidFill>
+                                <a:schemeClr val="tx1"/>
+                              </a:solidFill>
+                              <a:latin typeface="Cambria Math" panose="02040503050406030204" pitchFamily="18" charset="0"/>
+                              <a:ea typeface="Cambria Math" panose="02040503050406030204" pitchFamily="18" charset="0"/>
+                            </a:rPr>
+                            <m:t>𝜕</m:t>
+                          </m:r>
+                          <m:nary>
+                            <m:naryPr>
+                              <m:limLoc m:val="undOvr"/>
+                              <m:subHide m:val="on"/>
+                              <m:supHide m:val="on"/>
+                              <m:ctrlPr>
+                                <a:rPr lang="en-US" i="1">
+                                  <a:solidFill>
+                                    <a:schemeClr val="tx1"/>
+                                  </a:solidFill>
+                                  <a:latin typeface="Cambria Math" panose="02040503050406030204" pitchFamily="18" charset="0"/>
+                                </a:rPr>
+                              </m:ctrlPr>
+                            </m:naryPr>
+                            <m:sub/>
+                            <m:sup/>
+                            <m:e>
+                              <m:r>
+                                <a:rPr lang="en-US" i="1">
+                                  <a:solidFill>
+                                    <a:schemeClr val="tx1"/>
+                                  </a:solidFill>
+                                  <a:latin typeface="Cambria Math" panose="02040503050406030204" pitchFamily="18" charset="0"/>
+                                </a:rPr>
+                                <m:t>𝑑𝑦</m:t>
+                              </m:r>
+                              <m:r>
+                                <a:rPr lang="en-US" i="1">
+                                  <a:solidFill>
+                                    <a:schemeClr val="tx1"/>
+                                  </a:solidFill>
+                                  <a:latin typeface="Cambria Math" panose="02040503050406030204" pitchFamily="18" charset="0"/>
+                                </a:rPr>
+                                <m:t> </m:t>
+                              </m:r>
+                              <m:r>
+                                <a:rPr lang="en-US" i="1">
+                                  <a:solidFill>
+                                    <a:schemeClr val="tx1"/>
+                                  </a:solidFill>
+                                  <a:latin typeface="Cambria Math" panose="02040503050406030204" pitchFamily="18" charset="0"/>
+                                </a:rPr>
+                                <m:t>𝐿</m:t>
+                              </m:r>
+                              <m:d>
+                                <m:dPr>
+                                  <m:ctrlPr>
+                                    <a:rPr lang="en-US" i="1">
+                                      <a:solidFill>
+                                        <a:schemeClr val="tx1"/>
+                                      </a:solidFill>
+                                      <a:latin typeface="Cambria Math" panose="02040503050406030204" pitchFamily="18" charset="0"/>
+                                    </a:rPr>
+                                  </m:ctrlPr>
+                                </m:dPr>
+                                <m:e>
+                                  <m:r>
+                                    <a:rPr lang="en-US" i="1">
+                                      <a:solidFill>
+                                        <a:schemeClr val="tx1"/>
+                                      </a:solidFill>
+                                      <a:latin typeface="Cambria Math" panose="02040503050406030204" pitchFamily="18" charset="0"/>
+                                    </a:rPr>
+                                    <m:t>𝑦</m:t>
+                                  </m:r>
+                                  <m:r>
+                                    <a:rPr lang="en-US" i="1">
+                                      <a:solidFill>
+                                        <a:schemeClr val="tx1"/>
+                                      </a:solidFill>
+                                      <a:latin typeface="Cambria Math" panose="02040503050406030204" pitchFamily="18" charset="0"/>
+                                    </a:rPr>
+                                    <m:t>, </m:t>
+                                  </m:r>
+                                  <m:r>
+                                    <a:rPr lang="en-US" i="1">
+                                      <a:solidFill>
+                                        <a:schemeClr val="tx1"/>
+                                      </a:solidFill>
+                                      <a:latin typeface="Cambria Math" panose="02040503050406030204" pitchFamily="18" charset="0"/>
+                                    </a:rPr>
+                                    <m:t>𝑓</m:t>
+                                  </m:r>
+                                </m:e>
+                              </m:d>
+                              <m:r>
+                                <a:rPr lang="en-US" i="1">
+                                  <a:solidFill>
+                                    <a:schemeClr val="tx1"/>
+                                  </a:solidFill>
+                                  <a:latin typeface="Cambria Math" panose="02040503050406030204" pitchFamily="18" charset="0"/>
+                                </a:rPr>
+                                <m:t> </m:t>
+                              </m:r>
+                              <m:r>
+                                <a:rPr lang="en-US" i="1">
+                                  <a:solidFill>
+                                    <a:schemeClr val="tx1"/>
+                                  </a:solidFill>
+                                  <a:latin typeface="Cambria Math" panose="02040503050406030204" pitchFamily="18" charset="0"/>
+                                </a:rPr>
+                                <m:t>𝑝</m:t>
+                              </m:r>
+                              <m:d>
+                                <m:dPr>
+                                  <m:ctrlPr>
+                                    <a:rPr lang="en-US" i="1">
+                                      <a:solidFill>
+                                        <a:schemeClr val="tx1"/>
+                                      </a:solidFill>
+                                      <a:latin typeface="Cambria Math" panose="02040503050406030204" pitchFamily="18" charset="0"/>
+                                    </a:rPr>
+                                  </m:ctrlPr>
+                                </m:dPr>
+                                <m:e>
+                                  <m:r>
+                                    <a:rPr lang="en-US" i="1">
+                                      <a:solidFill>
+                                        <a:schemeClr val="tx1"/>
+                                      </a:solidFill>
+                                      <a:latin typeface="Cambria Math" panose="02040503050406030204" pitchFamily="18" charset="0"/>
+                                    </a:rPr>
+                                    <m:t>𝑦</m:t>
+                                  </m:r>
+                                  <m:r>
+                                    <a:rPr lang="en-US" i="1">
+                                      <a:solidFill>
+                                        <a:schemeClr val="tx1"/>
+                                      </a:solidFill>
+                                      <a:latin typeface="Cambria Math" panose="02040503050406030204" pitchFamily="18" charset="0"/>
+                                    </a:rPr>
+                                    <m:t>| </m:t>
+                                  </m:r>
+                                  <m:r>
+                                    <a:rPr lang="en-US" i="1">
+                                      <a:solidFill>
+                                        <a:schemeClr val="tx1"/>
+                                      </a:solidFill>
+                                      <a:latin typeface="Cambria Math" panose="02040503050406030204" pitchFamily="18" charset="0"/>
+                                    </a:rPr>
+                                    <m:t>𝑥</m:t>
+                                  </m:r>
+                                </m:e>
+                              </m:d>
+                            </m:e>
+                          </m:nary>
+                        </m:num>
+                        <m:den>
+                          <m:r>
+                            <a:rPr lang="en-US" b="0" i="1" smtClean="0">
+                              <a:solidFill>
+                                <a:schemeClr val="tx1"/>
+                              </a:solidFill>
+                              <a:latin typeface="Cambria Math" panose="02040503050406030204" pitchFamily="18" charset="0"/>
+                              <a:ea typeface="Cambria Math" panose="02040503050406030204" pitchFamily="18" charset="0"/>
+                            </a:rPr>
+                            <m:t>𝜕</m:t>
+                          </m:r>
+                          <m:r>
+                            <a:rPr lang="en-US" b="0" i="1" smtClean="0">
+                              <a:solidFill>
+                                <a:schemeClr val="tx1"/>
+                              </a:solidFill>
+                              <a:latin typeface="Cambria Math" panose="02040503050406030204" pitchFamily="18" charset="0"/>
+                              <a:ea typeface="Cambria Math" panose="02040503050406030204" pitchFamily="18" charset="0"/>
+                            </a:rPr>
+                            <m:t>𝑓</m:t>
+                          </m:r>
+                        </m:den>
+                      </m:f>
+                      <m:r>
+                        <a:rPr lang="en-US" b="0" i="1" smtClean="0">
+                          <a:solidFill>
+                            <a:schemeClr val="tx1"/>
+                          </a:solidFill>
+                          <a:latin typeface="Cambria Math" panose="02040503050406030204" pitchFamily="18" charset="0"/>
+                          <a:ea typeface="Cambria Math" panose="02040503050406030204" pitchFamily="18" charset="0"/>
+                        </a:rPr>
+                        <m:t>=0</m:t>
+                      </m:r>
+                    </m:oMath>
+                  </m:oMathPara>
+                </a14:m>
                 <a:endParaRPr lang="en-US" dirty="0"/>
               </a:p>
             </p:txBody>
@@ -8651,7 +8605,7 @@
               <a:blipFill>
                 <a:blip r:embed="rId2"/>
                 <a:stretch>
-                  <a:fillRect l="-1309" t="-23421" b="-3158"/>
+                  <a:fillRect l="-1309" t="-23421" b="-12368"/>
                 </a:stretch>
               </a:blipFill>
             </p:spPr>
@@ -8698,225 +8652,6 @@
           </a:p>
         </p:txBody>
       </p:sp>
-      <mc:AlternateContent xmlns:mc="http://schemas.openxmlformats.org/markup-compatibility/2006" xmlns:a14="http://schemas.microsoft.com/office/drawing/2010/main">
-        <mc:Choice Requires="a14">
-          <p:sp>
-            <p:nvSpPr>
-              <p:cNvPr id="2" name="TextBox 1">
-                <a:extLst>
-                  <a:ext uri="{FF2B5EF4-FFF2-40B4-BE49-F238E27FC236}">
-                    <a16:creationId xmlns:a16="http://schemas.microsoft.com/office/drawing/2014/main" id="{0280DAFF-105B-7780-AA48-5F1B4CF3212E}"/>
-                  </a:ext>
-                </a:extLst>
-              </p:cNvPr>
-              <p:cNvSpPr txBox="1"/>
-              <p:nvPr/>
-            </p:nvSpPr>
-            <p:spPr>
-              <a:xfrm>
-                <a:off x="4600840" y="5263669"/>
-                <a:ext cx="3019160" cy="1060931"/>
-              </a:xfrm>
-              <a:prstGeom prst="rect">
-                <a:avLst/>
-              </a:prstGeom>
-              <a:solidFill>
-                <a:srgbClr val="FFFC8F"/>
-              </a:solidFill>
-              <a:ln>
-                <a:solidFill>
-                  <a:schemeClr val="tx1"/>
-                </a:solidFill>
-              </a:ln>
-              <a:effectLst>
-                <a:outerShdw blurRad="50800" dist="38100" dir="2700000" algn="tl" rotWithShape="0">
-                  <a:prstClr val="black">
-                    <a:alpha val="40000"/>
-                  </a:prstClr>
-                </a:outerShdw>
-              </a:effectLst>
-            </p:spPr>
-            <p:txBody>
-              <a:bodyPr wrap="none" rtlCol="0">
-                <a:spAutoFit/>
-              </a:bodyPr>
-              <a:lstStyle/>
-              <a:p>
-                <a:pPr/>
-                <a14:m>
-                  <m:oMathPara xmlns:m="http://schemas.openxmlformats.org/officeDocument/2006/math">
-                    <m:oMath>
-                      <m:nary>
-                        <m:naryPr>
-                          <m:limLoc m:val="undOvr"/>
-                          <m:subHide m:val="on"/>
-                          <m:supHide m:val="on"/>
-                          <m:ctrlPr>
-                            <a:rPr lang="en-US" b="0" i="1" smtClean="0">
-                              <a:latin typeface="Cambria Math" panose="02040503050406030204" pitchFamily="18" charset="0"/>
-                            </a:rPr>
-                          </m:ctrlPr>
-                        </m:naryPr>
-                        <m:sub/>
-                        <m:sup/>
-                        <m:e>
-                          <m:r>
-                            <a:rPr lang="en-US" b="0" i="1" smtClean="0">
-                              <a:latin typeface="Cambria Math" panose="02040503050406030204" pitchFamily="18" charset="0"/>
-                            </a:rPr>
-                            <m:t>𝑑𝑦</m:t>
-                          </m:r>
-                          <m:r>
-                            <a:rPr lang="en-US" b="0" i="1" smtClean="0">
-                              <a:latin typeface="Cambria Math" panose="02040503050406030204" pitchFamily="18" charset="0"/>
-                            </a:rPr>
-                            <m:t> </m:t>
-                          </m:r>
-                          <m:f>
-                            <m:fPr>
-                              <m:ctrlPr>
-                                <a:rPr lang="en-US" b="0" i="1" smtClean="0">
-                                  <a:latin typeface="Cambria Math" panose="02040503050406030204" pitchFamily="18" charset="0"/>
-                                </a:rPr>
-                              </m:ctrlPr>
-                            </m:fPr>
-                            <m:num>
-                              <m:r>
-                                <a:rPr lang="en-US" b="0" i="1" smtClean="0">
-                                  <a:latin typeface="Cambria Math" panose="02040503050406030204" pitchFamily="18" charset="0"/>
-                                </a:rPr>
-                                <m:t>𝜕</m:t>
-                              </m:r>
-                              <m:r>
-                                <a:rPr lang="en-US" b="0" i="1" smtClean="0">
-                                  <a:latin typeface="Cambria Math" panose="02040503050406030204" pitchFamily="18" charset="0"/>
-                                </a:rPr>
-                                <m:t>𝐿</m:t>
-                              </m:r>
-                            </m:num>
-                            <m:den>
-                              <m:r>
-                                <a:rPr lang="en-US" b="0" i="1" smtClean="0">
-                                  <a:latin typeface="Cambria Math" panose="02040503050406030204" pitchFamily="18" charset="0"/>
-                                </a:rPr>
-                                <m:t>𝜕</m:t>
-                              </m:r>
-                              <m:r>
-                                <a:rPr lang="en-US" b="0" i="1" smtClean="0">
-                                  <a:latin typeface="Cambria Math" panose="02040503050406030204" pitchFamily="18" charset="0"/>
-                                </a:rPr>
-                                <m:t>𝑓</m:t>
-                              </m:r>
-                            </m:den>
-                          </m:f>
-                          <m:r>
-                            <a:rPr lang="en-US" i="1">
-                              <a:latin typeface="Cambria Math" panose="02040503050406030204" pitchFamily="18" charset="0"/>
-                            </a:rPr>
-                            <m:t>𝑝</m:t>
-                          </m:r>
-                          <m:d>
-                            <m:dPr>
-                              <m:ctrlPr>
-                                <a:rPr lang="en-US" b="0" i="1" smtClean="0">
-                                  <a:latin typeface="Cambria Math" panose="02040503050406030204" pitchFamily="18" charset="0"/>
-                                </a:rPr>
-                              </m:ctrlPr>
-                            </m:dPr>
-                            <m:e>
-                              <m:r>
-                                <a:rPr lang="en-US" b="0" i="1" smtClean="0">
-                                  <a:latin typeface="Cambria Math" panose="02040503050406030204" pitchFamily="18" charset="0"/>
-                                </a:rPr>
-                                <m:t>𝑦</m:t>
-                              </m:r>
-                              <m:r>
-                                <a:rPr lang="en-US" b="0" i="1" smtClean="0">
-                                  <a:latin typeface="Cambria Math" panose="02040503050406030204" pitchFamily="18" charset="0"/>
-                                </a:rPr>
-                                <m:t> | </m:t>
-                              </m:r>
-                              <m:r>
-                                <a:rPr lang="en-US" i="1">
-                                  <a:latin typeface="Cambria Math" panose="02040503050406030204" pitchFamily="18" charset="0"/>
-                                </a:rPr>
-                                <m:t>𝑥</m:t>
-                              </m:r>
-                            </m:e>
-                          </m:d>
-                          <m:r>
-                            <a:rPr lang="en-US" b="0" i="1" smtClean="0">
-                              <a:latin typeface="Cambria Math" panose="02040503050406030204" pitchFamily="18" charset="0"/>
-                            </a:rPr>
-                            <m:t>=0</m:t>
-                          </m:r>
-                        </m:e>
-                      </m:nary>
-                    </m:oMath>
-                  </m:oMathPara>
-                </a14:m>
-                <a:endParaRPr lang="en-US" dirty="0"/>
-              </a:p>
-            </p:txBody>
-          </p:sp>
-        </mc:Choice>
-        <mc:Fallback xmlns="">
-          <p:sp>
-            <p:nvSpPr>
-              <p:cNvPr id="2" name="TextBox 1">
-                <a:extLst>
-                  <a:ext uri="{FF2B5EF4-FFF2-40B4-BE49-F238E27FC236}">
-                    <a16:creationId xmlns:a16="http://schemas.microsoft.com/office/drawing/2014/main" id="{0280DAFF-105B-7780-AA48-5F1B4CF3212E}"/>
-                  </a:ext>
-                </a:extLst>
-              </p:cNvPr>
-              <p:cNvSpPr txBox="1">
-                <a:spLocks noRot="1" noChangeAspect="1" noMove="1" noResize="1" noEditPoints="1" noAdjustHandles="1" noChangeArrowheads="1" noChangeShapeType="1" noTextEdit="1"/>
-              </p:cNvSpPr>
-              <p:nvPr/>
-            </p:nvSpPr>
-            <p:spPr>
-              <a:xfrm>
-                <a:off x="4600840" y="5263669"/>
-                <a:ext cx="3019160" cy="1060931"/>
-              </a:xfrm>
-              <a:prstGeom prst="rect">
-                <a:avLst/>
-              </a:prstGeom>
-              <a:blipFill>
-                <a:blip r:embed="rId3"/>
-                <a:stretch>
-                  <a:fillRect/>
-                </a:stretch>
-              </a:blipFill>
-              <a:ln>
-                <a:solidFill>
-                  <a:schemeClr val="tx1"/>
-                </a:solidFill>
-              </a:ln>
-              <a:effectLst>
-                <a:outerShdw blurRad="50800" dist="38100" dir="2700000" algn="tl" rotWithShape="0">
-                  <a:prstClr val="black">
-                    <a:alpha val="40000"/>
-                  </a:prstClr>
-                </a:outerShdw>
-              </a:effectLst>
-            </p:spPr>
-            <p:txBody>
-              <a:bodyPr/>
-              <a:lstStyle/>
-              <a:p>
-                <a:r>
-                  <a:rPr lang="en-US">
-                    <a:noFill/>
-                  </a:rPr>
-                  <a:t> </a:t>
-                </a:r>
-              </a:p>
-            </p:txBody>
-          </p:sp>
-        </mc:Fallback>
-      </mc:AlternateContent>
     </p:spTree>
     <p:extLst>
       <p:ext uri="{BB962C8B-B14F-4D97-AF65-F5344CB8AC3E}">
@@ -8963,7 +8698,7 @@
                                         <p:tgtEl>
                                           <p:spTgt spid="4">
                                             <p:txEl>
-                                              <p:pRg st="3" end="3"/>
+                                              <p:pRg st="4" end="4"/>
                                             </p:txEl>
                                           </p:spTgt>
                                         </p:tgtEl>
@@ -8994,55 +8729,6 @@
                                         <p:tgtEl>
                                           <p:spTgt spid="4">
                                             <p:txEl>
-                                              <p:pRg st="4" end="4"/>
-                                            </p:txEl>
-                                          </p:spTgt>
-                                        </p:tgtEl>
-                                        <p:attrNameLst>
-                                          <p:attrName>style.visibility</p:attrName>
-                                        </p:attrNameLst>
-                                      </p:cBhvr>
-                                      <p:to>
-                                        <p:strVal val="visible"/>
-                                      </p:to>
-                                    </p:set>
-                                  </p:childTnLst>
-                                </p:cTn>
-                              </p:par>
-                            </p:childTnLst>
-                          </p:cTn>
-                        </p:par>
-                      </p:childTnLst>
-                    </p:cTn>
-                  </p:par>
-                  <p:par>
-                    <p:cTn id="9" fill="hold">
-                      <p:stCondLst>
-                        <p:cond delay="indefinite"/>
-                      </p:stCondLst>
-                      <p:childTnLst>
-                        <p:par>
-                          <p:cTn id="10" fill="hold">
-                            <p:stCondLst>
-                              <p:cond delay="0"/>
-                            </p:stCondLst>
-                            <p:childTnLst>
-                              <p:par>
-                                <p:cTn id="11" presetID="1" presetClass="entr" presetSubtype="0" fill="hold" nodeType="clickEffect">
-                                  <p:stCondLst>
-                                    <p:cond delay="0"/>
-                                  </p:stCondLst>
-                                  <p:childTnLst>
-                                    <p:set>
-                                      <p:cBhvr>
-                                        <p:cTn id="12" dur="1" fill="hold">
-                                          <p:stCondLst>
-                                            <p:cond delay="0"/>
-                                          </p:stCondLst>
-                                        </p:cTn>
-                                        <p:tgtEl>
-                                          <p:spTgt spid="4">
-                                            <p:txEl>
                                               <p:pRg st="5" end="5"/>
                                             </p:txEl>
                                           </p:spTgt>
@@ -9059,14 +8745,14 @@
                                 </p:cTn>
                               </p:par>
                               <p:par>
-                                <p:cTn id="13" presetID="1" presetClass="entr" presetSubtype="0" fill="hold" nodeType="withEffect">
+                                <p:cTn id="9" presetID="1" presetClass="entr" presetSubtype="0" fill="hold" nodeType="withEffect">
                                   <p:stCondLst>
                                     <p:cond delay="0"/>
                                   </p:stCondLst>
                                   <p:childTnLst>
                                     <p:set>
                                       <p:cBhvr>
-                                        <p:cTn id="14" dur="1" fill="hold">
+                                        <p:cTn id="10" dur="1" fill="hold">
                                           <p:stCondLst>
                                             <p:cond delay="0"/>
                                           </p:stCondLst>
@@ -9090,20 +8776,24 @@
                                 </p:cTn>
                               </p:par>
                               <p:par>
-                                <p:cTn id="15" presetID="1" presetClass="entr" presetSubtype="0" fill="hold" grpId="0" nodeType="withEffect">
+                                <p:cTn id="11" presetID="1" presetClass="entr" presetSubtype="0" fill="hold" nodeType="withEffect">
                                   <p:stCondLst>
                                     <p:cond delay="0"/>
                                   </p:stCondLst>
                                   <p:childTnLst>
                                     <p:set>
                                       <p:cBhvr>
-                                        <p:cTn id="16" dur="1" fill="hold">
+                                        <p:cTn id="12" dur="1" fill="hold">
                                           <p:stCondLst>
                                             <p:cond delay="0"/>
                                           </p:stCondLst>
                                         </p:cTn>
                                         <p:tgtEl>
-                                          <p:spTgt spid="2"/>
+                                          <p:spTgt spid="4">
+                                            <p:txEl>
+                                              <p:pRg st="7" end="7"/>
+                                            </p:txEl>
+                                          </p:spTgt>
                                         </p:tgtEl>
                                         <p:attrNameLst>
                                           <p:attrName>style.visibility</p:attrName>
@@ -9143,9 +8833,6 @@
         </p:cTn>
       </p:par>
     </p:tnLst>
-    <p:bldLst>
-      <p:bldP spid="2" grpId="0" animBg="1"/>
-    </p:bldLst>
   </p:timing>
 </p:sld>
 </file>
@@ -9200,16 +8887,77 @@
                   <a:buNone/>
                 </a:pPr>
                 <a:r>
+                  <a:rPr lang="en-US" dirty="0"/>
+                  <a:t>If </a:t>
+                </a:r>
+                <a14:m>
+                  <m:oMath xmlns:m="http://schemas.openxmlformats.org/officeDocument/2006/math">
+                    <m:r>
+                      <a:rPr lang="en-US" b="0" i="1" smtClean="0">
+                        <a:solidFill>
+                          <a:srgbClr val="0033CC"/>
+                        </a:solidFill>
+                        <a:latin typeface="Cambria Math" panose="02040503050406030204" pitchFamily="18" charset="0"/>
+                      </a:rPr>
+                      <m:t>𝜕</m:t>
+                    </m:r>
+                    <m:r>
+                      <a:rPr lang="en-US" b="0" i="1" smtClean="0">
+                        <a:solidFill>
+                          <a:srgbClr val="0033CC"/>
+                        </a:solidFill>
+                        <a:latin typeface="Cambria Math" panose="02040503050406030204" pitchFamily="18" charset="0"/>
+                      </a:rPr>
+                      <m:t>/</m:t>
+                    </m:r>
+                    <m:r>
+                      <a:rPr lang="en-US" b="0" i="1" smtClean="0">
+                        <a:solidFill>
+                          <a:srgbClr val="0033CC"/>
+                        </a:solidFill>
+                        <a:latin typeface="Cambria Math" panose="02040503050406030204" pitchFamily="18" charset="0"/>
+                      </a:rPr>
+                      <m:t>𝜕</m:t>
+                    </m:r>
+                    <m:r>
+                      <a:rPr lang="en-US" b="0" i="1" smtClean="0">
+                        <a:solidFill>
+                          <a:srgbClr val="0033CC"/>
+                        </a:solidFill>
+                        <a:latin typeface="Cambria Math" panose="02040503050406030204" pitchFamily="18" charset="0"/>
+                      </a:rPr>
+                      <m:t>𝑓</m:t>
+                    </m:r>
+                  </m:oMath>
+                </a14:m>
+                <a:r>
                   <a:rPr lang="en-US" dirty="0">
                     <a:solidFill>
                       <a:srgbClr val="0033CC"/>
                     </a:solidFill>
                   </a:rPr>
-                  <a:t>Points to Note</a:t>
+                  <a:t> </a:t>
                 </a:r>
                 <a:r>
                   <a:rPr lang="en-US" dirty="0"/>
-                  <a:t>:</a:t>
+                  <a:t>and </a:t>
+                </a:r>
+                <a14:m>
+                  <m:oMath xmlns:m="http://schemas.openxmlformats.org/officeDocument/2006/math">
+                    <m:r>
+                      <a:rPr lang="en-US" b="0" i="1" smtClean="0">
+                        <a:solidFill>
+                          <a:srgbClr val="0033CC"/>
+                        </a:solidFill>
+                        <a:latin typeface="Cambria Math" panose="02040503050406030204" pitchFamily="18" charset="0"/>
+                      </a:rPr>
+                      <m:t>∫</m:t>
+                    </m:r>
+                  </m:oMath>
+                </a14:m>
+                <a:r>
+                  <a:rPr lang="en-US" dirty="0"/>
+                  <a:t>commute, we obtain the very important result:</a:t>
                 </a:r>
               </a:p>
               <a:p>
@@ -9237,7 +8985,15 @@
                 </a:pPr>
                 <a:r>
                   <a:rPr lang="en-US" dirty="0"/>
-                  <a:t>This result is independent of the details of </a:t>
+                  <a:t>The result is </a:t>
+                </a:r>
+                <a:r>
+                  <a:rPr lang="en-US" i="1" dirty="0"/>
+                  <a:t>independent</a:t>
+                </a:r>
+                <a:r>
+                  <a:rPr lang="en-US" dirty="0"/>
+                  <a:t> of the details of </a:t>
                 </a:r>
                 <a14:m>
                   <m:oMath xmlns:m="http://schemas.openxmlformats.org/officeDocument/2006/math">
@@ -9517,7 +9273,7 @@
                 </a14:m>
                 <a:r>
                   <a:rPr lang="en-US" dirty="0"/>
-                  <a:t> that is arbitrarily close to the optimal function </a:t>
+                  <a:t> that is close (in some precise sense) to the optimal function </a:t>
                 </a:r>
                 <a14:m>
                   <m:oMath xmlns:m="http://schemas.openxmlformats.org/officeDocument/2006/math">
@@ -9606,7 +9362,7 @@
               <a:blipFill>
                 <a:blip r:embed="rId2"/>
                 <a:stretch>
-                  <a:fillRect l="-1309" t="-1316"/>
+                  <a:fillRect l="-1309" t="-789" r="-818"/>
                 </a:stretch>
               </a:blipFill>
             </p:spPr>
@@ -9653,8 +9409,8 @@
           </a:p>
         </p:txBody>
       </p:sp>
-      <mc:AlternateContent xmlns:mc="http://schemas.openxmlformats.org/markup-compatibility/2006" xmlns:a14="http://schemas.microsoft.com/office/drawing/2010/main">
-        <mc:Choice Requires="a14">
+      <mc:AlternateContent xmlns:mc="http://schemas.openxmlformats.org/markup-compatibility/2006">
+        <mc:Choice xmlns:a14="http://schemas.microsoft.com/office/drawing/2010/main" Requires="a14">
           <p:sp>
             <p:nvSpPr>
               <p:cNvPr id="2" name="TextBox 1">
@@ -9669,8 +9425,8 @@
             </p:nvSpPr>
             <p:spPr>
               <a:xfrm>
-                <a:off x="2819400" y="1828800"/>
-                <a:ext cx="3019160" cy="1060931"/>
+                <a:off x="1524000" y="1910869"/>
+                <a:ext cx="6003759" cy="1060931"/>
               </a:xfrm>
               <a:prstGeom prst="rect">
                 <a:avLst/>
@@ -9805,6 +9561,202 @@
                             </a:rPr>
                             <m:t>=0</m:t>
                           </m:r>
+                          <m:r>
+                            <a:rPr lang="en-US" i="1">
+                              <a:latin typeface="Cambria Math" panose="02040503050406030204" pitchFamily="18" charset="0"/>
+                              <a:ea typeface="Cambria Math" panose="02040503050406030204" pitchFamily="18" charset="0"/>
+                            </a:rPr>
+                            <m:t>→</m:t>
+                          </m:r>
+                          <m:sSub>
+                            <m:sSubPr>
+                              <m:ctrlPr>
+                                <a:rPr lang="en-US" b="0" i="1" smtClean="0">
+                                  <a:solidFill>
+                                    <a:srgbClr val="0033CC"/>
+                                  </a:solidFill>
+                                  <a:latin typeface="Cambria Math" panose="02040503050406030204" pitchFamily="18" charset="0"/>
+                                  <a:ea typeface="Cambria Math" panose="02040503050406030204" pitchFamily="18" charset="0"/>
+                                </a:rPr>
+                              </m:ctrlPr>
+                            </m:sSubPr>
+                            <m:e>
+                              <m:r>
+                                <a:rPr lang="en-US" b="0" i="1" smtClean="0">
+                                  <a:solidFill>
+                                    <a:srgbClr val="0033CC"/>
+                                  </a:solidFill>
+                                  <a:latin typeface="Cambria Math" panose="02040503050406030204" pitchFamily="18" charset="0"/>
+                                  <a:ea typeface="Cambria Math" panose="02040503050406030204" pitchFamily="18" charset="0"/>
+                                </a:rPr>
+                                <m:t>𝔼</m:t>
+                              </m:r>
+                            </m:e>
+                            <m:sub>
+                              <m:r>
+                                <a:rPr lang="en-US" b="0" i="1" smtClean="0">
+                                  <a:solidFill>
+                                    <a:srgbClr val="0033CC"/>
+                                  </a:solidFill>
+                                  <a:latin typeface="Cambria Math" panose="02040503050406030204" pitchFamily="18" charset="0"/>
+                                  <a:ea typeface="Cambria Math" panose="02040503050406030204" pitchFamily="18" charset="0"/>
+                                </a:rPr>
+                                <m:t>𝑦</m:t>
+                              </m:r>
+                              <m:r>
+                                <a:rPr lang="en-US" b="0" i="1" smtClean="0">
+                                  <a:solidFill>
+                                    <a:srgbClr val="0033CC"/>
+                                  </a:solidFill>
+                                  <a:latin typeface="Cambria Math" panose="02040503050406030204" pitchFamily="18" charset="0"/>
+                                  <a:ea typeface="Cambria Math" panose="02040503050406030204" pitchFamily="18" charset="0"/>
+                                </a:rPr>
+                                <m:t>∼</m:t>
+                              </m:r>
+                              <m:r>
+                                <a:rPr lang="en-US" b="0" i="1" smtClean="0">
+                                  <a:solidFill>
+                                    <a:srgbClr val="0033CC"/>
+                                  </a:solidFill>
+                                  <a:latin typeface="Cambria Math" panose="02040503050406030204" pitchFamily="18" charset="0"/>
+                                  <a:ea typeface="Cambria Math" panose="02040503050406030204" pitchFamily="18" charset="0"/>
+                                </a:rPr>
+                                <m:t>𝑝</m:t>
+                              </m:r>
+                              <m:d>
+                                <m:dPr>
+                                  <m:ctrlPr>
+                                    <a:rPr lang="en-US" b="0" i="1" smtClean="0">
+                                      <a:solidFill>
+                                        <a:srgbClr val="0033CC"/>
+                                      </a:solidFill>
+                                      <a:latin typeface="Cambria Math" panose="02040503050406030204" pitchFamily="18" charset="0"/>
+                                      <a:ea typeface="Cambria Math" panose="02040503050406030204" pitchFamily="18" charset="0"/>
+                                    </a:rPr>
+                                  </m:ctrlPr>
+                                </m:dPr>
+                                <m:e>
+                                  <m:r>
+                                    <a:rPr lang="en-US" b="0" i="1" smtClean="0">
+                                      <a:solidFill>
+                                        <a:srgbClr val="0033CC"/>
+                                      </a:solidFill>
+                                      <a:latin typeface="Cambria Math" panose="02040503050406030204" pitchFamily="18" charset="0"/>
+                                      <a:ea typeface="Cambria Math" panose="02040503050406030204" pitchFamily="18" charset="0"/>
+                                    </a:rPr>
+                                    <m:t>𝑦</m:t>
+                                  </m:r>
+                                </m:e>
+                                <m:e>
+                                  <m:r>
+                                    <a:rPr lang="en-US" b="0" i="1" smtClean="0">
+                                      <a:solidFill>
+                                        <a:srgbClr val="0033CC"/>
+                                      </a:solidFill>
+                                      <a:latin typeface="Cambria Math" panose="02040503050406030204" pitchFamily="18" charset="0"/>
+                                      <a:ea typeface="Cambria Math" panose="02040503050406030204" pitchFamily="18" charset="0"/>
+                                    </a:rPr>
+                                    <m:t>𝑥</m:t>
+                                  </m:r>
+                                </m:e>
+                              </m:d>
+                            </m:sub>
+                          </m:sSub>
+                          <m:r>
+                            <a:rPr lang="en-US" b="0" i="1" smtClean="0">
+                              <a:latin typeface="Cambria Math" panose="02040503050406030204" pitchFamily="18" charset="0"/>
+                              <a:ea typeface="Cambria Math" panose="02040503050406030204" pitchFamily="18" charset="0"/>
+                            </a:rPr>
+                            <m:t> </m:t>
+                          </m:r>
+                          <m:d>
+                            <m:dPr>
+                              <m:begChr m:val="["/>
+                              <m:endChr m:val="]"/>
+                              <m:ctrlPr>
+                                <a:rPr lang="en-US" i="1">
+                                  <a:solidFill>
+                                    <a:srgbClr val="0033CC"/>
+                                  </a:solidFill>
+                                  <a:latin typeface="Cambria Math" panose="02040503050406030204" pitchFamily="18" charset="0"/>
+                                </a:rPr>
+                              </m:ctrlPr>
+                            </m:dPr>
+                            <m:e>
+                              <m:f>
+                                <m:fPr>
+                                  <m:ctrlPr>
+                                    <a:rPr lang="en-US" i="1">
+                                      <a:solidFill>
+                                        <a:srgbClr val="0033CC"/>
+                                      </a:solidFill>
+                                      <a:latin typeface="Cambria Math" panose="02040503050406030204" pitchFamily="18" charset="0"/>
+                                    </a:rPr>
+                                  </m:ctrlPr>
+                                </m:fPr>
+                                <m:num>
+                                  <m:r>
+                                    <a:rPr lang="en-US" i="1">
+                                      <a:solidFill>
+                                        <a:srgbClr val="0033CC"/>
+                                      </a:solidFill>
+                                      <a:latin typeface="Cambria Math" panose="02040503050406030204" pitchFamily="18" charset="0"/>
+                                    </a:rPr>
+                                    <m:t>𝜕</m:t>
+                                  </m:r>
+                                  <m:r>
+                                    <a:rPr lang="en-US" i="1">
+                                      <a:solidFill>
+                                        <a:srgbClr val="0033CC"/>
+                                      </a:solidFill>
+                                      <a:latin typeface="Cambria Math" panose="02040503050406030204" pitchFamily="18" charset="0"/>
+                                    </a:rPr>
+                                    <m:t>𝐿</m:t>
+                                  </m:r>
+                                </m:num>
+                                <m:den>
+                                  <m:r>
+                                    <a:rPr lang="en-US" i="1">
+                                      <a:solidFill>
+                                        <a:srgbClr val="0033CC"/>
+                                      </a:solidFill>
+                                      <a:latin typeface="Cambria Math" panose="02040503050406030204" pitchFamily="18" charset="0"/>
+                                    </a:rPr>
+                                    <m:t>𝜕</m:t>
+                                  </m:r>
+                                  <m:r>
+                                    <a:rPr lang="en-US" i="1">
+                                      <a:solidFill>
+                                        <a:srgbClr val="0033CC"/>
+                                      </a:solidFill>
+                                      <a:latin typeface="Cambria Math" panose="02040503050406030204" pitchFamily="18" charset="0"/>
+                                    </a:rPr>
+                                    <m:t>𝑓</m:t>
+                                  </m:r>
+                                </m:den>
+                              </m:f>
+                            </m:e>
+                          </m:d>
+                          <m:r>
+                            <a:rPr lang="en-US" b="0" i="1" smtClean="0">
+                              <a:solidFill>
+                                <a:srgbClr val="0033CC"/>
+                              </a:solidFill>
+                              <a:latin typeface="Cambria Math" panose="02040503050406030204" pitchFamily="18" charset="0"/>
+                              <a:ea typeface="Cambria Math" panose="02040503050406030204" pitchFamily="18" charset="0"/>
+                            </a:rPr>
+                            <m:t>=</m:t>
+                          </m:r>
+                          <m:r>
+                            <a:rPr lang="en-US" b="0" i="1" smtClean="0">
+                              <a:solidFill>
+                                <a:srgbClr val="0033CC"/>
+                              </a:solidFill>
+                              <a:latin typeface="Cambria Math" panose="02040503050406030204" pitchFamily="18" charset="0"/>
+                              <a:ea typeface="Cambria Math" panose="02040503050406030204" pitchFamily="18" charset="0"/>
+                            </a:rPr>
+                            <m:t>0</m:t>
+                          </m:r>
                         </m:e>
                       </m:nary>
                     </m:oMath>
@@ -9815,7 +9767,7 @@
             </p:txBody>
           </p:sp>
         </mc:Choice>
-        <mc:Fallback xmlns="">
+        <mc:Fallback>
           <p:sp>
             <p:nvSpPr>
               <p:cNvPr id="2" name="TextBox 1">
@@ -9832,8 +9784,8 @@
             </p:nvSpPr>
             <p:spPr>
               <a:xfrm>
-                <a:off x="2819400" y="1828800"/>
-                <a:ext cx="3019160" cy="1060931"/>
+                <a:off x="1524000" y="1910869"/>
+                <a:ext cx="6003759" cy="1060931"/>
               </a:xfrm>
               <a:prstGeom prst="rect">
                 <a:avLst/>
@@ -9882,6 +9834,134 @@
   <p:clrMapOvr>
     <a:masterClrMapping/>
   </p:clrMapOvr>
+  <p:timing>
+    <p:tnLst>
+      <p:par>
+        <p:cTn id="1" dur="indefinite" restart="never" nodeType="tmRoot">
+          <p:childTnLst>
+            <p:seq concurrent="1" nextAc="seek">
+              <p:cTn id="2" dur="indefinite" nodeType="mainSeq">
+                <p:childTnLst>
+                  <p:par>
+                    <p:cTn id="3" fill="hold">
+                      <p:stCondLst>
+                        <p:cond delay="indefinite"/>
+                      </p:stCondLst>
+                      <p:childTnLst>
+                        <p:par>
+                          <p:cTn id="4" fill="hold">
+                            <p:stCondLst>
+                              <p:cond delay="0"/>
+                            </p:stCondLst>
+                            <p:childTnLst>
+                              <p:par>
+                                <p:cTn id="5" presetID="1" presetClass="entr" presetSubtype="0" fill="hold" nodeType="clickEffect">
+                                  <p:stCondLst>
+                                    <p:cond delay="0"/>
+                                  </p:stCondLst>
+                                  <p:childTnLst>
+                                    <p:set>
+                                      <p:cBhvr>
+                                        <p:cTn id="6" dur="1" fill="hold">
+                                          <p:stCondLst>
+                                            <p:cond delay="0"/>
+                                          </p:stCondLst>
+                                        </p:cTn>
+                                        <p:tgtEl>
+                                          <p:spTgt spid="4">
+                                            <p:txEl>
+                                              <p:pRg st="5" end="5"/>
+                                            </p:txEl>
+                                          </p:spTgt>
+                                        </p:tgtEl>
+                                        <p:attrNameLst>
+                                          <p:attrName>style.visibility</p:attrName>
+                                        </p:attrNameLst>
+                                      </p:cBhvr>
+                                      <p:to>
+                                        <p:strVal val="visible"/>
+                                      </p:to>
+                                    </p:set>
+                                  </p:childTnLst>
+                                </p:cTn>
+                              </p:par>
+                            </p:childTnLst>
+                          </p:cTn>
+                        </p:par>
+                      </p:childTnLst>
+                    </p:cTn>
+                  </p:par>
+                  <p:par>
+                    <p:cTn id="7" fill="hold">
+                      <p:stCondLst>
+                        <p:cond delay="indefinite"/>
+                      </p:stCondLst>
+                      <p:childTnLst>
+                        <p:par>
+                          <p:cTn id="8" fill="hold">
+                            <p:stCondLst>
+                              <p:cond delay="0"/>
+                            </p:stCondLst>
+                            <p:childTnLst>
+                              <p:par>
+                                <p:cTn id="9" presetID="1" presetClass="entr" presetSubtype="0" fill="hold" nodeType="clickEffect">
+                                  <p:stCondLst>
+                                    <p:cond delay="0"/>
+                                  </p:stCondLst>
+                                  <p:childTnLst>
+                                    <p:set>
+                                      <p:cBhvr>
+                                        <p:cTn id="10" dur="1" fill="hold">
+                                          <p:stCondLst>
+                                            <p:cond delay="0"/>
+                                          </p:stCondLst>
+                                        </p:cTn>
+                                        <p:tgtEl>
+                                          <p:spTgt spid="4">
+                                            <p:txEl>
+                                              <p:pRg st="6" end="6"/>
+                                            </p:txEl>
+                                          </p:spTgt>
+                                        </p:tgtEl>
+                                        <p:attrNameLst>
+                                          <p:attrName>style.visibility</p:attrName>
+                                        </p:attrNameLst>
+                                      </p:cBhvr>
+                                      <p:to>
+                                        <p:strVal val="visible"/>
+                                      </p:to>
+                                    </p:set>
+                                  </p:childTnLst>
+                                </p:cTn>
+                              </p:par>
+                            </p:childTnLst>
+                          </p:cTn>
+                        </p:par>
+                      </p:childTnLst>
+                    </p:cTn>
+                  </p:par>
+                </p:childTnLst>
+              </p:cTn>
+              <p:prevCondLst>
+                <p:cond evt="onPrev" delay="0">
+                  <p:tgtEl>
+                    <p:sldTgt/>
+                  </p:tgtEl>
+                </p:cond>
+              </p:prevCondLst>
+              <p:nextCondLst>
+                <p:cond evt="onNext" delay="0">
+                  <p:tgtEl>
+                    <p:sldTgt/>
+                  </p:tgtEl>
+                </p:cond>
+              </p:nextCondLst>
+            </p:seq>
+          </p:childTnLst>
+        </p:cTn>
+      </p:par>
+    </p:tnLst>
+  </p:timing>
 </p:sld>
 </file>
 
@@ -9963,8 +10043,8 @@
           <a:chExt cx="0" cy="0"/>
         </a:xfrm>
       </p:grpSpPr>
-      <mc:AlternateContent xmlns:mc="http://schemas.openxmlformats.org/markup-compatibility/2006" xmlns:a14="http://schemas.microsoft.com/office/drawing/2010/main">
-        <mc:Choice Requires="a14">
+      <mc:AlternateContent xmlns:mc="http://schemas.openxmlformats.org/markup-compatibility/2006">
+        <mc:Choice xmlns:a14="http://schemas.microsoft.com/office/drawing/2010/main" Requires="a14">
           <p:sp>
             <p:nvSpPr>
               <p:cNvPr id="4" name="Content Placeholder 3">
@@ -9995,17 +10075,31 @@
                   <a:buNone/>
                 </a:pPr>
                 <a:r>
+                  <a:rPr lang="en-US" dirty="0">
+                    <a:solidFill>
+                      <a:srgbClr val="0033CC"/>
+                    </a:solidFill>
+                  </a:rPr>
+                  <a:t>Quadratic loss</a:t>
+                </a:r>
+                <a:r>
                   <a:rPr lang="en-US" b="1" dirty="0">
                     <a:solidFill>
                       <a:srgbClr val="0033CC"/>
                     </a:solidFill>
                   </a:rPr>
-                  <a:t>Quadratic loss		</a:t>
+                  <a:t>		</a:t>
                 </a:r>
                 <a:r>
                   <a:rPr lang="en-US" dirty="0"/>
                   <a:t>(often used for regression)</a:t>
                 </a:r>
+              </a:p>
+              <a:p>
+                <a:pPr marL="0" indent="0">
+                  <a:buNone/>
+                </a:pPr>
+                <a:endParaRPr lang="en-US" dirty="0"/>
               </a:p>
               <a:p>
                 <a:pPr marL="0" indent="0">
@@ -10127,18 +10221,71 @@
                 <a:pPr marL="0" indent="0">
                   <a:buNone/>
                 </a:pPr>
+                <a14:m>
+                  <m:oMathPara xmlns:m="http://schemas.openxmlformats.org/officeDocument/2006/math">
+                    <m:oMathParaPr>
+                      <m:jc m:val="center"/>
+                    </m:oMathParaPr>
+                    <m:oMath>
+                      <m:r>
+                        <a:rPr lang="en-US" b="0" i="1" smtClean="0">
+                          <a:latin typeface="Cambria Math" panose="02040503050406030204" pitchFamily="18" charset="0"/>
+                        </a:rPr>
+                        <m:t>𝑦</m:t>
+                      </m:r>
+                      <m:r>
+                        <a:rPr lang="en-US" b="0" i="1" smtClean="0">
+                          <a:latin typeface="Cambria Math" panose="02040503050406030204" pitchFamily="18" charset="0"/>
+                        </a:rPr>
+                        <m:t>∈</m:t>
+                      </m:r>
+                      <m:r>
+                        <a:rPr lang="en-US" b="0" i="1" smtClean="0">
+                          <a:latin typeface="Cambria Math" panose="02040503050406030204" pitchFamily="18" charset="0"/>
+                          <a:ea typeface="Cambria Math" panose="02040503050406030204" pitchFamily="18" charset="0"/>
+                        </a:rPr>
+                        <m:t>ℝ</m:t>
+                      </m:r>
+                    </m:oMath>
+                  </m:oMathPara>
+                </a14:m>
+                <a:endParaRPr lang="en-US" dirty="0"/>
+              </a:p>
+              <a:p>
+                <a:pPr marL="0" indent="0">
+                  <a:buNone/>
+                </a:pPr>
+                <a:endParaRPr lang="en-US" dirty="0"/>
+              </a:p>
+              <a:p>
+                <a:pPr marL="0" indent="0">
+                  <a:buNone/>
+                </a:pPr>
+                <a:r>
+                  <a:rPr lang="en-US" dirty="0">
+                    <a:solidFill>
+                      <a:srgbClr val="0033CC"/>
+                    </a:solidFill>
+                  </a:rPr>
+                  <a:t>Binary cross entropy</a:t>
+                </a:r>
                 <a:r>
                   <a:rPr lang="en-US" b="1" dirty="0">
                     <a:solidFill>
                       <a:srgbClr val="0033CC"/>
                     </a:solidFill>
                   </a:rPr>
-                  <a:t>Binary cross entropy		</a:t>
+                  <a:t>	</a:t>
                 </a:r>
                 <a:r>
                   <a:rPr lang="en-US" dirty="0"/>
                   <a:t>(often used for classification)</a:t>
                 </a:r>
+              </a:p>
+              <a:p>
+                <a:pPr marL="0" indent="0">
+                  <a:buNone/>
+                </a:pPr>
                 <a:endParaRPr lang="en-US" b="1" dirty="0">
                   <a:solidFill>
                     <a:srgbClr val="0033CC"/>
@@ -10217,39 +10364,20 @@
                         <a:ea typeface="Cambria Math" charset="0"/>
                         <a:cs typeface="Cambria Math" charset="0"/>
                       </a:rPr>
-                      <m:t>−[</m:t>
+                      <m:t>−</m:t>
                     </m:r>
-                    <m:r>
-                      <a:rPr lang="en-US" i="1">
-                        <a:latin typeface="Cambria Math" panose="02040503050406030204" pitchFamily="18" charset="0"/>
-                        <a:ea typeface="Cambria Math" charset="0"/>
-                        <a:cs typeface="Cambria Math" charset="0"/>
-                      </a:rPr>
-                      <m:t>𝑦</m:t>
-                    </m:r>
-                    <m:func>
-                      <m:funcPr>
+                    <m:d>
+                      <m:dPr>
+                        <m:begChr m:val="["/>
+                        <m:endChr m:val="]"/>
                         <m:ctrlPr>
-                          <a:rPr lang="en-US">
+                          <a:rPr lang="en-US" i="1">
                             <a:latin typeface="Cambria Math" panose="02040503050406030204" pitchFamily="18" charset="0"/>
                             <a:ea typeface="Cambria Math" charset="0"/>
                             <a:cs typeface="Cambria Math" charset="0"/>
                           </a:rPr>
                         </m:ctrlPr>
-                      </m:funcPr>
-                      <m:fName>
-                        <m:r>
-                          <m:rPr>
-                            <m:sty m:val="p"/>
-                          </m:rPr>
-                          <a:rPr lang="en-US">
-                            <a:latin typeface="Cambria Math" panose="02040503050406030204" pitchFamily="18" charset="0"/>
-                            <a:ea typeface="Cambria Math" charset="0"/>
-                            <a:cs typeface="Cambria Math" charset="0"/>
-                          </a:rPr>
-                          <m:t>log</m:t>
-                        </m:r>
-                      </m:fName>
+                      </m:dPr>
                       <m:e>
                         <m:r>
                           <a:rPr lang="en-US" i="1">
@@ -10257,45 +10385,8 @@
                             <a:ea typeface="Cambria Math" charset="0"/>
                             <a:cs typeface="Cambria Math" charset="0"/>
                           </a:rPr>
-                          <m:t>𝑓</m:t>
+                          <m:t>𝑦</m:t>
                         </m:r>
-                        <m:r>
-                          <a:rPr lang="en-US" i="1">
-                            <a:latin typeface="Cambria Math" panose="02040503050406030204" pitchFamily="18" charset="0"/>
-                            <a:ea typeface="Cambria Math" charset="0"/>
-                            <a:cs typeface="Cambria Math" charset="0"/>
-                          </a:rPr>
-                          <m:t>+</m:t>
-                        </m:r>
-                        <m:d>
-                          <m:dPr>
-                            <m:ctrlPr>
-                              <a:rPr lang="en-US" i="1">
-                                <a:latin typeface="Cambria Math" panose="02040503050406030204" pitchFamily="18" charset="0"/>
-                                <a:ea typeface="Cambria Math" charset="0"/>
-                                <a:cs typeface="Cambria Math" charset="0"/>
-                              </a:rPr>
-                            </m:ctrlPr>
-                          </m:dPr>
-                          <m:e>
-                            <m:r>
-                              <a:rPr lang="en-US" i="1">
-                                <a:latin typeface="Cambria Math" panose="02040503050406030204" pitchFamily="18" charset="0"/>
-                                <a:ea typeface="Cambria Math" charset="0"/>
-                                <a:cs typeface="Cambria Math" charset="0"/>
-                              </a:rPr>
-                              <m:t>1−</m:t>
-                            </m:r>
-                            <m:r>
-                              <a:rPr lang="en-US" i="1">
-                                <a:latin typeface="Cambria Math" panose="02040503050406030204" pitchFamily="18" charset="0"/>
-                                <a:ea typeface="Cambria Math" charset="0"/>
-                                <a:cs typeface="Cambria Math" charset="0"/>
-                              </a:rPr>
-                              <m:t>𝑦</m:t>
-                            </m:r>
-                          </m:e>
-                        </m:d>
                         <m:func>
                           <m:funcPr>
                             <m:ctrlPr>
@@ -10326,14 +10417,6 @@
                                 <a:ea typeface="Cambria Math" charset="0"/>
                                 <a:cs typeface="Cambria Math" charset="0"/>
                               </a:rPr>
-                              <m:t>(1−</m:t>
-                            </m:r>
-                            <m:r>
-                              <a:rPr lang="en-US" i="1">
-                                <a:latin typeface="Cambria Math" panose="02040503050406030204" pitchFamily="18" charset="0"/>
-                                <a:ea typeface="Cambria Math" charset="0"/>
-                                <a:cs typeface="Cambria Math" charset="0"/>
-                              </a:rPr>
                               <m:t>𝑓</m:t>
                             </m:r>
                             <m:r>
@@ -10342,21 +10425,136 @@
                                 <a:ea typeface="Cambria Math" charset="0"/>
                                 <a:cs typeface="Cambria Math" charset="0"/>
                               </a:rPr>
-                              <m:t>)</m:t>
+                              <m:t>+</m:t>
                             </m:r>
+                            <m:d>
+                              <m:dPr>
+                                <m:ctrlPr>
+                                  <a:rPr lang="en-US" i="1">
+                                    <a:latin typeface="Cambria Math" panose="02040503050406030204" pitchFamily="18" charset="0"/>
+                                    <a:ea typeface="Cambria Math" charset="0"/>
+                                    <a:cs typeface="Cambria Math" charset="0"/>
+                                  </a:rPr>
+                                </m:ctrlPr>
+                              </m:dPr>
+                              <m:e>
+                                <m:r>
+                                  <a:rPr lang="en-US" i="1">
+                                    <a:latin typeface="Cambria Math" panose="02040503050406030204" pitchFamily="18" charset="0"/>
+                                    <a:ea typeface="Cambria Math" charset="0"/>
+                                    <a:cs typeface="Cambria Math" charset="0"/>
+                                  </a:rPr>
+                                  <m:t>1−</m:t>
+                                </m:r>
+                                <m:r>
+                                  <a:rPr lang="en-US" i="1">
+                                    <a:latin typeface="Cambria Math" panose="02040503050406030204" pitchFamily="18" charset="0"/>
+                                    <a:ea typeface="Cambria Math" charset="0"/>
+                                    <a:cs typeface="Cambria Math" charset="0"/>
+                                  </a:rPr>
+                                  <m:t>𝑦</m:t>
+                                </m:r>
+                              </m:e>
+                            </m:d>
+                            <m:func>
+                              <m:funcPr>
+                                <m:ctrlPr>
+                                  <a:rPr lang="en-US">
+                                    <a:latin typeface="Cambria Math" panose="02040503050406030204" pitchFamily="18" charset="0"/>
+                                    <a:ea typeface="Cambria Math" charset="0"/>
+                                    <a:cs typeface="Cambria Math" charset="0"/>
+                                  </a:rPr>
+                                </m:ctrlPr>
+                              </m:funcPr>
+                              <m:fName>
+                                <m:r>
+                                  <m:rPr>
+                                    <m:sty m:val="p"/>
+                                  </m:rPr>
+                                  <a:rPr lang="en-US">
+                                    <a:latin typeface="Cambria Math" panose="02040503050406030204" pitchFamily="18" charset="0"/>
+                                    <a:ea typeface="Cambria Math" charset="0"/>
+                                    <a:cs typeface="Cambria Math" charset="0"/>
+                                  </a:rPr>
+                                  <m:t>log</m:t>
+                                </m:r>
+                              </m:fName>
+                              <m:e>
+                                <m:d>
+                                  <m:dPr>
+                                    <m:ctrlPr>
+                                      <a:rPr lang="en-US" i="1">
+                                        <a:latin typeface="Cambria Math" panose="02040503050406030204" pitchFamily="18" charset="0"/>
+                                        <a:ea typeface="Cambria Math" charset="0"/>
+                                        <a:cs typeface="Cambria Math" charset="0"/>
+                                      </a:rPr>
+                                    </m:ctrlPr>
+                                  </m:dPr>
+                                  <m:e>
+                                    <m:r>
+                                      <a:rPr lang="en-US" i="1">
+                                        <a:latin typeface="Cambria Math" panose="02040503050406030204" pitchFamily="18" charset="0"/>
+                                        <a:ea typeface="Cambria Math" charset="0"/>
+                                        <a:cs typeface="Cambria Math" charset="0"/>
+                                      </a:rPr>
+                                      <m:t>1−</m:t>
+                                    </m:r>
+                                    <m:r>
+                                      <a:rPr lang="en-US" i="1">
+                                        <a:latin typeface="Cambria Math" panose="02040503050406030204" pitchFamily="18" charset="0"/>
+                                        <a:ea typeface="Cambria Math" charset="0"/>
+                                        <a:cs typeface="Cambria Math" charset="0"/>
+                                      </a:rPr>
+                                      <m:t>𝑓</m:t>
+                                    </m:r>
+                                  </m:e>
+                                </m:d>
+                              </m:e>
+                            </m:func>
                           </m:e>
                         </m:func>
                       </m:e>
-                    </m:func>
-                    <m:r>
-                      <a:rPr lang="en-US">
-                        <a:latin typeface="Cambria Math" panose="02040503050406030204" pitchFamily="18" charset="0"/>
-                        <a:ea typeface="Cambria Math" charset="0"/>
-                        <a:cs typeface="Cambria Math" charset="0"/>
-                      </a:rPr>
-                      <m:t>]</m:t>
-                    </m:r>
+                    </m:d>
                   </m:oMath>
+                </a14:m>
+                <a:br>
+                  <a:rPr lang="en-US" dirty="0">
+                    <a:latin typeface="Cambria Math" panose="02040503050406030204" pitchFamily="18" charset="0"/>
+                    <a:ea typeface="Cambria Math" charset="0"/>
+                    <a:cs typeface="Cambria Math" charset="0"/>
+                  </a:rPr>
+                </a:br>
+                <a:endParaRPr lang="en-US" dirty="0">
+                  <a:latin typeface="Cambria Math" panose="02040503050406030204" pitchFamily="18" charset="0"/>
+                  <a:ea typeface="Cambria Math" charset="0"/>
+                  <a:cs typeface="Cambria Math" charset="0"/>
+                </a:endParaRPr>
+              </a:p>
+              <a:p>
+                <a:pPr marL="0" indent="0">
+                  <a:buNone/>
+                </a:pPr>
+                <a14:m>
+                  <m:oMathPara xmlns:m="http://schemas.openxmlformats.org/officeDocument/2006/math">
+                    <m:oMath>
+                      <m:r>
+                        <a:rPr lang="en-US" b="0" i="1" smtClean="0">
+                          <a:latin typeface="Cambria Math" panose="02040503050406030204" pitchFamily="18" charset="0"/>
+                          <a:ea typeface="Cambria Math" charset="0"/>
+                          <a:cs typeface="Cambria Math" charset="0"/>
+                        </a:rPr>
+                        <m:t>𝑦</m:t>
+                      </m:r>
+                      <m:r>
+                        <a:rPr lang="en-US" b="0" i="1" smtClean="0">
+                          <a:latin typeface="Cambria Math" panose="02040503050406030204" pitchFamily="18" charset="0"/>
+                          <a:ea typeface="Cambria Math" charset="0"/>
+                          <a:cs typeface="Cambria Math" charset="0"/>
+                        </a:rPr>
+                        <m:t>∈{0, 1}</m:t>
+                      </m:r>
+                    </m:oMath>
+                  </m:oMathPara>
                 </a14:m>
                 <a:endParaRPr lang="en-US" dirty="0">
                   <a:latin typeface="Cambria Math" panose="02040503050406030204" pitchFamily="18" charset="0"/>
@@ -10368,691 +10566,12 @@
                 <a:pPr marL="0" indent="0">
                   <a:buNone/>
                 </a:pPr>
-                <a:r>
-                  <a:rPr lang="en-US" b="1" dirty="0">
-                    <a:solidFill>
-                      <a:srgbClr val="0033CC"/>
-                    </a:solidFill>
-                    <a:latin typeface="Cambria Math" panose="02040503050406030204" pitchFamily="18" charset="0"/>
-                    <a:ea typeface="Cambria Math" charset="0"/>
-                    <a:cs typeface="Cambria Math" charset="0"/>
-                  </a:rPr>
-                  <a:t>Exponential loss		</a:t>
-                </a:r>
-              </a:p>
-              <a:p>
-                <a:pPr marL="0" indent="0">
-                  <a:buNone/>
-                </a:pPr>
-                <a:r>
-                  <a:rPr lang="en-US" dirty="0">
-                    <a:ea typeface="Cambria Math" charset="0"/>
-                    <a:cs typeface="Cambria Math" charset="0"/>
-                  </a:rPr>
-                  <a:t>	</a:t>
-                </a:r>
-                <a14:m>
-                  <m:oMath xmlns:m="http://schemas.openxmlformats.org/officeDocument/2006/math">
-                    <m:r>
-                      <a:rPr lang="en-US" i="1">
-                        <a:latin typeface="Cambria Math" panose="02040503050406030204" pitchFamily="18" charset="0"/>
-                        <a:ea typeface="Cambria Math" charset="0"/>
-                        <a:cs typeface="Cambria Math" charset="0"/>
-                      </a:rPr>
-                      <m:t>𝐿</m:t>
-                    </m:r>
-                    <m:d>
-                      <m:dPr>
-                        <m:ctrlPr>
-                          <a:rPr lang="en-US" i="1">
-                            <a:latin typeface="Cambria Math" panose="02040503050406030204" pitchFamily="18" charset="0"/>
-                            <a:ea typeface="Cambria Math" charset="0"/>
-                            <a:cs typeface="Cambria Math" charset="0"/>
-                          </a:rPr>
-                        </m:ctrlPr>
-                      </m:dPr>
-                      <m:e>
-                        <m:r>
-                          <a:rPr lang="en-US" i="1">
-                            <a:latin typeface="Cambria Math" panose="02040503050406030204" pitchFamily="18" charset="0"/>
-                            <a:ea typeface="Cambria Math" charset="0"/>
-                            <a:cs typeface="Cambria Math" charset="0"/>
-                          </a:rPr>
-                          <m:t>𝑦</m:t>
-                        </m:r>
-                        <m:r>
-                          <a:rPr lang="en-US" i="1">
-                            <a:latin typeface="Cambria Math" panose="02040503050406030204" pitchFamily="18" charset="0"/>
-                            <a:ea typeface="Cambria Math" charset="0"/>
-                            <a:cs typeface="Cambria Math" charset="0"/>
-                          </a:rPr>
-                          <m:t>, </m:t>
-                        </m:r>
-                        <m:r>
-                          <a:rPr lang="en-US" i="1">
-                            <a:latin typeface="Cambria Math" panose="02040503050406030204" pitchFamily="18" charset="0"/>
-                            <a:ea typeface="Cambria Math" charset="0"/>
-                            <a:cs typeface="Cambria Math" charset="0"/>
-                          </a:rPr>
-                          <m:t>𝑓</m:t>
-                        </m:r>
-                      </m:e>
-                    </m:d>
-                    <m:r>
-                      <a:rPr lang="en-US" i="1">
-                        <a:latin typeface="Cambria Math" panose="02040503050406030204" pitchFamily="18" charset="0"/>
-                        <a:ea typeface="Cambria Math" charset="0"/>
-                        <a:cs typeface="Cambria Math" charset="0"/>
-                      </a:rPr>
-                      <m:t>=</m:t>
-                    </m:r>
-                    <m:func>
-                      <m:funcPr>
-                        <m:ctrlPr>
-                          <a:rPr lang="en-US">
-                            <a:latin typeface="Cambria Math" panose="02040503050406030204" pitchFamily="18" charset="0"/>
-                            <a:ea typeface="Cambria Math" charset="0"/>
-                            <a:cs typeface="Cambria Math" charset="0"/>
-                          </a:rPr>
-                        </m:ctrlPr>
-                      </m:funcPr>
-                      <m:fName>
-                        <m:r>
-                          <m:rPr>
-                            <m:sty m:val="p"/>
-                          </m:rPr>
-                          <a:rPr lang="en-US">
-                            <a:latin typeface="Cambria Math" panose="02040503050406030204" pitchFamily="18" charset="0"/>
-                            <a:ea typeface="Cambria Math" charset="0"/>
-                            <a:cs typeface="Cambria Math" charset="0"/>
-                          </a:rPr>
-                          <m:t>exp</m:t>
-                        </m:r>
-                      </m:fName>
-                      <m:e>
-                        <m:r>
-                          <a:rPr lang="en-US" i="1">
-                            <a:latin typeface="Cambria Math" panose="02040503050406030204" pitchFamily="18" charset="0"/>
-                            <a:ea typeface="Cambria Math" charset="0"/>
-                            <a:cs typeface="Cambria Math" charset="0"/>
-                          </a:rPr>
-                          <m:t>(−</m:t>
-                        </m:r>
-                        <m:r>
-                          <a:rPr lang="en-US" i="1">
-                            <a:latin typeface="Cambria Math" panose="02040503050406030204" pitchFamily="18" charset="0"/>
-                            <a:ea typeface="Cambria Math" charset="0"/>
-                            <a:cs typeface="Cambria Math" charset="0"/>
-                          </a:rPr>
-                          <m:t>𝑤𝑦𝑓</m:t>
-                        </m:r>
-                        <m:r>
-                          <a:rPr lang="en-US" i="1">
-                            <a:latin typeface="Cambria Math" panose="02040503050406030204" pitchFamily="18" charset="0"/>
-                            <a:ea typeface="Cambria Math" charset="0"/>
-                            <a:cs typeface="Cambria Math" charset="0"/>
-                          </a:rPr>
-                          <m:t>/2)</m:t>
-                        </m:r>
-                      </m:e>
-                    </m:func>
-                  </m:oMath>
-                </a14:m>
-                <a:endParaRPr lang="en-US" dirty="0">
-                  <a:latin typeface="Cambria Math" panose="02040503050406030204" pitchFamily="18" charset="0"/>
-                  <a:ea typeface="Cambria Math" charset="0"/>
-                  <a:cs typeface="Cambria Math" charset="0"/>
-                </a:endParaRPr>
-              </a:p>
-              <a:p>
-                <a:pPr marL="0" indent="0">
-                  <a:buNone/>
-                </a:pPr>
-                <a:r>
-                  <a:rPr lang="en-US" b="1" dirty="0">
-                    <a:solidFill>
-                      <a:srgbClr val="0033CC"/>
-                    </a:solidFill>
-                    <a:latin typeface="Cambria Math" panose="02040503050406030204" pitchFamily="18" charset="0"/>
-                    <a:ea typeface="Cambria Math" charset="0"/>
-                  </a:rPr>
-                  <a:t>Quantile loss (</a:t>
-                </a:r>
-                <a14:m>
-                  <m:oMath xmlns:m="http://schemas.openxmlformats.org/officeDocument/2006/math">
-                    <m:r>
-                      <a:rPr lang="en-US" b="1" i="1">
-                        <a:solidFill>
-                          <a:srgbClr val="0033CC"/>
-                        </a:solidFill>
-                        <a:latin typeface="Cambria Math" panose="02040503050406030204" pitchFamily="18" charset="0"/>
-                        <a:ea typeface="Cambria Math" charset="0"/>
-                      </a:rPr>
-                      <m:t>𝟎</m:t>
-                    </m:r>
-                    <m:r>
-                      <a:rPr lang="en-US" b="1" i="1">
-                        <a:solidFill>
-                          <a:srgbClr val="0033CC"/>
-                        </a:solidFill>
-                        <a:latin typeface="Cambria Math" panose="02040503050406030204" pitchFamily="18" charset="0"/>
-                        <a:ea typeface="Cambria Math" panose="02040503050406030204" pitchFamily="18" charset="0"/>
-                      </a:rPr>
-                      <m:t>≤</m:t>
-                    </m:r>
-                    <m:r>
-                      <a:rPr lang="en-US" b="1" i="1">
-                        <a:solidFill>
-                          <a:srgbClr val="0033CC"/>
-                        </a:solidFill>
-                        <a:latin typeface="Cambria Math" panose="02040503050406030204" pitchFamily="18" charset="0"/>
-                        <a:ea typeface="Cambria Math" panose="02040503050406030204" pitchFamily="18" charset="0"/>
-                      </a:rPr>
-                      <m:t>𝝉</m:t>
-                    </m:r>
-                    <m:r>
-                      <a:rPr lang="en-US" b="1" i="1">
-                        <a:solidFill>
-                          <a:srgbClr val="0033CC"/>
-                        </a:solidFill>
-                        <a:latin typeface="Cambria Math" panose="02040503050406030204" pitchFamily="18" charset="0"/>
-                        <a:ea typeface="Cambria Math" panose="02040503050406030204" pitchFamily="18" charset="0"/>
-                      </a:rPr>
-                      <m:t>≤</m:t>
-                    </m:r>
-                    <m:r>
-                      <a:rPr lang="en-US" b="1" i="1">
-                        <a:solidFill>
-                          <a:srgbClr val="0033CC"/>
-                        </a:solidFill>
-                        <a:latin typeface="Cambria Math" panose="02040503050406030204" pitchFamily="18" charset="0"/>
-                        <a:ea typeface="Cambria Math" panose="02040503050406030204" pitchFamily="18" charset="0"/>
-                      </a:rPr>
-                      <m:t>𝟏</m:t>
-                    </m:r>
-                  </m:oMath>
-                </a14:m>
-                <a:r>
-                  <a:rPr lang="en-US" b="1" dirty="0">
-                    <a:solidFill>
-                      <a:srgbClr val="0033CC"/>
-                    </a:solidFill>
-                    <a:latin typeface="Cambria Math" panose="02040503050406030204" pitchFamily="18" charset="0"/>
-                    <a:ea typeface="Cambria Math" charset="0"/>
-                  </a:rPr>
-                  <a:t>)	</a:t>
-                </a:r>
-              </a:p>
-              <a:p>
-                <a:pPr marL="0" indent="0">
-                  <a:buNone/>
-                </a:pPr>
-                <a:r>
-                  <a:rPr lang="en-US" dirty="0">
-                    <a:latin typeface="Cambria Math" panose="02040503050406030204" pitchFamily="18" charset="0"/>
-                    <a:ea typeface="Cambria Math" charset="0"/>
-                  </a:rPr>
-                  <a:t>	</a:t>
-                </a:r>
-                <a14:m>
-                  <m:oMath xmlns:m="http://schemas.openxmlformats.org/officeDocument/2006/math">
-                    <m:r>
-                      <a:rPr lang="en-US" i="1">
-                        <a:latin typeface="Cambria Math" panose="02040503050406030204" pitchFamily="18" charset="0"/>
-                        <a:ea typeface="Cambria Math" charset="0"/>
-                        <a:cs typeface="Cambria Math" charset="0"/>
-                      </a:rPr>
-                      <m:t>𝐿</m:t>
-                    </m:r>
-                    <m:d>
-                      <m:dPr>
-                        <m:ctrlPr>
-                          <a:rPr lang="en-US" i="1">
-                            <a:latin typeface="Cambria Math" panose="02040503050406030204" pitchFamily="18" charset="0"/>
-                            <a:ea typeface="Cambria Math" charset="0"/>
-                            <a:cs typeface="Cambria Math" charset="0"/>
-                          </a:rPr>
-                        </m:ctrlPr>
-                      </m:dPr>
-                      <m:e>
-                        <m:r>
-                          <a:rPr lang="en-US" i="1">
-                            <a:latin typeface="Cambria Math" panose="02040503050406030204" pitchFamily="18" charset="0"/>
-                            <a:ea typeface="Cambria Math" charset="0"/>
-                            <a:cs typeface="Cambria Math" charset="0"/>
-                          </a:rPr>
-                          <m:t>𝑦</m:t>
-                        </m:r>
-                        <m:r>
-                          <a:rPr lang="en-US" i="1">
-                            <a:latin typeface="Cambria Math" panose="02040503050406030204" pitchFamily="18" charset="0"/>
-                            <a:ea typeface="Cambria Math" charset="0"/>
-                            <a:cs typeface="Cambria Math" charset="0"/>
-                          </a:rPr>
-                          <m:t>, </m:t>
-                        </m:r>
-                        <m:r>
-                          <a:rPr lang="en-US" i="1">
-                            <a:latin typeface="Cambria Math" panose="02040503050406030204" pitchFamily="18" charset="0"/>
-                            <a:ea typeface="Cambria Math" charset="0"/>
-                            <a:cs typeface="Cambria Math" charset="0"/>
-                          </a:rPr>
-                          <m:t>𝑓</m:t>
-                        </m:r>
-                      </m:e>
-                    </m:d>
-                    <m:r>
-                      <a:rPr lang="en-US" i="1">
-                        <a:latin typeface="Cambria Math" panose="02040503050406030204" pitchFamily="18" charset="0"/>
-                        <a:ea typeface="Cambria Math" charset="0"/>
-                        <a:cs typeface="Cambria Math" charset="0"/>
-                      </a:rPr>
-                      <m:t>=</m:t>
-                    </m:r>
-                    <m:d>
-                      <m:dPr>
-                        <m:begChr m:val="{"/>
-                        <m:endChr m:val=""/>
-                        <m:ctrlPr>
-                          <a:rPr lang="en-US" i="1">
-                            <a:latin typeface="Cambria Math" panose="02040503050406030204" pitchFamily="18" charset="0"/>
-                            <a:ea typeface="Cambria Math" charset="0"/>
-                          </a:rPr>
-                        </m:ctrlPr>
-                      </m:dPr>
-                      <m:e>
-                        <m:eqArr>
-                          <m:eqArrPr>
-                            <m:ctrlPr>
-                              <a:rPr lang="en-US" i="1">
-                                <a:latin typeface="Cambria Math" panose="02040503050406030204" pitchFamily="18" charset="0"/>
-                                <a:ea typeface="Cambria Math" charset="0"/>
-                              </a:rPr>
-                            </m:ctrlPr>
-                          </m:eqArrPr>
-                          <m:e>
-                            <m:r>
-                              <a:rPr lang="en-US" i="1">
-                                <a:latin typeface="Cambria Math" panose="02040503050406030204" pitchFamily="18" charset="0"/>
-                                <a:ea typeface="Cambria Math" charset="0"/>
-                              </a:rPr>
-                              <m:t>𝜏</m:t>
-                            </m:r>
-                            <m:d>
-                              <m:dPr>
-                                <m:ctrlPr>
-                                  <a:rPr lang="en-US" i="1">
-                                    <a:latin typeface="Cambria Math" panose="02040503050406030204" pitchFamily="18" charset="0"/>
-                                    <a:ea typeface="Cambria Math" charset="0"/>
-                                  </a:rPr>
-                                </m:ctrlPr>
-                              </m:dPr>
-                              <m:e>
-                                <m:r>
-                                  <a:rPr lang="en-US" i="1">
-                                    <a:latin typeface="Cambria Math" panose="02040503050406030204" pitchFamily="18" charset="0"/>
-                                    <a:ea typeface="Cambria Math" charset="0"/>
-                                  </a:rPr>
-                                  <m:t>𝑦</m:t>
-                                </m:r>
-                                <m:r>
-                                  <a:rPr lang="en-US" i="1">
-                                    <a:latin typeface="Cambria Math" panose="02040503050406030204" pitchFamily="18" charset="0"/>
-                                    <a:ea typeface="Cambria Math" charset="0"/>
-                                  </a:rPr>
-                                  <m:t>−</m:t>
-                                </m:r>
-                                <m:r>
-                                  <a:rPr lang="en-US" i="1">
-                                    <a:latin typeface="Cambria Math" panose="02040503050406030204" pitchFamily="18" charset="0"/>
-                                    <a:ea typeface="Cambria Math" charset="0"/>
-                                  </a:rPr>
-                                  <m:t>𝑓</m:t>
-                                </m:r>
-                              </m:e>
-                            </m:d>
-                            <m:r>
-                              <a:rPr lang="en-US" i="1">
-                                <a:latin typeface="Cambria Math" panose="02040503050406030204" pitchFamily="18" charset="0"/>
-                                <a:ea typeface="Cambria Math" charset="0"/>
-                              </a:rPr>
-                              <m:t>              </m:t>
-                            </m:r>
-                            <m:r>
-                              <a:rPr lang="en-US" i="1">
-                                <a:latin typeface="Cambria Math" panose="02040503050406030204" pitchFamily="18" charset="0"/>
-                                <a:ea typeface="Cambria Math" charset="0"/>
-                              </a:rPr>
-                              <m:t>𝑦</m:t>
-                            </m:r>
-                            <m:r>
-                              <a:rPr lang="en-US" i="1">
-                                <a:latin typeface="Cambria Math" panose="02040503050406030204" pitchFamily="18" charset="0"/>
-                                <a:ea typeface="Cambria Math" panose="02040503050406030204" pitchFamily="18" charset="0"/>
-                              </a:rPr>
-                              <m:t>≥</m:t>
-                            </m:r>
-                            <m:r>
-                              <a:rPr lang="en-US" i="1">
-                                <a:latin typeface="Cambria Math" panose="02040503050406030204" pitchFamily="18" charset="0"/>
-                                <a:ea typeface="Cambria Math" panose="02040503050406030204" pitchFamily="18" charset="0"/>
-                              </a:rPr>
-                              <m:t>𝑓</m:t>
-                            </m:r>
-                            <m:r>
-                              <a:rPr lang="en-US" i="1">
-                                <a:latin typeface="Cambria Math" panose="02040503050406030204" pitchFamily="18" charset="0"/>
-                                <a:ea typeface="Cambria Math" charset="0"/>
-                              </a:rPr>
-                              <m:t> </m:t>
-                            </m:r>
-                          </m:e>
-                          <m:e>
-                            <m:d>
-                              <m:dPr>
-                                <m:ctrlPr>
-                                  <a:rPr lang="en-US" i="1">
-                                    <a:latin typeface="Cambria Math" panose="02040503050406030204" pitchFamily="18" charset="0"/>
-                                  </a:rPr>
-                                </m:ctrlPr>
-                              </m:dPr>
-                              <m:e>
-                                <m:r>
-                                  <a:rPr lang="en-US" i="1">
-                                    <a:latin typeface="Cambria Math" panose="02040503050406030204" pitchFamily="18" charset="0"/>
-                                  </a:rPr>
-                                  <m:t>1−</m:t>
-                                </m:r>
-                                <m:r>
-                                  <a:rPr lang="en-US" i="1">
-                                    <a:latin typeface="Cambria Math" panose="02040503050406030204" pitchFamily="18" charset="0"/>
-                                  </a:rPr>
-                                  <m:t>𝜏</m:t>
-                                </m:r>
-                              </m:e>
-                            </m:d>
-                            <m:d>
-                              <m:dPr>
-                                <m:ctrlPr>
-                                  <a:rPr lang="en-US" i="1">
-                                    <a:latin typeface="Cambria Math" panose="02040503050406030204" pitchFamily="18" charset="0"/>
-                                  </a:rPr>
-                                </m:ctrlPr>
-                              </m:dPr>
-                              <m:e>
-                                <m:r>
-                                  <a:rPr lang="en-US" i="1">
-                                    <a:latin typeface="Cambria Math" panose="02040503050406030204" pitchFamily="18" charset="0"/>
-                                  </a:rPr>
-                                  <m:t>𝑓</m:t>
-                                </m:r>
-                                <m:r>
-                                  <a:rPr lang="en-US" i="1">
-                                    <a:latin typeface="Cambria Math" panose="02040503050406030204" pitchFamily="18" charset="0"/>
-                                  </a:rPr>
-                                  <m:t>−</m:t>
-                                </m:r>
-                                <m:r>
-                                  <a:rPr lang="en-US" i="1">
-                                    <a:latin typeface="Cambria Math" panose="02040503050406030204" pitchFamily="18" charset="0"/>
-                                  </a:rPr>
-                                  <m:t>𝑦</m:t>
-                                </m:r>
-                              </m:e>
-                            </m:d>
-                            <m:r>
-                              <a:rPr lang="en-US" i="1">
-                                <a:latin typeface="Cambria Math" panose="02040503050406030204" pitchFamily="18" charset="0"/>
-                              </a:rPr>
-                              <m:t>  </m:t>
-                            </m:r>
-                            <m:r>
-                              <a:rPr lang="en-US" i="1">
-                                <a:latin typeface="Cambria Math" panose="02040503050406030204" pitchFamily="18" charset="0"/>
-                              </a:rPr>
-                              <m:t>𝑦</m:t>
-                            </m:r>
-                            <m:r>
-                              <a:rPr lang="en-US" i="1">
-                                <a:latin typeface="Cambria Math" panose="02040503050406030204" pitchFamily="18" charset="0"/>
-                              </a:rPr>
-                              <m:t>&lt;</m:t>
-                            </m:r>
-                            <m:r>
-                              <a:rPr lang="en-US" i="1">
-                                <a:latin typeface="Cambria Math" panose="02040503050406030204" pitchFamily="18" charset="0"/>
-                              </a:rPr>
-                              <m:t>𝑓</m:t>
-                            </m:r>
-                          </m:e>
-                        </m:eqArr>
-                      </m:e>
-                    </m:d>
-                  </m:oMath>
-                </a14:m>
-                <a:endParaRPr lang="en-US" dirty="0"/>
-              </a:p>
-              <a:p>
-                <a:pPr marL="0" indent="0">
-                  <a:buNone/>
-                </a:pPr>
-                <a:r>
-                  <a:rPr lang="en-US" dirty="0">
-                    <a:solidFill>
-                      <a:srgbClr val="0033CC"/>
-                    </a:solidFill>
-                  </a:rPr>
-                  <a:t>Zero-One loss</a:t>
-                </a:r>
-              </a:p>
-              <a:p>
-                <a:pPr marL="0" indent="0">
-                  <a:buNone/>
-                </a:pPr>
-                <a14:m>
-                  <m:oMathPara xmlns:m="http://schemas.openxmlformats.org/officeDocument/2006/math">
-                    <m:oMath>
-                      <m:r>
-                        <a:rPr lang="en-US" i="1">
-                          <a:latin typeface="Cambria Math" panose="02040503050406030204" pitchFamily="18" charset="0"/>
-                          <a:ea typeface="Cambria Math" charset="0"/>
-                          <a:cs typeface="Cambria Math" charset="0"/>
-                        </a:rPr>
-                        <m:t>𝐿</m:t>
-                      </m:r>
-                      <m:d>
-                        <m:dPr>
-                          <m:ctrlPr>
-                            <a:rPr lang="en-US" i="1">
-                              <a:latin typeface="Cambria Math" panose="02040503050406030204" pitchFamily="18" charset="0"/>
-                              <a:ea typeface="Cambria Math" charset="0"/>
-                              <a:cs typeface="Cambria Math" charset="0"/>
-                            </a:rPr>
-                          </m:ctrlPr>
-                        </m:dPr>
-                        <m:e>
-                          <m:r>
-                            <a:rPr lang="en-US" i="1">
-                              <a:latin typeface="Cambria Math" panose="02040503050406030204" pitchFamily="18" charset="0"/>
-                              <a:ea typeface="Cambria Math" charset="0"/>
-                              <a:cs typeface="Cambria Math" charset="0"/>
-                            </a:rPr>
-                            <m:t>𝑦</m:t>
-                          </m:r>
-                          <m:r>
-                            <a:rPr lang="en-US" i="1">
-                              <a:latin typeface="Cambria Math" panose="02040503050406030204" pitchFamily="18" charset="0"/>
-                              <a:ea typeface="Cambria Math" charset="0"/>
-                              <a:cs typeface="Cambria Math" charset="0"/>
-                            </a:rPr>
-                            <m:t>, </m:t>
-                          </m:r>
-                          <m:r>
-                            <a:rPr lang="en-US" i="1">
-                              <a:latin typeface="Cambria Math" panose="02040503050406030204" pitchFamily="18" charset="0"/>
-                              <a:ea typeface="Cambria Math" charset="0"/>
-                              <a:cs typeface="Cambria Math" charset="0"/>
-                            </a:rPr>
-                            <m:t>𝑓</m:t>
-                          </m:r>
-                        </m:e>
-                      </m:d>
-                      <m:r>
-                        <a:rPr lang="en-US" i="1">
-                          <a:latin typeface="Cambria Math" panose="02040503050406030204" pitchFamily="18" charset="0"/>
-                          <a:ea typeface="Cambria Math" charset="0"/>
-                          <a:cs typeface="Cambria Math" charset="0"/>
-                        </a:rPr>
-                        <m:t>=</m:t>
-                      </m:r>
-                      <m:d>
-                        <m:dPr>
-                          <m:begChr m:val="{"/>
-                          <m:endChr m:val=""/>
-                          <m:ctrlPr>
-                            <a:rPr lang="en-US" b="0" i="1" smtClean="0">
-                              <a:latin typeface="Cambria Math" panose="02040503050406030204" pitchFamily="18" charset="0"/>
-                              <a:ea typeface="Cambria Math" charset="0"/>
-                            </a:rPr>
-                          </m:ctrlPr>
-                        </m:dPr>
-                        <m:e>
-                          <m:eqArr>
-                            <m:eqArrPr>
-                              <m:ctrlPr>
-                                <a:rPr lang="en-US" b="0" i="1" smtClean="0">
-                                  <a:latin typeface="Cambria Math" panose="02040503050406030204" pitchFamily="18" charset="0"/>
-                                  <a:ea typeface="Cambria Math" charset="0"/>
-                                </a:rPr>
-                              </m:ctrlPr>
-                            </m:eqArrPr>
-                            <m:e>
-                              <m:r>
-                                <a:rPr lang="en-US" b="0" i="1" smtClean="0">
-                                  <a:latin typeface="Cambria Math" panose="02040503050406030204" pitchFamily="18" charset="0"/>
-                                  <a:ea typeface="Cambria Math" charset="0"/>
-                                </a:rPr>
-                                <m:t>0          |</m:t>
-                              </m:r>
-                              <m:r>
-                                <a:rPr lang="en-US" b="0" i="1" smtClean="0">
-                                  <a:latin typeface="Cambria Math" panose="02040503050406030204" pitchFamily="18" charset="0"/>
-                                  <a:ea typeface="Cambria Math" charset="0"/>
-                                </a:rPr>
-                                <m:t>𝑦</m:t>
-                              </m:r>
-                              <m:r>
-                                <a:rPr lang="en-US" b="0" i="1" smtClean="0">
-                                  <a:latin typeface="Cambria Math" panose="02040503050406030204" pitchFamily="18" charset="0"/>
-                                  <a:ea typeface="Cambria Math" charset="0"/>
-                                </a:rPr>
-                                <m:t>−</m:t>
-                              </m:r>
-                              <m:r>
-                                <a:rPr lang="en-US" b="0" i="1" smtClean="0">
-                                  <a:latin typeface="Cambria Math" panose="02040503050406030204" pitchFamily="18" charset="0"/>
-                                  <a:ea typeface="Cambria Math" charset="0"/>
-                                </a:rPr>
-                                <m:t>𝑓</m:t>
-                              </m:r>
-                              <m:r>
-                                <a:rPr lang="en-US" b="0" i="1" smtClean="0">
-                                  <a:latin typeface="Cambria Math" panose="02040503050406030204" pitchFamily="18" charset="0"/>
-                                  <a:ea typeface="Cambria Math" charset="0"/>
-                                </a:rPr>
-                                <m:t>|≤</m:t>
-                              </m:r>
-                              <m:r>
-                                <a:rPr lang="en-US" b="0" i="1" smtClean="0">
-                                  <a:latin typeface="Cambria Math" panose="02040503050406030204" pitchFamily="18" charset="0"/>
-                                  <a:ea typeface="Cambria Math" panose="02040503050406030204" pitchFamily="18" charset="0"/>
-                                </a:rPr>
-                                <m:t>𝑏</m:t>
-                              </m:r>
-                            </m:e>
-                            <m:e>
-                              <m:r>
-                                <a:rPr lang="en-US" b="0" i="1" smtClean="0">
-                                  <a:latin typeface="Cambria Math" panose="02040503050406030204" pitchFamily="18" charset="0"/>
-                                  <a:ea typeface="Cambria Math" charset="0"/>
-                                </a:rPr>
-                                <m:t> 1          </m:t>
-                              </m:r>
-                              <m:d>
-                                <m:dPr>
-                                  <m:begChr m:val="|"/>
-                                  <m:endChr m:val="|"/>
-                                  <m:ctrlPr>
-                                    <a:rPr lang="en-US" b="0" i="1" smtClean="0">
-                                      <a:latin typeface="Cambria Math" panose="02040503050406030204" pitchFamily="18" charset="0"/>
-                                      <a:ea typeface="Cambria Math" charset="0"/>
-                                    </a:rPr>
-                                  </m:ctrlPr>
-                                </m:dPr>
-                                <m:e>
-                                  <m:r>
-                                    <a:rPr lang="en-US" b="0" i="1" smtClean="0">
-                                      <a:latin typeface="Cambria Math" panose="02040503050406030204" pitchFamily="18" charset="0"/>
-                                      <a:ea typeface="Cambria Math" charset="0"/>
-                                    </a:rPr>
-                                    <m:t>𝑦</m:t>
-                                  </m:r>
-                                  <m:r>
-                                    <a:rPr lang="en-US" b="0" i="1" smtClean="0">
-                                      <a:latin typeface="Cambria Math" panose="02040503050406030204" pitchFamily="18" charset="0"/>
-                                      <a:ea typeface="Cambria Math" charset="0"/>
-                                    </a:rPr>
-                                    <m:t>−</m:t>
-                                  </m:r>
-                                  <m:r>
-                                    <a:rPr lang="en-US" b="0" i="1" smtClean="0">
-                                      <a:latin typeface="Cambria Math" panose="02040503050406030204" pitchFamily="18" charset="0"/>
-                                      <a:ea typeface="Cambria Math" charset="0"/>
-                                    </a:rPr>
-                                    <m:t>𝑓</m:t>
-                                  </m:r>
-                                </m:e>
-                              </m:d>
-                              <m:r>
-                                <a:rPr lang="en-US" b="0" i="1" smtClean="0">
-                                  <a:latin typeface="Cambria Math" panose="02040503050406030204" pitchFamily="18" charset="0"/>
-                                  <a:ea typeface="Cambria Math" charset="0"/>
-                                </a:rPr>
-                                <m:t>&gt;</m:t>
-                              </m:r>
-                              <m:r>
-                                <a:rPr lang="en-US" b="0" i="1" smtClean="0">
-                                  <a:latin typeface="Cambria Math" panose="02040503050406030204" pitchFamily="18" charset="0"/>
-                                  <a:ea typeface="Cambria Math" charset="0"/>
-                                </a:rPr>
-                                <m:t>𝑏</m:t>
-                              </m:r>
-                              <m:r>
-                                <a:rPr lang="en-US" b="0" i="1" smtClean="0">
-                                  <a:latin typeface="Cambria Math" panose="02040503050406030204" pitchFamily="18" charset="0"/>
-                                  <a:ea typeface="Cambria Math" charset="0"/>
-                                </a:rPr>
-                                <m:t> </m:t>
-                              </m:r>
-                            </m:e>
-                          </m:eqArr>
-                        </m:e>
-                      </m:d>
-                    </m:oMath>
-                  </m:oMathPara>
-                </a14:m>
-                <a:endParaRPr lang="en-US" dirty="0"/>
-              </a:p>
-              <a:p>
-                <a:pPr marL="0" indent="0">
-                  <a:buNone/>
-                </a:pPr>
                 <a:endParaRPr lang="en-US" dirty="0"/>
               </a:p>
             </p:txBody>
           </p:sp>
         </mc:Choice>
-        <mc:Fallback xmlns="">
+        <mc:Fallback>
           <p:sp>
             <p:nvSpPr>
               <p:cNvPr id="4" name="Content Placeholder 3">
@@ -11077,7 +10596,7 @@
               <a:blipFill>
                 <a:blip r:embed="rId2"/>
                 <a:stretch>
-                  <a:fillRect l="-1309" t="-1050" b="-65879"/>
+                  <a:fillRect l="-1309" t="-1050"/>
                 </a:stretch>
               </a:blipFill>
             </p:spPr>
@@ -11170,7 +10689,7 @@
                                         <p:tgtEl>
                                           <p:spTgt spid="4">
                                             <p:txEl>
-                                              <p:pRg st="2" end="2"/>
+                                              <p:pRg st="5" end="5"/>
                                             </p:txEl>
                                           </p:spTgt>
                                         </p:tgtEl>
@@ -11201,56 +10720,7 @@
                                         <p:tgtEl>
                                           <p:spTgt spid="4">
                                             <p:txEl>
-                                              <p:pRg st="3" end="3"/>
-                                            </p:txEl>
-                                          </p:spTgt>
-                                        </p:tgtEl>
-                                        <p:attrNameLst>
-                                          <p:attrName>style.visibility</p:attrName>
-                                        </p:attrNameLst>
-                                      </p:cBhvr>
-                                      <p:to>
-                                        <p:strVal val="visible"/>
-                                      </p:to>
-                                    </p:set>
-                                  </p:childTnLst>
-                                </p:cTn>
-                              </p:par>
-                            </p:childTnLst>
-                          </p:cTn>
-                        </p:par>
-                      </p:childTnLst>
-                    </p:cTn>
-                  </p:par>
-                  <p:par>
-                    <p:cTn id="9" fill="hold">
-                      <p:stCondLst>
-                        <p:cond delay="indefinite"/>
-                      </p:stCondLst>
-                      <p:childTnLst>
-                        <p:par>
-                          <p:cTn id="10" fill="hold">
-                            <p:stCondLst>
-                              <p:cond delay="0"/>
-                            </p:stCondLst>
-                            <p:childTnLst>
-                              <p:par>
-                                <p:cTn id="11" presetID="1" presetClass="entr" presetSubtype="0" fill="hold" nodeType="clickEffect">
-                                  <p:stCondLst>
-                                    <p:cond delay="0"/>
-                                  </p:stCondLst>
-                                  <p:childTnLst>
-                                    <p:set>
-                                      <p:cBhvr>
-                                        <p:cTn id="12" dur="1" fill="hold">
-                                          <p:stCondLst>
-                                            <p:cond delay="0"/>
-                                          </p:stCondLst>
-                                        </p:cTn>
-                                        <p:tgtEl>
-                                          <p:spTgt spid="4">
-                                            <p:txEl>
-                                              <p:pRg st="4" end="4"/>
+                                              <p:pRg st="7" end="7"/>
                                             </p:txEl>
                                           </p:spTgt>
                                         </p:tgtEl>
@@ -11266,143 +10736,14 @@
                                 </p:cTn>
                               </p:par>
                               <p:par>
-                                <p:cTn id="13" presetID="1" presetClass="entr" presetSubtype="0" fill="hold" nodeType="withEffect">
+                                <p:cTn id="9" presetID="1" presetClass="entr" presetSubtype="0" fill="hold" nodeType="withEffect">
                                   <p:stCondLst>
                                     <p:cond delay="0"/>
                                   </p:stCondLst>
                                   <p:childTnLst>
                                     <p:set>
                                       <p:cBhvr>
-                                        <p:cTn id="14" dur="1" fill="hold">
-                                          <p:stCondLst>
-                                            <p:cond delay="0"/>
-                                          </p:stCondLst>
-                                        </p:cTn>
-                                        <p:tgtEl>
-                                          <p:spTgt spid="4">
-                                            <p:txEl>
-                                              <p:pRg st="5" end="5"/>
-                                            </p:txEl>
-                                          </p:spTgt>
-                                        </p:tgtEl>
-                                        <p:attrNameLst>
-                                          <p:attrName>style.visibility</p:attrName>
-                                        </p:attrNameLst>
-                                      </p:cBhvr>
-                                      <p:to>
-                                        <p:strVal val="visible"/>
-                                      </p:to>
-                                    </p:set>
-                                  </p:childTnLst>
-                                </p:cTn>
-                              </p:par>
-                            </p:childTnLst>
-                          </p:cTn>
-                        </p:par>
-                      </p:childTnLst>
-                    </p:cTn>
-                  </p:par>
-                  <p:par>
-                    <p:cTn id="15" fill="hold">
-                      <p:stCondLst>
-                        <p:cond delay="indefinite"/>
-                      </p:stCondLst>
-                      <p:childTnLst>
-                        <p:par>
-                          <p:cTn id="16" fill="hold">
-                            <p:stCondLst>
-                              <p:cond delay="0"/>
-                            </p:stCondLst>
-                            <p:childTnLst>
-                              <p:par>
-                                <p:cTn id="17" presetID="1" presetClass="entr" presetSubtype="0" fill="hold" nodeType="clickEffect">
-                                  <p:stCondLst>
-                                    <p:cond delay="0"/>
-                                  </p:stCondLst>
-                                  <p:childTnLst>
-                                    <p:set>
-                                      <p:cBhvr>
-                                        <p:cTn id="18" dur="1" fill="hold">
-                                          <p:stCondLst>
-                                            <p:cond delay="0"/>
-                                          </p:stCondLst>
-                                        </p:cTn>
-                                        <p:tgtEl>
-                                          <p:spTgt spid="4">
-                                            <p:txEl>
-                                              <p:pRg st="6" end="6"/>
-                                            </p:txEl>
-                                          </p:spTgt>
-                                        </p:tgtEl>
-                                        <p:attrNameLst>
-                                          <p:attrName>style.visibility</p:attrName>
-                                        </p:attrNameLst>
-                                      </p:cBhvr>
-                                      <p:to>
-                                        <p:strVal val="visible"/>
-                                      </p:to>
-                                    </p:set>
-                                  </p:childTnLst>
-                                </p:cTn>
-                              </p:par>
-                              <p:par>
-                                <p:cTn id="19" presetID="1" presetClass="entr" presetSubtype="0" fill="hold" nodeType="withEffect">
-                                  <p:stCondLst>
-                                    <p:cond delay="0"/>
-                                  </p:stCondLst>
-                                  <p:childTnLst>
-                                    <p:set>
-                                      <p:cBhvr>
-                                        <p:cTn id="20" dur="1" fill="hold">
-                                          <p:stCondLst>
-                                            <p:cond delay="0"/>
-                                          </p:stCondLst>
-                                        </p:cTn>
-                                        <p:tgtEl>
-                                          <p:spTgt spid="4">
-                                            <p:txEl>
-                                              <p:pRg st="7" end="7"/>
-                                            </p:txEl>
-                                          </p:spTgt>
-                                        </p:tgtEl>
-                                        <p:attrNameLst>
-                                          <p:attrName>style.visibility</p:attrName>
-                                        </p:attrNameLst>
-                                      </p:cBhvr>
-                                      <p:to>
-                                        <p:strVal val="visible"/>
-                                      </p:to>
-                                    </p:set>
-                                  </p:childTnLst>
-                                </p:cTn>
-                              </p:par>
-                            </p:childTnLst>
-                          </p:cTn>
-                        </p:par>
-                      </p:childTnLst>
-                    </p:cTn>
-                  </p:par>
-                  <p:par>
-                    <p:cTn id="21" fill="hold">
-                      <p:stCondLst>
-                        <p:cond delay="indefinite"/>
-                      </p:stCondLst>
-                      <p:childTnLst>
-                        <p:par>
-                          <p:cTn id="22" fill="hold">
-                            <p:stCondLst>
-                              <p:cond delay="0"/>
-                            </p:stCondLst>
-                            <p:childTnLst>
-                              <p:par>
-                                <p:cTn id="23" presetID="1" presetClass="entr" presetSubtype="0" fill="hold" nodeType="clickEffect">
-                                  <p:stCondLst>
-                                    <p:cond delay="0"/>
-                                  </p:stCondLst>
-                                  <p:childTnLst>
-                                    <p:set>
-                                      <p:cBhvr>
-                                        <p:cTn id="24" dur="1" fill="hold">
+                                        <p:cTn id="10" dur="1" fill="hold">
                                           <p:stCondLst>
                                             <p:cond delay="0"/>
                                           </p:stCondLst>
@@ -11411,37 +10752,6 @@
                                           <p:spTgt spid="4">
                                             <p:txEl>
                                               <p:pRg st="8" end="8"/>
-                                            </p:txEl>
-                                          </p:spTgt>
-                                        </p:tgtEl>
-                                        <p:attrNameLst>
-                                          <p:attrName>style.visibility</p:attrName>
-                                        </p:attrNameLst>
-                                      </p:cBhvr>
-                                      <p:to>
-                                        <p:strVal val="visible"/>
-                                      </p:to>
-                                    </p:set>
-                                  </p:childTnLst>
-                                </p:cTn>
-                              </p:par>
-                              <p:par>
-                                <p:cTn id="25" presetID="1" presetClass="entr" presetSubtype="0" fill="hold" nodeType="withEffect">
-                                  <p:stCondLst>
-                                    <p:cond delay="0"/>
-                                  </p:stCondLst>
-                                  <p:childTnLst>
-                                    <p:set>
-                                      <p:cBhvr>
-                                        <p:cTn id="26" dur="1" fill="hold">
-                                          <p:stCondLst>
-                                            <p:cond delay="0"/>
-                                          </p:stCondLst>
-                                        </p:cTn>
-                                        <p:tgtEl>
-                                          <p:spTgt spid="4">
-                                            <p:txEl>
-                                              <p:pRg st="9" end="9"/>
                                             </p:txEl>
                                           </p:spTgt>
                                         </p:tgtEl>
@@ -11504,8 +10814,8 @@
           <a:chExt cx="0" cy="0"/>
         </a:xfrm>
       </p:grpSpPr>
-      <mc:AlternateContent xmlns:mc="http://schemas.openxmlformats.org/markup-compatibility/2006" xmlns:a14="http://schemas.microsoft.com/office/drawing/2010/main">
-        <mc:Choice Requires="a14">
+      <mc:AlternateContent xmlns:mc="http://schemas.openxmlformats.org/markup-compatibility/2006">
+        <mc:Choice xmlns:a14="http://schemas.microsoft.com/office/drawing/2010/main" Requires="a14">
           <p:sp>
             <p:nvSpPr>
               <p:cNvPr id="4" name="Content Placeholder 3">
@@ -11710,19 +11020,100 @@
                 <a14:m>
                   <m:oMathPara xmlns:m="http://schemas.openxmlformats.org/officeDocument/2006/math">
                     <m:oMath>
-                      <m:nary>
-                        <m:naryPr>
-                          <m:limLoc m:val="undOvr"/>
-                          <m:subHide m:val="on"/>
-                          <m:supHide m:val="on"/>
+                      <m:sSub>
+                        <m:sSubPr>
+                          <m:ctrlPr>
+                            <a:rPr lang="en-US" i="1">
+                              <a:latin typeface="Cambria Math" panose="02040503050406030204" pitchFamily="18" charset="0"/>
+                              <a:ea typeface="Cambria Math" panose="02040503050406030204" pitchFamily="18" charset="0"/>
+                            </a:rPr>
+                          </m:ctrlPr>
+                        </m:sSubPr>
+                        <m:e>
+                          <m:r>
+                            <a:rPr lang="en-US" i="1">
+                              <a:latin typeface="Cambria Math" panose="02040503050406030204" pitchFamily="18" charset="0"/>
+                              <a:ea typeface="Cambria Math" panose="02040503050406030204" pitchFamily="18" charset="0"/>
+                            </a:rPr>
+                            <m:t>    </m:t>
+                          </m:r>
+                          <m:r>
+                            <a:rPr lang="en-US" i="1">
+                              <a:latin typeface="Cambria Math" panose="02040503050406030204" pitchFamily="18" charset="0"/>
+                              <a:ea typeface="Cambria Math" panose="02040503050406030204" pitchFamily="18" charset="0"/>
+                            </a:rPr>
+                            <m:t>𝔼</m:t>
+                          </m:r>
+                        </m:e>
+                        <m:sub>
+                          <m:r>
+                            <a:rPr lang="en-US" i="1" smtClean="0">
+                              <a:latin typeface="Cambria Math" panose="02040503050406030204" pitchFamily="18" charset="0"/>
+                              <a:ea typeface="Cambria Math" panose="02040503050406030204" pitchFamily="18" charset="0"/>
+                            </a:rPr>
+                            <m:t>𝑦</m:t>
+                          </m:r>
+                          <m:r>
+                            <a:rPr lang="en-US" i="1" smtClean="0">
+                              <a:latin typeface="Cambria Math" panose="02040503050406030204" pitchFamily="18" charset="0"/>
+                              <a:ea typeface="Cambria Math" panose="02040503050406030204" pitchFamily="18" charset="0"/>
+                            </a:rPr>
+                            <m:t>∼</m:t>
+                          </m:r>
+                          <m:r>
+                            <a:rPr lang="en-US" i="1" smtClean="0">
+                              <a:latin typeface="Cambria Math" panose="02040503050406030204" pitchFamily="18" charset="0"/>
+                              <a:ea typeface="Cambria Math" panose="02040503050406030204" pitchFamily="18" charset="0"/>
+                            </a:rPr>
+                            <m:t>𝑝</m:t>
+                          </m:r>
+                          <m:d>
+                            <m:dPr>
+                              <m:ctrlPr>
+                                <a:rPr lang="en-US" i="1">
+                                  <a:latin typeface="Cambria Math" panose="02040503050406030204" pitchFamily="18" charset="0"/>
+                                  <a:ea typeface="Cambria Math" panose="02040503050406030204" pitchFamily="18" charset="0"/>
+                                </a:rPr>
+                              </m:ctrlPr>
+                            </m:dPr>
+                            <m:e>
+                              <m:r>
+                                <a:rPr lang="en-US" i="1">
+                                  <a:latin typeface="Cambria Math" panose="02040503050406030204" pitchFamily="18" charset="0"/>
+                                  <a:ea typeface="Cambria Math" panose="02040503050406030204" pitchFamily="18" charset="0"/>
+                                </a:rPr>
+                                <m:t>𝑦</m:t>
+                              </m:r>
+                            </m:e>
+                            <m:e>
+                              <m:r>
+                                <a:rPr lang="en-US" i="1">
+                                  <a:latin typeface="Cambria Math" panose="02040503050406030204" pitchFamily="18" charset="0"/>
+                                  <a:ea typeface="Cambria Math" panose="02040503050406030204" pitchFamily="18" charset="0"/>
+                                </a:rPr>
+                                <m:t>𝑥</m:t>
+                              </m:r>
+                            </m:e>
+                          </m:d>
+                        </m:sub>
+                      </m:sSub>
+                      <m:r>
+                        <a:rPr lang="en-US" i="1">
+                          <a:latin typeface="Cambria Math" panose="02040503050406030204" pitchFamily="18" charset="0"/>
+                          <a:ea typeface="Cambria Math" panose="02040503050406030204" pitchFamily="18" charset="0"/>
+                        </a:rPr>
+                        <m:t> </m:t>
+                      </m:r>
+                      <m:d>
+                        <m:dPr>
+                          <m:begChr m:val="["/>
+                          <m:endChr m:val="]"/>
                           <m:ctrlPr>
                             <a:rPr lang="en-US" i="1">
                               <a:latin typeface="Cambria Math" panose="02040503050406030204" pitchFamily="18" charset="0"/>
                             </a:rPr>
                           </m:ctrlPr>
-                        </m:naryPr>
-                        <m:sub/>
-                        <m:sup/>
+                        </m:dPr>
                         <m:e>
                           <m:f>
                             <m:fPr>
@@ -11761,78 +11152,22 @@
                               </m:r>
                             </m:den>
                           </m:f>
-                          <m:r>
-                            <a:rPr lang="en-US" i="1">
-                              <a:latin typeface="Cambria Math" panose="02040503050406030204" pitchFamily="18" charset="0"/>
-                            </a:rPr>
-                            <m:t> </m:t>
-                          </m:r>
-                          <m:r>
-                            <a:rPr lang="en-US" i="1" smtClean="0">
-                              <a:solidFill>
-                                <a:schemeClr val="tx1"/>
-                              </a:solidFill>
-                              <a:latin typeface="Cambria Math" panose="02040503050406030204" pitchFamily="18" charset="0"/>
-                            </a:rPr>
-                            <m:t>𝑝</m:t>
-                          </m:r>
-                          <m:d>
-                            <m:dPr>
-                              <m:ctrlPr>
-                                <a:rPr lang="en-US" i="1">
-                                  <a:solidFill>
-                                    <a:schemeClr val="tx1"/>
-                                  </a:solidFill>
-                                  <a:latin typeface="Cambria Math" panose="02040503050406030204" pitchFamily="18" charset="0"/>
-                                </a:rPr>
-                              </m:ctrlPr>
-                            </m:dPr>
-                            <m:e>
-                              <m:r>
-                                <a:rPr lang="en-US" i="1">
-                                  <a:solidFill>
-                                    <a:schemeClr val="tx1"/>
-                                  </a:solidFill>
-                                  <a:latin typeface="Cambria Math" panose="02040503050406030204" pitchFamily="18" charset="0"/>
-                                </a:rPr>
-                                <m:t>𝑦</m:t>
-                              </m:r>
-                            </m:e>
-                            <m:e>
-                              <m:r>
-                                <a:rPr lang="en-US" i="1">
-                                  <a:solidFill>
-                                    <a:schemeClr val="tx1"/>
-                                  </a:solidFill>
-                                  <a:latin typeface="Cambria Math" panose="02040503050406030204" pitchFamily="18" charset="0"/>
-                                </a:rPr>
-                                <m:t>𝑥</m:t>
-                              </m:r>
-                            </m:e>
-                          </m:d>
-                          <m:r>
-                            <a:rPr lang="en-US" i="1">
-                              <a:solidFill>
-                                <a:srgbClr val="C00000"/>
-                              </a:solidFill>
-                              <a:latin typeface="Cambria Math" panose="02040503050406030204" pitchFamily="18" charset="0"/>
-                            </a:rPr>
-                            <m:t> </m:t>
-                          </m:r>
-                          <m:r>
-                            <a:rPr lang="en-US" i="1">
-                              <a:latin typeface="Cambria Math" panose="02040503050406030204" pitchFamily="18" charset="0"/>
-                            </a:rPr>
-                            <m:t>𝑑𝑦</m:t>
-                          </m:r>
-                          <m:r>
-                            <a:rPr lang="en-US" i="1">
-                              <a:latin typeface="Cambria Math" panose="02040503050406030204" pitchFamily="18" charset="0"/>
-                            </a:rPr>
-                            <m:t>=0</m:t>
-                          </m:r>
                         </m:e>
-                      </m:nary>
+                      </m:d>
+                      <m:r>
+                        <a:rPr lang="en-US" i="1">
+                          <a:latin typeface="Cambria Math" panose="02040503050406030204" pitchFamily="18" charset="0"/>
+                          <a:ea typeface="Cambria Math" panose="02040503050406030204" pitchFamily="18" charset="0"/>
+                        </a:rPr>
+                        <m:t>=</m:t>
+                      </m:r>
+                      <m:r>
+                        <a:rPr lang="en-US" b="0" i="1" smtClean="0">
+                          <a:latin typeface="Cambria Math" panose="02040503050406030204" pitchFamily="18" charset="0"/>
+                          <a:ea typeface="Cambria Math" panose="02040503050406030204" pitchFamily="18" charset="0"/>
+                        </a:rPr>
+                        <m:t>0</m:t>
+                      </m:r>
                     </m:oMath>
                   </m:oMathPara>
                 </a14:m>
@@ -12034,7 +11369,7 @@
             </p:txBody>
           </p:sp>
         </mc:Choice>
-        <mc:Fallback xmlns="">
+        <mc:Fallback>
           <p:sp>
             <p:nvSpPr>
               <p:cNvPr id="4" name="Content Placeholder 3">
@@ -12055,7 +11390,7 @@
               <a:blipFill>
                 <a:blip r:embed="rId2"/>
                 <a:stretch>
-                  <a:fillRect l="-1309" t="-15789"/>
+                  <a:fillRect l="-1309" t="-1316"/>
                 </a:stretch>
               </a:blipFill>
             </p:spPr>
@@ -12097,13 +11432,13 @@
           <a:p>
             <a:r>
               <a:rPr lang="en-US" dirty="0"/>
-              <a:t>Common Loss Functions (2)</a:t>
+              <a:t>Quadratic Loss</a:t>
             </a:r>
           </a:p>
         </p:txBody>
       </p:sp>
-      <mc:AlternateContent xmlns:mc="http://schemas.openxmlformats.org/markup-compatibility/2006" xmlns:a14="http://schemas.microsoft.com/office/drawing/2010/main">
-        <mc:Choice Requires="a14">
+      <mc:AlternateContent xmlns:mc="http://schemas.openxmlformats.org/markup-compatibility/2006">
+        <mc:Choice xmlns:a14="http://schemas.microsoft.com/office/drawing/2010/main" Requires="a14">
           <p:sp>
             <p:nvSpPr>
               <p:cNvPr id="5" name="Text Box 6">
@@ -12121,7 +11456,7 @@
             <p:spPr bwMode="auto">
               <a:xfrm>
                 <a:off x="2590800" y="3276600"/>
-                <a:ext cx="3713774" cy="1060931"/>
+                <a:ext cx="3852465" cy="542008"/>
               </a:xfrm>
               <a:prstGeom prst="rect">
                 <a:avLst/>
@@ -12216,19 +11551,100 @@
                         </a:rPr>
                         <m:t>=</m:t>
                       </m:r>
-                      <m:nary>
-                        <m:naryPr>
-                          <m:limLoc m:val="undOvr"/>
-                          <m:subHide m:val="on"/>
-                          <m:supHide m:val="on"/>
+                      <m:sSub>
+                        <m:sSubPr>
                           <m:ctrlPr>
                             <a:rPr lang="en-US" i="1">
                               <a:latin typeface="Cambria Math" panose="02040503050406030204" pitchFamily="18" charset="0"/>
+                              <a:ea typeface="Cambria Math" panose="02040503050406030204" pitchFamily="18" charset="0"/>
                             </a:rPr>
                           </m:ctrlPr>
-                        </m:naryPr>
-                        <m:sub/>
-                        <m:sup/>
+                        </m:sSubPr>
+                        <m:e>
+                          <m:r>
+                            <a:rPr lang="en-US" i="1">
+                              <a:latin typeface="Cambria Math" panose="02040503050406030204" pitchFamily="18" charset="0"/>
+                              <a:ea typeface="Cambria Math" panose="02040503050406030204" pitchFamily="18" charset="0"/>
+                            </a:rPr>
+                            <m:t>    </m:t>
+                          </m:r>
+                          <m:r>
+                            <a:rPr lang="en-US" i="1">
+                              <a:latin typeface="Cambria Math" panose="02040503050406030204" pitchFamily="18" charset="0"/>
+                              <a:ea typeface="Cambria Math" panose="02040503050406030204" pitchFamily="18" charset="0"/>
+                            </a:rPr>
+                            <m:t>𝔼</m:t>
+                          </m:r>
+                        </m:e>
+                        <m:sub>
+                          <m:r>
+                            <a:rPr lang="en-US" i="1">
+                              <a:latin typeface="Cambria Math" panose="02040503050406030204" pitchFamily="18" charset="0"/>
+                              <a:ea typeface="Cambria Math" panose="02040503050406030204" pitchFamily="18" charset="0"/>
+                            </a:rPr>
+                            <m:t>𝑦</m:t>
+                          </m:r>
+                          <m:r>
+                            <a:rPr lang="en-US" i="1">
+                              <a:latin typeface="Cambria Math" panose="02040503050406030204" pitchFamily="18" charset="0"/>
+                              <a:ea typeface="Cambria Math" panose="02040503050406030204" pitchFamily="18" charset="0"/>
+                            </a:rPr>
+                            <m:t>∼</m:t>
+                          </m:r>
+                          <m:r>
+                            <a:rPr lang="en-US" i="1">
+                              <a:latin typeface="Cambria Math" panose="02040503050406030204" pitchFamily="18" charset="0"/>
+                              <a:ea typeface="Cambria Math" panose="02040503050406030204" pitchFamily="18" charset="0"/>
+                            </a:rPr>
+                            <m:t>𝑝</m:t>
+                          </m:r>
+                          <m:d>
+                            <m:dPr>
+                              <m:ctrlPr>
+                                <a:rPr lang="en-US" i="1">
+                                  <a:latin typeface="Cambria Math" panose="02040503050406030204" pitchFamily="18" charset="0"/>
+                                  <a:ea typeface="Cambria Math" panose="02040503050406030204" pitchFamily="18" charset="0"/>
+                                </a:rPr>
+                              </m:ctrlPr>
+                            </m:dPr>
+                            <m:e>
+                              <m:r>
+                                <a:rPr lang="en-US" i="1">
+                                  <a:latin typeface="Cambria Math" panose="02040503050406030204" pitchFamily="18" charset="0"/>
+                                  <a:ea typeface="Cambria Math" panose="02040503050406030204" pitchFamily="18" charset="0"/>
+                                </a:rPr>
+                                <m:t>𝑦</m:t>
+                              </m:r>
+                            </m:e>
+                            <m:e>
+                              <m:r>
+                                <a:rPr lang="en-US" i="1">
+                                  <a:latin typeface="Cambria Math" panose="02040503050406030204" pitchFamily="18" charset="0"/>
+                                  <a:ea typeface="Cambria Math" panose="02040503050406030204" pitchFamily="18" charset="0"/>
+                                </a:rPr>
+                                <m:t>𝑥</m:t>
+                              </m:r>
+                            </m:e>
+                          </m:d>
+                        </m:sub>
+                      </m:sSub>
+                      <m:r>
+                        <a:rPr lang="en-US" i="1">
+                          <a:latin typeface="Cambria Math" panose="02040503050406030204" pitchFamily="18" charset="0"/>
+                          <a:ea typeface="Cambria Math" panose="02040503050406030204" pitchFamily="18" charset="0"/>
+                        </a:rPr>
+                        <m:t> </m:t>
+                      </m:r>
+                      <m:d>
+                        <m:dPr>
+                          <m:begChr m:val="["/>
+                          <m:endChr m:val="]"/>
+                          <m:ctrlPr>
+                            <a:rPr lang="en-US" b="0" i="1" smtClean="0">
+                              <a:latin typeface="Cambria Math" panose="02040503050406030204" pitchFamily="18" charset="0"/>
+                            </a:rPr>
+                          </m:ctrlPr>
+                        </m:dPr>
                         <m:e>
                           <m:r>
                             <a:rPr lang="en-US" b="0" i="1" smtClean="0">
@@ -12236,68 +11652,8 @@
                             </a:rPr>
                             <m:t>𝑦</m:t>
                           </m:r>
-                          <m:r>
-                            <a:rPr lang="en-US" b="0" i="1" smtClean="0">
-                              <a:latin typeface="Cambria Math" panose="02040503050406030204" pitchFamily="18" charset="0"/>
-                            </a:rPr>
-                            <m:t> </m:t>
-                          </m:r>
-                          <m:r>
-                            <a:rPr lang="en-US" i="1">
-                              <a:latin typeface="Cambria Math" panose="02040503050406030204" pitchFamily="18" charset="0"/>
-                            </a:rPr>
-                            <m:t>𝑝</m:t>
-                          </m:r>
-                          <m:d>
-                            <m:dPr>
-                              <m:endChr m:val="|"/>
-                              <m:ctrlPr>
-                                <a:rPr lang="en-US" b="0" i="1" smtClean="0">
-                                  <a:latin typeface="Cambria Math" panose="02040503050406030204" pitchFamily="18" charset="0"/>
-                                </a:rPr>
-                              </m:ctrlPr>
-                            </m:dPr>
-                            <m:e>
-                              <m:r>
-                                <a:rPr lang="en-US" b="0" i="1" smtClean="0">
-                                  <a:latin typeface="Cambria Math" panose="02040503050406030204" pitchFamily="18" charset="0"/>
-                                </a:rPr>
-                                <m:t>𝑦</m:t>
-                              </m:r>
-                              <m:r>
-                                <a:rPr lang="en-US" i="1">
-                                  <a:latin typeface="Cambria Math" panose="02040503050406030204" pitchFamily="18" charset="0"/>
-                                </a:rPr>
-                                <m:t> </m:t>
-                              </m:r>
-                            </m:e>
-                          </m:d>
-                          <m:r>
-                            <a:rPr lang="en-US" i="1">
-                              <a:latin typeface="Cambria Math" panose="02040503050406030204" pitchFamily="18" charset="0"/>
-                            </a:rPr>
-                            <m:t> </m:t>
-                          </m:r>
-                          <m:r>
-                            <a:rPr lang="en-US" i="1">
-                              <a:latin typeface="Cambria Math" panose="02040503050406030204" pitchFamily="18" charset="0"/>
-                            </a:rPr>
-                            <m:t>𝑥</m:t>
-                          </m:r>
-                          <m:r>
-                            <a:rPr lang="en-US" i="1">
-                              <a:latin typeface="Cambria Math" panose="02040503050406030204" pitchFamily="18" charset="0"/>
-                            </a:rPr>
-                            <m:t>) </m:t>
-                          </m:r>
-                          <m:r>
-                            <a:rPr lang="en-US" i="1">
-                              <a:latin typeface="Cambria Math" panose="02040503050406030204" pitchFamily="18" charset="0"/>
-                            </a:rPr>
-                            <m:t>𝑑𝑦</m:t>
-                          </m:r>
                         </m:e>
-                      </m:nary>
+                      </m:d>
                     </m:oMath>
                   </m:oMathPara>
                 </a14:m>
@@ -12315,7 +11671,7 @@
             </p:txBody>
           </p:sp>
         </mc:Choice>
-        <mc:Fallback xmlns="">
+        <mc:Fallback>
           <p:sp>
             <p:nvSpPr>
               <p:cNvPr id="5" name="Text Box 6">
@@ -12333,7 +11689,7 @@
             <p:spPr bwMode="auto">
               <a:xfrm>
                 <a:off x="2590800" y="3276600"/>
-                <a:ext cx="3713774" cy="1060931"/>
+                <a:ext cx="3852465" cy="542008"/>
               </a:xfrm>
               <a:prstGeom prst="rect">
                 <a:avLst/>
@@ -12341,7 +11697,7 @@
               <a:blipFill>
                 <a:blip r:embed="rId3"/>
                 <a:stretch>
-                  <a:fillRect l="-676" t="-131818" b="-182955"/>
+                  <a:fillRect l="-651" b="-6522"/>
                 </a:stretch>
               </a:blipFill>
               <a:ln w="38100">
@@ -12391,6 +11747,9 @@
                     <p:cTn id="3" fill="hold">
                       <p:stCondLst>
                         <p:cond delay="indefinite"/>
+                        <p:cond evt="onBegin" delay="0">
+                          <p:tn val="2"/>
+                        </p:cond>
                       </p:stCondLst>
                       <p:childTnLst>
                         <p:par>
@@ -12400,7 +11759,7 @@
                             </p:stCondLst>
                             <p:childTnLst>
                               <p:par>
-                                <p:cTn id="5" presetID="10" presetClass="entr" presetSubtype="0" fill="hold" nodeType="clickEffect">
+                                <p:cTn id="5" presetID="10" presetClass="entr" presetSubtype="0" fill="hold" grpId="0" nodeType="withEffect">
                                   <p:stCondLst>
                                     <p:cond delay="0"/>
                                   </p:stCondLst>
@@ -12408,49 +11767,6 @@
                                     <p:set>
                                       <p:cBhvr>
                                         <p:cTn id="6" dur="1" fill="hold">
-                                          <p:stCondLst>
-                                            <p:cond delay="0"/>
-                                          </p:stCondLst>
-                                        </p:cTn>
-                                        <p:tgtEl>
-                                          <p:spTgt spid="4">
-                                            <p:txEl>
-                                              <p:pRg st="2" end="2"/>
-                                            </p:txEl>
-                                          </p:spTgt>
-                                        </p:tgtEl>
-                                        <p:attrNameLst>
-                                          <p:attrName>style.visibility</p:attrName>
-                                        </p:attrNameLst>
-                                      </p:cBhvr>
-                                      <p:to>
-                                        <p:strVal val="visible"/>
-                                      </p:to>
-                                    </p:set>
-                                    <p:animEffect transition="in" filter="fade">
-                                      <p:cBhvr>
-                                        <p:cTn id="7" dur="500"/>
-                                        <p:tgtEl>
-                                          <p:spTgt spid="4">
-                                            <p:txEl>
-                                              <p:pRg st="2" end="2"/>
-                                            </p:txEl>
-                                          </p:spTgt>
-                                        </p:tgtEl>
-                                      </p:cBhvr>
-                                    </p:animEffect>
-                                  </p:childTnLst>
-                                </p:cTn>
-                              </p:par>
-                              <p:par>
-                                <p:cTn id="8" presetID="10" presetClass="entr" presetSubtype="0" fill="hold" grpId="0" nodeType="withEffect">
-                                  <p:stCondLst>
-                                    <p:cond delay="0"/>
-                                  </p:stCondLst>
-                                  <p:childTnLst>
-                                    <p:set>
-                                      <p:cBhvr>
-                                        <p:cTn id="9" dur="1" fill="hold">
                                           <p:stCondLst>
                                             <p:cond delay="0"/>
                                           </p:stCondLst>
@@ -12468,7 +11784,7 @@
                                     </p:set>
                                     <p:animEffect transition="in" filter="fade">
                                       <p:cBhvr>
-                                        <p:cTn id="10" dur="500"/>
+                                        <p:cTn id="7" dur="500"/>
                                         <p:tgtEl>
                                           <p:spTgt spid="5"/>
                                         </p:tgtEl>
@@ -12484,26 +11800,26 @@
                     </p:cTn>
                   </p:par>
                   <p:par>
-                    <p:cTn id="11" fill="hold">
+                    <p:cTn id="8" fill="hold">
                       <p:stCondLst>
                         <p:cond delay="indefinite"/>
                       </p:stCondLst>
                       <p:childTnLst>
                         <p:par>
-                          <p:cTn id="12" fill="hold">
+                          <p:cTn id="9" fill="hold">
                             <p:stCondLst>
                               <p:cond delay="0"/>
                             </p:stCondLst>
                             <p:childTnLst>
                               <p:par>
-                                <p:cTn id="13" presetID="10" presetClass="entr" presetSubtype="0" fill="hold" nodeType="clickEffect">
+                                <p:cTn id="10" presetID="1" presetClass="entr" presetSubtype="0" fill="hold" nodeType="clickEffect">
                                   <p:stCondLst>
                                     <p:cond delay="0"/>
                                   </p:stCondLst>
                                   <p:childTnLst>
                                     <p:set>
                                       <p:cBhvr>
-                                        <p:cTn id="14" dur="1" fill="hold">
+                                        <p:cTn id="11" dur="1" fill="hold">
                                           <p:stCondLst>
                                             <p:cond delay="0"/>
                                           </p:stCondLst>
@@ -12523,18 +11839,6 @@
                                         <p:strVal val="visible"/>
                                       </p:to>
                                     </p:set>
-                                    <p:animEffect transition="in" filter="fade">
-                                      <p:cBhvr>
-                                        <p:cTn id="15" dur="500"/>
-                                        <p:tgtEl>
-                                          <p:spTgt spid="4">
-                                            <p:txEl>
-                                              <p:pRg st="5" end="5"/>
-                                            </p:txEl>
-                                          </p:spTgt>
-                                        </p:tgtEl>
-                                      </p:cBhvr>
-                                    </p:animEffect>
                                   </p:childTnLst>
                                 </p:cTn>
                               </p:par>
@@ -12617,8 +11921,8 @@
           </a:p>
         </p:txBody>
       </p:sp>
-      <mc:AlternateContent xmlns:mc="http://schemas.openxmlformats.org/markup-compatibility/2006">
-        <mc:Choice xmlns:a14="http://schemas.microsoft.com/office/drawing/2010/main" Requires="a14">
+      <mc:AlternateContent xmlns:mc="http://schemas.openxmlformats.org/markup-compatibility/2006" xmlns:a14="http://schemas.microsoft.com/office/drawing/2010/main">
+        <mc:Choice Requires="a14">
           <p:sp>
             <p:nvSpPr>
               <p:cNvPr id="8" name="Content Placeholder 7">
@@ -12984,7 +12288,7 @@
             </p:txBody>
           </p:sp>
         </mc:Choice>
-        <mc:Fallback>
+        <mc:Fallback xmlns="">
           <p:sp>
             <p:nvSpPr>
               <p:cNvPr id="8" name="Content Placeholder 7">
@@ -13267,8 +12571,8 @@
             <a:effectLst/>
           </p:spPr>
         </p:cxnSp>
-        <mc:AlternateContent xmlns:mc="http://schemas.openxmlformats.org/markup-compatibility/2006">
-          <mc:Choice xmlns:a14="http://schemas.microsoft.com/office/drawing/2010/main" Requires="a14">
+        <mc:AlternateContent xmlns:mc="http://schemas.openxmlformats.org/markup-compatibility/2006" xmlns:a14="http://schemas.microsoft.com/office/drawing/2010/main">
+          <mc:Choice Requires="a14">
             <p:sp>
               <p:nvSpPr>
                 <p:cNvPr id="23" name="Rectangle 22">
@@ -13402,7 +12706,7 @@
               </p:txBody>
             </p:sp>
           </mc:Choice>
-          <mc:Fallback>
+          <mc:Fallback xmlns="">
             <p:sp>
               <p:nvSpPr>
                 <p:cNvPr id="23" name="Rectangle 22">
@@ -13427,206 +12731,6 @@
                 </a:prstGeom>
                 <a:blipFill>
                   <a:blip r:embed="rId4"/>
-                  <a:stretch>
-                    <a:fillRect/>
-                  </a:stretch>
-                </a:blipFill>
-                <a:ln w="12700" cap="flat" cmpd="sng" algn="ctr">
-                  <a:solidFill>
-                    <a:schemeClr val="tx1"/>
-                  </a:solidFill>
-                  <a:prstDash val="solid"/>
-                  <a:round/>
-                  <a:headEnd type="none" w="med" len="med"/>
-                  <a:tailEnd type="none" w="med" len="med"/>
-                </a:ln>
-                <a:effectLst>
-                  <a:outerShdw blurRad="50800" dist="38100" dir="2700000" algn="tl" rotWithShape="0">
-                    <a:prstClr val="black">
-                      <a:alpha val="40000"/>
-                    </a:prstClr>
-                  </a:outerShdw>
-                </a:effectLst>
-              </p:spPr>
-              <p:txBody>
-                <a:bodyPr/>
-                <a:lstStyle/>
-                <a:p>
-                  <a:r>
-                    <a:rPr lang="en-US">
-                      <a:noFill/>
-                    </a:rPr>
-                    <a:t> </a:t>
-                  </a:r>
-                </a:p>
-              </p:txBody>
-            </p:sp>
-          </mc:Fallback>
-        </mc:AlternateContent>
-        <mc:AlternateContent xmlns:mc="http://schemas.openxmlformats.org/markup-compatibility/2006" xmlns:a14="http://schemas.microsoft.com/office/drawing/2010/main">
-          <mc:Choice Requires="a14">
-            <p:sp>
-              <p:nvSpPr>
-                <p:cNvPr id="24" name="Rectangle 23">
-                  <a:extLst>
-                    <a:ext uri="{FF2B5EF4-FFF2-40B4-BE49-F238E27FC236}">
-                      <a16:creationId xmlns:a16="http://schemas.microsoft.com/office/drawing/2014/main" id="{9465A5A1-B6DB-1925-14ED-712982BB6ECA}"/>
-                    </a:ext>
-                  </a:extLst>
-                </p:cNvPr>
-                <p:cNvSpPr/>
-                <p:nvPr/>
-              </p:nvSpPr>
-              <p:spPr bwMode="auto">
-                <a:xfrm>
-                  <a:off x="5676899" y="2238165"/>
-                  <a:ext cx="1447800" cy="461665"/>
-                </a:xfrm>
-                <a:prstGeom prst="rect">
-                  <a:avLst/>
-                </a:prstGeom>
-                <a:solidFill>
-                  <a:srgbClr val="E395F6"/>
-                </a:solidFill>
-                <a:ln w="12700" cap="flat" cmpd="sng" algn="ctr">
-                  <a:solidFill>
-                    <a:schemeClr val="tx1"/>
-                  </a:solidFill>
-                  <a:prstDash val="solid"/>
-                  <a:round/>
-                  <a:headEnd type="none" w="med" len="med"/>
-                  <a:tailEnd type="none" w="med" len="med"/>
-                </a:ln>
-                <a:effectLst>
-                  <a:outerShdw blurRad="50800" dist="38100" dir="2700000" algn="tl" rotWithShape="0">
-                    <a:prstClr val="black">
-                      <a:alpha val="40000"/>
-                    </a:prstClr>
-                  </a:outerShdw>
-                </a:effectLst>
-              </p:spPr>
-              <p:txBody>
-                <a:bodyPr vert="horz" wrap="square" lIns="91440" tIns="45720" rIns="91440" bIns="45720" numCol="1" rtlCol="0" anchor="t" anchorCtr="0" compatLnSpc="1">
-                  <a:prstTxWarp prst="textNoShape">
-                    <a:avLst/>
-                  </a:prstTxWarp>
-                  <a:spAutoFit/>
-                </a:bodyPr>
-                <a:lstStyle/>
-                <a:p>
-                  <a:pPr marL="0" marR="0" indent="0" algn="ctr" defTabSz="914400" rtl="0" eaLnBrk="0" fontAlgn="base" latinLnBrk="0" hangingPunct="0">
-                    <a:lnSpc>
-                      <a:spcPct val="100000"/>
-                    </a:lnSpc>
-                    <a:spcBef>
-                      <a:spcPct val="0"/>
-                    </a:spcBef>
-                    <a:spcAft>
-                      <a:spcPct val="0"/>
-                    </a:spcAft>
-                    <a:buClrTx/>
-                    <a:buSzTx/>
-                    <a:buFontTx/>
-                    <a:buNone/>
-                    <a:tabLst/>
-                  </a:pPr>
-                  <a14:m>
-                    <m:oMathPara xmlns:m="http://schemas.openxmlformats.org/officeDocument/2006/math">
-                      <m:oMath>
-                        <m:r>
-                          <a:rPr kumimoji="0" lang="en-US" sz="2400" b="0" i="1" u="none" strike="noStrike" cap="none" normalizeH="0" baseline="0" smtClean="0">
-                            <a:ln>
-                              <a:noFill/>
-                            </a:ln>
-                            <a:solidFill>
-                              <a:schemeClr val="tx1"/>
-                            </a:solidFill>
-                            <a:effectLst/>
-                            <a:latin typeface="Cambria Math" panose="02040503050406030204" pitchFamily="18" charset="0"/>
-                          </a:rPr>
-                          <m:t>𝜎</m:t>
-                        </m:r>
-                        <m:r>
-                          <a:rPr kumimoji="0" lang="en-US" sz="2400" b="0" i="1" u="none" strike="noStrike" cap="none" normalizeH="0" baseline="0" smtClean="0">
-                            <a:ln>
-                              <a:noFill/>
-                            </a:ln>
-                            <a:solidFill>
-                              <a:schemeClr val="tx1"/>
-                            </a:solidFill>
-                            <a:effectLst/>
-                            <a:latin typeface="Cambria Math" panose="02040503050406030204" pitchFamily="18" charset="0"/>
-                          </a:rPr>
-                          <m:t>(</m:t>
-                        </m:r>
-                        <m:r>
-                          <a:rPr kumimoji="0" lang="en-US" sz="2400" b="0" i="1" u="none" strike="noStrike" cap="none" normalizeH="0" baseline="0" smtClean="0">
-                            <a:ln>
-                              <a:noFill/>
-                            </a:ln>
-                            <a:solidFill>
-                              <a:schemeClr val="tx1"/>
-                            </a:solidFill>
-                            <a:effectLst/>
-                            <a:latin typeface="Cambria Math" panose="02040503050406030204" pitchFamily="18" charset="0"/>
-                          </a:rPr>
-                          <m:t>𝑧</m:t>
-                        </m:r>
-                        <m:r>
-                          <a:rPr kumimoji="0" lang="en-US" sz="2400" b="0" i="1" u="none" strike="noStrike" cap="none" normalizeH="0" baseline="0" smtClean="0">
-                            <a:ln>
-                              <a:noFill/>
-                            </a:ln>
-                            <a:solidFill>
-                              <a:schemeClr val="tx1"/>
-                            </a:solidFill>
-                            <a:effectLst/>
-                            <a:latin typeface="Cambria Math" panose="02040503050406030204" pitchFamily="18" charset="0"/>
-                          </a:rPr>
-                          <m:t>)</m:t>
-                        </m:r>
-                      </m:oMath>
-                    </m:oMathPara>
-                  </a14:m>
-                  <a:endParaRPr kumimoji="0" lang="en-US" sz="2400" b="0" i="0" u="none" strike="noStrike" cap="none" normalizeH="0" baseline="0" dirty="0">
-                    <a:ln>
-                      <a:noFill/>
-                    </a:ln>
-                    <a:solidFill>
-                      <a:schemeClr val="tx1"/>
-                    </a:solidFill>
-                    <a:effectLst/>
-                    <a:latin typeface="Times New Roman" pitchFamily="-65" charset="0"/>
-                  </a:endParaRPr>
-                </a:p>
-              </p:txBody>
-            </p:sp>
-          </mc:Choice>
-          <mc:Fallback xmlns="">
-            <p:sp>
-              <p:nvSpPr>
-                <p:cNvPr id="24" name="Rectangle 23">
-                  <a:extLst>
-                    <a:ext uri="{FF2B5EF4-FFF2-40B4-BE49-F238E27FC236}">
-                      <a16:creationId xmlns:a16="http://schemas.microsoft.com/office/drawing/2014/main" id="{9465A5A1-B6DB-1925-14ED-712982BB6ECA}"/>
-                    </a:ext>
-                  </a:extLst>
-                </p:cNvPr>
-                <p:cNvSpPr>
-                  <a:spLocks noRot="1" noChangeAspect="1" noMove="1" noResize="1" noEditPoints="1" noAdjustHandles="1" noChangeArrowheads="1" noChangeShapeType="1" noTextEdit="1"/>
-                </p:cNvSpPr>
-                <p:nvPr/>
-              </p:nvSpPr>
-              <p:spPr bwMode="auto">
-                <a:xfrm>
-                  <a:off x="5676899" y="2238165"/>
-                  <a:ext cx="1447800" cy="461665"/>
-                </a:xfrm>
-                <a:prstGeom prst="rect">
-                  <a:avLst/>
-                </a:prstGeom>
-                <a:blipFill>
-                  <a:blip r:embed="rId5"/>
                   <a:stretch>
                     <a:fillRect/>
                   </a:stretch>
@@ -14388,10 +13492,10 @@
       </p:sp>
       <p:sp>
         <p:nvSpPr>
-          <p:cNvPr id="48" name="Rectangle 47">
+          <p:cNvPr id="2" name="Rectangle 1">
             <a:extLst>
               <a:ext uri="{FF2B5EF4-FFF2-40B4-BE49-F238E27FC236}">
-                <a16:creationId xmlns:a16="http://schemas.microsoft.com/office/drawing/2014/main" id="{61B52839-182A-69A0-8DB4-9922D0B86A1A}"/>
+                <a16:creationId xmlns:a16="http://schemas.microsoft.com/office/drawing/2014/main" id="{D07FA661-67D8-A2A6-71D8-B3C951AC321A}"/>
               </a:ext>
             </a:extLst>
           </p:cNvPr>
@@ -14400,14 +13504,14 @@
         </p:nvSpPr>
         <p:spPr bwMode="auto">
           <a:xfrm>
-            <a:off x="983343" y="3680575"/>
+            <a:off x="968829" y="3624279"/>
             <a:ext cx="482600" cy="461665"/>
           </a:xfrm>
           <a:prstGeom prst="rect">
             <a:avLst/>
           </a:prstGeom>
           <a:solidFill>
-            <a:srgbClr val="E395F6"/>
+            <a:srgbClr val="FFC000"/>
           </a:solidFill>
           <a:ln w="12700" cap="flat" cmpd="sng" algn="ctr">
             <a:solidFill>
@@ -14464,6 +13568,211 @@
           </a:p>
         </p:txBody>
       </p:sp>
+      <mc:AlternateContent xmlns:mc="http://schemas.openxmlformats.org/markup-compatibility/2006">
+        <mc:Choice xmlns:a14="http://schemas.microsoft.com/office/drawing/2010/main" Requires="a14">
+          <p:sp>
+            <p:nvSpPr>
+              <p:cNvPr id="4" name="Rectangle 3">
+                <a:extLst>
+                  <a:ext uri="{FF2B5EF4-FFF2-40B4-BE49-F238E27FC236}">
+                    <a16:creationId xmlns:a16="http://schemas.microsoft.com/office/drawing/2014/main" id="{F9DA4E86-3004-89B6-E485-9F18A7DBE193}"/>
+                  </a:ext>
+                </a:extLst>
+              </p:cNvPr>
+              <p:cNvSpPr/>
+              <p:nvPr/>
+            </p:nvSpPr>
+            <p:spPr bwMode="auto">
+              <a:xfrm>
+                <a:off x="4997244" y="2202696"/>
+                <a:ext cx="1447800" cy="461665"/>
+              </a:xfrm>
+              <a:prstGeom prst="rect">
+                <a:avLst/>
+              </a:prstGeom>
+              <a:solidFill>
+                <a:srgbClr val="FFC000"/>
+              </a:solidFill>
+              <a:ln w="12700" cap="flat" cmpd="sng" algn="ctr">
+                <a:solidFill>
+                  <a:schemeClr val="tx1"/>
+                </a:solidFill>
+                <a:prstDash val="solid"/>
+                <a:round/>
+                <a:headEnd type="none" w="med" len="med"/>
+                <a:tailEnd type="none" w="med" len="med"/>
+              </a:ln>
+              <a:effectLst>
+                <a:outerShdw blurRad="50800" dist="38100" dir="2700000" algn="tl" rotWithShape="0">
+                  <a:prstClr val="black">
+                    <a:alpha val="40000"/>
+                  </a:prstClr>
+                </a:outerShdw>
+              </a:effectLst>
+            </p:spPr>
+            <p:txBody>
+              <a:bodyPr vert="horz" wrap="square" lIns="91440" tIns="45720" rIns="91440" bIns="45720" numCol="1" rtlCol="0" anchor="t" anchorCtr="0" compatLnSpc="1">
+                <a:prstTxWarp prst="textNoShape">
+                  <a:avLst/>
+                </a:prstTxWarp>
+                <a:spAutoFit/>
+              </a:bodyPr>
+              <a:lstStyle/>
+              <a:p>
+                <a:pPr marL="0" marR="0" indent="0" algn="ctr" defTabSz="914400" rtl="0" eaLnBrk="0" fontAlgn="base" latinLnBrk="0" hangingPunct="0">
+                  <a:lnSpc>
+                    <a:spcPct val="100000"/>
+                  </a:lnSpc>
+                  <a:spcBef>
+                    <a:spcPct val="0"/>
+                  </a:spcBef>
+                  <a:spcAft>
+                    <a:spcPct val="0"/>
+                  </a:spcAft>
+                  <a:buClrTx/>
+                  <a:buSzTx/>
+                  <a:buFontTx/>
+                  <a:buNone/>
+                  <a:tabLst/>
+                </a:pPr>
+                <a14:m>
+                  <m:oMathPara xmlns:m="http://schemas.openxmlformats.org/officeDocument/2006/math">
+                    <m:oMath>
+                      <m:r>
+                        <m:rPr>
+                          <m:sty m:val="p"/>
+                        </m:rPr>
+                        <a:rPr lang="en-US" b="0" i="1" smtClean="0">
+                          <a:latin typeface="Cambria Math" panose="02040503050406030204" pitchFamily="18" charset="0"/>
+                        </a:rPr>
+                        <m:t>σ</m:t>
+                      </m:r>
+                      <m:r>
+                        <m:rPr>
+                          <m:nor/>
+                        </m:rPr>
+                        <a:rPr lang="en-US" b="0" i="1" smtClean="0">
+                          <a:latin typeface="Cambria Math" panose="02040503050406030204" pitchFamily="18" charset="0"/>
+                        </a:rPr>
+                        <m:t> </m:t>
+                      </m:r>
+                      <m:r>
+                        <a:rPr kumimoji="0" lang="en-US" sz="2400" b="0" i="1" u="none" strike="noStrike" cap="none" normalizeH="0" baseline="0" smtClean="0">
+                          <a:ln>
+                            <a:noFill/>
+                          </a:ln>
+                          <a:solidFill>
+                            <a:schemeClr val="tx1"/>
+                          </a:solidFill>
+                          <a:effectLst/>
+                          <a:latin typeface="Cambria Math" panose="02040503050406030204" pitchFamily="18" charset="0"/>
+                        </a:rPr>
+                        <m:t>(</m:t>
+                      </m:r>
+                      <m:r>
+                        <a:rPr kumimoji="0" lang="en-US" sz="2400" b="0" i="1" u="none" strike="noStrike" cap="none" normalizeH="0" baseline="0" smtClean="0">
+                          <a:ln>
+                            <a:noFill/>
+                          </a:ln>
+                          <a:solidFill>
+                            <a:schemeClr val="tx1"/>
+                          </a:solidFill>
+                          <a:effectLst/>
+                          <a:latin typeface="Cambria Math" panose="02040503050406030204" pitchFamily="18" charset="0"/>
+                        </a:rPr>
+                        <m:t>𝑧</m:t>
+                      </m:r>
+                      <m:r>
+                        <a:rPr kumimoji="0" lang="en-US" sz="2400" b="0" i="1" u="none" strike="noStrike" cap="none" normalizeH="0" baseline="0" smtClean="0">
+                          <a:ln>
+                            <a:noFill/>
+                          </a:ln>
+                          <a:solidFill>
+                            <a:schemeClr val="tx1"/>
+                          </a:solidFill>
+                          <a:effectLst/>
+                          <a:latin typeface="Cambria Math" panose="02040503050406030204" pitchFamily="18" charset="0"/>
+                        </a:rPr>
+                        <m:t>)</m:t>
+                      </m:r>
+                    </m:oMath>
+                  </m:oMathPara>
+                </a14:m>
+                <a:endParaRPr kumimoji="0" lang="en-US" sz="2400" b="0" i="0" u="none" strike="noStrike" cap="none" normalizeH="0" baseline="0" dirty="0">
+                  <a:ln>
+                    <a:noFill/>
+                  </a:ln>
+                  <a:solidFill>
+                    <a:schemeClr val="tx1"/>
+                  </a:solidFill>
+                  <a:effectLst/>
+                  <a:latin typeface="Times New Roman" pitchFamily="-65" charset="0"/>
+                </a:endParaRPr>
+              </a:p>
+            </p:txBody>
+          </p:sp>
+        </mc:Choice>
+        <mc:Fallback>
+          <p:sp>
+            <p:nvSpPr>
+              <p:cNvPr id="4" name="Rectangle 3">
+                <a:extLst>
+                  <a:ext uri="{FF2B5EF4-FFF2-40B4-BE49-F238E27FC236}">
+                    <a16:creationId xmlns:a16="http://schemas.microsoft.com/office/drawing/2014/main" id="{F9DA4E86-3004-89B6-E485-9F18A7DBE193}"/>
+                  </a:ext>
+                </a:extLst>
+              </p:cNvPr>
+              <p:cNvSpPr>
+                <a:spLocks noRot="1" noChangeAspect="1" noMove="1" noResize="1" noEditPoints="1" noAdjustHandles="1" noChangeArrowheads="1" noChangeShapeType="1" noTextEdit="1"/>
+              </p:cNvSpPr>
+              <p:nvPr/>
+            </p:nvSpPr>
+            <p:spPr bwMode="auto">
+              <a:xfrm>
+                <a:off x="4997244" y="2202696"/>
+                <a:ext cx="1447800" cy="461665"/>
+              </a:xfrm>
+              <a:prstGeom prst="rect">
+                <a:avLst/>
+              </a:prstGeom>
+              <a:blipFill>
+                <a:blip r:embed="rId7"/>
+                <a:stretch>
+                  <a:fillRect/>
+                </a:stretch>
+              </a:blipFill>
+              <a:ln w="12700" cap="flat" cmpd="sng" algn="ctr">
+                <a:solidFill>
+                  <a:schemeClr val="tx1"/>
+                </a:solidFill>
+                <a:prstDash val="solid"/>
+                <a:round/>
+                <a:headEnd type="none" w="med" len="med"/>
+                <a:tailEnd type="none" w="med" len="med"/>
+              </a:ln>
+              <a:effectLst>
+                <a:outerShdw blurRad="50800" dist="38100" dir="2700000" algn="tl" rotWithShape="0">
+                  <a:prstClr val="black">
+                    <a:alpha val="40000"/>
+                  </a:prstClr>
+                </a:outerShdw>
+              </a:effectLst>
+            </p:spPr>
+            <p:txBody>
+              <a:bodyPr/>
+              <a:lstStyle/>
+              <a:p>
+                <a:r>
+                  <a:rPr lang="en-US">
+                    <a:noFill/>
+                  </a:rPr>
+                  <a:t> </a:t>
+                </a:r>
+              </a:p>
+            </p:txBody>
+          </p:sp>
+        </mc:Fallback>
+      </mc:AlternateContent>
     </p:spTree>
     <p:extLst>
       <p:ext uri="{BB962C8B-B14F-4D97-AF65-F5344CB8AC3E}">
@@ -14512,8 +13821,8 @@
           <a:chExt cx="0" cy="0"/>
         </a:xfrm>
       </p:grpSpPr>
-      <mc:AlternateContent xmlns:mc="http://schemas.openxmlformats.org/markup-compatibility/2006" xmlns:a14="http://schemas.microsoft.com/office/drawing/2010/main">
-        <mc:Choice Requires="a14">
+      <mc:AlternateContent xmlns:mc="http://schemas.openxmlformats.org/markup-compatibility/2006">
+        <mc:Choice xmlns:a14="http://schemas.microsoft.com/office/drawing/2010/main" Requires="a14">
           <p:sp>
             <p:nvSpPr>
               <p:cNvPr id="4" name="Content Placeholder 3">
@@ -14748,25 +14057,105 @@
               </a:p>
               <a:p>
                 <a:pPr>
-                  <a:buFont typeface="Marlett" pitchFamily="26" charset="0"/>
                   <a:buNone/>
                 </a:pPr>
                 <a14:m>
                   <m:oMathPara xmlns:m="http://schemas.openxmlformats.org/officeDocument/2006/math">
                     <m:oMath>
-                      <m:nary>
-                        <m:naryPr>
-                          <m:limLoc m:val="undOvr"/>
-                          <m:subHide m:val="on"/>
-                          <m:supHide m:val="on"/>
+                      <m:sSub>
+                        <m:sSubPr>
+                          <m:ctrlPr>
+                            <a:rPr lang="en-US" i="1">
+                              <a:latin typeface="Cambria Math" panose="02040503050406030204" pitchFamily="18" charset="0"/>
+                              <a:ea typeface="Cambria Math" panose="02040503050406030204" pitchFamily="18" charset="0"/>
+                            </a:rPr>
+                          </m:ctrlPr>
+                        </m:sSubPr>
+                        <m:e>
+                          <m:r>
+                            <a:rPr lang="en-US" i="1">
+                              <a:latin typeface="Cambria Math" panose="02040503050406030204" pitchFamily="18" charset="0"/>
+                              <a:ea typeface="Cambria Math" panose="02040503050406030204" pitchFamily="18" charset="0"/>
+                            </a:rPr>
+                            <m:t>    </m:t>
+                          </m:r>
+                          <m:r>
+                            <a:rPr lang="en-US" i="1">
+                              <a:latin typeface="Cambria Math" panose="02040503050406030204" pitchFamily="18" charset="0"/>
+                              <a:ea typeface="Cambria Math" panose="02040503050406030204" pitchFamily="18" charset="0"/>
+                            </a:rPr>
+                            <m:t>𝔼</m:t>
+                          </m:r>
+                        </m:e>
+                        <m:sub>
+                          <m:r>
+                            <a:rPr lang="en-US" i="1">
+                              <a:latin typeface="Cambria Math" panose="02040503050406030204" pitchFamily="18" charset="0"/>
+                              <a:ea typeface="Cambria Math" panose="02040503050406030204" pitchFamily="18" charset="0"/>
+                            </a:rPr>
+                            <m:t>𝑦</m:t>
+                          </m:r>
+                          <m:r>
+                            <a:rPr lang="en-US" i="1">
+                              <a:latin typeface="Cambria Math" panose="02040503050406030204" pitchFamily="18" charset="0"/>
+                              <a:ea typeface="Cambria Math" panose="02040503050406030204" pitchFamily="18" charset="0"/>
+                            </a:rPr>
+                            <m:t>∼</m:t>
+                          </m:r>
+                          <m:r>
+                            <a:rPr lang="en-US" i="1">
+                              <a:latin typeface="Cambria Math" panose="02040503050406030204" pitchFamily="18" charset="0"/>
+                              <a:ea typeface="Cambria Math" panose="02040503050406030204" pitchFamily="18" charset="0"/>
+                            </a:rPr>
+                            <m:t>𝑝</m:t>
+                          </m:r>
+                          <m:d>
+                            <m:dPr>
+                              <m:ctrlPr>
+                                <a:rPr lang="en-US" i="1">
+                                  <a:latin typeface="Cambria Math" panose="02040503050406030204" pitchFamily="18" charset="0"/>
+                                  <a:ea typeface="Cambria Math" panose="02040503050406030204" pitchFamily="18" charset="0"/>
+                                </a:rPr>
+                              </m:ctrlPr>
+                            </m:dPr>
+                            <m:e>
+                              <m:r>
+                                <a:rPr lang="en-US" i="1">
+                                  <a:latin typeface="Cambria Math" panose="02040503050406030204" pitchFamily="18" charset="0"/>
+                                  <a:ea typeface="Cambria Math" panose="02040503050406030204" pitchFamily="18" charset="0"/>
+                                </a:rPr>
+                                <m:t>𝑦</m:t>
+                              </m:r>
+                            </m:e>
+                            <m:e>
+                              <m:r>
+                                <a:rPr lang="en-US" i="1">
+                                  <a:latin typeface="Cambria Math" panose="02040503050406030204" pitchFamily="18" charset="0"/>
+                                  <a:ea typeface="Cambria Math" panose="02040503050406030204" pitchFamily="18" charset="0"/>
+                                </a:rPr>
+                                <m:t>𝑥</m:t>
+                              </m:r>
+                            </m:e>
+                          </m:d>
+                        </m:sub>
+                      </m:sSub>
+                      <m:r>
+                        <a:rPr lang="en-US" i="1">
+                          <a:latin typeface="Cambria Math" panose="02040503050406030204" pitchFamily="18" charset="0"/>
+                          <a:ea typeface="Cambria Math" panose="02040503050406030204" pitchFamily="18" charset="0"/>
+                        </a:rPr>
+                        <m:t> </m:t>
+                      </m:r>
+                      <m:d>
+                        <m:dPr>
+                          <m:begChr m:val="["/>
+                          <m:endChr m:val="]"/>
                           <m:ctrlPr>
                             <a:rPr lang="en-US" i="1">
                               <a:latin typeface="Cambria Math" panose="02040503050406030204" pitchFamily="18" charset="0"/>
                             </a:rPr>
                           </m:ctrlPr>
-                        </m:naryPr>
-                        <m:sub/>
-                        <m:sup/>
+                        </m:dPr>
                         <m:e>
                           <m:f>
                             <m:fPr>
@@ -14805,18 +14194,84 @@
                               </m:r>
                             </m:den>
                           </m:f>
+                        </m:e>
+                      </m:d>
+                      <m:r>
+                        <a:rPr lang="en-US" i="1">
+                          <a:latin typeface="Cambria Math" panose="02040503050406030204" pitchFamily="18" charset="0"/>
+                          <a:ea typeface="Cambria Math" panose="02040503050406030204" pitchFamily="18" charset="0"/>
+                        </a:rPr>
+                        <m:t>=</m:t>
+                      </m:r>
+                      <m:r>
+                        <a:rPr lang="en-US" i="1">
+                          <a:latin typeface="Cambria Math" panose="02040503050406030204" pitchFamily="18" charset="0"/>
+                          <a:ea typeface="Cambria Math" panose="02040503050406030204" pitchFamily="18" charset="0"/>
+                        </a:rPr>
+                        <m:t>0</m:t>
+                      </m:r>
+                    </m:oMath>
+                  </m:oMathPara>
+                </a14:m>
+                <a:endParaRPr lang="en-US" dirty="0"/>
+              </a:p>
+              <a:p>
+                <a:pPr>
+                  <a:buNone/>
+                </a:pPr>
+                <a:endParaRPr lang="en-US" dirty="0"/>
+              </a:p>
+              <a:p>
+                <a:pPr>
+                  <a:buNone/>
+                </a:pPr>
+                <a14:m>
+                  <m:oMathPara xmlns:m="http://schemas.openxmlformats.org/officeDocument/2006/math">
+                    <m:oMath>
+                      <m:sSub>
+                        <m:sSubPr>
+                          <m:ctrlPr>
+                            <a:rPr lang="en-US" i="1">
+                              <a:latin typeface="Cambria Math" panose="02040503050406030204" pitchFamily="18" charset="0"/>
+                              <a:ea typeface="Cambria Math" panose="02040503050406030204" pitchFamily="18" charset="0"/>
+                            </a:rPr>
+                          </m:ctrlPr>
+                        </m:sSubPr>
+                        <m:e>
                           <m:r>
                             <a:rPr lang="en-US" i="1">
                               <a:latin typeface="Cambria Math" panose="02040503050406030204" pitchFamily="18" charset="0"/>
+                              <a:ea typeface="Cambria Math" panose="02040503050406030204" pitchFamily="18" charset="0"/>
                             </a:rPr>
-                            <m:t> </m:t>
+                            <m:t>    </m:t>
                           </m:r>
                           <m:r>
-                            <a:rPr lang="en-US" i="1" smtClean="0">
-                              <a:solidFill>
-                                <a:schemeClr val="tx1"/>
-                              </a:solidFill>
+                            <a:rPr lang="en-US" i="1">
                               <a:latin typeface="Cambria Math" panose="02040503050406030204" pitchFamily="18" charset="0"/>
+                              <a:ea typeface="Cambria Math" panose="02040503050406030204" pitchFamily="18" charset="0"/>
+                            </a:rPr>
+                            <m:t>𝔼</m:t>
+                          </m:r>
+                        </m:e>
+                        <m:sub>
+                          <m:r>
+                            <a:rPr lang="en-US" i="1">
+                              <a:latin typeface="Cambria Math" panose="02040503050406030204" pitchFamily="18" charset="0"/>
+                              <a:ea typeface="Cambria Math" panose="02040503050406030204" pitchFamily="18" charset="0"/>
+                            </a:rPr>
+                            <m:t>𝑦</m:t>
+                          </m:r>
+                          <m:r>
+                            <a:rPr lang="en-US" i="1">
+                              <a:latin typeface="Cambria Math" panose="02040503050406030204" pitchFamily="18" charset="0"/>
+                              <a:ea typeface="Cambria Math" panose="02040503050406030204" pitchFamily="18" charset="0"/>
+                            </a:rPr>
+                            <m:t>∼</m:t>
+                          </m:r>
+                          <m:r>
+                            <a:rPr lang="en-US" i="1">
+                              <a:latin typeface="Cambria Math" panose="02040503050406030204" pitchFamily="18" charset="0"/>
+                              <a:ea typeface="Cambria Math" panose="02040503050406030204" pitchFamily="18" charset="0"/>
                             </a:rPr>
                             <m:t>𝑝</m:t>
                           </m:r>
@@ -14824,20 +14279,16 @@
                             <m:dPr>
                               <m:ctrlPr>
                                 <a:rPr lang="en-US" i="1">
-                                  <a:solidFill>
-                                    <a:schemeClr val="tx1"/>
-                                  </a:solidFill>
                                   <a:latin typeface="Cambria Math" panose="02040503050406030204" pitchFamily="18" charset="0"/>
+                                  <a:ea typeface="Cambria Math" panose="02040503050406030204" pitchFamily="18" charset="0"/>
                                 </a:rPr>
                               </m:ctrlPr>
                             </m:dPr>
                             <m:e>
                               <m:r>
                                 <a:rPr lang="en-US" i="1">
-                                  <a:solidFill>
-                                    <a:schemeClr val="tx1"/>
-                                  </a:solidFill>
                                   <a:latin typeface="Cambria Math" panose="02040503050406030204" pitchFamily="18" charset="0"/>
+                                  <a:ea typeface="Cambria Math" panose="02040503050406030204" pitchFamily="18" charset="0"/>
                                 </a:rPr>
                                 <m:t>𝑦</m:t>
                               </m:r>
@@ -14845,229 +14296,121 @@
                             <m:e>
                               <m:r>
                                 <a:rPr lang="en-US" i="1">
-                                  <a:solidFill>
-                                    <a:schemeClr val="tx1"/>
-                                  </a:solidFill>
                                   <a:latin typeface="Cambria Math" panose="02040503050406030204" pitchFamily="18" charset="0"/>
+                                  <a:ea typeface="Cambria Math" panose="02040503050406030204" pitchFamily="18" charset="0"/>
                                 </a:rPr>
                                 <m:t>𝑥</m:t>
                               </m:r>
                             </m:e>
                           </m:d>
-                          <m:r>
-                            <a:rPr lang="en-US" i="1">
-                              <a:solidFill>
-                                <a:srgbClr val="C00000"/>
-                              </a:solidFill>
-                              <a:latin typeface="Cambria Math" panose="02040503050406030204" pitchFamily="18" charset="0"/>
-                            </a:rPr>
-                            <m:t> </m:t>
-                          </m:r>
-                          <m:r>
-                            <a:rPr lang="en-US" i="1">
-                              <a:latin typeface="Cambria Math" panose="02040503050406030204" pitchFamily="18" charset="0"/>
-                            </a:rPr>
-                            <m:t>𝑑𝑦</m:t>
-                          </m:r>
-                          <m:r>
-                            <a:rPr lang="en-US" i="1">
-                              <a:latin typeface="Cambria Math" panose="02040503050406030204" pitchFamily="18" charset="0"/>
-                            </a:rPr>
-                            <m:t>=0</m:t>
-                          </m:r>
-                        </m:e>
-                      </m:nary>
-                    </m:oMath>
-                  </m:oMathPara>
-                </a14:m>
-                <a:endParaRPr lang="en-US" dirty="0"/>
-              </a:p>
-              <a:p>
-                <a:pPr>
-                  <a:buFont typeface="Marlett" pitchFamily="26" charset="0"/>
-                  <a:buNone/>
-                </a:pPr>
-                <a14:m>
-                  <m:oMathPara xmlns:m="http://schemas.openxmlformats.org/officeDocument/2006/math">
-                    <m:oMath>
-                      <m:nary>
-                        <m:naryPr>
-                          <m:limLoc m:val="undOvr"/>
-                          <m:subHide m:val="on"/>
-                          <m:supHide m:val="on"/>
+                        </m:sub>
+                      </m:sSub>
+                      <m:r>
+                        <a:rPr lang="en-US" i="1">
+                          <a:latin typeface="Cambria Math" panose="02040503050406030204" pitchFamily="18" charset="0"/>
+                          <a:ea typeface="Cambria Math" panose="02040503050406030204" pitchFamily="18" charset="0"/>
+                        </a:rPr>
+                        <m:t> </m:t>
+                      </m:r>
+                      <m:d>
+                        <m:dPr>
+                          <m:begChr m:val="["/>
+                          <m:endChr m:val="]"/>
                           <m:ctrlPr>
                             <a:rPr lang="en-US" i="1">
                               <a:latin typeface="Cambria Math" panose="02040503050406030204" pitchFamily="18" charset="0"/>
                             </a:rPr>
                           </m:ctrlPr>
-                        </m:naryPr>
-                        <m:sub/>
-                        <m:sup/>
+                        </m:dPr>
                         <m:e>
-                          <m:d>
-                            <m:dPr>
-                              <m:begChr m:val="["/>
-                              <m:endChr m:val="]"/>
+                          <m:f>
+                            <m:fPr>
                               <m:ctrlPr>
-                                <a:rPr lang="en-US" b="0" i="1" smtClean="0">
+                                <a:rPr lang="en-US" i="1">
                                   <a:latin typeface="Cambria Math" panose="02040503050406030204" pitchFamily="18" charset="0"/>
                                 </a:rPr>
                               </m:ctrlPr>
-                            </m:dPr>
-                            <m:e>
-                              <m:f>
-                                <m:fPr>
+                            </m:fPr>
+                            <m:num>
+                              <m:r>
+                                <a:rPr lang="en-US" i="1">
+                                  <a:latin typeface="Cambria Math" panose="02040503050406030204" pitchFamily="18" charset="0"/>
+                                </a:rPr>
+                                <m:t>𝑦</m:t>
+                              </m:r>
+                            </m:num>
+                            <m:den>
+                              <m:r>
+                                <a:rPr lang="en-US" i="1">
+                                  <a:latin typeface="Cambria Math" panose="02040503050406030204" pitchFamily="18" charset="0"/>
+                                </a:rPr>
+                                <m:t>𝑓</m:t>
+                              </m:r>
+                            </m:den>
+                          </m:f>
+                          <m:r>
+                            <a:rPr lang="en-US" i="1">
+                              <a:latin typeface="Cambria Math" panose="02040503050406030204" pitchFamily="18" charset="0"/>
+                            </a:rPr>
+                            <m:t>−</m:t>
+                          </m:r>
+                          <m:f>
+                            <m:fPr>
+                              <m:ctrlPr>
+                                <a:rPr lang="en-US" i="1">
+                                  <a:latin typeface="Cambria Math" panose="02040503050406030204" pitchFamily="18" charset="0"/>
+                                </a:rPr>
+                              </m:ctrlPr>
+                            </m:fPr>
+                            <m:num>
+                              <m:d>
+                                <m:dPr>
                                   <m:ctrlPr>
-                                    <a:rPr lang="en-US" b="0" i="1" smtClean="0">
+                                    <a:rPr lang="en-US" i="1">
                                       <a:latin typeface="Cambria Math" panose="02040503050406030204" pitchFamily="18" charset="0"/>
                                     </a:rPr>
                                   </m:ctrlPr>
-                                </m:fPr>
-                                <m:num>
+                                </m:dPr>
+                                <m:e>
                                   <m:r>
-                                    <a:rPr lang="en-US" b="0" i="1" smtClean="0">
-                                      <a:latin typeface="Cambria Math" panose="02040503050406030204" pitchFamily="18" charset="0"/>
-                                    </a:rPr>
-                                    <m:t>𝑦</m:t>
-                                  </m:r>
-                                </m:num>
-                                <m:den>
-                                  <m:r>
-                                    <a:rPr lang="en-US" b="0" i="1" smtClean="0">
-                                      <a:latin typeface="Cambria Math" panose="02040503050406030204" pitchFamily="18" charset="0"/>
-                                    </a:rPr>
-                                    <m:t>𝑓</m:t>
-                                  </m:r>
-                                </m:den>
-                              </m:f>
-                              <m:r>
-                                <a:rPr lang="en-US" b="0" i="1" smtClean="0">
-                                  <a:latin typeface="Cambria Math" panose="02040503050406030204" pitchFamily="18" charset="0"/>
-                                </a:rPr>
-                                <m:t>−</m:t>
-                              </m:r>
-                              <m:f>
-                                <m:fPr>
-                                  <m:ctrlPr>
-                                    <a:rPr lang="en-US" b="0" i="1" smtClean="0">
-                                      <a:latin typeface="Cambria Math" panose="02040503050406030204" pitchFamily="18" charset="0"/>
-                                    </a:rPr>
-                                  </m:ctrlPr>
-                                </m:fPr>
-                                <m:num>
-                                  <m:d>
-                                    <m:dPr>
-                                      <m:ctrlPr>
-                                        <a:rPr lang="en-US" b="0" i="1" smtClean="0">
-                                          <a:latin typeface="Cambria Math" panose="02040503050406030204" pitchFamily="18" charset="0"/>
-                                        </a:rPr>
-                                      </m:ctrlPr>
-                                    </m:dPr>
-                                    <m:e>
-                                      <m:r>
-                                        <a:rPr lang="en-US" b="0" i="1" smtClean="0">
-                                          <a:latin typeface="Cambria Math" panose="02040503050406030204" pitchFamily="18" charset="0"/>
-                                        </a:rPr>
-                                        <m:t>1−</m:t>
-                                      </m:r>
-                                      <m:r>
-                                        <a:rPr lang="en-US" b="0" i="1" smtClean="0">
-                                          <a:latin typeface="Cambria Math" panose="02040503050406030204" pitchFamily="18" charset="0"/>
-                                        </a:rPr>
-                                        <m:t>𝑦</m:t>
-                                      </m:r>
-                                    </m:e>
-                                  </m:d>
-                                </m:num>
-                                <m:den>
-                                  <m:r>
-                                    <a:rPr lang="en-US" b="0" i="1" smtClean="0">
+                                    <a:rPr lang="en-US" i="1">
                                       <a:latin typeface="Cambria Math" panose="02040503050406030204" pitchFamily="18" charset="0"/>
                                     </a:rPr>
                                     <m:t>1−</m:t>
                                   </m:r>
                                   <m:r>
-                                    <a:rPr lang="en-US" b="0" i="1" smtClean="0">
+                                    <a:rPr lang="en-US" i="1">
                                       <a:latin typeface="Cambria Math" panose="02040503050406030204" pitchFamily="18" charset="0"/>
                                     </a:rPr>
-                                    <m:t>𝑓</m:t>
+                                    <m:t>𝑦</m:t>
                                   </m:r>
-                                </m:den>
-                              </m:f>
-                            </m:e>
-                          </m:d>
-                          <m:r>
-                            <a:rPr lang="en-US" i="1">
-                              <a:latin typeface="Cambria Math" panose="02040503050406030204" pitchFamily="18" charset="0"/>
-                            </a:rPr>
-                            <m:t> </m:t>
-                          </m:r>
-                          <m:r>
-                            <a:rPr lang="en-US" i="1" smtClean="0">
-                              <a:solidFill>
-                                <a:schemeClr val="tx1"/>
-                              </a:solidFill>
-                              <a:latin typeface="Cambria Math" panose="02040503050406030204" pitchFamily="18" charset="0"/>
-                            </a:rPr>
-                            <m:t>𝑝</m:t>
-                          </m:r>
-                          <m:d>
-                            <m:dPr>
-                              <m:ctrlPr>
+                                </m:e>
+                              </m:d>
+                            </m:num>
+                            <m:den>
+                              <m:r>
                                 <a:rPr lang="en-US" i="1">
-                                  <a:solidFill>
-                                    <a:schemeClr val="tx1"/>
-                                  </a:solidFill>
                                   <a:latin typeface="Cambria Math" panose="02040503050406030204" pitchFamily="18" charset="0"/>
                                 </a:rPr>
-                              </m:ctrlPr>
-                            </m:dPr>
-                            <m:e>
+                                <m:t>1−</m:t>
+                              </m:r>
                               <m:r>
                                 <a:rPr lang="en-US" i="1">
-                                  <a:solidFill>
-                                    <a:schemeClr val="tx1"/>
-                                  </a:solidFill>
                                   <a:latin typeface="Cambria Math" panose="02040503050406030204" pitchFamily="18" charset="0"/>
                                 </a:rPr>
-                                <m:t>𝑦</m:t>
+                                <m:t>𝑓</m:t>
                               </m:r>
-                            </m:e>
-                            <m:e>
-                              <m:r>
-                                <a:rPr lang="en-US" i="1">
-                                  <a:solidFill>
-                                    <a:schemeClr val="tx1"/>
-                                  </a:solidFill>
-                                  <a:latin typeface="Cambria Math" panose="02040503050406030204" pitchFamily="18" charset="0"/>
-                                </a:rPr>
-                                <m:t>𝑥</m:t>
-                              </m:r>
-                            </m:e>
-                          </m:d>
-                          <m:r>
-                            <a:rPr lang="en-US" i="1">
-                              <a:solidFill>
-                                <a:srgbClr val="C00000"/>
-                              </a:solidFill>
-                              <a:latin typeface="Cambria Math" panose="02040503050406030204" pitchFamily="18" charset="0"/>
-                            </a:rPr>
-                            <m:t> </m:t>
-                          </m:r>
-                          <m:r>
-                            <a:rPr lang="en-US" i="1">
-                              <a:latin typeface="Cambria Math" panose="02040503050406030204" pitchFamily="18" charset="0"/>
-                            </a:rPr>
-                            <m:t>𝑑𝑦</m:t>
-                          </m:r>
-                          <m:r>
-                            <a:rPr lang="en-US" i="1">
-                              <a:latin typeface="Cambria Math" panose="02040503050406030204" pitchFamily="18" charset="0"/>
-                            </a:rPr>
-                            <m:t>=0</m:t>
-                          </m:r>
+                            </m:den>
+                          </m:f>
                         </m:e>
-                      </m:nary>
+                      </m:d>
+                      <m:r>
+                        <a:rPr lang="en-US" i="1">
+                          <a:latin typeface="Cambria Math" panose="02040503050406030204" pitchFamily="18" charset="0"/>
+                          <a:ea typeface="Cambria Math" panose="02040503050406030204" pitchFamily="18" charset="0"/>
+                        </a:rPr>
+                        <m:t>=0</m:t>
+                      </m:r>
                     </m:oMath>
                   </m:oMathPara>
                 </a14:m>
@@ -15079,12 +14422,233 @@
                 </a:pPr>
                 <a:r>
                   <a:rPr lang="en-US" dirty="0"/>
-                  <a:t>Note: </a:t>
+                  <a:t>Therefore, for </a:t>
                 </a:r>
                 <a14:m>
                   <m:oMath xmlns:m="http://schemas.openxmlformats.org/officeDocument/2006/math">
                     <m:r>
-                      <a:rPr lang="en-US" i="1" smtClean="0">
+                      <a:rPr lang="en-US" i="1">
+                        <a:solidFill>
+                          <a:srgbClr val="0033CC"/>
+                        </a:solidFill>
+                        <a:latin typeface="Cambria Math" panose="02040503050406030204" pitchFamily="18" charset="0"/>
+                      </a:rPr>
+                      <m:t>𝑦</m:t>
+                    </m:r>
+                  </m:oMath>
+                </a14:m>
+                <a:r>
+                  <a:rPr lang="en-US" dirty="0"/>
+                  <a:t> in the unit interval</a:t>
+                </a:r>
+              </a:p>
+              <a:p>
+                <a:pPr marL="0" indent="0">
+                  <a:buNone/>
+                </a:pPr>
+                <a14:m>
+                  <m:oMathPara xmlns:m="http://schemas.openxmlformats.org/officeDocument/2006/math">
+                    <m:oMath>
+                      <m:r>
+                        <a:rPr lang="en-US" i="1" dirty="0">
+                          <a:latin typeface="Cambria Math" panose="02040503050406030204" pitchFamily="18" charset="0"/>
+                        </a:rPr>
+                        <m:t>𝑓</m:t>
+                      </m:r>
+                      <m:d>
+                        <m:dPr>
+                          <m:ctrlPr>
+                            <a:rPr lang="en-US" i="1" dirty="0">
+                              <a:latin typeface="Cambria Math" panose="02040503050406030204" pitchFamily="18" charset="0"/>
+                            </a:rPr>
+                          </m:ctrlPr>
+                        </m:dPr>
+                        <m:e>
+                          <m:r>
+                            <a:rPr lang="en-US" i="1" dirty="0">
+                              <a:latin typeface="Cambria Math" panose="02040503050406030204" pitchFamily="18" charset="0"/>
+                            </a:rPr>
+                            <m:t>𝑥</m:t>
+                          </m:r>
+                          <m:r>
+                            <a:rPr lang="en-US" i="1" dirty="0">
+                              <a:latin typeface="Cambria Math" panose="02040503050406030204" pitchFamily="18" charset="0"/>
+                            </a:rPr>
+                            <m:t>, </m:t>
+                          </m:r>
+                          <m:sSup>
+                            <m:sSupPr>
+                              <m:ctrlPr>
+                                <a:rPr lang="en-US" i="1" dirty="0">
+                                  <a:latin typeface="Cambria Math" panose="02040503050406030204" pitchFamily="18" charset="0"/>
+                                </a:rPr>
+                              </m:ctrlPr>
+                            </m:sSupPr>
+                            <m:e>
+                              <m:r>
+                                <a:rPr lang="en-US" i="1" dirty="0">
+                                  <a:latin typeface="Cambria Math" panose="02040503050406030204" pitchFamily="18" charset="0"/>
+                                </a:rPr>
+                                <m:t>𝜔</m:t>
+                              </m:r>
+                            </m:e>
+                            <m:sup>
+                              <m:r>
+                                <a:rPr lang="en-US" i="1" dirty="0">
+                                  <a:latin typeface="Cambria Math" panose="02040503050406030204" pitchFamily="18" charset="0"/>
+                                </a:rPr>
+                                <m:t>∗</m:t>
+                              </m:r>
+                            </m:sup>
+                          </m:sSup>
+                        </m:e>
+                      </m:d>
+                      <m:r>
+                        <a:rPr lang="en-US" i="1">
+                          <a:latin typeface="Cambria Math" panose="02040503050406030204" pitchFamily="18" charset="0"/>
+                        </a:rPr>
+                        <m:t>=</m:t>
+                      </m:r>
+                      <m:sSub>
+                        <m:sSubPr>
+                          <m:ctrlPr>
+                            <a:rPr lang="en-US" i="1">
+                              <a:latin typeface="Cambria Math" panose="02040503050406030204" pitchFamily="18" charset="0"/>
+                              <a:ea typeface="Cambria Math" panose="02040503050406030204" pitchFamily="18" charset="0"/>
+                            </a:rPr>
+                          </m:ctrlPr>
+                        </m:sSubPr>
+                        <m:e>
+                          <m:r>
+                            <a:rPr lang="en-US" i="1">
+                              <a:latin typeface="Cambria Math" panose="02040503050406030204" pitchFamily="18" charset="0"/>
+                              <a:ea typeface="Cambria Math" panose="02040503050406030204" pitchFamily="18" charset="0"/>
+                            </a:rPr>
+                            <m:t> </m:t>
+                          </m:r>
+                          <m:r>
+                            <a:rPr lang="en-US" i="1">
+                              <a:latin typeface="Cambria Math" panose="02040503050406030204" pitchFamily="18" charset="0"/>
+                              <a:ea typeface="Cambria Math" panose="02040503050406030204" pitchFamily="18" charset="0"/>
+                            </a:rPr>
+                            <m:t>𝔼</m:t>
+                          </m:r>
+                        </m:e>
+                        <m:sub>
+                          <m:r>
+                            <a:rPr lang="en-US" i="1">
+                              <a:latin typeface="Cambria Math" panose="02040503050406030204" pitchFamily="18" charset="0"/>
+                              <a:ea typeface="Cambria Math" panose="02040503050406030204" pitchFamily="18" charset="0"/>
+                            </a:rPr>
+                            <m:t>𝑦</m:t>
+                          </m:r>
+                          <m:r>
+                            <a:rPr lang="en-US" i="1">
+                              <a:latin typeface="Cambria Math" panose="02040503050406030204" pitchFamily="18" charset="0"/>
+                              <a:ea typeface="Cambria Math" panose="02040503050406030204" pitchFamily="18" charset="0"/>
+                            </a:rPr>
+                            <m:t>∼</m:t>
+                          </m:r>
+                          <m:r>
+                            <a:rPr lang="en-US" i="1">
+                              <a:latin typeface="Cambria Math" panose="02040503050406030204" pitchFamily="18" charset="0"/>
+                              <a:ea typeface="Cambria Math" panose="02040503050406030204" pitchFamily="18" charset="0"/>
+                            </a:rPr>
+                            <m:t>𝑝</m:t>
+                          </m:r>
+                          <m:d>
+                            <m:dPr>
+                              <m:ctrlPr>
+                                <a:rPr lang="en-US" i="1">
+                                  <a:latin typeface="Cambria Math" panose="02040503050406030204" pitchFamily="18" charset="0"/>
+                                  <a:ea typeface="Cambria Math" panose="02040503050406030204" pitchFamily="18" charset="0"/>
+                                </a:rPr>
+                              </m:ctrlPr>
+                            </m:dPr>
+                            <m:e>
+                              <m:r>
+                                <a:rPr lang="en-US" i="1">
+                                  <a:latin typeface="Cambria Math" panose="02040503050406030204" pitchFamily="18" charset="0"/>
+                                  <a:ea typeface="Cambria Math" panose="02040503050406030204" pitchFamily="18" charset="0"/>
+                                </a:rPr>
+                                <m:t>𝑦</m:t>
+                              </m:r>
+                            </m:e>
+                            <m:e>
+                              <m:r>
+                                <a:rPr lang="en-US" i="1">
+                                  <a:latin typeface="Cambria Math" panose="02040503050406030204" pitchFamily="18" charset="0"/>
+                                  <a:ea typeface="Cambria Math" panose="02040503050406030204" pitchFamily="18" charset="0"/>
+                                </a:rPr>
+                                <m:t>𝑥</m:t>
+                              </m:r>
+                            </m:e>
+                          </m:d>
+                        </m:sub>
+                      </m:sSub>
+                      <m:d>
+                        <m:dPr>
+                          <m:begChr m:val="["/>
+                          <m:endChr m:val="]"/>
+                          <m:ctrlPr>
+                            <a:rPr lang="en-US" i="1">
+                              <a:latin typeface="Cambria Math" panose="02040503050406030204" pitchFamily="18" charset="0"/>
+                            </a:rPr>
+                          </m:ctrlPr>
+                        </m:dPr>
+                        <m:e>
+                          <m:r>
+                            <a:rPr lang="en-US" i="1">
+                              <a:latin typeface="Cambria Math" panose="02040503050406030204" pitchFamily="18" charset="0"/>
+                            </a:rPr>
+                            <m:t>𝑦</m:t>
+                          </m:r>
+                        </m:e>
+                      </m:d>
+                    </m:oMath>
+                  </m:oMathPara>
+                </a14:m>
+                <a:br>
+                  <a:rPr lang="en-US" dirty="0">
+                    <a:solidFill>
+                      <a:srgbClr val="0000FF"/>
+                    </a:solidFill>
+                    <a:effectLst>
+                      <a:outerShdw blurRad="38100" dist="38100" dir="2700000" algn="tl">
+                        <a:srgbClr val="DDDDDD"/>
+                      </a:outerShdw>
+                    </a:effectLst>
+                  </a:rPr>
+                </a:br>
+                <a:endParaRPr lang="en-US" dirty="0">
+                  <a:solidFill>
+                    <a:srgbClr val="0000FF"/>
+                  </a:solidFill>
+                  <a:effectLst>
+                    <a:outerShdw blurRad="38100" dist="38100" dir="2700000" algn="tl">
+                      <a:srgbClr val="DDDDDD"/>
+                    </a:outerShdw>
+                  </a:effectLst>
+                </a:endParaRPr>
+              </a:p>
+              <a:p>
+                <a:pPr marL="0" indent="0">
+                  <a:buNone/>
+                </a:pPr>
+                <a:endParaRPr lang="en-US" dirty="0"/>
+              </a:p>
+              <a:p>
+                <a:pPr marL="0" indent="0">
+                  <a:buNone/>
+                </a:pPr>
+                <a:r>
+                  <a:rPr lang="en-US" dirty="0"/>
+                  <a:t>But when </a:t>
+                </a:r>
+                <a14:m>
+                  <m:oMath xmlns:m="http://schemas.openxmlformats.org/officeDocument/2006/math">
+                    <m:r>
+                      <a:rPr lang="en-US" i="1">
                         <a:solidFill>
                           <a:srgbClr val="0033CC"/>
                         </a:solidFill>
@@ -15093,7 +14657,7 @@
                       <m:t>𝑦</m:t>
                     </m:r>
                     <m:r>
-                      <a:rPr lang="en-US" i="1" smtClean="0">
+                      <a:rPr lang="en-US" i="1">
                         <a:solidFill>
                           <a:srgbClr val="0033CC"/>
                         </a:solidFill>
@@ -15130,168 +14694,7 @@
                 </a14:m>
                 <a:r>
                   <a:rPr lang="en-US" dirty="0"/>
-                  <a:t>. Therefore,</a:t>
-                </a:r>
-                <a:br>
-                  <a:rPr lang="en-US" dirty="0"/>
-                </a:br>
-                <a:endParaRPr lang="en-US" dirty="0"/>
-              </a:p>
-              <a:p>
-                <a:pPr marL="0" indent="0">
-                  <a:buNone/>
-                </a:pPr>
-                <a14:m>
-                  <m:oMathPara xmlns:m="http://schemas.openxmlformats.org/officeDocument/2006/math">
-                    <m:oMath>
-                      <m:r>
-                        <a:rPr lang="en-US" b="0" i="1" smtClean="0">
-                          <a:latin typeface="Cambria Math" panose="02040503050406030204" pitchFamily="18" charset="0"/>
-                        </a:rPr>
-                        <m:t>−</m:t>
-                      </m:r>
-                      <m:f>
-                        <m:fPr>
-                          <m:ctrlPr>
-                            <a:rPr lang="en-US" b="0" i="1" smtClean="0">
-                              <a:latin typeface="Cambria Math" panose="02040503050406030204" pitchFamily="18" charset="0"/>
-                            </a:rPr>
-                          </m:ctrlPr>
-                        </m:fPr>
-                        <m:num>
-                          <m:r>
-                            <a:rPr lang="en-US" b="0" i="1" smtClean="0">
-                              <a:latin typeface="Cambria Math" panose="02040503050406030204" pitchFamily="18" charset="0"/>
-                            </a:rPr>
-                            <m:t>𝑝</m:t>
-                          </m:r>
-                          <m:d>
-                            <m:dPr>
-                              <m:ctrlPr>
-                                <a:rPr lang="en-US" b="0" i="1" smtClean="0">
-                                  <a:latin typeface="Cambria Math" panose="02040503050406030204" pitchFamily="18" charset="0"/>
-                                </a:rPr>
-                              </m:ctrlPr>
-                            </m:dPr>
-                            <m:e>
-                              <m:r>
-                                <a:rPr lang="en-US" b="0" i="1" smtClean="0">
-                                  <a:latin typeface="Cambria Math" panose="02040503050406030204" pitchFamily="18" charset="0"/>
-                                </a:rPr>
-                                <m:t>𝑦</m:t>
-                              </m:r>
-                              <m:r>
-                                <a:rPr lang="en-US" b="0" i="1" smtClean="0">
-                                  <a:latin typeface="Cambria Math" panose="02040503050406030204" pitchFamily="18" charset="0"/>
-                                </a:rPr>
-                                <m:t>=0</m:t>
-                              </m:r>
-                            </m:e>
-                            <m:e>
-                              <m:r>
-                                <a:rPr lang="en-US" b="0" i="1" smtClean="0">
-                                  <a:latin typeface="Cambria Math" panose="02040503050406030204" pitchFamily="18" charset="0"/>
-                                </a:rPr>
-                                <m:t>𝑥</m:t>
-                              </m:r>
-                            </m:e>
-                          </m:d>
-                        </m:num>
-                        <m:den>
-                          <m:r>
-                            <a:rPr lang="en-US" b="0" i="1" smtClean="0">
-                              <a:latin typeface="Cambria Math" panose="02040503050406030204" pitchFamily="18" charset="0"/>
-                            </a:rPr>
-                            <m:t>1−</m:t>
-                          </m:r>
-                          <m:r>
-                            <a:rPr lang="en-US" b="0" i="1" smtClean="0">
-                              <a:latin typeface="Cambria Math" panose="02040503050406030204" pitchFamily="18" charset="0"/>
-                            </a:rPr>
-                            <m:t>𝑓</m:t>
-                          </m:r>
-                        </m:den>
-                      </m:f>
-                      <m:r>
-                        <a:rPr lang="en-US" b="0" i="1" smtClean="0">
-                          <a:latin typeface="Cambria Math" panose="02040503050406030204" pitchFamily="18" charset="0"/>
-                        </a:rPr>
-                        <m:t>+</m:t>
-                      </m:r>
-                      <m:f>
-                        <m:fPr>
-                          <m:ctrlPr>
-                            <a:rPr lang="en-US" i="1">
-                              <a:latin typeface="Cambria Math" panose="02040503050406030204" pitchFamily="18" charset="0"/>
-                            </a:rPr>
-                          </m:ctrlPr>
-                        </m:fPr>
-                        <m:num>
-                          <m:r>
-                            <a:rPr lang="en-US" i="1">
-                              <a:latin typeface="Cambria Math" panose="02040503050406030204" pitchFamily="18" charset="0"/>
-                            </a:rPr>
-                            <m:t>𝑝</m:t>
-                          </m:r>
-                          <m:d>
-                            <m:dPr>
-                              <m:ctrlPr>
-                                <a:rPr lang="en-US" i="1">
-                                  <a:latin typeface="Cambria Math" panose="02040503050406030204" pitchFamily="18" charset="0"/>
-                                </a:rPr>
-                              </m:ctrlPr>
-                            </m:dPr>
-                            <m:e>
-                              <m:r>
-                                <a:rPr lang="en-US" i="1">
-                                  <a:latin typeface="Cambria Math" panose="02040503050406030204" pitchFamily="18" charset="0"/>
-                                </a:rPr>
-                                <m:t>𝑦</m:t>
-                              </m:r>
-                              <m:r>
-                                <a:rPr lang="en-US" i="1">
-                                  <a:latin typeface="Cambria Math" panose="02040503050406030204" pitchFamily="18" charset="0"/>
-                                </a:rPr>
-                                <m:t>=1</m:t>
-                              </m:r>
-                            </m:e>
-                            <m:e>
-                              <m:r>
-                                <a:rPr lang="en-US" i="1">
-                                  <a:latin typeface="Cambria Math" panose="02040503050406030204" pitchFamily="18" charset="0"/>
-                                </a:rPr>
-                                <m:t>𝑥</m:t>
-                              </m:r>
-                            </m:e>
-                          </m:d>
-                        </m:num>
-                        <m:den>
-                          <m:r>
-                            <a:rPr lang="en-US" i="1">
-                              <a:latin typeface="Cambria Math" panose="02040503050406030204" pitchFamily="18" charset="0"/>
-                            </a:rPr>
-                            <m:t>𝑓</m:t>
-                          </m:r>
-                        </m:den>
-                      </m:f>
-                      <m:r>
-                        <a:rPr lang="en-US" b="0" i="1" smtClean="0">
-                          <a:latin typeface="Cambria Math" panose="02040503050406030204" pitchFamily="18" charset="0"/>
-                        </a:rPr>
-                        <m:t>=0,</m:t>
-                      </m:r>
-                    </m:oMath>
-                  </m:oMathPara>
-                </a14:m>
-                <a:endParaRPr lang="en-US" dirty="0"/>
-              </a:p>
-              <a:p>
-                <a:pPr marL="0" indent="0">
-                  <a:buNone/>
-                </a:pPr>
-                <a:r>
-                  <a:rPr lang="en-US" dirty="0"/>
-                  <a:t>which implies</a:t>
+                  <a:t> this yields</a:t>
                 </a:r>
               </a:p>
               <a:p>
@@ -15303,7 +14706,7 @@
             </p:txBody>
           </p:sp>
         </mc:Choice>
-        <mc:Fallback xmlns="">
+        <mc:Fallback>
           <p:sp>
             <p:nvSpPr>
               <p:cNvPr id="4" name="Content Placeholder 3">
@@ -15324,7 +14727,7 @@
               <a:blipFill>
                 <a:blip r:embed="rId2"/>
                 <a:stretch>
-                  <a:fillRect l="-1309" t="-23421" r="-491"/>
+                  <a:fillRect l="-1309" t="-1316" r="-491"/>
                 </a:stretch>
               </a:blipFill>
             </p:spPr>
@@ -15371,8 +14774,8 @@
           </a:p>
         </p:txBody>
       </p:sp>
-      <mc:AlternateContent xmlns:mc="http://schemas.openxmlformats.org/markup-compatibility/2006" xmlns:a14="http://schemas.microsoft.com/office/drawing/2010/main">
-        <mc:Choice Requires="a14">
+      <mc:AlternateContent xmlns:mc="http://schemas.openxmlformats.org/markup-compatibility/2006">
+        <mc:Choice xmlns:a14="http://schemas.microsoft.com/office/drawing/2010/main" Requires="a14">
           <p:sp>
             <p:nvSpPr>
               <p:cNvPr id="2" name="Text Box 6">
@@ -15389,8 +14792,8 @@
             </p:nvSpPr>
             <p:spPr bwMode="auto">
               <a:xfrm>
-                <a:off x="2727813" y="5558135"/>
-                <a:ext cx="3184398" cy="461665"/>
+                <a:off x="2895600" y="5638800"/>
+                <a:ext cx="2741200" cy="461665"/>
               </a:xfrm>
               <a:prstGeom prst="rect">
                 <a:avLst/>
@@ -15491,23 +14894,35 @@
                         </a:rPr>
                         <m:t>𝑝</m:t>
                       </m:r>
+                      <m:d>
+                        <m:dPr>
+                          <m:endChr m:val="|"/>
+                          <m:ctrlPr>
+                            <a:rPr lang="en-US" b="0" i="1" smtClean="0">
+                              <a:latin typeface="Cambria Math" panose="02040503050406030204" pitchFamily="18" charset="0"/>
+                            </a:rPr>
+                          </m:ctrlPr>
+                        </m:dPr>
+                        <m:e>
+                          <m:r>
+                            <a:rPr lang="en-US" b="0" i="1" smtClean="0">
+                              <a:latin typeface="Cambria Math" panose="02040503050406030204" pitchFamily="18" charset="0"/>
+                            </a:rPr>
+                            <m:t>1</m:t>
+                          </m:r>
+                          <m:r>
+                            <a:rPr lang="en-US" b="0" i="1" smtClean="0">
+                              <a:latin typeface="Cambria Math" panose="02040503050406030204" pitchFamily="18" charset="0"/>
+                            </a:rPr>
+                            <m:t> </m:t>
+                          </m:r>
+                        </m:e>
+                      </m:d>
                       <m:r>
                         <a:rPr lang="en-US" b="0" i="1" smtClean="0">
                           <a:latin typeface="Cambria Math" panose="02040503050406030204" pitchFamily="18" charset="0"/>
                         </a:rPr>
-                        <m:t>(</m:t>
-                      </m:r>
-                      <m:r>
-                        <a:rPr lang="en-US" b="0" i="1" smtClean="0">
-                          <a:latin typeface="Cambria Math" panose="02040503050406030204" pitchFamily="18" charset="0"/>
-                        </a:rPr>
-                        <m:t>𝑦</m:t>
-                      </m:r>
-                      <m:r>
-                        <a:rPr lang="en-US" b="0" i="1" smtClean="0">
-                          <a:latin typeface="Cambria Math" panose="02040503050406030204" pitchFamily="18" charset="0"/>
-                        </a:rPr>
-                        <m:t>=1|</m:t>
+                        <m:t> </m:t>
                       </m:r>
                       <m:r>
                         <a:rPr lang="en-US" b="0" i="1" smtClean="0">
@@ -15538,7 +14953,7 @@
             </p:txBody>
           </p:sp>
         </mc:Choice>
-        <mc:Fallback xmlns="">
+        <mc:Fallback>
           <p:sp>
             <p:nvSpPr>
               <p:cNvPr id="2" name="Text Box 6">
@@ -15555,8 +14970,8 @@
             </p:nvSpPr>
             <p:spPr bwMode="auto">
               <a:xfrm>
-                <a:off x="2727813" y="5558135"/>
-                <a:ext cx="3184398" cy="461665"/>
+                <a:off x="2895600" y="5638800"/>
+                <a:ext cx="2741200" cy="461665"/>
               </a:xfrm>
               <a:prstGeom prst="rect">
                 <a:avLst/>
@@ -15564,7 +14979,7 @@
               <a:blipFill>
                 <a:blip r:embed="rId3"/>
                 <a:stretch>
-                  <a:fillRect l="-1176" b="-12500"/>
+                  <a:fillRect l="-909" b="-17500"/>
                 </a:stretch>
               </a:blipFill>
               <a:ln w="38100">
@@ -15623,7 +15038,7 @@
                             </p:stCondLst>
                             <p:childTnLst>
                               <p:par>
-                                <p:cTn id="5" presetID="10" presetClass="entr" presetSubtype="0" fill="hold" nodeType="clickEffect">
+                                <p:cTn id="5" presetID="1" presetClass="entr" presetSubtype="0" fill="hold" nodeType="clickEffect">
                                   <p:stCondLst>
                                     <p:cond delay="0"/>
                                   </p:stCondLst>
@@ -15638,7 +15053,7 @@
                                         <p:tgtEl>
                                           <p:spTgt spid="4">
                                             <p:txEl>
-                                              <p:pRg st="1" end="1"/>
+                                              <p:pRg st="3" end="3"/>
                                             </p:txEl>
                                           </p:spTgt>
                                         </p:tgtEl>
@@ -15650,18 +15065,6 @@
                                         <p:strVal val="visible"/>
                                       </p:to>
                                     </p:set>
-                                    <p:animEffect transition="in" filter="fade">
-                                      <p:cBhvr>
-                                        <p:cTn id="7" dur="500"/>
-                                        <p:tgtEl>
-                                          <p:spTgt spid="4">
-                                            <p:txEl>
-                                              <p:pRg st="1" end="1"/>
-                                            </p:txEl>
-                                          </p:spTgt>
-                                        </p:tgtEl>
-                                      </p:cBhvr>
-                                    </p:animEffect>
                                   </p:childTnLst>
                                 </p:cTn>
                               </p:par>
@@ -15672,26 +15075,26 @@
                     </p:cTn>
                   </p:par>
                   <p:par>
-                    <p:cTn id="8" fill="hold">
+                    <p:cTn id="7" fill="hold">
                       <p:stCondLst>
                         <p:cond delay="indefinite"/>
                       </p:stCondLst>
                       <p:childTnLst>
                         <p:par>
-                          <p:cTn id="9" fill="hold">
+                          <p:cTn id="8" fill="hold">
                             <p:stCondLst>
                               <p:cond delay="0"/>
                             </p:stCondLst>
                             <p:childTnLst>
                               <p:par>
-                                <p:cTn id="10" presetID="10" presetClass="entr" presetSubtype="0" fill="hold" nodeType="clickEffect">
+                                <p:cTn id="9" presetID="1" presetClass="entr" presetSubtype="0" fill="hold" nodeType="clickEffect">
                                   <p:stCondLst>
                                     <p:cond delay="0"/>
                                   </p:stCondLst>
                                   <p:childTnLst>
                                     <p:set>
                                       <p:cBhvr>
-                                        <p:cTn id="11" dur="1" fill="hold">
+                                        <p:cTn id="10" dur="1" fill="hold">
                                           <p:stCondLst>
                                             <p:cond delay="0"/>
                                           </p:stCondLst>
@@ -15699,7 +15102,7 @@
                                         <p:tgtEl>
                                           <p:spTgt spid="4">
                                             <p:txEl>
-                                              <p:pRg st="2" end="2"/>
+                                              <p:pRg st="4" end="4"/>
                                             </p:txEl>
                                           </p:spTgt>
                                         </p:tgtEl>
@@ -15711,18 +15114,37 @@
                                         <p:strVal val="visible"/>
                                       </p:to>
                                     </p:set>
-                                    <p:animEffect transition="in" filter="fade">
+                                  </p:childTnLst>
+                                </p:cTn>
+                              </p:par>
+                              <p:par>
+                                <p:cTn id="11" presetID="1" presetClass="entr" presetSubtype="0" fill="hold" nodeType="withEffect">
+                                  <p:stCondLst>
+                                    <p:cond delay="0"/>
+                                  </p:stCondLst>
+                                  <p:childTnLst>
+                                    <p:set>
                                       <p:cBhvr>
-                                        <p:cTn id="12" dur="500"/>
+                                        <p:cTn id="12" dur="1" fill="hold">
+                                          <p:stCondLst>
+                                            <p:cond delay="0"/>
+                                          </p:stCondLst>
+                                        </p:cTn>
                                         <p:tgtEl>
                                           <p:spTgt spid="4">
                                             <p:txEl>
-                                              <p:pRg st="2" end="2"/>
+                                              <p:pRg st="5" end="5"/>
                                             </p:txEl>
                                           </p:spTgt>
                                         </p:tgtEl>
+                                        <p:attrNameLst>
+                                          <p:attrName>style.visibility</p:attrName>
+                                        </p:attrNameLst>
                                       </p:cBhvr>
-                                    </p:animEffect>
+                                      <p:to>
+                                        <p:strVal val="visible"/>
+                                      </p:to>
+                                    </p:set>
                                   </p:childTnLst>
                                 </p:cTn>
                               </p:par>
@@ -15745,7 +15167,7 @@
                             </p:stCondLst>
                             <p:childTnLst>
                               <p:par>
-                                <p:cTn id="15" presetID="10" presetClass="entr" presetSubtype="0" fill="hold" nodeType="clickEffect">
+                                <p:cTn id="15" presetID="1" presetClass="entr" presetSubtype="0" fill="hold" nodeType="clickEffect">
                                   <p:stCondLst>
                                     <p:cond delay="0"/>
                                   </p:stCondLst>
@@ -15760,7 +15182,7 @@
                                         <p:tgtEl>
                                           <p:spTgt spid="4">
                                             <p:txEl>
-                                              <p:pRg st="3" end="3"/>
+                                              <p:pRg st="7" end="7"/>
                                             </p:txEl>
                                           </p:spTgt>
                                         </p:tgtEl>
@@ -15772,152 +15194,18 @@
                                         <p:strVal val="visible"/>
                                       </p:to>
                                     </p:set>
-                                    <p:animEffect transition="in" filter="fade">
-                                      <p:cBhvr>
-                                        <p:cTn id="17" dur="500"/>
-                                        <p:tgtEl>
-                                          <p:spTgt spid="4">
-                                            <p:txEl>
-                                              <p:pRg st="3" end="3"/>
-                                            </p:txEl>
-                                          </p:spTgt>
-                                        </p:tgtEl>
-                                      </p:cBhvr>
-                                    </p:animEffect>
                                   </p:childTnLst>
                                 </p:cTn>
                               </p:par>
-                            </p:childTnLst>
-                          </p:cTn>
-                        </p:par>
-                      </p:childTnLst>
-                    </p:cTn>
-                  </p:par>
-                  <p:par>
-                    <p:cTn id="18" fill="hold">
-                      <p:stCondLst>
-                        <p:cond delay="indefinite"/>
-                      </p:stCondLst>
-                      <p:childTnLst>
-                        <p:par>
-                          <p:cTn id="19" fill="hold">
-                            <p:stCondLst>
-                              <p:cond delay="0"/>
-                            </p:stCondLst>
-                            <p:childTnLst>
                               <p:par>
-                                <p:cTn id="20" presetID="10" presetClass="entr" presetSubtype="0" fill="hold" nodeType="clickEffect">
+                                <p:cTn id="17" presetID="10" presetClass="entr" presetSubtype="0" fill="hold" grpId="1" nodeType="withEffect">
                                   <p:stCondLst>
                                     <p:cond delay="0"/>
                                   </p:stCondLst>
                                   <p:childTnLst>
                                     <p:set>
                                       <p:cBhvr>
-                                        <p:cTn id="21" dur="1" fill="hold">
-                                          <p:stCondLst>
-                                            <p:cond delay="0"/>
-                                          </p:stCondLst>
-                                        </p:cTn>
-                                        <p:tgtEl>
-                                          <p:spTgt spid="4">
-                                            <p:txEl>
-                                              <p:pRg st="4" end="4"/>
-                                            </p:txEl>
-                                          </p:spTgt>
-                                        </p:tgtEl>
-                                        <p:attrNameLst>
-                                          <p:attrName>style.visibility</p:attrName>
-                                        </p:attrNameLst>
-                                      </p:cBhvr>
-                                      <p:to>
-                                        <p:strVal val="visible"/>
-                                      </p:to>
-                                    </p:set>
-                                    <p:animEffect transition="in" filter="fade">
-                                      <p:cBhvr>
-                                        <p:cTn id="22" dur="500"/>
-                                        <p:tgtEl>
-                                          <p:spTgt spid="4">
-                                            <p:txEl>
-                                              <p:pRg st="4" end="4"/>
-                                            </p:txEl>
-                                          </p:spTgt>
-                                        </p:tgtEl>
-                                      </p:cBhvr>
-                                    </p:animEffect>
-                                  </p:childTnLst>
-                                </p:cTn>
-                              </p:par>
-                            </p:childTnLst>
-                          </p:cTn>
-                        </p:par>
-                      </p:childTnLst>
-                    </p:cTn>
-                  </p:par>
-                  <p:par>
-                    <p:cTn id="23" fill="hold">
-                      <p:stCondLst>
-                        <p:cond delay="indefinite"/>
-                      </p:stCondLst>
-                      <p:childTnLst>
-                        <p:par>
-                          <p:cTn id="24" fill="hold">
-                            <p:stCondLst>
-                              <p:cond delay="0"/>
-                            </p:stCondLst>
-                            <p:childTnLst>
-                              <p:par>
-                                <p:cTn id="25" presetID="10" presetClass="entr" presetSubtype="0" fill="hold" nodeType="clickEffect">
-                                  <p:stCondLst>
-                                    <p:cond delay="0"/>
-                                  </p:stCondLst>
-                                  <p:childTnLst>
-                                    <p:set>
-                                      <p:cBhvr>
-                                        <p:cTn id="26" dur="1" fill="hold">
-                                          <p:stCondLst>
-                                            <p:cond delay="0"/>
-                                          </p:stCondLst>
-                                        </p:cTn>
-                                        <p:tgtEl>
-                                          <p:spTgt spid="4">
-                                            <p:txEl>
-                                              <p:pRg st="5" end="5"/>
-                                            </p:txEl>
-                                          </p:spTgt>
-                                        </p:tgtEl>
-                                        <p:attrNameLst>
-                                          <p:attrName>style.visibility</p:attrName>
-                                        </p:attrNameLst>
-                                      </p:cBhvr>
-                                      <p:to>
-                                        <p:strVal val="visible"/>
-                                      </p:to>
-                                    </p:set>
-                                    <p:animEffect transition="in" filter="fade">
-                                      <p:cBhvr>
-                                        <p:cTn id="27" dur="500"/>
-                                        <p:tgtEl>
-                                          <p:spTgt spid="4">
-                                            <p:txEl>
-                                              <p:pRg st="5" end="5"/>
-                                            </p:txEl>
-                                          </p:spTgt>
-                                        </p:tgtEl>
-                                      </p:cBhvr>
-                                    </p:animEffect>
-                                  </p:childTnLst>
-                                </p:cTn>
-                              </p:par>
-                              <p:par>
-                                <p:cTn id="28" presetID="10" presetClass="entr" presetSubtype="0" fill="hold" grpId="1" nodeType="withEffect">
-                                  <p:stCondLst>
-                                    <p:cond delay="0"/>
-                                  </p:stCondLst>
-                                  <p:childTnLst>
-                                    <p:set>
-                                      <p:cBhvr>
-                                        <p:cTn id="29" dur="1" fill="hold">
+                                        <p:cTn id="18" dur="1" fill="hold">
                                           <p:stCondLst>
                                             <p:cond delay="0"/>
                                           </p:stCondLst>
@@ -15935,7 +15223,7 @@
                                     </p:set>
                                     <p:animEffect transition="in" filter="fade">
                                       <p:cBhvr>
-                                        <p:cTn id="30" dur="500"/>
+                                        <p:cTn id="19" dur="500"/>
                                         <p:tgtEl>
                                           <p:spTgt spid="2"/>
                                         </p:tgtEl>
@@ -16001,8 +15289,8 @@
           <a:chExt cx="0" cy="0"/>
         </a:xfrm>
       </p:grpSpPr>
-      <mc:AlternateContent xmlns:mc="http://schemas.openxmlformats.org/markup-compatibility/2006" xmlns:a14="http://schemas.microsoft.com/office/drawing/2010/main">
-        <mc:Choice Requires="a14">
+      <mc:AlternateContent xmlns:mc="http://schemas.openxmlformats.org/markup-compatibility/2006">
+        <mc:Choice xmlns:a14="http://schemas.microsoft.com/office/drawing/2010/main" Requires="a14">
           <p:sp>
             <p:nvSpPr>
               <p:cNvPr id="4" name="Content Placeholder 3">
@@ -16029,7 +15317,7 @@
                 </a:pPr>
                 <a:r>
                   <a:rPr lang="en-US" dirty="0"/>
-                  <a:t>The result</a:t>
+                  <a:t>According to Bayes’ theorem</a:t>
                 </a:r>
               </a:p>
               <a:p>
@@ -16132,6 +15420,15 @@
                         </m:e>
                         <m:e>
                           <m:r>
+                            <a:rPr lang="en-US" b="0" i="1" smtClean="0">
+                              <a:solidFill>
+                                <a:srgbClr val="0033CC"/>
+                              </a:solidFill>
+                              <a:latin typeface="Cambria Math" panose="02040503050406030204" pitchFamily="18" charset="0"/>
+                            </a:rPr>
+                            <m:t> </m:t>
+                          </m:r>
+                          <m:r>
                             <a:rPr lang="en-US" i="1">
                               <a:solidFill>
                                 <a:srgbClr val="0033CC"/>
@@ -16193,8 +15490,26 @@
                                 </a:rPr>
                                 <m:t>𝑥</m:t>
                               </m:r>
+                              <m:r>
+                                <a:rPr lang="en-US" b="0" i="1" smtClean="0">
+                                  <a:solidFill>
+                                    <a:srgbClr val="0033CC"/>
+                                  </a:solidFill>
+                                  <a:latin typeface="Cambria Math" panose="02040503050406030204" pitchFamily="18" charset="0"/>
+                                </a:rPr>
+                                <m:t> </m:t>
+                              </m:r>
                             </m:e>
                             <m:e>
+                              <m:r>
+                                <a:rPr lang="en-US" b="0" i="1" smtClean="0">
+                                  <a:solidFill>
+                                    <a:srgbClr val="0033CC"/>
+                                  </a:solidFill>
+                                  <a:latin typeface="Cambria Math" panose="02040503050406030204" pitchFamily="18" charset="0"/>
+                                </a:rPr>
+                                <m:t> </m:t>
+                              </m:r>
                               <m:r>
                                 <a:rPr lang="en-US" b="0" i="1" smtClean="0">
                                   <a:solidFill>
@@ -16285,18 +15600,6 @@
                     </a:effectLst>
                   </a:rPr>
                 </a:br>
-                <a:endParaRPr lang="en-US" dirty="0">
-                  <a:effectLst>
-                    <a:outerShdw blurRad="38100" dist="38100" dir="2700000" algn="tl">
-                      <a:srgbClr val="DDDDDD"/>
-                    </a:outerShdw>
-                  </a:effectLst>
-                </a:endParaRPr>
-              </a:p>
-              <a:p>
-                <a:pPr marL="0" indent="0">
-                  <a:buNone/>
-                </a:pPr>
                 <a:endParaRPr lang="en-US" dirty="0">
                   <a:latin typeface="+mn-lt"/>
                 </a:endParaRPr>
@@ -16521,220 +15824,25 @@
                 </a14:m>
                 <a:r>
                   <a:rPr lang="en-US" dirty="0">
-                    <a:solidFill>
-                      <a:srgbClr val="0033CC"/>
-                    </a:solidFill>
-                    <a:effectLst>
-                      <a:outerShdw blurRad="38100" dist="38100" dir="2700000" algn="tl">
-                        <a:srgbClr val="DDDDDD"/>
-                      </a:outerShdw>
-                    </a:effectLst>
+                    <a:ea typeface="Cambria Math" panose="02040503050406030204" pitchFamily="18" charset="0"/>
                   </a:rPr>
-                  <a:t>, </a:t>
+                  <a:t>. </a:t>
                 </a:r>
-                <a14:m>
-                  <m:oMath xmlns:m="http://schemas.openxmlformats.org/officeDocument/2006/math">
-                    <m:d>
-                      <m:dPr>
-                        <m:ctrlPr>
-                          <a:rPr lang="en-US" i="1">
-                            <a:latin typeface="Cambria Math" panose="02040503050406030204" pitchFamily="18" charset="0"/>
-                          </a:rPr>
-                        </m:ctrlPr>
-                      </m:dPr>
-                      <m:e>
-                        <m:r>
-                          <a:rPr lang="en-US" i="1">
-                            <a:latin typeface="Cambria Math" panose="02040503050406030204" pitchFamily="18" charset="0"/>
-                          </a:rPr>
-                          <m:t>𝑘</m:t>
-                        </m:r>
-                        <m:r>
-                          <a:rPr lang="en-US" i="1">
-                            <a:latin typeface="Cambria Math" panose="02040503050406030204" pitchFamily="18" charset="0"/>
-                            <a:ea typeface="Cambria Math" panose="02040503050406030204" pitchFamily="18" charset="0"/>
-                          </a:rPr>
-                          <m:t>≡</m:t>
-                        </m:r>
-                        <m:r>
-                          <a:rPr lang="en-US" i="1">
-                            <a:latin typeface="Cambria Math" panose="02040503050406030204" pitchFamily="18" charset="0"/>
-                            <a:ea typeface="Cambria Math" panose="02040503050406030204" pitchFamily="18" charset="0"/>
-                          </a:rPr>
-                          <m:t>𝑦</m:t>
-                        </m:r>
-                        <m:r>
-                          <a:rPr lang="en-US" i="1">
-                            <a:latin typeface="Cambria Math" panose="02040503050406030204" pitchFamily="18" charset="0"/>
-                            <a:ea typeface="Cambria Math" panose="02040503050406030204" pitchFamily="18" charset="0"/>
-                          </a:rPr>
-                          <m:t>=</m:t>
-                        </m:r>
-                        <m:r>
-                          <a:rPr lang="en-US" i="1">
-                            <a:latin typeface="Cambria Math" panose="02040503050406030204" pitchFamily="18" charset="0"/>
-                            <a:ea typeface="Cambria Math" panose="02040503050406030204" pitchFamily="18" charset="0"/>
-                          </a:rPr>
-                          <m:t>𝑘</m:t>
-                        </m:r>
-                      </m:e>
-                    </m:d>
-                  </m:oMath>
-                </a14:m>
-                <a:r>
+                <a:br>
                   <a:rPr lang="en-US" dirty="0">
                     <a:ea typeface="Cambria Math" panose="02040503050406030204" pitchFamily="18" charset="0"/>
                   </a:rPr>
-                  <a:t>, </a:t>
-                </a:r>
-                <a:r>
-                  <a:rPr lang="en-US" dirty="0">
-                    <a:effectLst>
-                      <a:outerShdw blurRad="38100" dist="38100" dir="2700000" algn="tl">
-                        <a:srgbClr val="DDDDDD"/>
-                      </a:outerShdw>
-                    </a:effectLst>
-                  </a:rPr>
-                  <a:t>shows that </a:t>
-                </a:r>
-                <a:r>
-                  <a:rPr lang="en-US" i="1" u="sng" dirty="0">
-                    <a:effectLst>
-                      <a:outerShdw blurRad="38100" dist="38100" dir="2700000" algn="tl">
-                        <a:srgbClr val="DDDDDD"/>
-                      </a:outerShdw>
-                    </a:effectLst>
-                  </a:rPr>
-                  <a:t>any</a:t>
-                </a:r>
-                <a:r>
-                  <a:rPr lang="en-US" dirty="0">
-                    <a:effectLst>
-                      <a:outerShdw blurRad="38100" dist="38100" dir="2700000" algn="tl">
-                        <a:srgbClr val="DDDDDD"/>
-                      </a:outerShdw>
-                    </a:effectLst>
-                  </a:rPr>
-                  <a:t> model trained using the the cross-entropy loss necessarily approximates a </a:t>
-                </a:r>
-                <a:r>
-                  <a:rPr lang="en-US" b="1" dirty="0">
-                    <a:solidFill>
-                      <a:srgbClr val="0033CC"/>
-                    </a:solidFill>
-                    <a:effectLst>
-                      <a:outerShdw blurRad="38100" dist="38100" dir="2700000" algn="tl">
-                        <a:srgbClr val="DDDDDD"/>
-                      </a:outerShdw>
-                    </a:effectLst>
-                  </a:rPr>
-                  <a:t>class probability</a:t>
-                </a:r>
-                <a:r>
-                  <a:rPr lang="en-US" dirty="0">
-                    <a:effectLst>
-                      <a:outerShdw blurRad="38100" dist="38100" dir="2700000" algn="tl">
-                        <a:srgbClr val="DDDDDD"/>
-                      </a:outerShdw>
-                    </a:effectLst>
-                  </a:rPr>
-                  <a:t>, that is, the probability that an object characterized by the </a:t>
-                </a:r>
-                <a:r>
-                  <a:rPr lang="en-US" b="1" dirty="0">
-                    <a:solidFill>
-                      <a:srgbClr val="0033CC"/>
-                    </a:solidFill>
-                    <a:effectLst>
-                      <a:outerShdw blurRad="38100" dist="38100" dir="2700000" algn="tl">
-                        <a:srgbClr val="DDDDDD"/>
-                      </a:outerShdw>
-                    </a:effectLst>
-                  </a:rPr>
-                  <a:t>features </a:t>
-                </a:r>
-                <a:r>
-                  <a:rPr lang="en-US" dirty="0">
-                    <a:effectLst>
-                      <a:outerShdw blurRad="38100" dist="38100" dir="2700000" algn="tl">
-                        <a:srgbClr val="DDDDDD"/>
-                      </a:outerShdw>
-                    </a:effectLst>
-                  </a:rPr>
-                  <a:t>(i.e., attributes) </a:t>
-                </a:r>
-                <a14:m>
-                  <m:oMath xmlns:m="http://schemas.openxmlformats.org/officeDocument/2006/math">
-                    <m:r>
-                      <a:rPr lang="en-US" b="0" i="1" smtClean="0">
-                        <a:solidFill>
-                          <a:srgbClr val="0033CC"/>
-                        </a:solidFill>
-                        <a:effectLst>
-                          <a:outerShdw blurRad="38100" dist="38100" dir="2700000" algn="tl">
-                            <a:srgbClr val="DDDDDD"/>
-                          </a:outerShdw>
-                        </a:effectLst>
-                        <a:latin typeface="Cambria Math" panose="02040503050406030204" pitchFamily="18" charset="0"/>
-                      </a:rPr>
-                      <m:t>𝑥</m:t>
-                    </m:r>
-                  </m:oMath>
-                </a14:m>
-                <a:r>
-                  <a:rPr lang="en-US" dirty="0">
-                    <a:effectLst>
-                      <a:outerShdw blurRad="38100" dist="38100" dir="2700000" algn="tl">
-                        <a:srgbClr val="DDDDDD"/>
-                      </a:outerShdw>
-                    </a:effectLst>
-                  </a:rPr>
-                  <a:t> belongs to the class labeled  </a:t>
-                </a:r>
-                <a14:m>
-                  <m:oMath xmlns:m="http://schemas.openxmlformats.org/officeDocument/2006/math">
-                    <m:r>
-                      <a:rPr lang="en-US" b="0" i="1" smtClean="0">
-                        <a:solidFill>
-                          <a:srgbClr val="0033CC"/>
-                        </a:solidFill>
-                        <a:effectLst>
-                          <a:outerShdw blurRad="38100" dist="38100" dir="2700000" algn="tl">
-                            <a:srgbClr val="DDDDDD"/>
-                          </a:outerShdw>
-                        </a:effectLst>
-                        <a:latin typeface="Cambria Math" panose="02040503050406030204" pitchFamily="18" charset="0"/>
-                      </a:rPr>
-                      <m:t>𝑦</m:t>
-                    </m:r>
-                    <m:r>
-                      <a:rPr lang="en-US" b="0" i="1" smtClean="0">
-                        <a:solidFill>
-                          <a:srgbClr val="0033CC"/>
-                        </a:solidFill>
-                        <a:effectLst>
-                          <a:outerShdw blurRad="38100" dist="38100" dir="2700000" algn="tl">
-                            <a:srgbClr val="DDDDDD"/>
-                          </a:outerShdw>
-                        </a:effectLst>
-                        <a:latin typeface="Cambria Math" panose="02040503050406030204" pitchFamily="18" charset="0"/>
-                      </a:rPr>
-                      <m:t>=1</m:t>
-                    </m:r>
-                  </m:oMath>
-                </a14:m>
-                <a:r>
-                  <a:rPr lang="en-US" dirty="0">
-                    <a:effectLst>
-                      <a:outerShdw blurRad="38100" dist="38100" dir="2700000" algn="tl">
-                        <a:srgbClr val="DDDDDD"/>
-                      </a:outerShdw>
-                    </a:effectLst>
-                  </a:rPr>
-                  <a:t>.</a:t>
-                </a:r>
+                </a:br>
+                <a:endParaRPr lang="en-US" dirty="0">
+                  <a:effectLst>
+                    <a:outerShdw blurRad="38100" dist="38100" dir="2700000" algn="tl">
+                      <a:srgbClr val="DDDDDD"/>
+                    </a:outerShdw>
+                  </a:effectLst>
+                </a:endParaRPr>
               </a:p>
               <a:p>
+                <a:pPr lvl="1"/>
                 <a14:m>
                   <m:oMath xmlns:m="http://schemas.openxmlformats.org/officeDocument/2006/math">
                     <m:r>
@@ -16767,8 +15875,26 @@
                           </a:rPr>
                           <m:t>𝑥</m:t>
                         </m:r>
+                        <m:r>
+                          <a:rPr lang="en-US" b="0" i="1" smtClean="0">
+                            <a:solidFill>
+                              <a:srgbClr val="0033CC"/>
+                            </a:solidFill>
+                            <a:latin typeface="Cambria Math" panose="02040503050406030204" pitchFamily="18" charset="0"/>
+                          </a:rPr>
+                          <m:t> </m:t>
+                        </m:r>
                       </m:e>
                       <m:e>
+                        <m:r>
+                          <a:rPr lang="en-US" b="0" i="1" smtClean="0">
+                            <a:solidFill>
+                              <a:srgbClr val="0033CC"/>
+                            </a:solidFill>
+                            <a:latin typeface="Cambria Math" panose="02040503050406030204" pitchFamily="18" charset="0"/>
+                          </a:rPr>
+                          <m:t> </m:t>
+                        </m:r>
                         <m:r>
                           <a:rPr lang="en-US" b="0" i="1" smtClean="0">
                             <a:solidFill>
@@ -16818,7 +15944,7 @@
                       </a:outerShdw>
                     </a:effectLst>
                   </a:rPr>
-                  <a:t> for class </a:t>
+                  <a:t> for the class labeled  </a:t>
                 </a:r>
                 <a14:m>
                   <m:oMath xmlns:m="http://schemas.openxmlformats.org/officeDocument/2006/math">
@@ -16854,6 +15980,7 @@
                 </a:r>
               </a:p>
               <a:p>
+                <a:pPr lvl="1"/>
                 <a14:m>
                   <m:oMath xmlns:m="http://schemas.openxmlformats.org/officeDocument/2006/math">
                     <m:r>
@@ -16915,7 +16042,7 @@
                       </a:outerShdw>
                     </a:effectLst>
                   </a:rPr>
-                  <a:t>is the prior probability of class </a:t>
+                  <a:t>is the prior probability of the class labeled </a:t>
                 </a:r>
                 <a14:m>
                   <m:oMath xmlns:m="http://schemas.openxmlformats.org/officeDocument/2006/math">
@@ -16951,6 +16078,108 @@
                 </a:r>
               </a:p>
               <a:p>
+                <a:pPr marL="457200" lvl="1" indent="0">
+                  <a:buNone/>
+                </a:pPr>
+                <a:endParaRPr lang="en-US" dirty="0">
+                  <a:effectLst>
+                    <a:outerShdw blurRad="38100" dist="38100" dir="2700000" algn="tl">
+                      <a:srgbClr val="DDDDDD"/>
+                    </a:outerShdw>
+                  </a:effectLst>
+                </a:endParaRPr>
+              </a:p>
+              <a:p>
+                <a:pPr marL="0" indent="0">
+                  <a:buNone/>
+                </a:pPr>
+                <a:r>
+                  <a:rPr lang="en-US" dirty="0">
+                    <a:effectLst>
+                      <a:outerShdw blurRad="38100" dist="38100" dir="2700000" algn="tl">
+                        <a:srgbClr val="DDDDDD"/>
+                      </a:outerShdw>
+                    </a:effectLst>
+                  </a:rPr>
+                  <a:t>Any model trained with binary cross entropy necessarily approximates </a:t>
+                </a:r>
+                <a14:m>
+                  <m:oMath xmlns:m="http://schemas.openxmlformats.org/officeDocument/2006/math">
+                    <m:r>
+                      <a:rPr lang="en-US" i="1">
+                        <a:solidFill>
+                          <a:srgbClr val="0033CC"/>
+                        </a:solidFill>
+                        <a:latin typeface="Cambria Math" panose="02040503050406030204" pitchFamily="18" charset="0"/>
+                      </a:rPr>
+                      <m:t>𝑝</m:t>
+                    </m:r>
+                    <m:d>
+                      <m:dPr>
+                        <m:ctrlPr>
+                          <a:rPr lang="en-US" i="1">
+                            <a:solidFill>
+                              <a:srgbClr val="0033CC"/>
+                            </a:solidFill>
+                            <a:latin typeface="Cambria Math" panose="02040503050406030204" pitchFamily="18" charset="0"/>
+                          </a:rPr>
+                        </m:ctrlPr>
+                      </m:dPr>
+                      <m:e>
+                        <m:r>
+                          <a:rPr lang="en-US" i="1">
+                            <a:solidFill>
+                              <a:srgbClr val="0033CC"/>
+                            </a:solidFill>
+                            <a:latin typeface="Cambria Math" panose="02040503050406030204" pitchFamily="18" charset="0"/>
+                          </a:rPr>
+                          <m:t>1</m:t>
+                        </m:r>
+                        <m:r>
+                          <a:rPr lang="en-US" b="0" i="1" smtClean="0">
+                            <a:solidFill>
+                              <a:srgbClr val="0033CC"/>
+                            </a:solidFill>
+                            <a:latin typeface="Cambria Math" panose="02040503050406030204" pitchFamily="18" charset="0"/>
+                          </a:rPr>
+                          <m:t> </m:t>
+                        </m:r>
+                      </m:e>
+                      <m:e>
+                        <m:r>
+                          <a:rPr lang="en-US" i="1">
+                            <a:solidFill>
+                              <a:srgbClr val="0033CC"/>
+                            </a:solidFill>
+                            <a:latin typeface="Cambria Math" panose="02040503050406030204" pitchFamily="18" charset="0"/>
+                          </a:rPr>
+                          <m:t> </m:t>
+                        </m:r>
+                        <m:r>
+                          <a:rPr lang="en-US" i="1">
+                            <a:solidFill>
+                              <a:srgbClr val="0033CC"/>
+                            </a:solidFill>
+                            <a:latin typeface="Cambria Math" panose="02040503050406030204" pitchFamily="18" charset="0"/>
+                          </a:rPr>
+                          <m:t>𝑥</m:t>
+                        </m:r>
+                      </m:e>
+                    </m:d>
+                  </m:oMath>
+                </a14:m>
+                <a:r>
+                  <a:rPr lang="en-US" dirty="0">
+                    <a:effectLst>
+                      <a:outerShdw blurRad="38100" dist="38100" dir="2700000" algn="tl">
+                        <a:srgbClr val="DDDDDD"/>
+                      </a:outerShdw>
+                    </a:effectLst>
+                  </a:rPr>
+                  <a:t>. </a:t>
+                </a:r>
+              </a:p>
+              <a:p>
                 <a:pPr marL="0" indent="0">
                   <a:buNone/>
                 </a:pPr>
@@ -16965,7 +16194,7 @@
             </p:txBody>
           </p:sp>
         </mc:Choice>
-        <mc:Fallback xmlns="">
+        <mc:Fallback>
           <p:sp>
             <p:nvSpPr>
               <p:cNvPr id="4" name="Content Placeholder 3">
@@ -16986,7 +16215,7 @@
               <a:blipFill>
                 <a:blip r:embed="rId2"/>
                 <a:stretch>
-                  <a:fillRect l="-1309" t="-1316" r="-1637"/>
+                  <a:fillRect l="-1309" t="-1316" r="-327"/>
                 </a:stretch>
               </a:blipFill>
             </p:spPr>
@@ -17033,84 +16262,6 @@
           </a:p>
         </p:txBody>
       </p:sp>
-      <p:sp>
-        <p:nvSpPr>
-          <p:cNvPr id="5" name="Rectangle 4">
-            <a:extLst>
-              <a:ext uri="{FF2B5EF4-FFF2-40B4-BE49-F238E27FC236}">
-                <a16:creationId xmlns:a16="http://schemas.microsoft.com/office/drawing/2014/main" id="{C0257CDA-15E4-6062-2B9A-14F1EB476F48}"/>
-              </a:ext>
-            </a:extLst>
-          </p:cNvPr>
-          <p:cNvSpPr/>
-          <p:nvPr/>
-        </p:nvSpPr>
-        <p:spPr bwMode="auto">
-          <a:xfrm>
-            <a:off x="2362200" y="1676400"/>
-            <a:ext cx="4648200" cy="914400"/>
-          </a:xfrm>
-          <a:prstGeom prst="rect">
-            <a:avLst/>
-          </a:prstGeom>
-          <a:noFill/>
-          <a:ln>
-            <a:headEnd type="none" w="med" len="med"/>
-            <a:tailEnd type="none" w="med" len="med"/>
-          </a:ln>
-        </p:spPr>
-        <p:style>
-          <a:lnRef idx="2">
-            <a:schemeClr val="accent1"/>
-          </a:lnRef>
-          <a:fillRef idx="1">
-            <a:schemeClr val="lt1"/>
-          </a:fillRef>
-          <a:effectRef idx="0">
-            <a:schemeClr val="accent1"/>
-          </a:effectRef>
-          <a:fontRef idx="minor">
-            <a:schemeClr val="dk1"/>
-          </a:fontRef>
-        </p:style>
-        <p:txBody>
-          <a:bodyPr vert="horz" wrap="square" lIns="91440" tIns="45720" rIns="91440" bIns="45720" numCol="1" rtlCol="0" anchor="t" anchorCtr="0" compatLnSpc="1">
-            <a:prstTxWarp prst="textNoShape">
-              <a:avLst/>
-            </a:prstTxWarp>
-            <a:spAutoFit/>
-          </a:bodyPr>
-          <a:lstStyle/>
-          <a:p>
-            <a:pPr marL="0" marR="0" indent="0" algn="l" defTabSz="914400" rtl="0" eaLnBrk="0" fontAlgn="base" latinLnBrk="0" hangingPunct="0">
-              <a:lnSpc>
-                <a:spcPct val="100000"/>
-              </a:lnSpc>
-              <a:spcBef>
-                <a:spcPct val="0"/>
-              </a:spcBef>
-              <a:spcAft>
-                <a:spcPct val="0"/>
-              </a:spcAft>
-              <a:buClrTx/>
-              <a:buSzTx/>
-              <a:buFontTx/>
-              <a:buNone/>
-              <a:tabLst/>
-            </a:pPr>
-            <a:endParaRPr kumimoji="0" lang="en-US" sz="2400" b="0" i="0" u="none" strike="noStrike" cap="none" normalizeH="0" baseline="0">
-              <a:ln>
-                <a:noFill/>
-              </a:ln>
-              <a:solidFill>
-                <a:schemeClr val="tx1"/>
-              </a:solidFill>
-              <a:effectLst/>
-              <a:latin typeface="Times New Roman" pitchFamily="-65" charset="0"/>
-            </a:endParaRPr>
-          </a:p>
-        </p:txBody>
-      </p:sp>
     </p:spTree>
     <p:extLst>
       <p:ext uri="{BB962C8B-B14F-4D97-AF65-F5344CB8AC3E}">
@@ -17132,7 +16283,7 @@
         <p:cNvPr id="1" name="">
           <a:extLst>
             <a:ext uri="{FF2B5EF4-FFF2-40B4-BE49-F238E27FC236}">
-              <a16:creationId xmlns:a16="http://schemas.microsoft.com/office/drawing/2014/main" id="{ADDD52B3-B149-0384-60D0-3FBD9A101986}"/>
+              <a16:creationId xmlns:a16="http://schemas.microsoft.com/office/drawing/2014/main" id="{FE62805C-33FE-C4E0-A043-BAEEFB252968}"/>
             </a:ext>
           </a:extLst>
         </p:cNvPr>
@@ -17147,14 +16298,14 @@
           <a:chExt cx="0" cy="0"/>
         </a:xfrm>
       </p:grpSpPr>
-      <mc:AlternateContent xmlns:mc="http://schemas.openxmlformats.org/markup-compatibility/2006" xmlns:a14="http://schemas.microsoft.com/office/drawing/2010/main">
-        <mc:Choice Requires="a14">
+      <mc:AlternateContent xmlns:mc="http://schemas.openxmlformats.org/markup-compatibility/2006">
+        <mc:Choice xmlns:a14="http://schemas.microsoft.com/office/drawing/2010/main" Requires="a14">
           <p:sp>
             <p:nvSpPr>
               <p:cNvPr id="4" name="Content Placeholder 3">
                 <a:extLst>
                   <a:ext uri="{FF2B5EF4-FFF2-40B4-BE49-F238E27FC236}">
-                    <a16:creationId xmlns:a16="http://schemas.microsoft.com/office/drawing/2014/main" id="{E29D23C3-1A8A-B6E1-82CD-2E3C33F57EF1}"/>
+                    <a16:creationId xmlns:a16="http://schemas.microsoft.com/office/drawing/2014/main" id="{255DEE06-32D2-1EC4-196B-00B030238D4F}"/>
                   </a:ext>
                 </a:extLst>
               </p:cNvPr>
@@ -17167,8 +16318,8 @@
             </p:nvSpPr>
             <p:spPr>
               <a:xfrm>
-                <a:off x="711200" y="1295400"/>
-                <a:ext cx="7823200" cy="4819650"/>
+                <a:off x="711200" y="1123950"/>
+                <a:ext cx="7747000" cy="4819650"/>
               </a:xfrm>
             </p:spPr>
             <p:txBody>
@@ -17183,8 +16334,22 @@
                     <a:solidFill>
                       <a:srgbClr val="0033CC"/>
                     </a:solidFill>
+                    <a:latin typeface="+mn-lt"/>
+                    <a:ea typeface="Cambria Math" charset="0"/>
+                    <a:cs typeface="Cambria Math" charset="0"/>
                   </a:rPr>
-                  <a:t>Example: A Spam Filter</a:t>
+                  <a:t>Exponential loss</a:t>
+                </a:r>
+                <a:r>
+                  <a:rPr lang="en-US" b="1" dirty="0">
+                    <a:solidFill>
+                      <a:srgbClr val="0033CC"/>
+                    </a:solidFill>
+                    <a:latin typeface="Cambria Math" panose="02040503050406030204" pitchFamily="18" charset="0"/>
+                    <a:ea typeface="Cambria Math" charset="0"/>
+                    <a:cs typeface="Cambria Math" charset="0"/>
+                  </a:rPr>
+                  <a:t>		</a:t>
                 </a:r>
               </a:p>
               <a:p>
@@ -17192,244 +16357,229 @@
                   <a:buNone/>
                 </a:pPr>
                 <a:r>
-                  <a:rPr lang="en-US" dirty="0"/>
-                  <a:t>A spam filter is a binary classifier: spam vs. non-spam emails. </a:t>
+                  <a:rPr lang="en-US" dirty="0">
+                    <a:ea typeface="Cambria Math" charset="0"/>
+                    <a:cs typeface="Cambria Math" charset="0"/>
+                  </a:rPr>
+                  <a:t>	</a:t>
                 </a:r>
+                <a14:m>
+                  <m:oMath xmlns:m="http://schemas.openxmlformats.org/officeDocument/2006/math">
+                    <m:r>
+                      <a:rPr lang="en-US" i="1">
+                        <a:latin typeface="Cambria Math" panose="02040503050406030204" pitchFamily="18" charset="0"/>
+                        <a:ea typeface="Cambria Math" charset="0"/>
+                        <a:cs typeface="Cambria Math" charset="0"/>
+                      </a:rPr>
+                      <m:t>𝐿</m:t>
+                    </m:r>
+                    <m:d>
+                      <m:dPr>
+                        <m:ctrlPr>
+                          <a:rPr lang="en-US" i="1">
+                            <a:latin typeface="Cambria Math" panose="02040503050406030204" pitchFamily="18" charset="0"/>
+                            <a:ea typeface="Cambria Math" charset="0"/>
+                            <a:cs typeface="Cambria Math" charset="0"/>
+                          </a:rPr>
+                        </m:ctrlPr>
+                      </m:dPr>
+                      <m:e>
+                        <m:r>
+                          <a:rPr lang="en-US" i="1">
+                            <a:latin typeface="Cambria Math" panose="02040503050406030204" pitchFamily="18" charset="0"/>
+                            <a:ea typeface="Cambria Math" charset="0"/>
+                            <a:cs typeface="Cambria Math" charset="0"/>
+                          </a:rPr>
+                          <m:t>𝑦</m:t>
+                        </m:r>
+                        <m:r>
+                          <a:rPr lang="en-US" i="1">
+                            <a:latin typeface="Cambria Math" panose="02040503050406030204" pitchFamily="18" charset="0"/>
+                            <a:ea typeface="Cambria Math" charset="0"/>
+                            <a:cs typeface="Cambria Math" charset="0"/>
+                          </a:rPr>
+                          <m:t>, </m:t>
+                        </m:r>
+                        <m:r>
+                          <a:rPr lang="en-US" i="1">
+                            <a:latin typeface="Cambria Math" panose="02040503050406030204" pitchFamily="18" charset="0"/>
+                            <a:ea typeface="Cambria Math" charset="0"/>
+                            <a:cs typeface="Cambria Math" charset="0"/>
+                          </a:rPr>
+                          <m:t>𝑓</m:t>
+                        </m:r>
+                      </m:e>
+                    </m:d>
+                    <m:r>
+                      <a:rPr lang="en-US" i="1">
+                        <a:latin typeface="Cambria Math" panose="02040503050406030204" pitchFamily="18" charset="0"/>
+                        <a:ea typeface="Cambria Math" charset="0"/>
+                        <a:cs typeface="Cambria Math" charset="0"/>
+                      </a:rPr>
+                      <m:t>=</m:t>
+                    </m:r>
+                    <m:func>
+                      <m:funcPr>
+                        <m:ctrlPr>
+                          <a:rPr lang="en-US">
+                            <a:latin typeface="Cambria Math" panose="02040503050406030204" pitchFamily="18" charset="0"/>
+                            <a:ea typeface="Cambria Math" charset="0"/>
+                            <a:cs typeface="Cambria Math" charset="0"/>
+                          </a:rPr>
+                        </m:ctrlPr>
+                      </m:funcPr>
+                      <m:fName>
+                        <m:r>
+                          <m:rPr>
+                            <m:sty m:val="p"/>
+                          </m:rPr>
+                          <a:rPr lang="en-US">
+                            <a:latin typeface="Cambria Math" panose="02040503050406030204" pitchFamily="18" charset="0"/>
+                            <a:ea typeface="Cambria Math" charset="0"/>
+                            <a:cs typeface="Cambria Math" charset="0"/>
+                          </a:rPr>
+                          <m:t>exp</m:t>
+                        </m:r>
+                      </m:fName>
+                      <m:e>
+                        <m:d>
+                          <m:dPr>
+                            <m:ctrlPr>
+                              <a:rPr lang="en-US" i="1">
+                                <a:latin typeface="Cambria Math" panose="02040503050406030204" pitchFamily="18" charset="0"/>
+                                <a:ea typeface="Cambria Math" charset="0"/>
+                                <a:cs typeface="Cambria Math" charset="0"/>
+                              </a:rPr>
+                            </m:ctrlPr>
+                          </m:dPr>
+                          <m:e>
+                            <m:r>
+                              <a:rPr lang="en-US" i="1">
+                                <a:latin typeface="Cambria Math" panose="02040503050406030204" pitchFamily="18" charset="0"/>
+                                <a:ea typeface="Cambria Math" charset="0"/>
+                                <a:cs typeface="Cambria Math" charset="0"/>
+                              </a:rPr>
+                              <m:t>−</m:t>
+                            </m:r>
+                            <m:f>
+                              <m:fPr>
+                                <m:ctrlPr>
+                                  <a:rPr lang="en-US" i="1">
+                                    <a:latin typeface="Cambria Math" panose="02040503050406030204" pitchFamily="18" charset="0"/>
+                                    <a:ea typeface="Cambria Math" charset="0"/>
+                                    <a:cs typeface="Cambria Math" charset="0"/>
+                                  </a:rPr>
+                                </m:ctrlPr>
+                              </m:fPr>
+                              <m:num>
+                                <m:r>
+                                  <a:rPr lang="en-US" i="1">
+                                    <a:latin typeface="Cambria Math" panose="02040503050406030204" pitchFamily="18" charset="0"/>
+                                    <a:ea typeface="Cambria Math" charset="0"/>
+                                    <a:cs typeface="Cambria Math" charset="0"/>
+                                  </a:rPr>
+                                  <m:t>𝑤𝑦𝑓</m:t>
+                                </m:r>
+                              </m:num>
+                              <m:den>
+                                <m:r>
+                                  <a:rPr lang="en-US" i="1">
+                                    <a:latin typeface="Cambria Math" panose="02040503050406030204" pitchFamily="18" charset="0"/>
+                                    <a:ea typeface="Cambria Math" charset="0"/>
+                                    <a:cs typeface="Cambria Math" charset="0"/>
+                                  </a:rPr>
+                                  <m:t>2</m:t>
+                                </m:r>
+                              </m:den>
+                            </m:f>
+                          </m:e>
+                        </m:d>
+                        <m:r>
+                          <a:rPr lang="en-US" b="0" i="1" smtClean="0">
+                            <a:latin typeface="Cambria Math" panose="02040503050406030204" pitchFamily="18" charset="0"/>
+                            <a:ea typeface="Cambria Math" charset="0"/>
+                            <a:cs typeface="Cambria Math" charset="0"/>
+                          </a:rPr>
+                          <m:t>,      </m:t>
+                        </m:r>
+                        <m:r>
+                          <a:rPr lang="en-US" b="0" i="1" smtClean="0">
+                            <a:latin typeface="Cambria Math" panose="02040503050406030204" pitchFamily="18" charset="0"/>
+                            <a:ea typeface="Cambria Math" charset="0"/>
+                            <a:cs typeface="Cambria Math" charset="0"/>
+                          </a:rPr>
+                          <m:t>𝑦</m:t>
+                        </m:r>
+                        <m:r>
+                          <a:rPr lang="en-US" b="0" i="1" smtClean="0">
+                            <a:latin typeface="Cambria Math" panose="02040503050406030204" pitchFamily="18" charset="0"/>
+                            <a:ea typeface="Cambria Math" charset="0"/>
+                            <a:cs typeface="Cambria Math" charset="0"/>
+                          </a:rPr>
+                          <m:t>∈ </m:t>
+                        </m:r>
+                        <m:d>
+                          <m:dPr>
+                            <m:begChr m:val="{"/>
+                            <m:endChr m:val="}"/>
+                            <m:ctrlPr>
+                              <a:rPr lang="en-US" b="0" i="1" smtClean="0">
+                                <a:latin typeface="Cambria Math" panose="02040503050406030204" pitchFamily="18" charset="0"/>
+                                <a:ea typeface="Cambria Math" charset="0"/>
+                              </a:rPr>
+                            </m:ctrlPr>
+                          </m:dPr>
+                          <m:e>
+                            <m:r>
+                              <a:rPr lang="en-US" b="0" i="1" smtClean="0">
+                                <a:latin typeface="Cambria Math" panose="02040503050406030204" pitchFamily="18" charset="0"/>
+                                <a:ea typeface="Cambria Math" charset="0"/>
+                              </a:rPr>
+                              <m:t>−1, +1</m:t>
+                            </m:r>
+                          </m:e>
+                        </m:d>
+                        <m:r>
+                          <a:rPr lang="en-US" b="0" i="1" smtClean="0">
+                            <a:latin typeface="Cambria Math" panose="02040503050406030204" pitchFamily="18" charset="0"/>
+                            <a:ea typeface="Cambria Math" charset="0"/>
+                            <a:cs typeface="Cambria Math" charset="0"/>
+                          </a:rPr>
+                          <m:t> </m:t>
+                        </m:r>
+                      </m:e>
+                    </m:func>
+                  </m:oMath>
+                </a14:m>
+                <a:endParaRPr lang="en-US" dirty="0">
+                  <a:latin typeface="Cambria Math" panose="02040503050406030204" pitchFamily="18" charset="0"/>
+                  <a:ea typeface="Cambria Math" charset="0"/>
+                  <a:cs typeface="Cambria Math" charset="0"/>
+                </a:endParaRPr>
+              </a:p>
+              <a:p>
+                <a:pPr marL="0" indent="0">
+                  <a:buNone/>
+                </a:pPr>
+                <a:endParaRPr lang="en-US" dirty="0">
+                  <a:latin typeface="Cambria Math" panose="02040503050406030204" pitchFamily="18" charset="0"/>
+                  <a:ea typeface="Cambria Math" charset="0"/>
+                  <a:cs typeface="Cambria Math" charset="0"/>
+                </a:endParaRPr>
               </a:p>
               <a:p>
                 <a:pPr marL="0" indent="0">
                   <a:buNone/>
                 </a:pPr>
                 <a:r>
-                  <a:rPr lang="en-US" dirty="0"/>
-                  <a:t>Suppose  </a:t>
-                </a:r>
-                <a14:m>
-                  <m:oMath xmlns:m="http://schemas.openxmlformats.org/officeDocument/2006/math">
-                    <m:r>
-                      <a:rPr lang="en-US" b="0" i="1" smtClean="0">
-                        <a:solidFill>
-                          <a:srgbClr val="0033CC"/>
-                        </a:solidFill>
-                        <a:latin typeface="Cambria Math" panose="02040503050406030204" pitchFamily="18" charset="0"/>
-                      </a:rPr>
-                      <m:t>𝑦</m:t>
-                    </m:r>
-                    <m:r>
-                      <a:rPr lang="en-US" b="0" i="1" smtClean="0">
-                        <a:solidFill>
-                          <a:srgbClr val="0033CC"/>
-                        </a:solidFill>
-                        <a:latin typeface="Cambria Math" panose="02040503050406030204" pitchFamily="18" charset="0"/>
-                      </a:rPr>
-                      <m:t>=1</m:t>
-                    </m:r>
-                  </m:oMath>
-                </a14:m>
-                <a:r>
-                  <a:rPr lang="en-US" dirty="0"/>
-                  <a:t> and </a:t>
-                </a:r>
-                <a14:m>
-                  <m:oMath xmlns:m="http://schemas.openxmlformats.org/officeDocument/2006/math">
-                    <m:r>
-                      <a:rPr lang="en-US" b="0" i="1" smtClean="0">
-                        <a:solidFill>
-                          <a:srgbClr val="0033CC"/>
-                        </a:solidFill>
-                        <a:latin typeface="Cambria Math" panose="02040503050406030204" pitchFamily="18" charset="0"/>
-                      </a:rPr>
-                      <m:t>𝑦</m:t>
-                    </m:r>
-                    <m:r>
-                      <a:rPr lang="en-US" b="0" i="1" smtClean="0">
-                        <a:solidFill>
-                          <a:srgbClr val="0033CC"/>
-                        </a:solidFill>
-                        <a:latin typeface="Cambria Math" panose="02040503050406030204" pitchFamily="18" charset="0"/>
-                      </a:rPr>
-                      <m:t>=0</m:t>
-                    </m:r>
-                  </m:oMath>
-                </a14:m>
-                <a:r>
-                  <a:rPr lang="en-US" dirty="0"/>
-                  <a:t> labels spam and non-spam emails, respectively, and the training dataset comprises </a:t>
-                </a:r>
-                <a:r>
                   <a:rPr lang="en-US" dirty="0">
                     <a:solidFill>
                       <a:srgbClr val="0033CC"/>
                     </a:solidFill>
+                    <a:latin typeface="+mn-lt"/>
+                    <a:ea typeface="Cambria Math" charset="0"/>
                   </a:rPr>
-                  <a:t>50%</a:t>
-                </a:r>
-                <a:r>
-                  <a:rPr lang="en-US" dirty="0"/>
-                  <a:t> spam emails and </a:t>
-                </a:r>
-                <a:r>
-                  <a:rPr lang="en-US" dirty="0">
-                    <a:solidFill>
-                      <a:srgbClr val="0033CC"/>
-                    </a:solidFill>
-                  </a:rPr>
-                  <a:t>50%</a:t>
-                </a:r>
-                <a:r>
-                  <a:rPr lang="en-US" dirty="0"/>
-                  <a:t> non-spam emails. That is, the dataset is </a:t>
-                </a:r>
-                <a:r>
-                  <a:rPr lang="en-US" b="1" dirty="0">
-                    <a:solidFill>
-                      <a:srgbClr val="0033CC"/>
-                    </a:solidFill>
-                  </a:rPr>
-                  <a:t>balanced</a:t>
-                </a:r>
-                <a:r>
-                  <a:rPr lang="en-US" dirty="0"/>
-                  <a:t>. </a:t>
-                </a:r>
-                <a:br>
-                  <a:rPr lang="en-US" dirty="0"/>
-                </a:br>
-                <a:endParaRPr lang="en-US" dirty="0"/>
-              </a:p>
-              <a:p>
-                <a:r>
-                  <a:rPr lang="en-US" dirty="0"/>
-                  <a:t>Each email is characterized by a vector </a:t>
-                </a:r>
-                <a14:m>
-                  <m:oMath xmlns:m="http://schemas.openxmlformats.org/officeDocument/2006/math">
-                    <m:r>
-                      <a:rPr lang="en-US" i="1">
-                        <a:solidFill>
-                          <a:srgbClr val="0033CC"/>
-                        </a:solidFill>
-                        <a:latin typeface="Cambria Math" panose="02040503050406030204" pitchFamily="18" charset="0"/>
-                      </a:rPr>
-                      <m:t>𝑥</m:t>
-                    </m:r>
-                  </m:oMath>
-                </a14:m>
-                <a:r>
-                  <a:rPr lang="en-US" dirty="0"/>
-                  <a:t>, and </a:t>
-                </a:r>
-                <a14:m>
-                  <m:oMath xmlns:m="http://schemas.openxmlformats.org/officeDocument/2006/math">
-                    <m:r>
-                      <a:rPr lang="en-US" i="1" smtClean="0">
-                        <a:solidFill>
-                          <a:srgbClr val="0033CC"/>
-                        </a:solidFill>
-                        <a:latin typeface="Cambria Math" panose="02040503050406030204" pitchFamily="18" charset="0"/>
-                      </a:rPr>
-                      <m:t>𝑝</m:t>
-                    </m:r>
-                    <m:d>
-                      <m:dPr>
-                        <m:ctrlPr>
-                          <a:rPr lang="en-US" i="1">
-                            <a:solidFill>
-                              <a:srgbClr val="0033CC"/>
-                            </a:solidFill>
-                            <a:latin typeface="Cambria Math" panose="02040503050406030204" pitchFamily="18" charset="0"/>
-                          </a:rPr>
-                        </m:ctrlPr>
-                      </m:dPr>
-                      <m:e>
-                        <m:r>
-                          <a:rPr lang="en-US" i="1">
-                            <a:solidFill>
-                              <a:srgbClr val="0033CC"/>
-                            </a:solidFill>
-                            <a:latin typeface="Cambria Math" panose="02040503050406030204" pitchFamily="18" charset="0"/>
-                          </a:rPr>
-                          <m:t>𝑥</m:t>
-                        </m:r>
-                      </m:e>
-                      <m:e>
-                        <m:r>
-                          <a:rPr lang="en-US" b="0" i="1" smtClean="0">
-                            <a:solidFill>
-                              <a:srgbClr val="0033CC"/>
-                            </a:solidFill>
-                            <a:latin typeface="Cambria Math" panose="02040503050406030204" pitchFamily="18" charset="0"/>
-                          </a:rPr>
-                          <m:t>1</m:t>
-                        </m:r>
-                      </m:e>
-                    </m:d>
-                  </m:oMath>
-                </a14:m>
-                <a:r>
-                  <a:rPr lang="en-US" dirty="0"/>
-                  <a:t> and </a:t>
-                </a:r>
-                <a14:m>
-                  <m:oMath xmlns:m="http://schemas.openxmlformats.org/officeDocument/2006/math">
-                    <m:r>
-                      <a:rPr lang="en-US" i="1" smtClean="0">
-                        <a:solidFill>
-                          <a:srgbClr val="0033CC"/>
-                        </a:solidFill>
-                        <a:latin typeface="Cambria Math" panose="02040503050406030204" pitchFamily="18" charset="0"/>
-                      </a:rPr>
-                      <m:t>𝑝</m:t>
-                    </m:r>
-                    <m:d>
-                      <m:dPr>
-                        <m:ctrlPr>
-                          <a:rPr lang="en-US" i="1">
-                            <a:solidFill>
-                              <a:srgbClr val="0033CC"/>
-                            </a:solidFill>
-                            <a:latin typeface="Cambria Math" panose="02040503050406030204" pitchFamily="18" charset="0"/>
-                          </a:rPr>
-                        </m:ctrlPr>
-                      </m:dPr>
-                      <m:e>
-                        <m:r>
-                          <a:rPr lang="en-US" i="1">
-                            <a:solidFill>
-                              <a:srgbClr val="0033CC"/>
-                            </a:solidFill>
-                            <a:latin typeface="Cambria Math" panose="02040503050406030204" pitchFamily="18" charset="0"/>
-                          </a:rPr>
-                          <m:t>𝑥</m:t>
-                        </m:r>
-                      </m:e>
-                      <m:e>
-                        <m:r>
-                          <a:rPr lang="en-US" b="0" i="1" smtClean="0">
-                            <a:solidFill>
-                              <a:srgbClr val="0033CC"/>
-                            </a:solidFill>
-                            <a:latin typeface="Cambria Math" panose="02040503050406030204" pitchFamily="18" charset="0"/>
-                          </a:rPr>
-                          <m:t>0</m:t>
-                        </m:r>
-                      </m:e>
-                    </m:d>
-                  </m:oMath>
-                </a14:m>
-                <a:r>
-                  <a:rPr lang="en-US" dirty="0"/>
-                  <a:t> are the probability densities of these vectors for spam and non-spam emails, respectively.</a:t>
-                </a:r>
-                <a:br>
-                  <a:rPr lang="en-US" dirty="0"/>
-                </a:br>
-                <a:endParaRPr lang="en-US" dirty="0"/>
-              </a:p>
-              <a:p>
-                <a:r>
-                  <a:rPr lang="en-US" dirty="0"/>
-                  <a:t>The prior probabilities are </a:t>
+                  <a:t>Quantile loss (</a:t>
                 </a:r>
                 <a14:m>
                   <m:oMath xmlns:m="http://schemas.openxmlformats.org/officeDocument/2006/math">
@@ -17438,97 +16588,538 @@
                         <a:solidFill>
                           <a:srgbClr val="0033CC"/>
                         </a:solidFill>
+                        <a:latin typeface="+mn-lt"/>
+                        <a:ea typeface="Cambria Math" charset="0"/>
+                      </a:rPr>
+                      <m:t>0</m:t>
+                    </m:r>
+                    <m:r>
+                      <a:rPr lang="en-US" b="0" i="1">
+                        <a:solidFill>
+                          <a:srgbClr val="0033CC"/>
+                        </a:solidFill>
+                        <a:latin typeface="+mn-lt"/>
+                        <a:ea typeface="Cambria Math" panose="02040503050406030204" pitchFamily="18" charset="0"/>
+                      </a:rPr>
+                      <m:t>≤</m:t>
+                    </m:r>
+                    <m:r>
+                      <a:rPr lang="en-US" b="0" i="1">
+                        <a:solidFill>
+                          <a:srgbClr val="0033CC"/>
+                        </a:solidFill>
+                        <a:latin typeface="+mn-lt"/>
+                        <a:ea typeface="Cambria Math" panose="02040503050406030204" pitchFamily="18" charset="0"/>
+                      </a:rPr>
+                      <m:t>𝜏</m:t>
+                    </m:r>
+                    <m:r>
+                      <a:rPr lang="en-US" b="0" i="1">
+                        <a:solidFill>
+                          <a:srgbClr val="0033CC"/>
+                        </a:solidFill>
+                        <a:latin typeface="+mn-lt"/>
+                        <a:ea typeface="Cambria Math" panose="02040503050406030204" pitchFamily="18" charset="0"/>
+                      </a:rPr>
+                      <m:t>≤1</m:t>
+                    </m:r>
+                  </m:oMath>
+                </a14:m>
+                <a:r>
+                  <a:rPr lang="en-US" dirty="0">
+                    <a:solidFill>
+                      <a:srgbClr val="0033CC"/>
+                    </a:solidFill>
+                    <a:latin typeface="+mn-lt"/>
+                    <a:ea typeface="Cambria Math" charset="0"/>
+                  </a:rPr>
+                  <a:t>)</a:t>
+                </a:r>
+                <a:r>
+                  <a:rPr lang="en-US" dirty="0">
+                    <a:solidFill>
+                      <a:srgbClr val="0033CC"/>
+                    </a:solidFill>
+                    <a:latin typeface="Cambria Math" panose="02040503050406030204" pitchFamily="18" charset="0"/>
+                    <a:ea typeface="Cambria Math" charset="0"/>
+                  </a:rPr>
+                  <a:t>	</a:t>
+                </a:r>
+              </a:p>
+              <a:p>
+                <a:pPr marL="0" indent="0">
+                  <a:buNone/>
+                </a:pPr>
+                <a:r>
+                  <a:rPr lang="en-US" dirty="0">
+                    <a:latin typeface="Cambria Math" panose="02040503050406030204" pitchFamily="18" charset="0"/>
+                    <a:ea typeface="Cambria Math" charset="0"/>
+                  </a:rPr>
+                  <a:t>	</a:t>
+                </a:r>
+                <a14:m>
+                  <m:oMath xmlns:m="http://schemas.openxmlformats.org/officeDocument/2006/math">
+                    <m:r>
+                      <a:rPr lang="en-US" i="1">
                         <a:latin typeface="Cambria Math" panose="02040503050406030204" pitchFamily="18" charset="0"/>
+                        <a:ea typeface="Cambria Math" charset="0"/>
+                        <a:cs typeface="Cambria Math" charset="0"/>
                       </a:rPr>
-                      <m:t>𝜋</m:t>
+                      <m:t>𝐿</m:t>
                     </m:r>
                     <m:d>
                       <m:dPr>
                         <m:ctrlPr>
-                          <a:rPr lang="en-US" b="0" i="1">
-                            <a:solidFill>
-                              <a:srgbClr val="0033CC"/>
-                            </a:solidFill>
+                          <a:rPr lang="en-US" i="1">
                             <a:latin typeface="Cambria Math" panose="02040503050406030204" pitchFamily="18" charset="0"/>
+                            <a:ea typeface="Cambria Math" charset="0"/>
+                            <a:cs typeface="Cambria Math" charset="0"/>
                           </a:rPr>
                         </m:ctrlPr>
                       </m:dPr>
                       <m:e>
                         <m:r>
-                          <a:rPr lang="en-US" b="0" i="1">
-                            <a:solidFill>
-                              <a:srgbClr val="0033CC"/>
-                            </a:solidFill>
+                          <a:rPr lang="en-US" i="1">
                             <a:latin typeface="Cambria Math" panose="02040503050406030204" pitchFamily="18" charset="0"/>
+                            <a:ea typeface="Cambria Math" charset="0"/>
+                            <a:cs typeface="Cambria Math" charset="0"/>
                           </a:rPr>
-                          <m:t>1</m:t>
+                          <m:t>𝑦</m:t>
+                        </m:r>
+                        <m:r>
+                          <a:rPr lang="en-US" i="1">
+                            <a:latin typeface="Cambria Math" panose="02040503050406030204" pitchFamily="18" charset="0"/>
+                            <a:ea typeface="Cambria Math" charset="0"/>
+                            <a:cs typeface="Cambria Math" charset="0"/>
+                          </a:rPr>
+                          <m:t>, </m:t>
+                        </m:r>
+                        <m:r>
+                          <a:rPr lang="en-US" i="1">
+                            <a:latin typeface="Cambria Math" panose="02040503050406030204" pitchFamily="18" charset="0"/>
+                            <a:ea typeface="Cambria Math" charset="0"/>
+                            <a:cs typeface="Cambria Math" charset="0"/>
+                          </a:rPr>
+                          <m:t>𝑓</m:t>
                         </m:r>
                       </m:e>
                     </m:d>
                     <m:r>
-                      <a:rPr lang="en-US" b="0" i="1" smtClean="0">
-                        <a:solidFill>
-                          <a:srgbClr val="0033CC"/>
-                        </a:solidFill>
+                      <a:rPr lang="en-US" i="1">
                         <a:latin typeface="Cambria Math" panose="02040503050406030204" pitchFamily="18" charset="0"/>
+                        <a:ea typeface="Cambria Math" charset="0"/>
+                        <a:cs typeface="Cambria Math" charset="0"/>
                       </a:rPr>
-                      <m:t>=0.50</m:t>
-                    </m:r>
-                  </m:oMath>
-                </a14:m>
-                <a:r>
-                  <a:rPr lang="en-US" dirty="0"/>
-                  <a:t> and </a:t>
-                </a:r>
-                <a14:m>
-                  <m:oMath xmlns:m="http://schemas.openxmlformats.org/officeDocument/2006/math">
-                    <m:r>
-                      <a:rPr lang="en-US" b="0" i="1">
-                        <a:solidFill>
-                          <a:srgbClr val="0033CC"/>
-                        </a:solidFill>
-                        <a:latin typeface="Cambria Math" panose="02040503050406030204" pitchFamily="18" charset="0"/>
-                      </a:rPr>
-                      <m:t>𝜋</m:t>
+                      <m:t>=</m:t>
                     </m:r>
                     <m:d>
                       <m:dPr>
+                        <m:begChr m:val="{"/>
+                        <m:endChr m:val=""/>
                         <m:ctrlPr>
-                          <a:rPr lang="en-US" b="0" i="1" smtClean="0">
-                            <a:solidFill>
-                              <a:srgbClr val="0033CC"/>
-                            </a:solidFill>
+                          <a:rPr lang="en-US" i="1">
                             <a:latin typeface="Cambria Math" panose="02040503050406030204" pitchFamily="18" charset="0"/>
+                            <a:ea typeface="Cambria Math" charset="0"/>
                           </a:rPr>
                         </m:ctrlPr>
                       </m:dPr>
                       <m:e>
-                        <m:r>
-                          <a:rPr lang="en-US" b="0" i="1" smtClean="0">
-                            <a:solidFill>
-                              <a:srgbClr val="0033CC"/>
-                            </a:solidFill>
-                            <a:latin typeface="Cambria Math" panose="02040503050406030204" pitchFamily="18" charset="0"/>
-                          </a:rPr>
-                          <m:t>0</m:t>
-                        </m:r>
+                        <m:eqArr>
+                          <m:eqArrPr>
+                            <m:ctrlPr>
+                              <a:rPr lang="en-US" i="1">
+                                <a:latin typeface="Cambria Math" panose="02040503050406030204" pitchFamily="18" charset="0"/>
+                                <a:ea typeface="Cambria Math" charset="0"/>
+                              </a:rPr>
+                            </m:ctrlPr>
+                          </m:eqArrPr>
+                          <m:e>
+                            <m:r>
+                              <a:rPr lang="en-US" i="1">
+                                <a:latin typeface="Cambria Math" panose="02040503050406030204" pitchFamily="18" charset="0"/>
+                                <a:ea typeface="Cambria Math" charset="0"/>
+                              </a:rPr>
+                              <m:t>𝜏</m:t>
+                            </m:r>
+                            <m:d>
+                              <m:dPr>
+                                <m:ctrlPr>
+                                  <a:rPr lang="en-US" i="1">
+                                    <a:latin typeface="Cambria Math" panose="02040503050406030204" pitchFamily="18" charset="0"/>
+                                    <a:ea typeface="Cambria Math" charset="0"/>
+                                  </a:rPr>
+                                </m:ctrlPr>
+                              </m:dPr>
+                              <m:e>
+                                <m:r>
+                                  <a:rPr lang="en-US" i="1">
+                                    <a:latin typeface="Cambria Math" panose="02040503050406030204" pitchFamily="18" charset="0"/>
+                                    <a:ea typeface="Cambria Math" charset="0"/>
+                                  </a:rPr>
+                                  <m:t>𝑦</m:t>
+                                </m:r>
+                                <m:r>
+                                  <a:rPr lang="en-US" i="1">
+                                    <a:latin typeface="Cambria Math" panose="02040503050406030204" pitchFamily="18" charset="0"/>
+                                    <a:ea typeface="Cambria Math" charset="0"/>
+                                  </a:rPr>
+                                  <m:t>−</m:t>
+                                </m:r>
+                                <m:r>
+                                  <a:rPr lang="en-US" i="1">
+                                    <a:latin typeface="Cambria Math" panose="02040503050406030204" pitchFamily="18" charset="0"/>
+                                    <a:ea typeface="Cambria Math" charset="0"/>
+                                  </a:rPr>
+                                  <m:t>𝑓</m:t>
+                                </m:r>
+                              </m:e>
+                            </m:d>
+                            <m:r>
+                              <a:rPr lang="en-US" i="1">
+                                <a:latin typeface="Cambria Math" panose="02040503050406030204" pitchFamily="18" charset="0"/>
+                                <a:ea typeface="Cambria Math" charset="0"/>
+                              </a:rPr>
+                              <m:t>              </m:t>
+                            </m:r>
+                            <m:r>
+                              <a:rPr lang="en-US" i="1">
+                                <a:latin typeface="Cambria Math" panose="02040503050406030204" pitchFamily="18" charset="0"/>
+                                <a:ea typeface="Cambria Math" charset="0"/>
+                              </a:rPr>
+                              <m:t>𝑦</m:t>
+                            </m:r>
+                            <m:r>
+                              <a:rPr lang="en-US" i="1">
+                                <a:latin typeface="Cambria Math" panose="02040503050406030204" pitchFamily="18" charset="0"/>
+                                <a:ea typeface="Cambria Math" panose="02040503050406030204" pitchFamily="18" charset="0"/>
+                              </a:rPr>
+                              <m:t>≥</m:t>
+                            </m:r>
+                            <m:r>
+                              <a:rPr lang="en-US" i="1">
+                                <a:latin typeface="Cambria Math" panose="02040503050406030204" pitchFamily="18" charset="0"/>
+                                <a:ea typeface="Cambria Math" panose="02040503050406030204" pitchFamily="18" charset="0"/>
+                              </a:rPr>
+                              <m:t>𝑓</m:t>
+                            </m:r>
+                            <m:r>
+                              <a:rPr lang="en-US" i="1">
+                                <a:latin typeface="Cambria Math" panose="02040503050406030204" pitchFamily="18" charset="0"/>
+                                <a:ea typeface="Cambria Math" charset="0"/>
+                              </a:rPr>
+                              <m:t> </m:t>
+                            </m:r>
+                          </m:e>
+                          <m:e>
+                            <m:d>
+                              <m:dPr>
+                                <m:ctrlPr>
+                                  <a:rPr lang="en-US" i="1">
+                                    <a:latin typeface="Cambria Math" panose="02040503050406030204" pitchFamily="18" charset="0"/>
+                                  </a:rPr>
+                                </m:ctrlPr>
+                              </m:dPr>
+                              <m:e>
+                                <m:r>
+                                  <a:rPr lang="en-US" i="1">
+                                    <a:latin typeface="Cambria Math" panose="02040503050406030204" pitchFamily="18" charset="0"/>
+                                  </a:rPr>
+                                  <m:t>1−</m:t>
+                                </m:r>
+                                <m:r>
+                                  <a:rPr lang="en-US" i="1">
+                                    <a:latin typeface="Cambria Math" panose="02040503050406030204" pitchFamily="18" charset="0"/>
+                                  </a:rPr>
+                                  <m:t>𝜏</m:t>
+                                </m:r>
+                              </m:e>
+                            </m:d>
+                            <m:d>
+                              <m:dPr>
+                                <m:ctrlPr>
+                                  <a:rPr lang="en-US" i="1">
+                                    <a:latin typeface="Cambria Math" panose="02040503050406030204" pitchFamily="18" charset="0"/>
+                                  </a:rPr>
+                                </m:ctrlPr>
+                              </m:dPr>
+                              <m:e>
+                                <m:r>
+                                  <a:rPr lang="en-US" i="1">
+                                    <a:latin typeface="Cambria Math" panose="02040503050406030204" pitchFamily="18" charset="0"/>
+                                  </a:rPr>
+                                  <m:t>𝑓</m:t>
+                                </m:r>
+                                <m:r>
+                                  <a:rPr lang="en-US" i="1">
+                                    <a:latin typeface="Cambria Math" panose="02040503050406030204" pitchFamily="18" charset="0"/>
+                                  </a:rPr>
+                                  <m:t>−</m:t>
+                                </m:r>
+                                <m:r>
+                                  <a:rPr lang="en-US" i="1">
+                                    <a:latin typeface="Cambria Math" panose="02040503050406030204" pitchFamily="18" charset="0"/>
+                                  </a:rPr>
+                                  <m:t>𝑦</m:t>
+                                </m:r>
+                              </m:e>
+                            </m:d>
+                            <m:r>
+                              <a:rPr lang="en-US" i="1">
+                                <a:latin typeface="Cambria Math" panose="02040503050406030204" pitchFamily="18" charset="0"/>
+                              </a:rPr>
+                              <m:t>  </m:t>
+                            </m:r>
+                            <m:r>
+                              <a:rPr lang="en-US" i="1">
+                                <a:latin typeface="Cambria Math" panose="02040503050406030204" pitchFamily="18" charset="0"/>
+                              </a:rPr>
+                              <m:t>𝑦</m:t>
+                            </m:r>
+                            <m:r>
+                              <a:rPr lang="en-US" i="1">
+                                <a:latin typeface="Cambria Math" panose="02040503050406030204" pitchFamily="18" charset="0"/>
+                              </a:rPr>
+                              <m:t>&lt;</m:t>
+                            </m:r>
+                            <m:r>
+                              <a:rPr lang="en-US" i="1">
+                                <a:latin typeface="Cambria Math" panose="02040503050406030204" pitchFamily="18" charset="0"/>
+                              </a:rPr>
+                              <m:t>𝑓</m:t>
+                            </m:r>
+                          </m:e>
+                        </m:eqArr>
                       </m:e>
                     </m:d>
-                    <m:r>
-                      <a:rPr lang="en-US" b="0" i="1" smtClean="0">
-                        <a:solidFill>
-                          <a:srgbClr val="0033CC"/>
-                        </a:solidFill>
-                        <a:latin typeface="Cambria Math" panose="02040503050406030204" pitchFamily="18" charset="0"/>
-                      </a:rPr>
-                      <m:t>=0.50</m:t>
-                    </m:r>
                   </m:oMath>
                 </a14:m>
+                <a:endParaRPr lang="en-US" dirty="0">
+                  <a:latin typeface="Cambria Math" panose="02040503050406030204" pitchFamily="18" charset="0"/>
+                </a:endParaRPr>
+              </a:p>
+              <a:p>
+                <a:pPr marL="0" indent="0">
+                  <a:buNone/>
+                </a:pPr>
+                <a:endParaRPr lang="en-US" dirty="0"/>
+              </a:p>
+              <a:p>
+                <a:pPr marL="0" indent="0">
+                  <a:buNone/>
+                </a:pPr>
                 <a:r>
-                  <a:rPr lang="en-US" dirty="0"/>
-                  <a:t>.  </a:t>
+                  <a:rPr lang="en-US" dirty="0">
+                    <a:solidFill>
+                      <a:srgbClr val="0033CC"/>
+                    </a:solidFill>
+                    <a:latin typeface="+mn-lt"/>
+                  </a:rPr>
+                  <a:t>Zero-One loss</a:t>
                 </a:r>
+              </a:p>
+              <a:p>
+                <a:pPr marL="0" indent="0">
+                  <a:buNone/>
+                </a:pPr>
+                <a14:m>
+                  <m:oMathPara xmlns:m="http://schemas.openxmlformats.org/officeDocument/2006/math">
+                    <m:oMath>
+                      <m:r>
+                        <a:rPr lang="en-US" i="1">
+                          <a:latin typeface="Cambria Math" panose="02040503050406030204" pitchFamily="18" charset="0"/>
+                          <a:ea typeface="Cambria Math" charset="0"/>
+                          <a:cs typeface="Cambria Math" charset="0"/>
+                        </a:rPr>
+                        <m:t>𝐿</m:t>
+                      </m:r>
+                      <m:d>
+                        <m:dPr>
+                          <m:ctrlPr>
+                            <a:rPr lang="en-US" i="1">
+                              <a:latin typeface="Cambria Math" panose="02040503050406030204" pitchFamily="18" charset="0"/>
+                              <a:ea typeface="Cambria Math" charset="0"/>
+                              <a:cs typeface="Cambria Math" charset="0"/>
+                            </a:rPr>
+                          </m:ctrlPr>
+                        </m:dPr>
+                        <m:e>
+                          <m:r>
+                            <a:rPr lang="en-US" i="1">
+                              <a:latin typeface="Cambria Math" panose="02040503050406030204" pitchFamily="18" charset="0"/>
+                              <a:ea typeface="Cambria Math" charset="0"/>
+                              <a:cs typeface="Cambria Math" charset="0"/>
+                            </a:rPr>
+                            <m:t>𝑦</m:t>
+                          </m:r>
+                          <m:r>
+                            <a:rPr lang="en-US" i="1">
+                              <a:latin typeface="Cambria Math" panose="02040503050406030204" pitchFamily="18" charset="0"/>
+                              <a:ea typeface="Cambria Math" charset="0"/>
+                              <a:cs typeface="Cambria Math" charset="0"/>
+                            </a:rPr>
+                            <m:t>, </m:t>
+                          </m:r>
+                          <m:r>
+                            <a:rPr lang="en-US" i="1">
+                              <a:latin typeface="Cambria Math" panose="02040503050406030204" pitchFamily="18" charset="0"/>
+                              <a:ea typeface="Cambria Math" charset="0"/>
+                              <a:cs typeface="Cambria Math" charset="0"/>
+                            </a:rPr>
+                            <m:t>𝑓</m:t>
+                          </m:r>
+                        </m:e>
+                      </m:d>
+                      <m:r>
+                        <a:rPr lang="en-US" i="1">
+                          <a:latin typeface="Cambria Math" panose="02040503050406030204" pitchFamily="18" charset="0"/>
+                          <a:ea typeface="Cambria Math" charset="0"/>
+                          <a:cs typeface="Cambria Math" charset="0"/>
+                        </a:rPr>
+                        <m:t>=</m:t>
+                      </m:r>
+                      <m:d>
+                        <m:dPr>
+                          <m:begChr m:val="{"/>
+                          <m:endChr m:val=""/>
+                          <m:ctrlPr>
+                            <a:rPr lang="en-US" b="0" i="1" smtClean="0">
+                              <a:latin typeface="Cambria Math" panose="02040503050406030204" pitchFamily="18" charset="0"/>
+                              <a:ea typeface="Cambria Math" charset="0"/>
+                            </a:rPr>
+                          </m:ctrlPr>
+                        </m:dPr>
+                        <m:e>
+                          <m:eqArr>
+                            <m:eqArrPr>
+                              <m:ctrlPr>
+                                <a:rPr lang="en-US" b="0" i="1" smtClean="0">
+                                  <a:latin typeface="Cambria Math" panose="02040503050406030204" pitchFamily="18" charset="0"/>
+                                  <a:ea typeface="Cambria Math" charset="0"/>
+                                </a:rPr>
+                              </m:ctrlPr>
+                            </m:eqArrPr>
+                            <m:e>
+                              <m:r>
+                                <a:rPr lang="en-US" b="0" i="1" smtClean="0">
+                                  <a:latin typeface="Cambria Math" panose="02040503050406030204" pitchFamily="18" charset="0"/>
+                                  <a:ea typeface="Cambria Math" charset="0"/>
+                                </a:rPr>
+                                <m:t>0          |</m:t>
+                              </m:r>
+                              <m:r>
+                                <a:rPr lang="en-US" b="0" i="1" smtClean="0">
+                                  <a:latin typeface="Cambria Math" panose="02040503050406030204" pitchFamily="18" charset="0"/>
+                                  <a:ea typeface="Cambria Math" charset="0"/>
+                                </a:rPr>
+                                <m:t>𝑦</m:t>
+                              </m:r>
+                              <m:r>
+                                <a:rPr lang="en-US" b="0" i="1" smtClean="0">
+                                  <a:latin typeface="Cambria Math" panose="02040503050406030204" pitchFamily="18" charset="0"/>
+                                  <a:ea typeface="Cambria Math" charset="0"/>
+                                </a:rPr>
+                                <m:t>−</m:t>
+                              </m:r>
+                              <m:r>
+                                <a:rPr lang="en-US" b="0" i="1" smtClean="0">
+                                  <a:latin typeface="Cambria Math" panose="02040503050406030204" pitchFamily="18" charset="0"/>
+                                  <a:ea typeface="Cambria Math" charset="0"/>
+                                </a:rPr>
+                                <m:t>𝑓</m:t>
+                              </m:r>
+                              <m:r>
+                                <a:rPr lang="en-US" b="0" i="1" smtClean="0">
+                                  <a:latin typeface="Cambria Math" panose="02040503050406030204" pitchFamily="18" charset="0"/>
+                                  <a:ea typeface="Cambria Math" charset="0"/>
+                                </a:rPr>
+                                <m:t>|≤</m:t>
+                              </m:r>
+                              <m:r>
+                                <a:rPr lang="en-US" b="0" i="1" smtClean="0">
+                                  <a:latin typeface="Cambria Math" panose="02040503050406030204" pitchFamily="18" charset="0"/>
+                                  <a:ea typeface="Cambria Math" panose="02040503050406030204" pitchFamily="18" charset="0"/>
+                                </a:rPr>
+                                <m:t>𝑏</m:t>
+                              </m:r>
+                            </m:e>
+                            <m:e>
+                              <m:r>
+                                <a:rPr lang="en-US" b="0" i="1" smtClean="0">
+                                  <a:latin typeface="Cambria Math" panose="02040503050406030204" pitchFamily="18" charset="0"/>
+                                  <a:ea typeface="Cambria Math" charset="0"/>
+                                </a:rPr>
+                                <m:t> 1          </m:t>
+                              </m:r>
+                              <m:d>
+                                <m:dPr>
+                                  <m:begChr m:val="|"/>
+                                  <m:endChr m:val="|"/>
+                                  <m:ctrlPr>
+                                    <a:rPr lang="en-US" b="0" i="1" smtClean="0">
+                                      <a:latin typeface="Cambria Math" panose="02040503050406030204" pitchFamily="18" charset="0"/>
+                                      <a:ea typeface="Cambria Math" charset="0"/>
+                                    </a:rPr>
+                                  </m:ctrlPr>
+                                </m:dPr>
+                                <m:e>
+                                  <m:r>
+                                    <a:rPr lang="en-US" b="0" i="1" smtClean="0">
+                                      <a:latin typeface="Cambria Math" panose="02040503050406030204" pitchFamily="18" charset="0"/>
+                                      <a:ea typeface="Cambria Math" charset="0"/>
+                                    </a:rPr>
+                                    <m:t>𝑦</m:t>
+                                  </m:r>
+                                  <m:r>
+                                    <a:rPr lang="en-US" b="0" i="1" smtClean="0">
+                                      <a:latin typeface="Cambria Math" panose="02040503050406030204" pitchFamily="18" charset="0"/>
+                                      <a:ea typeface="Cambria Math" charset="0"/>
+                                    </a:rPr>
+                                    <m:t>−</m:t>
+                                  </m:r>
+                                  <m:r>
+                                    <a:rPr lang="en-US" b="0" i="1" smtClean="0">
+                                      <a:latin typeface="Cambria Math" panose="02040503050406030204" pitchFamily="18" charset="0"/>
+                                      <a:ea typeface="Cambria Math" charset="0"/>
+                                    </a:rPr>
+                                    <m:t>𝑓</m:t>
+                                  </m:r>
+                                </m:e>
+                              </m:d>
+                              <m:r>
+                                <a:rPr lang="en-US" b="0" i="1" smtClean="0">
+                                  <a:latin typeface="Cambria Math" panose="02040503050406030204" pitchFamily="18" charset="0"/>
+                                  <a:ea typeface="Cambria Math" charset="0"/>
+                                </a:rPr>
+                                <m:t>&gt;</m:t>
+                              </m:r>
+                              <m:r>
+                                <a:rPr lang="en-US" b="0" i="1" smtClean="0">
+                                  <a:latin typeface="Cambria Math" panose="02040503050406030204" pitchFamily="18" charset="0"/>
+                                  <a:ea typeface="Cambria Math" charset="0"/>
+                                </a:rPr>
+                                <m:t>𝑏</m:t>
+                              </m:r>
+                              <m:r>
+                                <a:rPr lang="en-US" b="0" i="1" smtClean="0">
+                                  <a:latin typeface="Cambria Math" panose="02040503050406030204" pitchFamily="18" charset="0"/>
+                                  <a:ea typeface="Cambria Math" charset="0"/>
+                                </a:rPr>
+                                <m:t> </m:t>
+                              </m:r>
+                            </m:e>
+                          </m:eqArr>
+                        </m:e>
+                      </m:d>
+                    </m:oMath>
+                  </m:oMathPara>
+                </a14:m>
+                <a:endParaRPr lang="en-US" dirty="0"/>
+              </a:p>
+              <a:p>
+                <a:pPr marL="0" indent="0">
+                  <a:buNone/>
+                </a:pPr>
+                <a:endParaRPr lang="en-US" dirty="0"/>
               </a:p>
               <a:p>
                 <a:pPr marL="0" indent="0">
@@ -17545,13 +17136,13 @@
             </p:txBody>
           </p:sp>
         </mc:Choice>
-        <mc:Fallback xmlns="">
+        <mc:Fallback>
           <p:sp>
             <p:nvSpPr>
               <p:cNvPr id="4" name="Content Placeholder 3">
                 <a:extLst>
                   <a:ext uri="{FF2B5EF4-FFF2-40B4-BE49-F238E27FC236}">
-                    <a16:creationId xmlns:a16="http://schemas.microsoft.com/office/drawing/2014/main" id="{E29D23C3-1A8A-B6E1-82CD-2E3C33F57EF1}"/>
+                    <a16:creationId xmlns:a16="http://schemas.microsoft.com/office/drawing/2014/main" id="{255DEE06-32D2-1EC4-196B-00B030238D4F}"/>
                   </a:ext>
                 </a:extLst>
               </p:cNvPr>
@@ -17564,13 +17155,13 @@
             </p:nvSpPr>
             <p:spPr>
               <a:xfrm>
-                <a:off x="711200" y="1295400"/>
-                <a:ext cx="7823200" cy="4819650"/>
+                <a:off x="711200" y="1123950"/>
+                <a:ext cx="7747000" cy="4819650"/>
               </a:xfrm>
               <a:blipFill>
                 <a:blip r:embed="rId2"/>
                 <a:stretch>
-                  <a:fillRect l="-1299" t="-1316" r="-1461" b="-2105"/>
+                  <a:fillRect l="-1309" t="-1050" b="-52231"/>
                 </a:stretch>
               </a:blipFill>
             </p:spPr>
@@ -17594,7 +17185,7 @@
           <p:cNvPr id="3" name="Title 2">
             <a:extLst>
               <a:ext uri="{FF2B5EF4-FFF2-40B4-BE49-F238E27FC236}">
-                <a16:creationId xmlns:a16="http://schemas.microsoft.com/office/drawing/2014/main" id="{F1F8539E-70B2-43DC-E94F-8C95CE813264}"/>
+                <a16:creationId xmlns:a16="http://schemas.microsoft.com/office/drawing/2014/main" id="{60E6CDD5-5F74-FC26-FB76-AE145174BADC}"/>
               </a:ext>
             </a:extLst>
           </p:cNvPr>
@@ -17611,8 +17202,12 @@
           <a:lstStyle/>
           <a:p>
             <a:r>
-              <a:rPr lang="en-US" dirty="0"/>
-              <a:t>Binary Cross Entropy Loss (3)</a:t>
+              <a:rPr lang="en-US" dirty="0">
+                <a:solidFill>
+                  <a:srgbClr val="0033CC"/>
+                </a:solidFill>
+              </a:rPr>
+              <a:t>Other Loss Functions</a:t>
             </a:r>
           </a:p>
         </p:txBody>
@@ -17620,7 +17215,346 @@
     </p:spTree>
     <p:extLst>
       <p:ext uri="{BB962C8B-B14F-4D97-AF65-F5344CB8AC3E}">
-        <p14:creationId xmlns:p14="http://schemas.microsoft.com/office/powerpoint/2010/main" val="2653704022"/>
+        <p14:creationId xmlns:p14="http://schemas.microsoft.com/office/powerpoint/2010/main" val="2125969678"/>
+      </p:ext>
+    </p:extLst>
+  </p:cSld>
+  <p:clrMapOvr>
+    <a:masterClrMapping/>
+  </p:clrMapOvr>
+  <p:timing>
+    <p:tnLst>
+      <p:par>
+        <p:cTn id="1" dur="indefinite" restart="never" nodeType="tmRoot">
+          <p:childTnLst>
+            <p:seq concurrent="1" nextAc="seek">
+              <p:cTn id="2" dur="indefinite" nodeType="mainSeq">
+                <p:childTnLst>
+                  <p:par>
+                    <p:cTn id="3" fill="hold">
+                      <p:stCondLst>
+                        <p:cond delay="indefinite"/>
+                        <p:cond evt="onBegin" delay="0">
+                          <p:tn val="2"/>
+                        </p:cond>
+                      </p:stCondLst>
+                      <p:childTnLst>
+                        <p:par>
+                          <p:cTn id="4" fill="hold">
+                            <p:stCondLst>
+                              <p:cond delay="0"/>
+                            </p:stCondLst>
+                            <p:childTnLst>
+                              <p:par>
+                                <p:cTn id="5" presetID="1" presetClass="entr" presetSubtype="0" fill="hold" nodeType="withEffect">
+                                  <p:stCondLst>
+                                    <p:cond delay="0"/>
+                                  </p:stCondLst>
+                                  <p:childTnLst>
+                                    <p:set>
+                                      <p:cBhvr>
+                                        <p:cTn id="6" dur="1" fill="hold">
+                                          <p:stCondLst>
+                                            <p:cond delay="0"/>
+                                          </p:stCondLst>
+                                        </p:cTn>
+                                        <p:tgtEl>
+                                          <p:spTgt spid="4">
+                                            <p:txEl>
+                                              <p:pRg st="0" end="0"/>
+                                            </p:txEl>
+                                          </p:spTgt>
+                                        </p:tgtEl>
+                                        <p:attrNameLst>
+                                          <p:attrName>style.visibility</p:attrName>
+                                        </p:attrNameLst>
+                                      </p:cBhvr>
+                                      <p:to>
+                                        <p:strVal val="visible"/>
+                                      </p:to>
+                                    </p:set>
+                                  </p:childTnLst>
+                                </p:cTn>
+                              </p:par>
+                              <p:par>
+                                <p:cTn id="7" presetID="1" presetClass="entr" presetSubtype="0" fill="hold" nodeType="withEffect">
+                                  <p:stCondLst>
+                                    <p:cond delay="0"/>
+                                  </p:stCondLst>
+                                  <p:childTnLst>
+                                    <p:set>
+                                      <p:cBhvr>
+                                        <p:cTn id="8" dur="1" fill="hold">
+                                          <p:stCondLst>
+                                            <p:cond delay="0"/>
+                                          </p:stCondLst>
+                                        </p:cTn>
+                                        <p:tgtEl>
+                                          <p:spTgt spid="4">
+                                            <p:txEl>
+                                              <p:pRg st="1" end="1"/>
+                                            </p:txEl>
+                                          </p:spTgt>
+                                        </p:tgtEl>
+                                        <p:attrNameLst>
+                                          <p:attrName>style.visibility</p:attrName>
+                                        </p:attrNameLst>
+                                      </p:cBhvr>
+                                      <p:to>
+                                        <p:strVal val="visible"/>
+                                      </p:to>
+                                    </p:set>
+                                  </p:childTnLst>
+                                </p:cTn>
+                              </p:par>
+                            </p:childTnLst>
+                          </p:cTn>
+                        </p:par>
+                      </p:childTnLst>
+                    </p:cTn>
+                  </p:par>
+                  <p:par>
+                    <p:cTn id="9" fill="hold">
+                      <p:stCondLst>
+                        <p:cond delay="indefinite"/>
+                      </p:stCondLst>
+                      <p:childTnLst>
+                        <p:par>
+                          <p:cTn id="10" fill="hold">
+                            <p:stCondLst>
+                              <p:cond delay="0"/>
+                            </p:stCondLst>
+                            <p:childTnLst>
+                              <p:par>
+                                <p:cTn id="11" presetID="1" presetClass="entr" presetSubtype="0" fill="hold" nodeType="clickEffect">
+                                  <p:stCondLst>
+                                    <p:cond delay="0"/>
+                                  </p:stCondLst>
+                                  <p:childTnLst>
+                                    <p:set>
+                                      <p:cBhvr>
+                                        <p:cTn id="12" dur="1" fill="hold">
+                                          <p:stCondLst>
+                                            <p:cond delay="0"/>
+                                          </p:stCondLst>
+                                        </p:cTn>
+                                        <p:tgtEl>
+                                          <p:spTgt spid="4">
+                                            <p:txEl>
+                                              <p:pRg st="3" end="3"/>
+                                            </p:txEl>
+                                          </p:spTgt>
+                                        </p:tgtEl>
+                                        <p:attrNameLst>
+                                          <p:attrName>style.visibility</p:attrName>
+                                        </p:attrNameLst>
+                                      </p:cBhvr>
+                                      <p:to>
+                                        <p:strVal val="visible"/>
+                                      </p:to>
+                                    </p:set>
+                                  </p:childTnLst>
+                                </p:cTn>
+                              </p:par>
+                              <p:par>
+                                <p:cTn id="13" presetID="1" presetClass="entr" presetSubtype="0" fill="hold" nodeType="withEffect">
+                                  <p:stCondLst>
+                                    <p:cond delay="0"/>
+                                  </p:stCondLst>
+                                  <p:childTnLst>
+                                    <p:set>
+                                      <p:cBhvr>
+                                        <p:cTn id="14" dur="1" fill="hold">
+                                          <p:stCondLst>
+                                            <p:cond delay="0"/>
+                                          </p:stCondLst>
+                                        </p:cTn>
+                                        <p:tgtEl>
+                                          <p:spTgt spid="4">
+                                            <p:txEl>
+                                              <p:pRg st="4" end="4"/>
+                                            </p:txEl>
+                                          </p:spTgt>
+                                        </p:tgtEl>
+                                        <p:attrNameLst>
+                                          <p:attrName>style.visibility</p:attrName>
+                                        </p:attrNameLst>
+                                      </p:cBhvr>
+                                      <p:to>
+                                        <p:strVal val="visible"/>
+                                      </p:to>
+                                    </p:set>
+                                  </p:childTnLst>
+                                </p:cTn>
+                              </p:par>
+                            </p:childTnLst>
+                          </p:cTn>
+                        </p:par>
+                      </p:childTnLst>
+                    </p:cTn>
+                  </p:par>
+                  <p:par>
+                    <p:cTn id="15" fill="hold">
+                      <p:stCondLst>
+                        <p:cond delay="indefinite"/>
+                      </p:stCondLst>
+                      <p:childTnLst>
+                        <p:par>
+                          <p:cTn id="16" fill="hold">
+                            <p:stCondLst>
+                              <p:cond delay="0"/>
+                            </p:stCondLst>
+                            <p:childTnLst>
+                              <p:par>
+                                <p:cTn id="17" presetID="1" presetClass="entr" presetSubtype="0" fill="hold" nodeType="clickEffect">
+                                  <p:stCondLst>
+                                    <p:cond delay="0"/>
+                                  </p:stCondLst>
+                                  <p:childTnLst>
+                                    <p:set>
+                                      <p:cBhvr>
+                                        <p:cTn id="18" dur="1" fill="hold">
+                                          <p:stCondLst>
+                                            <p:cond delay="0"/>
+                                          </p:stCondLst>
+                                        </p:cTn>
+                                        <p:tgtEl>
+                                          <p:spTgt spid="4">
+                                            <p:txEl>
+                                              <p:pRg st="6" end="6"/>
+                                            </p:txEl>
+                                          </p:spTgt>
+                                        </p:tgtEl>
+                                        <p:attrNameLst>
+                                          <p:attrName>style.visibility</p:attrName>
+                                        </p:attrNameLst>
+                                      </p:cBhvr>
+                                      <p:to>
+                                        <p:strVal val="visible"/>
+                                      </p:to>
+                                    </p:set>
+                                  </p:childTnLst>
+                                </p:cTn>
+                              </p:par>
+                              <p:par>
+                                <p:cTn id="19" presetID="1" presetClass="entr" presetSubtype="0" fill="hold" nodeType="withEffect">
+                                  <p:stCondLst>
+                                    <p:cond delay="0"/>
+                                  </p:stCondLst>
+                                  <p:childTnLst>
+                                    <p:set>
+                                      <p:cBhvr>
+                                        <p:cTn id="20" dur="1" fill="hold">
+                                          <p:stCondLst>
+                                            <p:cond delay="0"/>
+                                          </p:stCondLst>
+                                        </p:cTn>
+                                        <p:tgtEl>
+                                          <p:spTgt spid="4">
+                                            <p:txEl>
+                                              <p:pRg st="7" end="7"/>
+                                            </p:txEl>
+                                          </p:spTgt>
+                                        </p:tgtEl>
+                                        <p:attrNameLst>
+                                          <p:attrName>style.visibility</p:attrName>
+                                        </p:attrNameLst>
+                                      </p:cBhvr>
+                                      <p:to>
+                                        <p:strVal val="visible"/>
+                                      </p:to>
+                                    </p:set>
+                                  </p:childTnLst>
+                                </p:cTn>
+                              </p:par>
+                            </p:childTnLst>
+                          </p:cTn>
+                        </p:par>
+                      </p:childTnLst>
+                    </p:cTn>
+                  </p:par>
+                </p:childTnLst>
+              </p:cTn>
+              <p:prevCondLst>
+                <p:cond evt="onPrev" delay="0">
+                  <p:tgtEl>
+                    <p:sldTgt/>
+                  </p:tgtEl>
+                </p:cond>
+              </p:prevCondLst>
+              <p:nextCondLst>
+                <p:cond evt="onNext" delay="0">
+                  <p:tgtEl>
+                    <p:sldTgt/>
+                  </p:tgtEl>
+                </p:cond>
+              </p:nextCondLst>
+            </p:seq>
+          </p:childTnLst>
+        </p:cTn>
+      </p:par>
+    </p:tnLst>
+  </p:timing>
+</p:sld>
+</file>
+
+<file path=ppt/slides/slide23.xml><?xml version="1.0" encoding="utf-8"?>
+<p:sld xmlns:a="http://schemas.openxmlformats.org/drawingml/2006/main" xmlns:r="http://schemas.openxmlformats.org/officeDocument/2006/relationships" xmlns:p="http://schemas.openxmlformats.org/presentationml/2006/main">
+  <p:cSld>
+    <p:spTree>
+      <p:nvGrpSpPr>
+        <p:cNvPr id="1" name="">
+          <a:extLst>
+            <a:ext uri="{FF2B5EF4-FFF2-40B4-BE49-F238E27FC236}">
+              <a16:creationId xmlns:a16="http://schemas.microsoft.com/office/drawing/2014/main" id="{61ECB4C0-80C8-07F9-C349-10ACCC49952E}"/>
+            </a:ext>
+          </a:extLst>
+        </p:cNvPr>
+        <p:cNvGrpSpPr/>
+        <p:nvPr/>
+      </p:nvGrpSpPr>
+      <p:grpSpPr>
+        <a:xfrm>
+          <a:off x="0" y="0"/>
+          <a:ext cx="0" cy="0"/>
+          <a:chOff x="0" y="0"/>
+          <a:chExt cx="0" cy="0"/>
+        </a:xfrm>
+      </p:grpSpPr>
+      <p:pic>
+        <p:nvPicPr>
+          <p:cNvPr id="11" name="Picture 10">
+            <a:extLst>
+              <a:ext uri="{FF2B5EF4-FFF2-40B4-BE49-F238E27FC236}">
+                <a16:creationId xmlns:a16="http://schemas.microsoft.com/office/drawing/2014/main" id="{351E33F5-BBCF-6CD6-6E9E-6FD680B452EB}"/>
+              </a:ext>
+            </a:extLst>
+          </p:cNvPr>
+          <p:cNvPicPr>
+            <a:picLocks noChangeAspect="1"/>
+          </p:cNvPicPr>
+          <p:nvPr/>
+        </p:nvPicPr>
+        <p:blipFill>
+          <a:blip r:embed="rId2"/>
+          <a:stretch>
+            <a:fillRect/>
+          </a:stretch>
+        </p:blipFill>
+        <p:spPr>
+          <a:xfrm>
+            <a:off x="946150" y="457200"/>
+            <a:ext cx="7251700" cy="5791200"/>
+          </a:xfrm>
+          <a:prstGeom prst="rect">
+            <a:avLst/>
+          </a:prstGeom>
+        </p:spPr>
+      </p:pic>
+    </p:spTree>
+    <p:extLst>
+      <p:ext uri="{BB962C8B-B14F-4D97-AF65-F5344CB8AC3E}">
+        <p14:creationId xmlns:p14="http://schemas.microsoft.com/office/powerpoint/2010/main" val="782288326"/>
       </p:ext>
     </p:extLst>
   </p:cSld>
@@ -17630,7 +17564,73 @@
 </p:sld>
 </file>
 
-<file path=ppt/slides/slide23.xml><?xml version="1.0" encoding="utf-8"?>
+<file path=ppt/slides/slide24.xml><?xml version="1.0" encoding="utf-8"?>
+<p:sld xmlns:a="http://schemas.openxmlformats.org/drawingml/2006/main" xmlns:r="http://schemas.openxmlformats.org/officeDocument/2006/relationships" xmlns:p="http://schemas.openxmlformats.org/presentationml/2006/main">
+  <p:cSld>
+    <p:spTree>
+      <p:nvGrpSpPr>
+        <p:cNvPr id="1" name="">
+          <a:extLst>
+            <a:ext uri="{FF2B5EF4-FFF2-40B4-BE49-F238E27FC236}">
+              <a16:creationId xmlns:a16="http://schemas.microsoft.com/office/drawing/2014/main" id="{4CA98269-3DD1-62B3-A440-2DC62FE9527E}"/>
+            </a:ext>
+          </a:extLst>
+        </p:cNvPr>
+        <p:cNvGrpSpPr/>
+        <p:nvPr/>
+      </p:nvGrpSpPr>
+      <p:grpSpPr>
+        <a:xfrm>
+          <a:off x="0" y="0"/>
+          <a:ext cx="0" cy="0"/>
+          <a:chOff x="0" y="0"/>
+          <a:chExt cx="0" cy="0"/>
+        </a:xfrm>
+      </p:grpSpPr>
+      <p:pic>
+        <p:nvPicPr>
+          <p:cNvPr id="3" name="Picture 2">
+            <a:extLst>
+              <a:ext uri="{FF2B5EF4-FFF2-40B4-BE49-F238E27FC236}">
+                <a16:creationId xmlns:a16="http://schemas.microsoft.com/office/drawing/2014/main" id="{A7F23B5B-2925-0F05-2F6A-4DC2A84C3EBD}"/>
+              </a:ext>
+            </a:extLst>
+          </p:cNvPr>
+          <p:cNvPicPr>
+            <a:picLocks noChangeAspect="1"/>
+          </p:cNvPicPr>
+          <p:nvPr/>
+        </p:nvPicPr>
+        <p:blipFill>
+          <a:blip r:embed="rId2"/>
+          <a:stretch>
+            <a:fillRect/>
+          </a:stretch>
+        </p:blipFill>
+        <p:spPr>
+          <a:xfrm>
+            <a:off x="977900" y="527050"/>
+            <a:ext cx="7188200" cy="5803900"/>
+          </a:xfrm>
+          <a:prstGeom prst="rect">
+            <a:avLst/>
+          </a:prstGeom>
+        </p:spPr>
+      </p:pic>
+    </p:spTree>
+    <p:extLst>
+      <p:ext uri="{BB962C8B-B14F-4D97-AF65-F5344CB8AC3E}">
+        <p14:creationId xmlns:p14="http://schemas.microsoft.com/office/powerpoint/2010/main" val="71968830"/>
+      </p:ext>
+    </p:extLst>
+  </p:cSld>
+  <p:clrMapOvr>
+    <a:masterClrMapping/>
+  </p:clrMapOvr>
+</p:sld>
+</file>
+
+<file path=ppt/slides/slide25.xml><?xml version="1.0" encoding="utf-8"?>
 <p:sld xmlns:a="http://schemas.openxmlformats.org/drawingml/2006/main" xmlns:r="http://schemas.openxmlformats.org/officeDocument/2006/relationships" xmlns:p="http://schemas.openxmlformats.org/presentationml/2006/main">
   <p:cSld>
     <p:spTree>
@@ -17653,8 +17653,8 @@
           <a:chExt cx="0" cy="0"/>
         </a:xfrm>
       </p:grpSpPr>
-      <mc:AlternateContent xmlns:mc="http://schemas.openxmlformats.org/markup-compatibility/2006" xmlns:a14="http://schemas.microsoft.com/office/drawing/2010/main">
-        <mc:Choice Requires="a14">
+      <mc:AlternateContent xmlns:mc="http://schemas.openxmlformats.org/markup-compatibility/2006">
+        <mc:Choice xmlns:a14="http://schemas.microsoft.com/office/drawing/2010/main" Requires="a14">
           <p:sp>
             <p:nvSpPr>
               <p:cNvPr id="4" name="Content Placeholder 3">
@@ -17687,15 +17687,7 @@
               <a:p>
                 <a:r>
                   <a:rPr lang="en-US" dirty="0"/>
-                  <a:t>Many (1</a:t>
-                </a:r>
-                <a:r>
-                  <a:rPr lang="en-US" baseline="30000" dirty="0"/>
-                  <a:t>st</a:t>
-                </a:r>
-                <a:r>
-                  <a:rPr lang="en-US" dirty="0"/>
-                  <a:t>-order) minimization algorithms are variations of the following algorithm:</a:t>
+                  <a:t>Many minimization algorithms are variations of the following algorithm:</a:t>
                 </a:r>
                 <a:endParaRPr lang="en-US" i="1" dirty="0">
                   <a:solidFill>
@@ -17887,10 +17879,6 @@
                   <a:rPr lang="en-US" dirty="0"/>
                   <a:t>.</a:t>
                 </a:r>
-                <a:br>
-                  <a:rPr lang="en-US" dirty="0"/>
-                </a:br>
-                <a:endParaRPr lang="en-US" dirty="0"/>
               </a:p>
               <a:p>
                 <a:pPr marL="0" indent="0">
@@ -18036,15 +18024,40 @@
                 </a:r>
                 <a14:m>
                   <m:oMath xmlns:m="http://schemas.openxmlformats.org/officeDocument/2006/math">
-                    <m:r>
-                      <a:rPr lang="en-US" i="1">
-                        <a:solidFill>
-                          <a:srgbClr val="0033CC"/>
-                        </a:solidFill>
-                        <a:latin typeface="Cambria Math" panose="02040503050406030204" pitchFamily="18" charset="0"/>
-                      </a:rPr>
-                      <m:t>𝑓</m:t>
-                    </m:r>
+                    <m:sSub>
+                      <m:sSubPr>
+                        <m:ctrlPr>
+                          <a:rPr lang="en-US" i="1">
+                            <a:solidFill>
+                              <a:srgbClr val="0033CC"/>
+                            </a:solidFill>
+                            <a:latin typeface="Cambria Math" panose="02040503050406030204" pitchFamily="18" charset="0"/>
+                          </a:rPr>
+                        </m:ctrlPr>
+                      </m:sSubPr>
+                      <m:e>
+                        <m:r>
+                          <a:rPr lang="en-US" i="1">
+                            <a:solidFill>
+                              <a:srgbClr val="0033CC"/>
+                            </a:solidFill>
+                            <a:latin typeface="Cambria Math" panose="02040503050406030204" pitchFamily="18" charset="0"/>
+                          </a:rPr>
+                          <m:t>𝑓</m:t>
+                        </m:r>
+                      </m:e>
+                      <m:sub>
+                        <m:r>
+                          <a:rPr lang="en-US" b="0" i="1" smtClean="0">
+                            <a:solidFill>
+                              <a:srgbClr val="0033CC"/>
+                            </a:solidFill>
+                            <a:latin typeface="Cambria Math" panose="02040503050406030204" pitchFamily="18" charset="0"/>
+                          </a:rPr>
+                          <m:t>𝜔</m:t>
+                        </m:r>
+                      </m:sub>
+                    </m:sSub>
                     <m:d>
                       <m:dPr>
                         <m:ctrlPr>
@@ -18065,24 +18078,6 @@
                             <a:latin typeface="Cambria Math" panose="02040503050406030204" pitchFamily="18" charset="0"/>
                           </a:rPr>
                           <m:t>𝑥</m:t>
-                        </m:r>
-                        <m:r>
-                          <a:rPr lang="en-US" i="1">
-                            <a:solidFill>
-                              <a:srgbClr val="0033CC"/>
-                            </a:solidFill>
-                            <a:latin typeface="Cambria Math" panose="02040503050406030204" pitchFamily="18" charset="0"/>
-                          </a:rPr>
-                          <m:t>,</m:t>
-                        </m:r>
-                        <m:r>
-                          <a:rPr lang="en-US" i="1">
-                            <a:solidFill>
-                              <a:srgbClr val="0033CC"/>
-                            </a:solidFill>
-                            <a:latin typeface="Cambria Math" panose="02040503050406030204" pitchFamily="18" charset="0"/>
-                          </a:rPr>
-                          <m:t>𝜔</m:t>
                         </m:r>
                       </m:e>
                     </m:d>
@@ -18156,20 +18151,20 @@
                 </a:r>
                 <a14:m>
                   <m:oMath xmlns:m="http://schemas.openxmlformats.org/officeDocument/2006/math">
-                    <m:sSup>
-                      <m:sSupPr>
+                    <m:sSub>
+                      <m:sSubPr>
                         <m:ctrlPr>
-                          <a:rPr lang="en-US" i="1">
+                          <a:rPr lang="en-US" b="0" i="1" smtClean="0">
                             <a:solidFill>
                               <a:srgbClr val="0033CC"/>
                             </a:solidFill>
                             <a:latin typeface="Cambria Math" panose="02040503050406030204" pitchFamily="18" charset="0"/>
                           </a:rPr>
                         </m:ctrlPr>
-                      </m:sSupPr>
+                      </m:sSubPr>
                       <m:e>
                         <m:r>
-                          <a:rPr lang="en-US" i="1">
+                          <a:rPr lang="en-US" b="0" i="1" smtClean="0">
                             <a:solidFill>
                               <a:srgbClr val="0033CC"/>
                             </a:solidFill>
@@ -18178,36 +18173,33 @@
                           <m:t>𝑓</m:t>
                         </m:r>
                       </m:e>
-                      <m:sup>
-                        <m:r>
-                          <a:rPr lang="en-US" i="1">
-                            <a:solidFill>
-                              <a:srgbClr val="0033CC"/>
-                            </a:solidFill>
-                            <a:latin typeface="Cambria Math" panose="02040503050406030204" pitchFamily="18" charset="0"/>
-                          </a:rPr>
-                          <m:t>∗</m:t>
-                        </m:r>
-                      </m:sup>
-                    </m:sSup>
-                    <m:r>
-                      <a:rPr lang="en-US" i="1">
-                        <a:solidFill>
-                          <a:srgbClr val="0033CC"/>
-                        </a:solidFill>
-                        <a:latin typeface="Cambria Math" panose="02040503050406030204" pitchFamily="18" charset="0"/>
-                      </a:rPr>
-                      <m:t>=</m:t>
-                    </m:r>
-                    <m:r>
-                      <a:rPr lang="en-US" i="1">
-                        <a:solidFill>
-                          <a:srgbClr val="0033CC"/>
-                        </a:solidFill>
-                        <a:latin typeface="Cambria Math" panose="02040503050406030204" pitchFamily="18" charset="0"/>
-                      </a:rPr>
-                      <m:t>𝑓</m:t>
-                    </m:r>
+                      <m:sub>
+                        <m:acc>
+                          <m:accPr>
+                            <m:chr m:val="̂"/>
+                            <m:ctrlPr>
+                              <a:rPr lang="en-US" b="1" i="1" smtClean="0">
+                                <a:solidFill>
+                                  <a:srgbClr val="0033CC"/>
+                                </a:solidFill>
+                                <a:latin typeface="Cambria Math" panose="02040503050406030204" pitchFamily="18" charset="0"/>
+                              </a:rPr>
+                            </m:ctrlPr>
+                          </m:accPr>
+                          <m:e>
+                            <m:r>
+                              <a:rPr lang="en-US" b="1" i="1" smtClean="0">
+                                <a:solidFill>
+                                  <a:srgbClr val="0033CC"/>
+                                </a:solidFill>
+                                <a:latin typeface="Cambria Math" panose="02040503050406030204" pitchFamily="18" charset="0"/>
+                              </a:rPr>
+                              <m:t>𝝎</m:t>
+                            </m:r>
+                          </m:e>
+                        </m:acc>
+                      </m:sub>
+                    </m:sSub>
                     <m:r>
                       <a:rPr lang="en-US" i="1">
                         <a:solidFill>
@@ -18226,49 +18218,6 @@
                       </a:rPr>
                       <m:t>𝑥</m:t>
                     </m:r>
-                    <m:r>
-                      <a:rPr lang="en-US" i="1">
-                        <a:solidFill>
-                          <a:srgbClr val="0033CC"/>
-                        </a:solidFill>
-                        <a:latin typeface="Cambria Math" panose="02040503050406030204" pitchFamily="18" charset="0"/>
-                      </a:rPr>
-                      <m:t>,</m:t>
-                    </m:r>
-                    <m:sSup>
-                      <m:sSupPr>
-                        <m:ctrlPr>
-                          <a:rPr lang="en-US" i="1">
-                            <a:solidFill>
-                              <a:srgbClr val="0033CC"/>
-                            </a:solidFill>
-                            <a:latin typeface="Cambria Math" panose="02040503050406030204" pitchFamily="18" charset="0"/>
-                          </a:rPr>
-                        </m:ctrlPr>
-                      </m:sSupPr>
-                      <m:e>
-                        <m:r>
-                          <a:rPr lang="en-US" i="1">
-                            <a:solidFill>
-                              <a:srgbClr val="0033CC"/>
-                            </a:solidFill>
-                            <a:latin typeface="Cambria Math" panose="02040503050406030204" pitchFamily="18" charset="0"/>
-                          </a:rPr>
-                          <m:t>𝜔</m:t>
-                        </m:r>
-                      </m:e>
-                      <m:sup>
-                        <m:r>
-                          <a:rPr lang="en-US" i="1">
-                            <a:solidFill>
-                              <a:srgbClr val="0033CC"/>
-                            </a:solidFill>
-                            <a:latin typeface="Cambria Math" panose="02040503050406030204" pitchFamily="18" charset="0"/>
-                          </a:rPr>
-                          <m:t>∗</m:t>
-                        </m:r>
-                      </m:sup>
-                    </m:sSup>
                     <m:r>
                       <a:rPr lang="en-US" i="1">
                         <a:solidFill>
@@ -18418,12 +18367,25 @@
                 <a:pPr marL="0" indent="0">
                   <a:buNone/>
                 </a:pPr>
+                <a:r>
+                  <a:rPr lang="en-US" i="1" dirty="0"/>
+                  <a:t>     approximately</a:t>
+                </a:r>
+                <a:r>
+                  <a:rPr lang="en-US" dirty="0"/>
+                  <a:t>.</a:t>
+                </a:r>
+              </a:p>
+              <a:p>
+                <a:pPr marL="0" indent="0">
+                  <a:buNone/>
+                </a:pPr>
                 <a:endParaRPr lang="en-US" dirty="0"/>
               </a:p>
             </p:txBody>
           </p:sp>
         </mc:Choice>
-        <mc:Fallback xmlns="">
+        <mc:Fallback>
           <p:sp>
             <p:nvSpPr>
               <p:cNvPr id="4" name="Content Placeholder 3">
@@ -18444,7 +18406,7 @@
               <a:blipFill>
                 <a:blip r:embed="rId2"/>
                 <a:stretch>
-                  <a:fillRect l="-1309" t="-1316" r="-1309" b="-47895"/>
+                  <a:fillRect l="-1309" t="-1316" r="-655" b="-32895"/>
                 </a:stretch>
               </a:blipFill>
             </p:spPr>
@@ -18610,8 +18572,8 @@
           </a:p>
         </p:txBody>
       </p:sp>
-      <mc:AlternateContent xmlns:mc="http://schemas.openxmlformats.org/markup-compatibility/2006">
-        <mc:Choice xmlns:a14="http://schemas.microsoft.com/office/drawing/2010/main" Requires="a14">
+      <mc:AlternateContent xmlns:mc="http://schemas.openxmlformats.org/markup-compatibility/2006" xmlns:a14="http://schemas.microsoft.com/office/drawing/2010/main">
+        <mc:Choice Requires="a14">
           <p:sp>
             <p:nvSpPr>
               <p:cNvPr id="4" name="Content Placeholder 3">
@@ -19193,7 +19155,7 @@
             </p:txBody>
           </p:sp>
         </mc:Choice>
-        <mc:Fallback>
+        <mc:Fallback xmlns="">
           <p:sp>
             <p:nvSpPr>
               <p:cNvPr id="4" name="Content Placeholder 3">
@@ -20335,15 +20297,40 @@
                 </a:r>
                 <a14:m>
                   <m:oMath xmlns:m="http://schemas.openxmlformats.org/officeDocument/2006/math">
-                    <m:r>
-                      <a:rPr lang="en-US" i="1">
-                        <a:solidFill>
-                          <a:srgbClr val="0033CC"/>
-                        </a:solidFill>
-                        <a:latin typeface="Cambria Math" panose="02040503050406030204" pitchFamily="18" charset="0"/>
-                      </a:rPr>
-                      <m:t>𝑓</m:t>
-                    </m:r>
+                    <m:sSub>
+                      <m:sSubPr>
+                        <m:ctrlPr>
+                          <a:rPr lang="en-US" i="1">
+                            <a:solidFill>
+                              <a:srgbClr val="0033CC"/>
+                            </a:solidFill>
+                            <a:latin typeface="Cambria Math" panose="02040503050406030204" pitchFamily="18" charset="0"/>
+                          </a:rPr>
+                        </m:ctrlPr>
+                      </m:sSubPr>
+                      <m:e>
+                        <m:r>
+                          <a:rPr lang="en-US" i="1">
+                            <a:solidFill>
+                              <a:srgbClr val="0033CC"/>
+                            </a:solidFill>
+                            <a:latin typeface="Cambria Math" panose="02040503050406030204" pitchFamily="18" charset="0"/>
+                          </a:rPr>
+                          <m:t>𝑓</m:t>
+                        </m:r>
+                      </m:e>
+                      <m:sub>
+                        <m:r>
+                          <a:rPr lang="en-US" b="0" i="1" smtClean="0">
+                            <a:solidFill>
+                              <a:srgbClr val="0033CC"/>
+                            </a:solidFill>
+                            <a:latin typeface="Cambria Math" panose="02040503050406030204" pitchFamily="18" charset="0"/>
+                          </a:rPr>
+                          <m:t>𝜔</m:t>
+                        </m:r>
+                      </m:sub>
+                    </m:sSub>
                     <m:d>
                       <m:dPr>
                         <m:ctrlPr>
@@ -20433,24 +20420,6 @@
                             </m:r>
                           </m:sub>
                         </m:sSub>
-                        <m:r>
-                          <a:rPr lang="en-US" i="1">
-                            <a:solidFill>
-                              <a:srgbClr val="0033CC"/>
-                            </a:solidFill>
-                            <a:latin typeface="Cambria Math" panose="02040503050406030204" pitchFamily="18" charset="0"/>
-                          </a:rPr>
-                          <m:t>,</m:t>
-                        </m:r>
-                        <m:r>
-                          <a:rPr lang="en-US" i="1">
-                            <a:solidFill>
-                              <a:srgbClr val="0033CC"/>
-                            </a:solidFill>
-                            <a:latin typeface="Cambria Math" panose="02040503050406030204" pitchFamily="18" charset="0"/>
-                          </a:rPr>
-                          <m:t>𝜔</m:t>
-                        </m:r>
                       </m:e>
                     </m:d>
                   </m:oMath>
@@ -22000,8 +21969,8 @@
           </a:p>
         </p:txBody>
       </p:sp>
-      <mc:AlternateContent xmlns:mc="http://schemas.openxmlformats.org/markup-compatibility/2006">
-        <mc:Choice xmlns:a14="http://schemas.microsoft.com/office/drawing/2010/main" Requires="a14">
+      <mc:AlternateContent xmlns:mc="http://schemas.openxmlformats.org/markup-compatibility/2006" xmlns:a14="http://schemas.microsoft.com/office/drawing/2010/main">
+        <mc:Choice Requires="a14">
           <p:sp>
             <p:nvSpPr>
               <p:cNvPr id="4" name="Content Placeholder 3">
@@ -22521,7 +22490,7 @@
             </p:txBody>
           </p:sp>
         </mc:Choice>
-        <mc:Fallback>
+        <mc:Fallback xmlns="">
           <p:sp>
             <p:nvSpPr>
               <p:cNvPr id="4" name="Content Placeholder 3">
@@ -23584,8 +23553,8 @@
         </p:blipFill>
         <p:spPr>
           <a:xfrm>
-            <a:off x="5297518" y="2057400"/>
-            <a:ext cx="3846482" cy="3922200"/>
+            <a:off x="5334000" y="2094600"/>
+            <a:ext cx="3810000" cy="3885000"/>
           </a:xfrm>
           <a:prstGeom prst="rect">
             <a:avLst/>
@@ -23633,7 +23602,7 @@
             </a:pPr>
             <a:r>
               <a:rPr lang="en-US" dirty="0"/>
-              <a:t>Our task is to navigate the empirical</a:t>
+              <a:t>Our task is to navigate the empirical risk </a:t>
             </a:r>
           </a:p>
           <a:p>
@@ -23642,7 +23611,7 @@
             </a:pPr>
             <a:r>
               <a:rPr lang="en-US" dirty="0"/>
-              <a:t>risk landscape to find a </a:t>
+              <a:t>landscape to find a  </a:t>
             </a:r>
             <a:r>
               <a:rPr lang="en-US" i="1" dirty="0">
@@ -23650,37 +23619,11 @@
                   <a:srgbClr val="0033CC"/>
                 </a:solidFill>
               </a:rPr>
-              <a:t>good </a:t>
-            </a:r>
-          </a:p>
-          <a:p>
-            <a:pPr marL="0" indent="0">
-              <a:buNone/>
-            </a:pPr>
-            <a:r>
-              <a:rPr lang="en-US" i="1" dirty="0">
-                <a:solidFill>
-                  <a:srgbClr val="0033CC"/>
-                </a:solidFill>
-              </a:rPr>
-              <a:t>approximation</a:t>
+              <a:t>good approximation</a:t>
             </a:r>
             <a:r>
               <a:rPr lang="en-US" dirty="0"/>
-              <a:t> of the minimum not of </a:t>
-            </a:r>
-          </a:p>
-          <a:p>
-            <a:pPr marL="0" indent="0">
-              <a:buNone/>
-            </a:pPr>
-            <a:r>
-              <a:rPr lang="en-US" i="1" dirty="0"/>
-              <a:t>that</a:t>
-            </a:r>
-            <a:r>
-              <a:rPr lang="en-US" dirty="0"/>
-              <a:t> landscape but rather of the</a:t>
+              <a:t> </a:t>
             </a:r>
           </a:p>
           <a:p>
@@ -23689,7 +23632,15 @@
             </a:pPr>
             <a:r>
               <a:rPr lang="en-US" dirty="0"/>
-              <a:t>landscape that would be formed if </a:t>
+              <a:t>of the minimum not of </a:t>
+            </a:r>
+            <a:r>
+              <a:rPr lang="en-US" i="1" dirty="0"/>
+              <a:t>that</a:t>
+            </a:r>
+            <a:r>
+              <a:rPr lang="en-US" dirty="0"/>
+              <a:t> landscape </a:t>
             </a:r>
           </a:p>
           <a:p>
@@ -23698,7 +23649,16 @@
             </a:pPr>
             <a:r>
               <a:rPr lang="en-US" dirty="0"/>
-              <a:t>we if we had an </a:t>
+              <a:t>but rather of the landscape that would </a:t>
+            </a:r>
+          </a:p>
+          <a:p>
+            <a:pPr marL="0" indent="0">
+              <a:buNone/>
+            </a:pPr>
+            <a:r>
+              <a:rPr lang="en-US" dirty="0"/>
+              <a:t>be formed if we if we had an </a:t>
             </a:r>
             <a:r>
               <a:rPr lang="en-US" i="1" u="sng" dirty="0">
@@ -23710,7 +23670,7 @@
             </a:r>
             <a:r>
               <a:rPr lang="en-US" dirty="0"/>
-              <a:t> amount of data</a:t>
+              <a:t> </a:t>
             </a:r>
           </a:p>
           <a:p>
@@ -23719,8 +23679,14 @@
             </a:pPr>
             <a:r>
               <a:rPr lang="en-US" dirty="0"/>
-              <a:t>and a model that would fit the infinite dataset exactly.</a:t>
+              <a:t>amount of data and the correct model.</a:t>
             </a:r>
+          </a:p>
+          <a:p>
+            <a:pPr marL="0" indent="0">
+              <a:buNone/>
+            </a:pPr>
+            <a:endParaRPr lang="en-US" dirty="0"/>
           </a:p>
           <a:p>
             <a:pPr marL="0" indent="0">
@@ -23854,8 +23820,8 @@
           </a:p>
         </p:txBody>
       </p:sp>
-      <mc:AlternateContent xmlns:mc="http://schemas.openxmlformats.org/markup-compatibility/2006">
-        <mc:Choice xmlns:a14="http://schemas.microsoft.com/office/drawing/2010/main" Requires="a14">
+      <mc:AlternateContent xmlns:mc="http://schemas.openxmlformats.org/markup-compatibility/2006" xmlns:a14="http://schemas.microsoft.com/office/drawing/2010/main">
+        <mc:Choice Requires="a14">
           <p:sp>
             <p:nvSpPr>
               <p:cNvPr id="12" name="Content Placeholder 11">
@@ -24155,7 +24121,7 @@
             </p:txBody>
           </p:sp>
         </mc:Choice>
-        <mc:Fallback>
+        <mc:Fallback xmlns="">
           <p:sp>
             <p:nvSpPr>
               <p:cNvPr id="12" name="Content Placeholder 11">

--- a/Lectures/01.Foundations/Lecture02.pptx
+++ b/Lectures/01.Foundations/Lecture02.pptx
@@ -5,10 +5,10 @@
     <p:sldMasterId id="2147483648" r:id="rId1"/>
   </p:sldMasterIdLst>
   <p:notesMasterIdLst>
-    <p:notesMasterId r:id="rId27"/>
+    <p:notesMasterId r:id="rId23"/>
   </p:notesMasterIdLst>
   <p:handoutMasterIdLst>
-    <p:handoutMasterId r:id="rId28"/>
+    <p:handoutMasterId r:id="rId24"/>
   </p:handoutMasterIdLst>
   <p:sldIdLst>
     <p:sldId id="256" r:id="rId2"/>
@@ -21,21 +21,17 @@
     <p:sldId id="265" r:id="rId9"/>
     <p:sldId id="262" r:id="rId10"/>
     <p:sldId id="261" r:id="rId11"/>
-    <p:sldId id="267" r:id="rId12"/>
+    <p:sldId id="1024" r:id="rId12"/>
     <p:sldId id="268" r:id="rId13"/>
     <p:sldId id="269" r:id="rId14"/>
     <p:sldId id="270" r:id="rId15"/>
     <p:sldId id="271" r:id="rId16"/>
     <p:sldId id="272" r:id="rId17"/>
-    <p:sldId id="278" r:id="rId18"/>
-    <p:sldId id="279" r:id="rId19"/>
-    <p:sldId id="280" r:id="rId20"/>
-    <p:sldId id="1013" r:id="rId21"/>
-    <p:sldId id="1015" r:id="rId22"/>
-    <p:sldId id="1021" r:id="rId23"/>
-    <p:sldId id="1022" r:id="rId24"/>
-    <p:sldId id="1023" r:id="rId25"/>
-    <p:sldId id="1014" r:id="rId26"/>
+    <p:sldId id="274" r:id="rId18"/>
+    <p:sldId id="1057" r:id="rId19"/>
+    <p:sldId id="276" r:id="rId20"/>
+    <p:sldId id="277" r:id="rId21"/>
+    <p:sldId id="1014" r:id="rId22"/>
   </p:sldIdLst>
   <p:sldSz cx="9144000" cy="6858000" type="letter"/>
   <p:notesSz cx="9601200" cy="7315200"/>
@@ -2127,6 +2123,143 @@
 </p:sldLayout>
 </file>
 
+<file path=ppt/slideLayouts/slideLayout8.xml><?xml version="1.0" encoding="utf-8"?>
+<p:sldLayout xmlns:a="http://schemas.openxmlformats.org/drawingml/2006/main" xmlns:r="http://schemas.openxmlformats.org/officeDocument/2006/relationships" xmlns:p="http://schemas.openxmlformats.org/presentationml/2006/main" userDrawn="1">
+  <p:cSld name="1_Two Content">
+    <p:spTree>
+      <p:nvGrpSpPr>
+        <p:cNvPr id="1" name=""/>
+        <p:cNvGrpSpPr/>
+        <p:nvPr/>
+      </p:nvGrpSpPr>
+      <p:grpSpPr>
+        <a:xfrm>
+          <a:off x="0" y="0"/>
+          <a:ext cx="0" cy="0"/>
+          <a:chOff x="0" y="0"/>
+          <a:chExt cx="0" cy="0"/>
+        </a:xfrm>
+      </p:grpSpPr>
+      <p:sp>
+        <p:nvSpPr>
+          <p:cNvPr id="2" name="Title 1"/>
+          <p:cNvSpPr>
+            <a:spLocks noGrp="1"/>
+          </p:cNvSpPr>
+          <p:nvPr>
+            <p:ph type="title"/>
+          </p:nvPr>
+        </p:nvSpPr>
+        <p:spPr/>
+        <p:txBody>
+          <a:bodyPr/>
+          <a:lstStyle/>
+          <a:p>
+            <a:r>
+              <a:rPr lang="en-US"/>
+              <a:t>Click to edit Master title style</a:t>
+            </a:r>
+          </a:p>
+        </p:txBody>
+      </p:sp>
+      <p:sp>
+        <p:nvSpPr>
+          <p:cNvPr id="3" name="Content Placeholder 2"/>
+          <p:cNvSpPr>
+            <a:spLocks noGrp="1"/>
+          </p:cNvSpPr>
+          <p:nvPr>
+            <p:ph sz="half" idx="1"/>
+          </p:nvPr>
+        </p:nvSpPr>
+        <p:spPr>
+          <a:xfrm>
+            <a:off x="711200" y="1295400"/>
+            <a:ext cx="4699000" cy="4819650"/>
+          </a:xfrm>
+        </p:spPr>
+        <p:txBody>
+          <a:bodyPr/>
+          <a:lstStyle>
+            <a:lvl1pPr>
+              <a:defRPr sz="2400"/>
+            </a:lvl1pPr>
+            <a:lvl2pPr>
+              <a:defRPr sz="2400"/>
+            </a:lvl2pPr>
+            <a:lvl3pPr>
+              <a:defRPr sz="2000"/>
+            </a:lvl3pPr>
+            <a:lvl4pPr>
+              <a:defRPr sz="1800"/>
+            </a:lvl4pPr>
+            <a:lvl5pPr>
+              <a:defRPr sz="1800"/>
+            </a:lvl5pPr>
+            <a:lvl6pPr>
+              <a:defRPr sz="1800"/>
+            </a:lvl6pPr>
+            <a:lvl7pPr>
+              <a:defRPr sz="1800"/>
+            </a:lvl7pPr>
+            <a:lvl8pPr>
+              <a:defRPr sz="1800"/>
+            </a:lvl8pPr>
+            <a:lvl9pPr>
+              <a:defRPr sz="1800"/>
+            </a:lvl9pPr>
+          </a:lstStyle>
+          <a:p>
+            <a:pPr lvl="0"/>
+            <a:r>
+              <a:rPr lang="en-US"/>
+              <a:t>Click to edit Master text styles</a:t>
+            </a:r>
+          </a:p>
+          <a:p>
+            <a:pPr lvl="1"/>
+            <a:r>
+              <a:rPr lang="en-US"/>
+              <a:t>Second level</a:t>
+            </a:r>
+          </a:p>
+          <a:p>
+            <a:pPr lvl="2"/>
+            <a:r>
+              <a:rPr lang="en-US"/>
+              <a:t>Third level</a:t>
+            </a:r>
+          </a:p>
+          <a:p>
+            <a:pPr lvl="3"/>
+            <a:r>
+              <a:rPr lang="en-US"/>
+              <a:t>Fourth level</a:t>
+            </a:r>
+          </a:p>
+          <a:p>
+            <a:pPr lvl="4"/>
+            <a:r>
+              <a:rPr lang="en-US"/>
+              <a:t>Fifth level</a:t>
+            </a:r>
+            <a:endParaRPr lang="en-US" dirty="0"/>
+          </a:p>
+        </p:txBody>
+      </p:sp>
+    </p:spTree>
+    <p:extLst>
+      <p:ext uri="{BB962C8B-B14F-4D97-AF65-F5344CB8AC3E}">
+        <p14:creationId xmlns:p14="http://schemas.microsoft.com/office/powerpoint/2010/main" val="4043729802"/>
+      </p:ext>
+    </p:extLst>
+  </p:cSld>
+  <p:clrMapOvr>
+    <a:masterClrMapping/>
+  </p:clrMapOvr>
+</p:sldLayout>
+</file>
+
 <file path=ppt/slideMasters/slideMaster1.xml><?xml version="1.0" encoding="utf-8"?>
 <p:sldMaster xmlns:a="http://schemas.openxmlformats.org/drawingml/2006/main" xmlns:r="http://schemas.openxmlformats.org/officeDocument/2006/relationships" xmlns:p="http://schemas.openxmlformats.org/presentationml/2006/main">
   <p:cSld>
@@ -2380,6 +2513,7 @@
     <p:sldLayoutId id="2147483885" r:id="rId5"/>
     <p:sldLayoutId id="2147483886" r:id="rId6"/>
     <p:sldLayoutId id="2147483892" r:id="rId7"/>
+    <p:sldLayoutId id="2147483893" r:id="rId8"/>
   </p:sldLayoutIdLst>
   <p:hf hdr="0" dt="0"/>
   <p:txStyles>
@@ -2919,8 +3053,8 @@
           <a:chExt cx="0" cy="0"/>
         </a:xfrm>
       </p:grpSpPr>
-      <mc:AlternateContent xmlns:mc="http://schemas.openxmlformats.org/markup-compatibility/2006" xmlns:a14="http://schemas.microsoft.com/office/drawing/2010/main">
-        <mc:Choice Requires="a14">
+      <mc:AlternateContent xmlns:mc="http://schemas.openxmlformats.org/markup-compatibility/2006">
+        <mc:Choice xmlns:a14="http://schemas.microsoft.com/office/drawing/2010/main" Requires="a14">
           <p:sp>
             <p:nvSpPr>
               <p:cNvPr id="5" name="Content Placeholder 4">
@@ -3220,7 +3354,7 @@
                       <a:srgbClr val="0033CC"/>
                     </a:solidFill>
                   </a:rPr>
-                  <a:t>risk functional</a:t>
+                  <a:t>risk functional*</a:t>
                 </a:r>
                 <a:r>
                   <a:rPr lang="en-US" dirty="0"/>
@@ -3482,10 +3616,24 @@
                   <a:t>is the probability distribution of the data.</a:t>
                 </a:r>
               </a:p>
+              <a:p>
+                <a:pPr marL="0" indent="0">
+                  <a:buNone/>
+                </a:pPr>
+                <a:r>
+                  <a:rPr lang="en-US" dirty="0"/>
+                  <a:t>*</a:t>
+                </a:r>
+                <a:r>
+                  <a:rPr lang="en-US" sz="2000" dirty="0"/>
+                  <a:t>A functional depends on all values of a function simultaneously.</a:t>
+                </a:r>
+                <a:endParaRPr lang="en-US" dirty="0"/>
+              </a:p>
             </p:txBody>
           </p:sp>
         </mc:Choice>
-        <mc:Fallback xmlns="">
+        <mc:Fallback>
           <p:sp>
             <p:nvSpPr>
               <p:cNvPr id="5" name="Content Placeholder 4">
@@ -3506,7 +3654,7 @@
               <a:blipFill>
                 <a:blip r:embed="rId2"/>
                 <a:stretch>
-                  <a:fillRect l="-1309" t="-8947" b="-28684"/>
+                  <a:fillRect l="-1309" t="-8947" r="-1473" b="-28684"/>
                 </a:stretch>
               </a:blipFill>
             </p:spPr>
@@ -3676,6 +3824,37 @@
                                   </p:childTnLst>
                                 </p:cTn>
                               </p:par>
+                              <p:par>
+                                <p:cTn id="11" presetID="1" presetClass="entr" presetSubtype="0" fill="hold" nodeType="withEffect">
+                                  <p:stCondLst>
+                                    <p:cond delay="0"/>
+                                  </p:stCondLst>
+                                  <p:childTnLst>
+                                    <p:set>
+                                      <p:cBhvr>
+                                        <p:cTn id="12" dur="1" fill="hold">
+                                          <p:stCondLst>
+                                            <p:cond delay="0"/>
+                                          </p:stCondLst>
+                                        </p:cTn>
+                                        <p:tgtEl>
+                                          <p:spTgt spid="5">
+                                            <p:txEl>
+                                              <p:pRg st="7" end="7"/>
+                                            </p:txEl>
+                                          </p:spTgt>
+                                        </p:tgtEl>
+                                        <p:attrNameLst>
+                                          <p:attrName>style.visibility</p:attrName>
+                                        </p:attrNameLst>
+                                      </p:cBhvr>
+                                      <p:to>
+                                        <p:strVal val="visible"/>
+                                      </p:to>
+                                    </p:set>
+                                  </p:childTnLst>
+                                </p:cTn>
+                              </p:par>
                             </p:childTnLst>
                           </p:cTn>
                         </p:par>
@@ -3712,7 +3891,13 @@
   <p:cSld>
     <p:spTree>
       <p:nvGrpSpPr>
-        <p:cNvPr id="1" name=""/>
+        <p:cNvPr id="1" name="">
+          <a:extLst>
+            <a:ext uri="{FF2B5EF4-FFF2-40B4-BE49-F238E27FC236}">
+              <a16:creationId xmlns:a16="http://schemas.microsoft.com/office/drawing/2014/main" id="{CEA503DC-2D20-D176-BC6D-3AEABF5C1D56}"/>
+            </a:ext>
+          </a:extLst>
+        </p:cNvPr>
         <p:cNvGrpSpPr/>
         <p:nvPr/>
       </p:nvGrpSpPr>
@@ -3731,7 +3916,7 @@
               <p:cNvPr id="4" name="Content Placeholder 3">
                 <a:extLst>
                   <a:ext uri="{FF2B5EF4-FFF2-40B4-BE49-F238E27FC236}">
-                    <a16:creationId xmlns:a16="http://schemas.microsoft.com/office/drawing/2014/main" id="{F505F6DF-07C0-3FB6-D14A-A77EB0EDFBFF}"/>
+                    <a16:creationId xmlns:a16="http://schemas.microsoft.com/office/drawing/2014/main" id="{CDC6E10B-4699-795B-54D9-DDE45CE93FF6}"/>
                   </a:ext>
                 </a:extLst>
               </p:cNvPr>
@@ -3993,7 +4178,7 @@
                 </a:pPr>
                 <a:r>
                   <a:rPr lang="en-US" dirty="0"/>
-                  <a:t>While we know the functional form of the loss function </a:t>
+                  <a:t>Of course, in practice, we minimize the empirical risk </a:t>
                 </a:r>
                 <a14:m>
                   <m:oMath xmlns:m="http://schemas.openxmlformats.org/officeDocument/2006/math">
@@ -4004,7 +4189,7 @@
                         </a:solidFill>
                         <a:latin typeface="Cambria Math" panose="02040503050406030204" pitchFamily="18" charset="0"/>
                       </a:rPr>
-                      <m:t>𝐿</m:t>
+                      <m:t>𝑅</m:t>
                     </m:r>
                     <m:d>
                       <m:dPr>
@@ -4025,25 +4210,7 @@
                             </a:solidFill>
                             <a:latin typeface="Cambria Math" panose="02040503050406030204" pitchFamily="18" charset="0"/>
                           </a:rPr>
-                          <m:t>𝑦</m:t>
-                        </m:r>
-                        <m:r>
-                          <a:rPr lang="en-US" i="1">
-                            <a:solidFill>
-                              <a:srgbClr val="0033CC"/>
-                            </a:solidFill>
-                            <a:latin typeface="Cambria Math" panose="02040503050406030204" pitchFamily="18" charset="0"/>
-                          </a:rPr>
-                          <m:t>, </m:t>
-                        </m:r>
-                        <m:r>
-                          <a:rPr lang="en-US" i="1">
-                            <a:solidFill>
-                              <a:srgbClr val="0033CC"/>
-                            </a:solidFill>
-                            <a:latin typeface="Cambria Math" panose="02040503050406030204" pitchFamily="18" charset="0"/>
-                          </a:rPr>
-                          <m:t>𝑓</m:t>
+                          <m:t>𝜔</m:t>
                         </m:r>
                       </m:e>
                     </m:d>
@@ -4051,74 +4218,7 @@
                 </a14:m>
                 <a:r>
                   <a:rPr lang="en-US" dirty="0"/>
-                  <a:t> because we choose it, the probability distribution, </a:t>
-                </a:r>
-                <a14:m>
-                  <m:oMath xmlns:m="http://schemas.openxmlformats.org/officeDocument/2006/math">
-                    <m:r>
-                      <a:rPr lang="en-US" i="1">
-                        <a:solidFill>
-                          <a:srgbClr val="0033CC"/>
-                        </a:solidFill>
-                        <a:latin typeface="Cambria Math" panose="02040503050406030204" pitchFamily="18" charset="0"/>
-                      </a:rPr>
-                      <m:t>𝑝</m:t>
-                    </m:r>
-                    <m:d>
-                      <m:dPr>
-                        <m:ctrlPr>
-                          <a:rPr lang="en-US" i="1">
-                            <a:solidFill>
-                              <a:srgbClr val="0033CC"/>
-                            </a:solidFill>
-                            <a:latin typeface="Cambria Math" panose="02040503050406030204" pitchFamily="18" charset="0"/>
-                          </a:rPr>
-                        </m:ctrlPr>
-                      </m:dPr>
-                      <m:e>
-                        <m:r>
-                          <a:rPr lang="en-US" i="1">
-                            <a:solidFill>
-                              <a:srgbClr val="0033CC"/>
-                            </a:solidFill>
-                            <a:latin typeface="Cambria Math" panose="02040503050406030204" pitchFamily="18" charset="0"/>
-                          </a:rPr>
-                          <m:t>𝑥</m:t>
-                        </m:r>
-                        <m:r>
-                          <a:rPr lang="en-US" i="1">
-                            <a:solidFill>
-                              <a:srgbClr val="0033CC"/>
-                            </a:solidFill>
-                            <a:latin typeface="Cambria Math" panose="02040503050406030204" pitchFamily="18" charset="0"/>
-                          </a:rPr>
-                          <m:t>, </m:t>
-                        </m:r>
-                        <m:r>
-                          <a:rPr lang="en-US" i="1">
-                            <a:solidFill>
-                              <a:srgbClr val="0033CC"/>
-                            </a:solidFill>
-                            <a:latin typeface="Cambria Math" panose="02040503050406030204" pitchFamily="18" charset="0"/>
-                          </a:rPr>
-                          <m:t>𝑦</m:t>
-                        </m:r>
-                      </m:e>
-                    </m:d>
-                    <m:r>
-                      <a:rPr lang="en-US" i="1">
-                        <a:solidFill>
-                          <a:srgbClr val="0033CC"/>
-                        </a:solidFill>
-                        <a:latin typeface="Cambria Math" panose="02040503050406030204" pitchFamily="18" charset="0"/>
-                      </a:rPr>
-                      <m:t>𝑑𝑥𝑑𝑦</m:t>
-                    </m:r>
-                  </m:oMath>
-                </a14:m>
-                <a:r>
-                  <a:rPr lang="en-US" dirty="0"/>
-                  <a:t>, of the data is usually unknown.</a:t>
+                  <a:t> because we don’t have an infinite amount of data.</a:t>
                 </a:r>
               </a:p>
               <a:p>
@@ -4133,7 +4233,7 @@
                 </a:pPr>
                 <a:r>
                   <a:rPr lang="en-US" dirty="0"/>
-                  <a:t>However, </a:t>
+                  <a:t>However, since </a:t>
                 </a:r>
                 <a14:m>
                   <m:oMath xmlns:m="http://schemas.openxmlformats.org/officeDocument/2006/math">
@@ -4227,7 +4327,15 @@
                 </a14:m>
                 <a:r>
                   <a:rPr lang="en-US" dirty="0"/>
-                  <a:t>, so any useful result derived for the risk functional pertains, at least approximately, to the empirical risk. </a:t>
+                  <a:t>, any result derived for the risk functional pertains, at least </a:t>
+                </a:r>
+                <a:r>
+                  <a:rPr lang="en-US" i="1" dirty="0"/>
+                  <a:t>approximately</a:t>
+                </a:r>
+                <a:r>
+                  <a:rPr lang="en-US" dirty="0"/>
+                  <a:t>, to the empirical risk. </a:t>
                 </a:r>
               </a:p>
             </p:txBody>
@@ -4239,7 +4347,7 @@
               <p:cNvPr id="4" name="Content Placeholder 3">
                 <a:extLst>
                   <a:ext uri="{FF2B5EF4-FFF2-40B4-BE49-F238E27FC236}">
-                    <a16:creationId xmlns:a16="http://schemas.microsoft.com/office/drawing/2014/main" id="{F505F6DF-07C0-3FB6-D14A-A77EB0EDFBFF}"/>
+                    <a16:creationId xmlns:a16="http://schemas.microsoft.com/office/drawing/2014/main" id="{CDC6E10B-4699-795B-54D9-DDE45CE93FF6}"/>
                   </a:ext>
                 </a:extLst>
               </p:cNvPr>
@@ -4254,7 +4362,7 @@
               <a:blipFill>
                 <a:blip r:embed="rId2"/>
                 <a:stretch>
-                  <a:fillRect l="-1309" t="-15789" r="-818"/>
+                  <a:fillRect l="-1309" t="-15789"/>
                 </a:stretch>
               </a:blipFill>
             </p:spPr>
@@ -4278,7 +4386,7 @@
           <p:cNvPr id="3" name="Title 2">
             <a:extLst>
               <a:ext uri="{FF2B5EF4-FFF2-40B4-BE49-F238E27FC236}">
-                <a16:creationId xmlns:a16="http://schemas.microsoft.com/office/drawing/2014/main" id="{6932BC2D-7398-EAA2-68DC-E23FFAC563F8}"/>
+                <a16:creationId xmlns:a16="http://schemas.microsoft.com/office/drawing/2014/main" id="{56E7ACC0-AA67-1FEE-CFB0-DCD6CE6E5DD0}"/>
               </a:ext>
             </a:extLst>
           </p:cNvPr>
@@ -4304,7 +4412,7 @@
     </p:spTree>
     <p:extLst>
       <p:ext uri="{BB962C8B-B14F-4D97-AF65-F5344CB8AC3E}">
-        <p14:creationId xmlns:p14="http://schemas.microsoft.com/office/powerpoint/2010/main" val="919993008"/>
+        <p14:creationId xmlns:p14="http://schemas.microsoft.com/office/powerpoint/2010/main" val="125349319"/>
       </p:ext>
     </p:extLst>
   </p:cSld>
@@ -5529,8 +5637,8 @@
           <a:chExt cx="0" cy="0"/>
         </a:xfrm>
       </p:grpSpPr>
-      <mc:AlternateContent xmlns:mc="http://schemas.openxmlformats.org/markup-compatibility/2006" xmlns:a14="http://schemas.microsoft.com/office/drawing/2010/main">
-        <mc:Choice Requires="a14">
+      <mc:AlternateContent xmlns:mc="http://schemas.openxmlformats.org/markup-compatibility/2006">
+        <mc:Choice xmlns:a14="http://schemas.microsoft.com/office/drawing/2010/main" Requires="a14">
           <p:sp>
             <p:nvSpPr>
               <p:cNvPr id="4" name="Content Placeholder 3">
@@ -6257,29 +6365,6 @@
                         <a:rPr lang="en-US" i="1">
                           <a:latin typeface="Cambria Math" panose="02040503050406030204" pitchFamily="18" charset="0"/>
                         </a:rPr>
-                        <m:t>             </m:t>
-                      </m:r>
-                    </m:oMath>
-                  </m:oMathPara>
-                </a14:m>
-                <a:endParaRPr lang="en-US" i="1" dirty="0">
-                  <a:latin typeface="Cambria Math" panose="02040503050406030204" pitchFamily="18" charset="0"/>
-                </a:endParaRPr>
-              </a:p>
-              <a:p>
-                <a:pPr marL="0" indent="0">
-                  <a:buNone/>
-                </a:pPr>
-                <a14:m>
-                  <m:oMathPara xmlns:m="http://schemas.openxmlformats.org/officeDocument/2006/math">
-                    <m:oMathParaPr>
-                      <m:jc m:val="left"/>
-                    </m:oMathParaPr>
-                    <m:oMath>
-                      <m:r>
-                        <a:rPr lang="en-US" i="1">
-                          <a:latin typeface="Cambria Math" panose="02040503050406030204" pitchFamily="18" charset="0"/>
-                        </a:rPr>
                         <m:t>                                  =</m:t>
                       </m:r>
                       <m:r>
@@ -6496,7 +6581,7 @@
             </p:txBody>
           </p:sp>
         </mc:Choice>
-        <mc:Fallback xmlns="">
+        <mc:Fallback>
           <p:sp>
             <p:nvSpPr>
               <p:cNvPr id="4" name="Content Placeholder 3">
@@ -6517,7 +6602,7 @@
               <a:blipFill>
                 <a:blip r:embed="rId2"/>
                 <a:stretch>
-                  <a:fillRect l="-1309" t="-1316" b="-36316"/>
+                  <a:fillRect l="-1309" t="-1316" b="-28684"/>
                 </a:stretch>
               </a:blipFill>
             </p:spPr>
@@ -6743,6 +6828,134 @@
   <p:clrMapOvr>
     <a:masterClrMapping/>
   </p:clrMapOvr>
+  <p:timing>
+    <p:tnLst>
+      <p:par>
+        <p:cTn id="1" dur="indefinite" restart="never" nodeType="tmRoot">
+          <p:childTnLst>
+            <p:seq concurrent="1" nextAc="seek">
+              <p:cTn id="2" dur="indefinite" nodeType="mainSeq">
+                <p:childTnLst>
+                  <p:par>
+                    <p:cTn id="3" fill="hold">
+                      <p:stCondLst>
+                        <p:cond delay="indefinite"/>
+                      </p:stCondLst>
+                      <p:childTnLst>
+                        <p:par>
+                          <p:cTn id="4" fill="hold">
+                            <p:stCondLst>
+                              <p:cond delay="0"/>
+                            </p:stCondLst>
+                            <p:childTnLst>
+                              <p:par>
+                                <p:cTn id="5" presetID="1" presetClass="entr" presetSubtype="0" fill="hold" nodeType="clickEffect">
+                                  <p:stCondLst>
+                                    <p:cond delay="0"/>
+                                  </p:stCondLst>
+                                  <p:childTnLst>
+                                    <p:set>
+                                      <p:cBhvr>
+                                        <p:cTn id="6" dur="1" fill="hold">
+                                          <p:stCondLst>
+                                            <p:cond delay="0"/>
+                                          </p:stCondLst>
+                                        </p:cTn>
+                                        <p:tgtEl>
+                                          <p:spTgt spid="4">
+                                            <p:txEl>
+                                              <p:pRg st="4" end="4"/>
+                                            </p:txEl>
+                                          </p:spTgt>
+                                        </p:tgtEl>
+                                        <p:attrNameLst>
+                                          <p:attrName>style.visibility</p:attrName>
+                                        </p:attrNameLst>
+                                      </p:cBhvr>
+                                      <p:to>
+                                        <p:strVal val="visible"/>
+                                      </p:to>
+                                    </p:set>
+                                  </p:childTnLst>
+                                </p:cTn>
+                              </p:par>
+                            </p:childTnLst>
+                          </p:cTn>
+                        </p:par>
+                      </p:childTnLst>
+                    </p:cTn>
+                  </p:par>
+                  <p:par>
+                    <p:cTn id="7" fill="hold">
+                      <p:stCondLst>
+                        <p:cond delay="indefinite"/>
+                      </p:stCondLst>
+                      <p:childTnLst>
+                        <p:par>
+                          <p:cTn id="8" fill="hold">
+                            <p:stCondLst>
+                              <p:cond delay="0"/>
+                            </p:stCondLst>
+                            <p:childTnLst>
+                              <p:par>
+                                <p:cTn id="9" presetID="1" presetClass="entr" presetSubtype="0" fill="hold" nodeType="clickEffect">
+                                  <p:stCondLst>
+                                    <p:cond delay="0"/>
+                                  </p:stCondLst>
+                                  <p:childTnLst>
+                                    <p:set>
+                                      <p:cBhvr>
+                                        <p:cTn id="10" dur="1" fill="hold">
+                                          <p:stCondLst>
+                                            <p:cond delay="0"/>
+                                          </p:stCondLst>
+                                        </p:cTn>
+                                        <p:tgtEl>
+                                          <p:spTgt spid="4">
+                                            <p:txEl>
+                                              <p:pRg st="5" end="5"/>
+                                            </p:txEl>
+                                          </p:spTgt>
+                                        </p:tgtEl>
+                                        <p:attrNameLst>
+                                          <p:attrName>style.visibility</p:attrName>
+                                        </p:attrNameLst>
+                                      </p:cBhvr>
+                                      <p:to>
+                                        <p:strVal val="visible"/>
+                                      </p:to>
+                                    </p:set>
+                                  </p:childTnLst>
+                                </p:cTn>
+                              </p:par>
+                            </p:childTnLst>
+                          </p:cTn>
+                        </p:par>
+                      </p:childTnLst>
+                    </p:cTn>
+                  </p:par>
+                </p:childTnLst>
+              </p:cTn>
+              <p:prevCondLst>
+                <p:cond evt="onPrev" delay="0">
+                  <p:tgtEl>
+                    <p:sldTgt/>
+                  </p:tgtEl>
+                </p:cond>
+              </p:prevCondLst>
+              <p:nextCondLst>
+                <p:cond evt="onNext" delay="0">
+                  <p:tgtEl>
+                    <p:sldTgt/>
+                  </p:tgtEl>
+                </p:cond>
+              </p:nextCondLst>
+            </p:seq>
+          </p:childTnLst>
+        </p:cTn>
+      </p:par>
+    </p:tnLst>
+  </p:timing>
 </p:sld>
 </file>
 
@@ -6769,8 +6982,8 @@
           <a:chExt cx="0" cy="0"/>
         </a:xfrm>
       </p:grpSpPr>
-      <mc:AlternateContent xmlns:mc="http://schemas.openxmlformats.org/markup-compatibility/2006">
-        <mc:Choice xmlns:a14="http://schemas.microsoft.com/office/drawing/2010/main" Requires="a14">
+      <mc:AlternateContent xmlns:mc="http://schemas.openxmlformats.org/markup-compatibility/2006" xmlns:a14="http://schemas.microsoft.com/office/drawing/2010/main">
+        <mc:Choice Requires="a14">
           <p:sp>
             <p:nvSpPr>
               <p:cNvPr id="4" name="Content Placeholder 3">
@@ -7752,7 +7965,7 @@
             </p:txBody>
           </p:sp>
         </mc:Choice>
-        <mc:Fallback>
+        <mc:Fallback xmlns="">
           <p:sp>
             <p:nvSpPr>
               <p:cNvPr id="4" name="Content Placeholder 3">
@@ -8001,8 +8214,8 @@
           <a:chExt cx="0" cy="0"/>
         </a:xfrm>
       </p:grpSpPr>
-      <mc:AlternateContent xmlns:mc="http://schemas.openxmlformats.org/markup-compatibility/2006">
-        <mc:Choice xmlns:a14="http://schemas.microsoft.com/office/drawing/2010/main" Requires="a14">
+      <mc:AlternateContent xmlns:mc="http://schemas.openxmlformats.org/markup-compatibility/2006" xmlns:a14="http://schemas.microsoft.com/office/drawing/2010/main">
+        <mc:Choice Requires="a14">
           <p:sp>
             <p:nvSpPr>
               <p:cNvPr id="4" name="Content Placeholder 3">
@@ -8584,7 +8797,7 @@
             </p:txBody>
           </p:sp>
         </mc:Choice>
-        <mc:Fallback>
+        <mc:Fallback xmlns="">
           <p:sp>
             <p:nvSpPr>
               <p:cNvPr id="4" name="Content Placeholder 3">
@@ -8860,8 +9073,8 @@
           <a:chExt cx="0" cy="0"/>
         </a:xfrm>
       </p:grpSpPr>
-      <mc:AlternateContent xmlns:mc="http://schemas.openxmlformats.org/markup-compatibility/2006">
-        <mc:Choice xmlns:a14="http://schemas.microsoft.com/office/drawing/2010/main" Requires="a14">
+      <mc:AlternateContent xmlns:mc="http://schemas.openxmlformats.org/markup-compatibility/2006" xmlns:a14="http://schemas.microsoft.com/office/drawing/2010/main">
+        <mc:Choice Requires="a14">
           <p:sp>
             <p:nvSpPr>
               <p:cNvPr id="4" name="Content Placeholder 3">
@@ -9341,7 +9554,7 @@
             </p:txBody>
           </p:sp>
         </mc:Choice>
-        <mc:Fallback>
+        <mc:Fallback xmlns="">
           <p:sp>
             <p:nvSpPr>
               <p:cNvPr id="4" name="Content Placeholder 3">
@@ -9409,8 +9622,8 @@
           </a:p>
         </p:txBody>
       </p:sp>
-      <mc:AlternateContent xmlns:mc="http://schemas.openxmlformats.org/markup-compatibility/2006">
-        <mc:Choice xmlns:a14="http://schemas.microsoft.com/office/drawing/2010/main" Requires="a14">
+      <mc:AlternateContent xmlns:mc="http://schemas.openxmlformats.org/markup-compatibility/2006" xmlns:a14="http://schemas.microsoft.com/office/drawing/2010/main">
+        <mc:Choice Requires="a14">
           <p:sp>
             <p:nvSpPr>
               <p:cNvPr id="2" name="TextBox 1">
@@ -9745,17 +9958,7 @@
                               <a:latin typeface="Cambria Math" panose="02040503050406030204" pitchFamily="18" charset="0"/>
                               <a:ea typeface="Cambria Math" panose="02040503050406030204" pitchFamily="18" charset="0"/>
                             </a:rPr>
-                            <m:t>=</m:t>
-                          </m:r>
-                          <m:r>
-                            <a:rPr lang="en-US" b="0" i="1" smtClean="0">
-                              <a:solidFill>
-                                <a:srgbClr val="0033CC"/>
-                              </a:solidFill>
-                              <a:latin typeface="Cambria Math" panose="02040503050406030204" pitchFamily="18" charset="0"/>
-                              <a:ea typeface="Cambria Math" panose="02040503050406030204" pitchFamily="18" charset="0"/>
-                            </a:rPr>
-                            <m:t>0</m:t>
+                            <m:t>=0</m:t>
                           </m:r>
                         </m:e>
                       </m:nary>
@@ -9767,7 +9970,7 @@
             </p:txBody>
           </p:sp>
         </mc:Choice>
-        <mc:Fallback>
+        <mc:Fallback xmlns="">
           <p:sp>
             <p:nvSpPr>
               <p:cNvPr id="2" name="TextBox 1">
@@ -9984,10 +10187,10 @@
       </p:grpSpPr>
       <p:sp>
         <p:nvSpPr>
-          <p:cNvPr id="3" name="Title 2">
+          <p:cNvPr id="2" name="Title 1">
             <a:extLst>
               <a:ext uri="{FF2B5EF4-FFF2-40B4-BE49-F238E27FC236}">
-                <a16:creationId xmlns:a16="http://schemas.microsoft.com/office/drawing/2014/main" id="{0CFDF7CA-B744-B3B5-850E-543CCDA16258}"/>
+                <a16:creationId xmlns:a16="http://schemas.microsoft.com/office/drawing/2014/main" id="{15160679-D6B1-610A-B664-7236129E7F93}"/>
               </a:ext>
             </a:extLst>
           </p:cNvPr>
@@ -10005,7 +10208,7 @@
           <a:p>
             <a:r>
               <a:rPr lang="en-US" dirty="0"/>
-              <a:t>Common loss functions</a:t>
+              <a:t>Empirical RISK Minimization</a:t>
             </a:r>
           </a:p>
         </p:txBody>
@@ -10013,7 +10216,7 @@
     </p:spTree>
     <p:extLst>
       <p:ext uri="{BB962C8B-B14F-4D97-AF65-F5344CB8AC3E}">
-        <p14:creationId xmlns:p14="http://schemas.microsoft.com/office/powerpoint/2010/main" val="4210722022"/>
+        <p14:creationId xmlns:p14="http://schemas.microsoft.com/office/powerpoint/2010/main" val="3793860274"/>
       </p:ext>
     </p:extLst>
   </p:cSld>
@@ -10043,584 +10246,49 @@
           <a:chExt cx="0" cy="0"/>
         </a:xfrm>
       </p:grpSpPr>
-      <mc:AlternateContent xmlns:mc="http://schemas.openxmlformats.org/markup-compatibility/2006">
-        <mc:Choice xmlns:a14="http://schemas.microsoft.com/office/drawing/2010/main" Requires="a14">
-          <p:sp>
-            <p:nvSpPr>
-              <p:cNvPr id="4" name="Content Placeholder 3">
-                <a:extLst>
-                  <a:ext uri="{FF2B5EF4-FFF2-40B4-BE49-F238E27FC236}">
-                    <a16:creationId xmlns:a16="http://schemas.microsoft.com/office/drawing/2014/main" id="{51DC6163-A954-DD59-6EC8-A66A6CED9A85}"/>
-                  </a:ext>
-                </a:extLst>
-              </p:cNvPr>
-              <p:cNvSpPr>
-                <a:spLocks noGrp="1"/>
-              </p:cNvSpPr>
-              <p:nvPr>
-                <p:ph sz="half" idx="1"/>
-              </p:nvPr>
-            </p:nvSpPr>
-            <p:spPr>
-              <a:xfrm>
-                <a:off x="711200" y="1123950"/>
-                <a:ext cx="7747000" cy="4819650"/>
-              </a:xfrm>
-            </p:spPr>
-            <p:txBody>
-              <a:bodyPr/>
-              <a:lstStyle/>
-              <a:p>
-                <a:pPr marL="0" indent="0">
-                  <a:buNone/>
-                </a:pPr>
-                <a:r>
-                  <a:rPr lang="en-US" dirty="0">
-                    <a:solidFill>
-                      <a:srgbClr val="0033CC"/>
-                    </a:solidFill>
-                  </a:rPr>
-                  <a:t>Quadratic loss</a:t>
-                </a:r>
-                <a:r>
-                  <a:rPr lang="en-US" b="1" dirty="0">
-                    <a:solidFill>
-                      <a:srgbClr val="0033CC"/>
-                    </a:solidFill>
-                  </a:rPr>
-                  <a:t>		</a:t>
-                </a:r>
-                <a:r>
-                  <a:rPr lang="en-US" dirty="0"/>
-                  <a:t>(often used for regression)</a:t>
-                </a:r>
-              </a:p>
-              <a:p>
-                <a:pPr marL="0" indent="0">
-                  <a:buNone/>
-                </a:pPr>
-                <a:endParaRPr lang="en-US" dirty="0"/>
-              </a:p>
-              <a:p>
-                <a:pPr marL="0" indent="0">
-                  <a:buNone/>
-                </a:pPr>
-                <a:r>
-                  <a:rPr lang="en-US" dirty="0">
-                    <a:ea typeface="Cambria Math" charset="0"/>
-                    <a:cs typeface="Cambria Math" charset="0"/>
-                  </a:rPr>
-                  <a:t>	</a:t>
-                </a:r>
-                <a14:m>
-                  <m:oMath xmlns:m="http://schemas.openxmlformats.org/officeDocument/2006/math">
-                    <m:r>
-                      <a:rPr lang="en-US" i="1">
-                        <a:latin typeface="Cambria Math" panose="02040503050406030204" pitchFamily="18" charset="0"/>
-                        <a:ea typeface="Cambria Math" charset="0"/>
-                        <a:cs typeface="Cambria Math" charset="0"/>
-                      </a:rPr>
-                      <m:t>𝐿</m:t>
-                    </m:r>
-                    <m:d>
-                      <m:dPr>
-                        <m:ctrlPr>
-                          <a:rPr lang="en-US" i="1">
-                            <a:latin typeface="Cambria Math" panose="02040503050406030204" pitchFamily="18" charset="0"/>
-                            <a:ea typeface="Cambria Math" charset="0"/>
-                            <a:cs typeface="Cambria Math" charset="0"/>
-                          </a:rPr>
-                        </m:ctrlPr>
-                      </m:dPr>
-                      <m:e>
-                        <m:r>
-                          <a:rPr lang="en-US" i="1">
-                            <a:latin typeface="Cambria Math" panose="02040503050406030204" pitchFamily="18" charset="0"/>
-                            <a:ea typeface="Cambria Math" charset="0"/>
-                            <a:cs typeface="Cambria Math" charset="0"/>
-                          </a:rPr>
-                          <m:t>𝑦</m:t>
-                        </m:r>
-                        <m:r>
-                          <a:rPr lang="en-US" i="1">
-                            <a:latin typeface="Cambria Math" panose="02040503050406030204" pitchFamily="18" charset="0"/>
-                            <a:ea typeface="Cambria Math" charset="0"/>
-                            <a:cs typeface="Cambria Math" charset="0"/>
-                          </a:rPr>
-                          <m:t>, </m:t>
-                        </m:r>
-                        <m:r>
-                          <a:rPr lang="en-US" i="1">
-                            <a:latin typeface="Cambria Math" panose="02040503050406030204" pitchFamily="18" charset="0"/>
-                            <a:ea typeface="Cambria Math" charset="0"/>
-                            <a:cs typeface="Cambria Math" charset="0"/>
-                          </a:rPr>
-                          <m:t>𝑓</m:t>
-                        </m:r>
-                      </m:e>
-                    </m:d>
-                    <m:r>
-                      <a:rPr lang="en-US" i="1">
-                        <a:latin typeface="Cambria Math" panose="02040503050406030204" pitchFamily="18" charset="0"/>
-                      </a:rPr>
-                      <m:t>=</m:t>
-                    </m:r>
-                    <m:sSup>
-                      <m:sSupPr>
-                        <m:ctrlPr>
-                          <a:rPr lang="en-US" i="1">
-                            <a:latin typeface="Cambria Math" panose="02040503050406030204" pitchFamily="18" charset="0"/>
-                          </a:rPr>
-                        </m:ctrlPr>
-                      </m:sSupPr>
-                      <m:e>
-                        <m:d>
-                          <m:dPr>
-                            <m:ctrlPr>
-                              <a:rPr lang="en-US" i="1">
-                                <a:latin typeface="Cambria Math" panose="02040503050406030204" pitchFamily="18" charset="0"/>
-                              </a:rPr>
-                            </m:ctrlPr>
-                          </m:dPr>
-                          <m:e>
-                            <m:r>
-                              <a:rPr lang="en-US" i="1">
-                                <a:latin typeface="Cambria Math" panose="02040503050406030204" pitchFamily="18" charset="0"/>
-                              </a:rPr>
-                              <m:t>𝑦</m:t>
-                            </m:r>
-                            <m:r>
-                              <a:rPr lang="en-US" i="1">
-                                <a:latin typeface="Cambria Math" panose="02040503050406030204" pitchFamily="18" charset="0"/>
-                              </a:rPr>
-                              <m:t>−</m:t>
-                            </m:r>
-                            <m:r>
-                              <a:rPr lang="en-US" i="1">
-                                <a:latin typeface="Cambria Math" panose="02040503050406030204" pitchFamily="18" charset="0"/>
-                              </a:rPr>
-                              <m:t>𝑓</m:t>
-                            </m:r>
-                          </m:e>
-                        </m:d>
-                      </m:e>
-                      <m:sup>
-                        <m:r>
-                          <a:rPr lang="en-US" i="1">
-                            <a:latin typeface="Cambria Math" panose="02040503050406030204" pitchFamily="18" charset="0"/>
-                          </a:rPr>
-                          <m:t>2</m:t>
-                        </m:r>
-                      </m:sup>
-                    </m:sSup>
-                  </m:oMath>
-                </a14:m>
-                <a:endParaRPr lang="en-US" dirty="0"/>
-              </a:p>
-              <a:p>
-                <a:pPr marL="0" indent="0">
-                  <a:buNone/>
-                </a:pPr>
-                <a14:m>
-                  <m:oMathPara xmlns:m="http://schemas.openxmlformats.org/officeDocument/2006/math">
-                    <m:oMathParaPr>
-                      <m:jc m:val="center"/>
-                    </m:oMathParaPr>
-                    <m:oMath>
-                      <m:r>
-                        <a:rPr lang="en-US" b="0" i="1" smtClean="0">
-                          <a:latin typeface="Cambria Math" panose="02040503050406030204" pitchFamily="18" charset="0"/>
-                        </a:rPr>
-                        <m:t>𝑦</m:t>
-                      </m:r>
-                      <m:r>
-                        <a:rPr lang="en-US" b="0" i="1" smtClean="0">
-                          <a:latin typeface="Cambria Math" panose="02040503050406030204" pitchFamily="18" charset="0"/>
-                        </a:rPr>
-                        <m:t>∈</m:t>
-                      </m:r>
-                      <m:r>
-                        <a:rPr lang="en-US" b="0" i="1" smtClean="0">
-                          <a:latin typeface="Cambria Math" panose="02040503050406030204" pitchFamily="18" charset="0"/>
-                          <a:ea typeface="Cambria Math" panose="02040503050406030204" pitchFamily="18" charset="0"/>
-                        </a:rPr>
-                        <m:t>ℝ</m:t>
-                      </m:r>
-                    </m:oMath>
-                  </m:oMathPara>
-                </a14:m>
-                <a:endParaRPr lang="en-US" dirty="0"/>
-              </a:p>
-              <a:p>
-                <a:pPr marL="0" indent="0">
-                  <a:buNone/>
-                </a:pPr>
-                <a:endParaRPr lang="en-US" dirty="0"/>
-              </a:p>
-              <a:p>
-                <a:pPr marL="0" indent="0">
-                  <a:buNone/>
-                </a:pPr>
-                <a:r>
-                  <a:rPr lang="en-US" dirty="0">
-                    <a:solidFill>
-                      <a:srgbClr val="0033CC"/>
-                    </a:solidFill>
-                  </a:rPr>
-                  <a:t>Binary cross entropy</a:t>
-                </a:r>
-                <a:r>
-                  <a:rPr lang="en-US" b="1" dirty="0">
-                    <a:solidFill>
-                      <a:srgbClr val="0033CC"/>
-                    </a:solidFill>
-                  </a:rPr>
-                  <a:t>	</a:t>
-                </a:r>
-                <a:r>
-                  <a:rPr lang="en-US" dirty="0"/>
-                  <a:t>(often used for classification)</a:t>
-                </a:r>
-              </a:p>
-              <a:p>
-                <a:pPr marL="0" indent="0">
-                  <a:buNone/>
-                </a:pPr>
-                <a:endParaRPr lang="en-US" b="1" dirty="0">
-                  <a:solidFill>
-                    <a:srgbClr val="0033CC"/>
-                  </a:solidFill>
-                </a:endParaRPr>
-              </a:p>
-              <a:p>
-                <a:pPr marL="0" indent="0">
-                  <a:buNone/>
-                </a:pPr>
-                <a:r>
-                  <a:rPr lang="en-US" dirty="0">
-                    <a:ea typeface="Cambria Math" charset="0"/>
-                    <a:cs typeface="Cambria Math" charset="0"/>
-                  </a:rPr>
-                  <a:t>	</a:t>
-                </a:r>
-                <a14:m>
-                  <m:oMath xmlns:m="http://schemas.openxmlformats.org/officeDocument/2006/math">
-                    <m:r>
-                      <a:rPr lang="en-US" i="1">
-                        <a:latin typeface="Cambria Math" panose="02040503050406030204" pitchFamily="18" charset="0"/>
-                        <a:ea typeface="Cambria Math" charset="0"/>
-                        <a:cs typeface="Cambria Math" charset="0"/>
-                      </a:rPr>
-                      <m:t>𝐿</m:t>
-                    </m:r>
-                    <m:d>
-                      <m:dPr>
-                        <m:ctrlPr>
-                          <a:rPr lang="en-US" i="1">
-                            <a:latin typeface="Cambria Math" panose="02040503050406030204" pitchFamily="18" charset="0"/>
-                            <a:ea typeface="Cambria Math" charset="0"/>
-                            <a:cs typeface="Cambria Math" charset="0"/>
-                          </a:rPr>
-                        </m:ctrlPr>
-                      </m:dPr>
-                      <m:e>
-                        <m:r>
-                          <a:rPr lang="en-US" i="1">
-                            <a:latin typeface="Cambria Math" panose="02040503050406030204" pitchFamily="18" charset="0"/>
-                            <a:ea typeface="Cambria Math" charset="0"/>
-                            <a:cs typeface="Cambria Math" charset="0"/>
-                          </a:rPr>
-                          <m:t>𝑦</m:t>
-                        </m:r>
-                        <m:r>
-                          <a:rPr lang="en-US" i="1">
-                            <a:latin typeface="Cambria Math" panose="02040503050406030204" pitchFamily="18" charset="0"/>
-                            <a:ea typeface="Cambria Math" charset="0"/>
-                            <a:cs typeface="Cambria Math" charset="0"/>
-                          </a:rPr>
-                          <m:t>, </m:t>
-                        </m:r>
-                        <m:r>
-                          <a:rPr lang="en-US" i="1">
-                            <a:latin typeface="Cambria Math" panose="02040503050406030204" pitchFamily="18" charset="0"/>
-                            <a:ea typeface="Cambria Math" charset="0"/>
-                            <a:cs typeface="Cambria Math" charset="0"/>
-                          </a:rPr>
-                          <m:t>𝑓</m:t>
-                        </m:r>
-                      </m:e>
-                    </m:d>
-                    <m:r>
-                      <a:rPr lang="en-US" i="1">
-                        <a:latin typeface="Cambria Math" panose="02040503050406030204" pitchFamily="18" charset="0"/>
-                        <a:ea typeface="Cambria Math" charset="0"/>
-                        <a:cs typeface="Cambria Math" charset="0"/>
-                      </a:rPr>
-                      <m:t>=</m:t>
-                    </m:r>
-                    <m:r>
-                      <a:rPr lang="en-US">
-                        <a:latin typeface="Cambria Math" panose="02040503050406030204" pitchFamily="18" charset="0"/>
-                        <a:ea typeface="Cambria Math" charset="0"/>
-                        <a:cs typeface="Cambria Math" charset="0"/>
-                      </a:rPr>
-                      <m:t>−</m:t>
-                    </m:r>
-                    <m:d>
-                      <m:dPr>
-                        <m:begChr m:val="["/>
-                        <m:endChr m:val="]"/>
-                        <m:ctrlPr>
-                          <a:rPr lang="en-US" i="1">
-                            <a:latin typeface="Cambria Math" panose="02040503050406030204" pitchFamily="18" charset="0"/>
-                            <a:ea typeface="Cambria Math" charset="0"/>
-                            <a:cs typeface="Cambria Math" charset="0"/>
-                          </a:rPr>
-                        </m:ctrlPr>
-                      </m:dPr>
-                      <m:e>
-                        <m:r>
-                          <a:rPr lang="en-US" i="1">
-                            <a:latin typeface="Cambria Math" panose="02040503050406030204" pitchFamily="18" charset="0"/>
-                            <a:ea typeface="Cambria Math" charset="0"/>
-                            <a:cs typeface="Cambria Math" charset="0"/>
-                          </a:rPr>
-                          <m:t>𝑦</m:t>
-                        </m:r>
-                        <m:func>
-                          <m:funcPr>
-                            <m:ctrlPr>
-                              <a:rPr lang="en-US">
-                                <a:latin typeface="Cambria Math" panose="02040503050406030204" pitchFamily="18" charset="0"/>
-                                <a:ea typeface="Cambria Math" charset="0"/>
-                                <a:cs typeface="Cambria Math" charset="0"/>
-                              </a:rPr>
-                            </m:ctrlPr>
-                          </m:funcPr>
-                          <m:fName>
-                            <m:r>
-                              <m:rPr>
-                                <m:sty m:val="p"/>
-                              </m:rPr>
-                              <a:rPr lang="en-US">
-                                <a:latin typeface="Cambria Math" panose="02040503050406030204" pitchFamily="18" charset="0"/>
-                                <a:ea typeface="Cambria Math" charset="0"/>
-                                <a:cs typeface="Cambria Math" charset="0"/>
-                              </a:rPr>
-                              <m:t>log</m:t>
-                            </m:r>
-                          </m:fName>
-                          <m:e>
-                            <m:r>
-                              <a:rPr lang="en-US" i="1">
-                                <a:latin typeface="Cambria Math" panose="02040503050406030204" pitchFamily="18" charset="0"/>
-                                <a:ea typeface="Cambria Math" charset="0"/>
-                                <a:cs typeface="Cambria Math" charset="0"/>
-                              </a:rPr>
-                              <m:t>𝑓</m:t>
-                            </m:r>
-                            <m:r>
-                              <a:rPr lang="en-US" i="1">
-                                <a:latin typeface="Cambria Math" panose="02040503050406030204" pitchFamily="18" charset="0"/>
-                                <a:ea typeface="Cambria Math" charset="0"/>
-                                <a:cs typeface="Cambria Math" charset="0"/>
-                              </a:rPr>
-                              <m:t>+</m:t>
-                            </m:r>
-                            <m:d>
-                              <m:dPr>
-                                <m:ctrlPr>
-                                  <a:rPr lang="en-US" i="1">
-                                    <a:latin typeface="Cambria Math" panose="02040503050406030204" pitchFamily="18" charset="0"/>
-                                    <a:ea typeface="Cambria Math" charset="0"/>
-                                    <a:cs typeface="Cambria Math" charset="0"/>
-                                  </a:rPr>
-                                </m:ctrlPr>
-                              </m:dPr>
-                              <m:e>
-                                <m:r>
-                                  <a:rPr lang="en-US" i="1">
-                                    <a:latin typeface="Cambria Math" panose="02040503050406030204" pitchFamily="18" charset="0"/>
-                                    <a:ea typeface="Cambria Math" charset="0"/>
-                                    <a:cs typeface="Cambria Math" charset="0"/>
-                                  </a:rPr>
-                                  <m:t>1−</m:t>
-                                </m:r>
-                                <m:r>
-                                  <a:rPr lang="en-US" i="1">
-                                    <a:latin typeface="Cambria Math" panose="02040503050406030204" pitchFamily="18" charset="0"/>
-                                    <a:ea typeface="Cambria Math" charset="0"/>
-                                    <a:cs typeface="Cambria Math" charset="0"/>
-                                  </a:rPr>
-                                  <m:t>𝑦</m:t>
-                                </m:r>
-                              </m:e>
-                            </m:d>
-                            <m:func>
-                              <m:funcPr>
-                                <m:ctrlPr>
-                                  <a:rPr lang="en-US">
-                                    <a:latin typeface="Cambria Math" panose="02040503050406030204" pitchFamily="18" charset="0"/>
-                                    <a:ea typeface="Cambria Math" charset="0"/>
-                                    <a:cs typeface="Cambria Math" charset="0"/>
-                                  </a:rPr>
-                                </m:ctrlPr>
-                              </m:funcPr>
-                              <m:fName>
-                                <m:r>
-                                  <m:rPr>
-                                    <m:sty m:val="p"/>
-                                  </m:rPr>
-                                  <a:rPr lang="en-US">
-                                    <a:latin typeface="Cambria Math" panose="02040503050406030204" pitchFamily="18" charset="0"/>
-                                    <a:ea typeface="Cambria Math" charset="0"/>
-                                    <a:cs typeface="Cambria Math" charset="0"/>
-                                  </a:rPr>
-                                  <m:t>log</m:t>
-                                </m:r>
-                              </m:fName>
-                              <m:e>
-                                <m:d>
-                                  <m:dPr>
-                                    <m:ctrlPr>
-                                      <a:rPr lang="en-US" i="1">
-                                        <a:latin typeface="Cambria Math" panose="02040503050406030204" pitchFamily="18" charset="0"/>
-                                        <a:ea typeface="Cambria Math" charset="0"/>
-                                        <a:cs typeface="Cambria Math" charset="0"/>
-                                      </a:rPr>
-                                    </m:ctrlPr>
-                                  </m:dPr>
-                                  <m:e>
-                                    <m:r>
-                                      <a:rPr lang="en-US" i="1">
-                                        <a:latin typeface="Cambria Math" panose="02040503050406030204" pitchFamily="18" charset="0"/>
-                                        <a:ea typeface="Cambria Math" charset="0"/>
-                                        <a:cs typeface="Cambria Math" charset="0"/>
-                                      </a:rPr>
-                                      <m:t>1−</m:t>
-                                    </m:r>
-                                    <m:r>
-                                      <a:rPr lang="en-US" i="1">
-                                        <a:latin typeface="Cambria Math" panose="02040503050406030204" pitchFamily="18" charset="0"/>
-                                        <a:ea typeface="Cambria Math" charset="0"/>
-                                        <a:cs typeface="Cambria Math" charset="0"/>
-                                      </a:rPr>
-                                      <m:t>𝑓</m:t>
-                                    </m:r>
-                                  </m:e>
-                                </m:d>
-                              </m:e>
-                            </m:func>
-                          </m:e>
-                        </m:func>
-                      </m:e>
-                    </m:d>
-                  </m:oMath>
-                </a14:m>
-                <a:br>
-                  <a:rPr lang="en-US" dirty="0">
-                    <a:latin typeface="Cambria Math" panose="02040503050406030204" pitchFamily="18" charset="0"/>
-                    <a:ea typeface="Cambria Math" charset="0"/>
-                    <a:cs typeface="Cambria Math" charset="0"/>
-                  </a:rPr>
-                </a:br>
-                <a:endParaRPr lang="en-US" dirty="0">
-                  <a:latin typeface="Cambria Math" panose="02040503050406030204" pitchFamily="18" charset="0"/>
-                  <a:ea typeface="Cambria Math" charset="0"/>
-                  <a:cs typeface="Cambria Math" charset="0"/>
-                </a:endParaRPr>
-              </a:p>
-              <a:p>
-                <a:pPr marL="0" indent="0">
-                  <a:buNone/>
-                </a:pPr>
-                <a14:m>
-                  <m:oMathPara xmlns:m="http://schemas.openxmlformats.org/officeDocument/2006/math">
-                    <m:oMath>
-                      <m:r>
-                        <a:rPr lang="en-US" b="0" i="1" smtClean="0">
-                          <a:latin typeface="Cambria Math" panose="02040503050406030204" pitchFamily="18" charset="0"/>
-                          <a:ea typeface="Cambria Math" charset="0"/>
-                          <a:cs typeface="Cambria Math" charset="0"/>
-                        </a:rPr>
-                        <m:t>𝑦</m:t>
-                      </m:r>
-                      <m:r>
-                        <a:rPr lang="en-US" b="0" i="1" smtClean="0">
-                          <a:latin typeface="Cambria Math" panose="02040503050406030204" pitchFamily="18" charset="0"/>
-                          <a:ea typeface="Cambria Math" charset="0"/>
-                          <a:cs typeface="Cambria Math" charset="0"/>
-                        </a:rPr>
-                        <m:t>∈{0, 1}</m:t>
-                      </m:r>
-                    </m:oMath>
-                  </m:oMathPara>
-                </a14:m>
-                <a:endParaRPr lang="en-US" dirty="0">
-                  <a:latin typeface="Cambria Math" panose="02040503050406030204" pitchFamily="18" charset="0"/>
-                  <a:ea typeface="Cambria Math" charset="0"/>
-                  <a:cs typeface="Cambria Math" charset="0"/>
-                </a:endParaRPr>
-              </a:p>
-              <a:p>
-                <a:pPr marL="0" indent="0">
-                  <a:buNone/>
-                </a:pPr>
-                <a:endParaRPr lang="en-US" dirty="0"/>
-              </a:p>
-            </p:txBody>
-          </p:sp>
-        </mc:Choice>
-        <mc:Fallback>
-          <p:sp>
-            <p:nvSpPr>
-              <p:cNvPr id="4" name="Content Placeholder 3">
-                <a:extLst>
-                  <a:ext uri="{FF2B5EF4-FFF2-40B4-BE49-F238E27FC236}">
-                    <a16:creationId xmlns:a16="http://schemas.microsoft.com/office/drawing/2014/main" id="{51DC6163-A954-DD59-6EC8-A66A6CED9A85}"/>
-                  </a:ext>
-                </a:extLst>
-              </p:cNvPr>
-              <p:cNvSpPr>
-                <a:spLocks noGrp="1" noRot="1" noChangeAspect="1" noMove="1" noResize="1" noEditPoints="1" noAdjustHandles="1" noChangeArrowheads="1" noChangeShapeType="1" noTextEdit="1"/>
-              </p:cNvSpPr>
-              <p:nvPr>
-                <p:ph sz="half" idx="1"/>
-              </p:nvPr>
-            </p:nvSpPr>
-            <p:spPr>
-              <a:xfrm>
-                <a:off x="711200" y="1123950"/>
-                <a:ext cx="7747000" cy="4819650"/>
-              </a:xfrm>
-              <a:blipFill>
-                <a:blip r:embed="rId2"/>
-                <a:stretch>
-                  <a:fillRect l="-1309" t="-1050"/>
-                </a:stretch>
-              </a:blipFill>
-            </p:spPr>
-            <p:txBody>
-              <a:bodyPr/>
-              <a:lstStyle/>
-              <a:p>
-                <a:r>
-                  <a:rPr lang="en-US">
-                    <a:noFill/>
-                  </a:rPr>
-                  <a:t> </a:t>
-                </a:r>
-              </a:p>
-            </p:txBody>
-          </p:sp>
-        </mc:Fallback>
-      </mc:AlternateContent>
+      <p:pic>
+        <p:nvPicPr>
+          <p:cNvPr id="4" name="Picture 3" descr="A map of a mountain&#10;&#10;Description automatically generated">
+            <a:extLst>
+              <a:ext uri="{FF2B5EF4-FFF2-40B4-BE49-F238E27FC236}">
+                <a16:creationId xmlns:a16="http://schemas.microsoft.com/office/drawing/2014/main" id="{1A2EAA9C-C30B-4209-7C57-577CC8C5C26A}"/>
+              </a:ext>
+            </a:extLst>
+          </p:cNvPr>
+          <p:cNvPicPr>
+            <a:picLocks noChangeAspect="1"/>
+          </p:cNvPicPr>
+          <p:nvPr/>
+        </p:nvPicPr>
+        <p:blipFill>
+          <a:blip r:embed="rId2"/>
+          <a:stretch>
+            <a:fillRect/>
+          </a:stretch>
+        </p:blipFill>
+        <p:spPr>
+          <a:xfrm>
+            <a:off x="3060700" y="378767"/>
+            <a:ext cx="5903588" cy="6019800"/>
+          </a:xfrm>
+          <a:prstGeom prst="rect">
+            <a:avLst/>
+          </a:prstGeom>
+          <a:effectLst>
+            <a:outerShdw blurRad="50800" dist="38100" dir="2700000" algn="tl" rotWithShape="0">
+              <a:prstClr val="black">
+                <a:alpha val="40000"/>
+              </a:prstClr>
+            </a:outerShdw>
+          </a:effectLst>
+        </p:spPr>
+      </p:pic>
       <p:sp>
         <p:nvSpPr>
-          <p:cNvPr id="3" name="Title 2">
+          <p:cNvPr id="6" name="Content Placeholder 5">
             <a:extLst>
               <a:ext uri="{FF2B5EF4-FFF2-40B4-BE49-F238E27FC236}">
-                <a16:creationId xmlns:a16="http://schemas.microsoft.com/office/drawing/2014/main" id="{B7724020-1E2E-A9CD-0218-AB93D86BC677}"/>
+                <a16:creationId xmlns:a16="http://schemas.microsoft.com/office/drawing/2014/main" id="{EFEF134B-1C30-2F33-B22D-7AB50490343B}"/>
               </a:ext>
             </a:extLst>
           </p:cNvPr>
@@ -10628,17 +10296,229 @@
             <a:spLocks noGrp="1"/>
           </p:cNvSpPr>
           <p:nvPr>
-            <p:ph type="title"/>
+            <p:ph sz="half" idx="1"/>
           </p:nvPr>
         </p:nvSpPr>
-        <p:spPr/>
+        <p:spPr>
+          <a:xfrm>
+            <a:off x="711200" y="1276350"/>
+            <a:ext cx="4699000" cy="4819650"/>
+          </a:xfrm>
+        </p:spPr>
         <p:txBody>
           <a:bodyPr/>
           <a:lstStyle/>
           <a:p>
+            <a:pPr marL="0" indent="0">
+              <a:buNone/>
+            </a:pPr>
             <a:r>
               <a:rPr lang="en-US" dirty="0"/>
-              <a:t>Common Loss Functions (1)</a:t>
+              <a:t>Some jargon</a:t>
+            </a:r>
+          </a:p>
+          <a:p>
+            <a:pPr marL="0" indent="0">
+              <a:buNone/>
+            </a:pPr>
+            <a:r>
+              <a:rPr lang="en-US" b="1" dirty="0">
+                <a:solidFill>
+                  <a:srgbClr val="0033CC"/>
+                </a:solidFill>
+              </a:rPr>
+              <a:t>Train</a:t>
+            </a:r>
+            <a:r>
+              <a:rPr lang="en-US" dirty="0"/>
+              <a:t>: fit a model to </a:t>
+            </a:r>
+            <a:br>
+              <a:rPr lang="en-US" dirty="0"/>
+            </a:br>
+            <a:r>
+              <a:rPr lang="en-US" dirty="0"/>
+              <a:t>(training) data.</a:t>
+            </a:r>
+          </a:p>
+          <a:p>
+            <a:pPr marL="0" indent="0">
+              <a:buNone/>
+            </a:pPr>
+            <a:endParaRPr lang="en-US" dirty="0"/>
+          </a:p>
+          <a:p>
+            <a:pPr marL="0" indent="0">
+              <a:buNone/>
+            </a:pPr>
+            <a:r>
+              <a:rPr lang="en-US" b="1" dirty="0">
+                <a:solidFill>
+                  <a:srgbClr val="0033CC"/>
+                </a:solidFill>
+              </a:rPr>
+              <a:t>Batch</a:t>
+            </a:r>
+            <a:r>
+              <a:rPr lang="en-US" dirty="0"/>
+              <a:t>: a subset of the</a:t>
+            </a:r>
+            <a:br>
+              <a:rPr lang="en-US" dirty="0"/>
+            </a:br>
+            <a:r>
+              <a:rPr lang="en-US" dirty="0"/>
+              <a:t>training data.</a:t>
+            </a:r>
+          </a:p>
+          <a:p>
+            <a:pPr marL="0" indent="0">
+              <a:buNone/>
+            </a:pPr>
+            <a:endParaRPr lang="en-US" dirty="0"/>
+          </a:p>
+          <a:p>
+            <a:pPr marL="0" indent="0">
+              <a:buNone/>
+            </a:pPr>
+            <a:r>
+              <a:rPr lang="en-US" b="1" dirty="0">
+                <a:solidFill>
+                  <a:srgbClr val="0033CC"/>
+                </a:solidFill>
+              </a:rPr>
+              <a:t>Iteration</a:t>
+            </a:r>
+            <a:r>
+              <a:rPr lang="en-US" dirty="0"/>
+              <a:t>: a single </a:t>
+            </a:r>
+            <a:br>
+              <a:rPr lang="en-US" dirty="0"/>
+            </a:br>
+            <a:r>
+              <a:rPr lang="en-US" dirty="0"/>
+              <a:t>optimization step.</a:t>
+            </a:r>
+          </a:p>
+          <a:p>
+            <a:pPr marL="0" indent="0">
+              <a:buNone/>
+            </a:pPr>
+            <a:endParaRPr lang="en-US" dirty="0"/>
+          </a:p>
+          <a:p>
+            <a:pPr marL="0" indent="0">
+              <a:buNone/>
+            </a:pPr>
+            <a:r>
+              <a:rPr lang="en-US" b="1" dirty="0">
+                <a:solidFill>
+                  <a:srgbClr val="0033CC"/>
+                </a:solidFill>
+              </a:rPr>
+              <a:t>Epoch</a:t>
+            </a:r>
+            <a:r>
+              <a:rPr lang="en-US" dirty="0"/>
+              <a:t>: a single </a:t>
+            </a:r>
+          </a:p>
+          <a:p>
+            <a:pPr marL="0" indent="0">
+              <a:buNone/>
+            </a:pPr>
+            <a:r>
+              <a:rPr lang="en-US" dirty="0"/>
+              <a:t>pass through the entire training data.</a:t>
+            </a:r>
+          </a:p>
+          <a:p>
+            <a:pPr marL="0" indent="0">
+              <a:buNone/>
+            </a:pPr>
+            <a:endParaRPr lang="en-US" dirty="0"/>
+          </a:p>
+          <a:p>
+            <a:pPr marL="0" indent="0">
+              <a:buNone/>
+            </a:pPr>
+            <a:endParaRPr lang="en-US" dirty="0"/>
+          </a:p>
+          <a:p>
+            <a:pPr marL="0" indent="0">
+              <a:buNone/>
+            </a:pPr>
+            <a:endParaRPr lang="en-US" dirty="0"/>
+          </a:p>
+        </p:txBody>
+      </p:sp>
+      <p:sp>
+        <p:nvSpPr>
+          <p:cNvPr id="7" name="TextBox 6">
+            <a:extLst>
+              <a:ext uri="{FF2B5EF4-FFF2-40B4-BE49-F238E27FC236}">
+                <a16:creationId xmlns:a16="http://schemas.microsoft.com/office/drawing/2014/main" id="{9DD3DC66-CCC2-1FAD-5103-64B1FB5CA688}"/>
+              </a:ext>
+            </a:extLst>
+          </p:cNvPr>
+          <p:cNvSpPr txBox="1"/>
+          <p:nvPr/>
+        </p:nvSpPr>
+        <p:spPr>
+          <a:xfrm>
+            <a:off x="4446475" y="117157"/>
+            <a:ext cx="963725" cy="523220"/>
+          </a:xfrm>
+          <a:prstGeom prst="rect">
+            <a:avLst/>
+          </a:prstGeom>
+          <a:noFill/>
+        </p:spPr>
+        <p:txBody>
+          <a:bodyPr wrap="none" rtlCol="0">
+            <a:spAutoFit/>
+          </a:bodyPr>
+          <a:lstStyle/>
+          <a:p>
+            <a:r>
+              <a:rPr lang="en-US" sz="2800" b="1" dirty="0"/>
+              <a:t>Start</a:t>
+            </a:r>
+          </a:p>
+        </p:txBody>
+      </p:sp>
+      <p:sp>
+        <p:nvSpPr>
+          <p:cNvPr id="8" name="TextBox 7">
+            <a:extLst>
+              <a:ext uri="{FF2B5EF4-FFF2-40B4-BE49-F238E27FC236}">
+                <a16:creationId xmlns:a16="http://schemas.microsoft.com/office/drawing/2014/main" id="{59BFFAE8-5F75-7D8F-7376-F4E5623C617A}"/>
+              </a:ext>
+            </a:extLst>
+          </p:cNvPr>
+          <p:cNvSpPr txBox="1"/>
+          <p:nvPr/>
+        </p:nvSpPr>
+        <p:spPr>
+          <a:xfrm>
+            <a:off x="7810438" y="5701040"/>
+            <a:ext cx="824265" cy="523220"/>
+          </a:xfrm>
+          <a:prstGeom prst="rect">
+            <a:avLst/>
+          </a:prstGeom>
+          <a:noFill/>
+        </p:spPr>
+        <p:txBody>
+          <a:bodyPr wrap="none" rtlCol="0">
+            <a:spAutoFit/>
+          </a:bodyPr>
+          <a:lstStyle/>
+          <a:p>
+            <a:r>
+              <a:rPr lang="en-US" sz="2800" b="1" dirty="0"/>
+              <a:t>End</a:t>
             </a:r>
           </a:p>
         </p:txBody>
@@ -10646,7 +10526,7 @@
     </p:spTree>
     <p:extLst>
       <p:ext uri="{BB962C8B-B14F-4D97-AF65-F5344CB8AC3E}">
-        <p14:creationId xmlns:p14="http://schemas.microsoft.com/office/powerpoint/2010/main" val="3100751115"/>
+        <p14:creationId xmlns:p14="http://schemas.microsoft.com/office/powerpoint/2010/main" val="4032599781"/>
       </p:ext>
     </p:extLst>
   </p:cSld>
@@ -10687,7 +10567,7 @@
                                           </p:stCondLst>
                                         </p:cTn>
                                         <p:tgtEl>
-                                          <p:spTgt spid="4">
+                                          <p:spTgt spid="6">
                                             <p:txEl>
                                               <p:pRg st="5" end="5"/>
                                             </p:txEl>
@@ -10704,21 +10584,39 @@
                                   </p:childTnLst>
                                 </p:cTn>
                               </p:par>
+                            </p:childTnLst>
+                          </p:cTn>
+                        </p:par>
+                      </p:childTnLst>
+                    </p:cTn>
+                  </p:par>
+                  <p:par>
+                    <p:cTn id="7" fill="hold">
+                      <p:stCondLst>
+                        <p:cond delay="indefinite"/>
+                      </p:stCondLst>
+                      <p:childTnLst>
+                        <p:par>
+                          <p:cTn id="8" fill="hold">
+                            <p:stCondLst>
+                              <p:cond delay="0"/>
+                            </p:stCondLst>
+                            <p:childTnLst>
                               <p:par>
-                                <p:cTn id="7" presetID="1" presetClass="entr" presetSubtype="0" fill="hold" nodeType="withEffect">
+                                <p:cTn id="9" presetID="1" presetClass="entr" presetSubtype="0" fill="hold" nodeType="clickEffect">
                                   <p:stCondLst>
                                     <p:cond delay="0"/>
                                   </p:stCondLst>
                                   <p:childTnLst>
                                     <p:set>
                                       <p:cBhvr>
-                                        <p:cTn id="8" dur="1" fill="hold">
+                                        <p:cTn id="10" dur="1" fill="hold">
                                           <p:stCondLst>
                                             <p:cond delay="0"/>
                                           </p:stCondLst>
                                         </p:cTn>
                                         <p:tgtEl>
-                                          <p:spTgt spid="4">
+                                          <p:spTgt spid="6">
                                             <p:txEl>
                                               <p:pRg st="7" end="7"/>
                                             </p:txEl>
@@ -10736,20 +10634,20 @@
                                 </p:cTn>
                               </p:par>
                               <p:par>
-                                <p:cTn id="9" presetID="1" presetClass="entr" presetSubtype="0" fill="hold" nodeType="withEffect">
+                                <p:cTn id="11" presetID="1" presetClass="entr" presetSubtype="0" fill="hold" nodeType="withEffect">
                                   <p:stCondLst>
                                     <p:cond delay="0"/>
                                   </p:stCondLst>
                                   <p:childTnLst>
                                     <p:set>
                                       <p:cBhvr>
-                                        <p:cTn id="10" dur="1" fill="hold">
+                                        <p:cTn id="12" dur="1" fill="hold">
                                           <p:stCondLst>
                                             <p:cond delay="0"/>
                                           </p:stCondLst>
                                         </p:cTn>
                                         <p:tgtEl>
-                                          <p:spTgt spid="4">
+                                          <p:spTgt spid="6">
                                             <p:txEl>
                                               <p:pRg st="8" end="8"/>
                                             </p:txEl>
@@ -10814,14 +10712,44 @@
           <a:chExt cx="0" cy="0"/>
         </a:xfrm>
       </p:grpSpPr>
+      <p:pic>
+        <p:nvPicPr>
+          <p:cNvPr id="4" name="Picture 3" descr="A map of a mountain&#10;&#10;Description automatically generated">
+            <a:extLst>
+              <a:ext uri="{FF2B5EF4-FFF2-40B4-BE49-F238E27FC236}">
+                <a16:creationId xmlns:a16="http://schemas.microsoft.com/office/drawing/2014/main" id="{FC20D917-2813-56A2-BE44-B1E435474AE5}"/>
+              </a:ext>
+            </a:extLst>
+          </p:cNvPr>
+          <p:cNvPicPr>
+            <a:picLocks noChangeAspect="1"/>
+          </p:cNvPicPr>
+          <p:nvPr/>
+        </p:nvPicPr>
+        <p:blipFill>
+          <a:blip r:embed="rId2"/>
+          <a:stretch>
+            <a:fillRect/>
+          </a:stretch>
+        </p:blipFill>
+        <p:spPr>
+          <a:xfrm>
+            <a:off x="5297518" y="2514600"/>
+            <a:ext cx="3846482" cy="3922200"/>
+          </a:xfrm>
+          <a:prstGeom prst="rect">
+            <a:avLst/>
+          </a:prstGeom>
+        </p:spPr>
+      </p:pic>
       <mc:AlternateContent xmlns:mc="http://schemas.openxmlformats.org/markup-compatibility/2006">
         <mc:Choice xmlns:a14="http://schemas.microsoft.com/office/drawing/2010/main" Requires="a14">
           <p:sp>
             <p:nvSpPr>
-              <p:cNvPr id="4" name="Content Placeholder 3">
+              <p:cNvPr id="2" name="Content Placeholder 1">
                 <a:extLst>
                   <a:ext uri="{FF2B5EF4-FFF2-40B4-BE49-F238E27FC236}">
-                    <a16:creationId xmlns:a16="http://schemas.microsoft.com/office/drawing/2014/main" id="{C5085120-E763-F128-57A2-3EF60CB80E2F}"/>
+                    <a16:creationId xmlns:a16="http://schemas.microsoft.com/office/drawing/2014/main" id="{6907674D-04C0-896E-ECB0-08F4A9BA3844}"/>
                   </a:ext>
                 </a:extLst>
               </p:cNvPr>
@@ -10838,16 +10766,15 @@
               <a:lstStyle/>
               <a:p>
                 <a:pPr>
+                  <a:lnSpc>
+                    <a:spcPct val="90000"/>
+                  </a:lnSpc>
                   <a:buFont typeface="Marlett" pitchFamily="26" charset="0"/>
                   <a:buNone/>
                 </a:pPr>
                 <a:r>
-                  <a:rPr lang="en-US" b="1" dirty="0">
-                    <a:solidFill>
-                      <a:srgbClr val="0033CC"/>
-                    </a:solidFill>
-                  </a:rPr>
-                  <a:t>Quadratic loss: </a:t>
+                  <a:rPr lang="en-US" dirty="0"/>
+                  <a:t>The minimization of </a:t>
                 </a:r>
                 <a14:m>
                   <m:oMath xmlns:m="http://schemas.openxmlformats.org/officeDocument/2006/math">
@@ -10857,10 +10784,8 @@
                           <a:srgbClr val="0033CC"/>
                         </a:solidFill>
                         <a:latin typeface="Cambria Math" panose="02040503050406030204" pitchFamily="18" charset="0"/>
-                        <a:ea typeface="Cambria Math" charset="0"/>
-                        <a:cs typeface="Cambria Math" charset="0"/>
                       </a:rPr>
-                      <m:t>𝐿</m:t>
+                      <m:t>𝑅</m:t>
                     </m:r>
                     <m:d>
                       <m:dPr>
@@ -10870,8 +10795,6 @@
                               <a:srgbClr val="0033CC"/>
                             </a:solidFill>
                             <a:latin typeface="Cambria Math" panose="02040503050406030204" pitchFamily="18" charset="0"/>
-                            <a:ea typeface="Cambria Math" charset="0"/>
-                            <a:cs typeface="Cambria Math" charset="0"/>
                           </a:rPr>
                         </m:ctrlPr>
                       </m:dPr>
@@ -10882,48 +10805,255 @@
                               <a:srgbClr val="0033CC"/>
                             </a:solidFill>
                             <a:latin typeface="Cambria Math" panose="02040503050406030204" pitchFamily="18" charset="0"/>
-                            <a:ea typeface="Cambria Math" charset="0"/>
-                            <a:cs typeface="Cambria Math" charset="0"/>
                           </a:rPr>
-                          <m:t>𝑦</m:t>
+                          <m:t>𝜔</m:t>
                         </m:r>
+                      </m:e>
+                    </m:d>
+                    <m:r>
+                      <a:rPr lang="en-US" i="1">
+                        <a:solidFill>
+                          <a:srgbClr val="0033CC"/>
+                        </a:solidFill>
+                        <a:latin typeface="Cambria Math" panose="02040503050406030204" pitchFamily="18" charset="0"/>
+                      </a:rPr>
+                      <m:t> </m:t>
+                    </m:r>
+                  </m:oMath>
+                </a14:m>
+                <a:r>
+                  <a:rPr lang="en-US" dirty="0"/>
+                  <a:t>is typically done by moving in the direction of </a:t>
+                </a:r>
+                <a:r>
+                  <a:rPr lang="en-US" i="1" dirty="0">
+                    <a:solidFill>
+                      <a:srgbClr val="0033CC"/>
+                    </a:solidFill>
+                  </a:rPr>
+                  <a:t>steepest descent</a:t>
+                </a:r>
+                <a:r>
+                  <a:rPr lang="en-US" dirty="0"/>
+                  <a:t>. Most optimization algorithms in ML are variations of</a:t>
+                </a:r>
+                <a:r>
+                  <a:rPr lang="en-US" dirty="0">
+                    <a:solidFill>
+                      <a:srgbClr val="000000"/>
+                    </a:solidFill>
+                  </a:rPr>
+                  <a:t> </a:t>
+                </a:r>
+                <a:r>
+                  <a:rPr lang="en-US" b="1" dirty="0">
+                    <a:solidFill>
+                      <a:srgbClr val="0033CC"/>
+                    </a:solidFill>
+                  </a:rPr>
+                  <a:t>S</a:t>
+                </a:r>
+                <a:r>
+                  <a:rPr lang="en-US" dirty="0">
+                    <a:solidFill>
+                      <a:srgbClr val="0033CC"/>
+                    </a:solidFill>
+                  </a:rPr>
+                  <a:t>tochastic </a:t>
+                </a:r>
+                <a:r>
+                  <a:rPr lang="en-US" b="1" dirty="0">
+                    <a:solidFill>
+                      <a:srgbClr val="0033CC"/>
+                    </a:solidFill>
+                  </a:rPr>
+                  <a:t>G</a:t>
+                </a:r>
+                <a:r>
+                  <a:rPr lang="en-US" dirty="0">
+                    <a:solidFill>
+                      <a:srgbClr val="0033CC"/>
+                    </a:solidFill>
+                  </a:rPr>
+                  <a:t>radient </a:t>
+                </a:r>
+                <a:r>
+                  <a:rPr lang="en-US" b="1" dirty="0">
+                    <a:solidFill>
+                      <a:srgbClr val="0033CC"/>
+                    </a:solidFill>
+                  </a:rPr>
+                  <a:t>D</a:t>
+                </a:r>
+                <a:r>
+                  <a:rPr lang="en-US" dirty="0">
+                    <a:solidFill>
+                      <a:srgbClr val="0033CC"/>
+                    </a:solidFill>
+                  </a:rPr>
+                  <a:t>escent</a:t>
+                </a:r>
+                <a:r>
+                  <a:rPr lang="en-US" dirty="0">
+                    <a:solidFill>
+                      <a:srgbClr val="000000"/>
+                    </a:solidFill>
+                  </a:rPr>
+                  <a:t>. </a:t>
+                </a:r>
+              </a:p>
+              <a:p>
+                <a:pPr>
+                  <a:lnSpc>
+                    <a:spcPct val="90000"/>
+                  </a:lnSpc>
+                  <a:buFont typeface="Marlett" pitchFamily="26" charset="0"/>
+                  <a:buNone/>
+                </a:pPr>
+                <a:endParaRPr lang="en-US" dirty="0">
+                  <a:solidFill>
+                    <a:srgbClr val="000000"/>
+                  </a:solidFill>
+                </a:endParaRPr>
+              </a:p>
+              <a:p>
+                <a:pPr>
+                  <a:lnSpc>
+                    <a:spcPct val="90000"/>
+                  </a:lnSpc>
+                  <a:buFont typeface="Marlett" pitchFamily="26" charset="0"/>
+                  <a:buNone/>
+                </a:pPr>
+                <a:r>
+                  <a:rPr lang="en-US" b="1" dirty="0">
+                    <a:solidFill>
+                      <a:srgbClr val="0033CC"/>
+                    </a:solidFill>
+                  </a:rPr>
+                  <a:t>Algorithm</a:t>
+                </a:r>
+                <a:endParaRPr lang="en-US" b="1" dirty="0">
+                  <a:solidFill>
+                    <a:srgbClr val="000000"/>
+                  </a:solidFill>
+                </a:endParaRPr>
+              </a:p>
+              <a:p>
+                <a:pPr marL="457200" indent="-457200">
+                  <a:lnSpc>
+                    <a:spcPct val="90000"/>
+                  </a:lnSpc>
+                  <a:buFont typeface="+mj-lt"/>
+                  <a:buAutoNum type="arabicPeriod"/>
+                </a:pPr>
+                <a:r>
+                  <a:rPr lang="en-US" dirty="0">
+                    <a:solidFill>
+                      <a:srgbClr val="000000"/>
+                    </a:solidFill>
+                  </a:rPr>
+                  <a:t>At the current point </a:t>
+                </a:r>
+                <a14:m>
+                  <m:oMath xmlns:m="http://schemas.openxmlformats.org/officeDocument/2006/math">
+                    <m:sSub>
+                      <m:sSubPr>
+                        <m:ctrlPr>
+                          <a:rPr lang="en-US" i="1">
+                            <a:solidFill>
+                              <a:srgbClr val="0033CC"/>
+                            </a:solidFill>
+                            <a:latin typeface="Cambria Math" panose="02040503050406030204" pitchFamily="18" charset="0"/>
+                            <a:ea typeface="Cambria Math" panose="02040503050406030204" pitchFamily="18" charset="0"/>
+                          </a:rPr>
+                        </m:ctrlPr>
+                      </m:sSubPr>
+                      <m:e>
                         <m:r>
                           <a:rPr lang="en-US" i="1">
                             <a:solidFill>
                               <a:srgbClr val="0033CC"/>
                             </a:solidFill>
                             <a:latin typeface="Cambria Math" panose="02040503050406030204" pitchFamily="18" charset="0"/>
-                            <a:ea typeface="Cambria Math" charset="0"/>
-                            <a:cs typeface="Cambria Math" charset="0"/>
+                            <a:ea typeface="Cambria Math" panose="02040503050406030204" pitchFamily="18" charset="0"/>
                           </a:rPr>
-                          <m:t>, </m:t>
+                          <m:t>𝜔</m:t>
                         </m:r>
+                      </m:e>
+                      <m:sub>
                         <m:r>
                           <a:rPr lang="en-US" i="1">
                             <a:solidFill>
                               <a:srgbClr val="0033CC"/>
                             </a:solidFill>
                             <a:latin typeface="Cambria Math" panose="02040503050406030204" pitchFamily="18" charset="0"/>
-                            <a:ea typeface="Cambria Math" charset="0"/>
-                            <a:cs typeface="Cambria Math" charset="0"/>
+                            <a:ea typeface="Cambria Math" panose="02040503050406030204" pitchFamily="18" charset="0"/>
                           </a:rPr>
-                          <m:t>𝑓</m:t>
+                          <m:t>𝑗</m:t>
                         </m:r>
-                      </m:e>
-                    </m:d>
+                      </m:sub>
+                    </m:sSub>
+                  </m:oMath>
+                </a14:m>
+                <a:r>
+                  <a:rPr lang="en-US" dirty="0">
+                    <a:solidFill>
+                      <a:srgbClr val="000000"/>
+                    </a:solidFill>
+                  </a:rPr>
+                  <a:t>, compute a </a:t>
+                </a:r>
+                <a:br>
+                  <a:rPr lang="en-US" dirty="0">
+                    <a:solidFill>
+                      <a:srgbClr val="000000"/>
+                    </a:solidFill>
+                  </a:rPr>
+                </a:br>
+                <a:r>
+                  <a:rPr lang="en-US" i="1" u="sng" dirty="0">
+                    <a:solidFill>
+                      <a:srgbClr val="0033CC"/>
+                    </a:solidFill>
+                  </a:rPr>
+                  <a:t>noisy</a:t>
+                </a:r>
+                <a:r>
+                  <a:rPr lang="en-US" dirty="0">
+                    <a:solidFill>
+                      <a:srgbClr val="000000"/>
+                    </a:solidFill>
+                  </a:rPr>
+                  <a:t> approximation of the gradient </a:t>
+                </a:r>
+                <a:br>
+                  <a:rPr lang="en-US" dirty="0">
+                    <a:solidFill>
+                      <a:srgbClr val="000000"/>
+                    </a:solidFill>
+                  </a:rPr>
+                </a:br>
+                <a:r>
+                  <a:rPr lang="en-US" dirty="0">
+                    <a:solidFill>
+                      <a:srgbClr val="000000"/>
+                    </a:solidFill>
+                  </a:rPr>
+                  <a:t>of  </a:t>
+                </a:r>
+                <a14:m>
+                  <m:oMath xmlns:m="http://schemas.openxmlformats.org/officeDocument/2006/math">
                     <m:r>
-                      <a:rPr lang="en-US">
+                      <a:rPr lang="en-US" i="1">
                         <a:solidFill>
                           <a:srgbClr val="0033CC"/>
                         </a:solidFill>
                         <a:latin typeface="Cambria Math" panose="02040503050406030204" pitchFamily="18" charset="0"/>
-                        <a:ea typeface="Cambria Math" charset="0"/>
-                        <a:cs typeface="Cambria Math" charset="0"/>
                       </a:rPr>
-                      <m:t>=</m:t>
+                      <m:t>𝑅</m:t>
                     </m:r>
-                    <m:sSup>
-                      <m:sSupPr>
+                    <m:d>
+                      <m:dPr>
                         <m:ctrlPr>
                           <a:rPr lang="en-US" i="1">
                             <a:solidFill>
@@ -10932,7 +11062,7 @@
                             <a:latin typeface="Cambria Math" panose="02040503050406030204" pitchFamily="18" charset="0"/>
                           </a:rPr>
                         </m:ctrlPr>
-                      </m:sSupPr>
+                      </m:dPr>
                       <m:e>
                         <m:r>
                           <a:rPr lang="en-US" i="1">
@@ -10941,7 +11071,109 @@
                             </a:solidFill>
                             <a:latin typeface="Cambria Math" panose="02040503050406030204" pitchFamily="18" charset="0"/>
                           </a:rPr>
-                          <m:t> </m:t>
+                          <m:t>𝜔</m:t>
+                        </m:r>
+                      </m:e>
+                    </m:d>
+                    <m:r>
+                      <a:rPr lang="en-US" i="1" smtClean="0">
+                        <a:solidFill>
+                          <a:srgbClr val="0033CC"/>
+                        </a:solidFill>
+                        <a:latin typeface="Cambria Math" panose="02040503050406030204" pitchFamily="18" charset="0"/>
+                        <a:ea typeface="Cambria Math" panose="02040503050406030204" pitchFamily="18" charset="0"/>
+                      </a:rPr>
+                      <m:t>≈</m:t>
+                    </m:r>
+                    <m:f>
+                      <m:fPr>
+                        <m:ctrlPr>
+                          <a:rPr lang="en-US" i="1">
+                            <a:solidFill>
+                              <a:srgbClr val="0033CC"/>
+                            </a:solidFill>
+                            <a:latin typeface="Cambria Math" panose="02040503050406030204" pitchFamily="18" charset="0"/>
+                          </a:rPr>
+                        </m:ctrlPr>
+                      </m:fPr>
+                      <m:num>
+                        <m:r>
+                          <a:rPr lang="en-US" i="1">
+                            <a:solidFill>
+                              <a:srgbClr val="0033CC"/>
+                            </a:solidFill>
+                            <a:latin typeface="Cambria Math" panose="02040503050406030204" pitchFamily="18" charset="0"/>
+                          </a:rPr>
+                          <m:t>1</m:t>
+                        </m:r>
+                      </m:num>
+                      <m:den>
+                        <m:r>
+                          <a:rPr lang="en-US" i="1">
+                            <a:solidFill>
+                              <a:srgbClr val="0033CC"/>
+                            </a:solidFill>
+                            <a:latin typeface="Cambria Math" panose="02040503050406030204" pitchFamily="18" charset="0"/>
+                          </a:rPr>
+                          <m:t>𝑛</m:t>
+                        </m:r>
+                      </m:den>
+                    </m:f>
+                    <m:nary>
+                      <m:naryPr>
+                        <m:chr m:val="∑"/>
+                        <m:ctrlPr>
+                          <a:rPr lang="en-US" i="1">
+                            <a:solidFill>
+                              <a:srgbClr val="0033CC"/>
+                            </a:solidFill>
+                            <a:latin typeface="Cambria Math" panose="02040503050406030204" pitchFamily="18" charset="0"/>
+                          </a:rPr>
+                        </m:ctrlPr>
+                      </m:naryPr>
+                      <m:sub>
+                        <m:r>
+                          <m:rPr>
+                            <m:brk m:alnAt="23"/>
+                          </m:rPr>
+                          <a:rPr lang="en-US" i="1">
+                            <a:solidFill>
+                              <a:srgbClr val="0033CC"/>
+                            </a:solidFill>
+                            <a:latin typeface="Cambria Math" panose="02040503050406030204" pitchFamily="18" charset="0"/>
+                          </a:rPr>
+                          <m:t>𝑖</m:t>
+                        </m:r>
+                        <m:r>
+                          <a:rPr lang="en-US" i="1">
+                            <a:solidFill>
+                              <a:srgbClr val="0033CC"/>
+                            </a:solidFill>
+                            <a:latin typeface="Cambria Math" panose="02040503050406030204" pitchFamily="18" charset="0"/>
+                          </a:rPr>
+                          <m:t>=1</m:t>
+                        </m:r>
+                      </m:sub>
+                      <m:sup>
+                        <m:r>
+                          <a:rPr lang="en-US" i="1">
+                            <a:solidFill>
+                              <a:srgbClr val="0033CC"/>
+                            </a:solidFill>
+                            <a:latin typeface="Cambria Math" panose="02040503050406030204" pitchFamily="18" charset="0"/>
+                          </a:rPr>
+                          <m:t>𝑛</m:t>
+                        </m:r>
+                      </m:sup>
+                      <m:e>
+                        <m:r>
+                          <a:rPr lang="en-US" i="1">
+                            <a:solidFill>
+                              <a:srgbClr val="0033CC"/>
+                            </a:solidFill>
+                            <a:latin typeface="Cambria Math" panose="02040503050406030204" pitchFamily="18" charset="0"/>
+                          </a:rPr>
+                          <m:t>𝐿</m:t>
                         </m:r>
                         <m:d>
                           <m:dPr>
@@ -10955,6 +11187,40 @@
                             </m:ctrlPr>
                           </m:dPr>
                           <m:e>
+                            <m:sSub>
+                              <m:sSubPr>
+                                <m:ctrlPr>
+                                  <a:rPr lang="en-US" i="1">
+                                    <a:solidFill>
+                                      <a:srgbClr val="0033CC"/>
+                                    </a:solidFill>
+                                    <a:latin typeface="Cambria Math" panose="02040503050406030204" pitchFamily="18" charset="0"/>
+                                  </a:rPr>
+                                </m:ctrlPr>
+                              </m:sSubPr>
+                              <m:e>
+                                <m:r>
+                                  <a:rPr lang="en-US" i="1">
+                                    <a:solidFill>
+                                      <a:srgbClr val="0033CC"/>
+                                    </a:solidFill>
+                                    <a:latin typeface="Cambria Math" panose="02040503050406030204" pitchFamily="18" charset="0"/>
+                                  </a:rPr>
+                                  <m:t>𝑦</m:t>
+                                </m:r>
+                              </m:e>
+                              <m:sub>
+                                <m:r>
+                                  <a:rPr lang="en-US" i="1">
+                                    <a:solidFill>
+                                      <a:srgbClr val="0033CC"/>
+                                    </a:solidFill>
+                                    <a:latin typeface="Cambria Math" panose="02040503050406030204" pitchFamily="18" charset="0"/>
+                                  </a:rPr>
+                                  <m:t>𝑖</m:t>
+                                </m:r>
+                              </m:sub>
+                            </m:sSub>
                             <m:r>
                               <a:rPr lang="en-US" i="1">
                                 <a:solidFill>
@@ -10962,59 +11228,215 @@
                                 </a:solidFill>
                                 <a:latin typeface="Cambria Math" panose="02040503050406030204" pitchFamily="18" charset="0"/>
                               </a:rPr>
-                              <m:t>𝑦</m:t>
+                              <m:t>, </m:t>
                             </m:r>
-                            <m:r>
-                              <a:rPr lang="en-US" i="1">
-                                <a:solidFill>
-                                  <a:srgbClr val="0033CC"/>
-                                </a:solidFill>
-                                <a:latin typeface="Cambria Math" charset="0"/>
-                              </a:rPr>
-                              <m:t>−</m:t>
-                            </m:r>
-                            <m:r>
-                              <a:rPr lang="en-US" i="1">
-                                <a:solidFill>
-                                  <a:srgbClr val="0033CC"/>
-                                </a:solidFill>
-                                <a:latin typeface="Cambria Math" charset="0"/>
-                              </a:rPr>
-                              <m:t>𝑓</m:t>
-                            </m:r>
+                            <m:sSub>
+                              <m:sSubPr>
+                                <m:ctrlPr>
+                                  <a:rPr lang="en-US" i="1">
+                                    <a:solidFill>
+                                      <a:srgbClr val="0033CC"/>
+                                    </a:solidFill>
+                                    <a:latin typeface="Cambria Math" panose="02040503050406030204" pitchFamily="18" charset="0"/>
+                                  </a:rPr>
+                                </m:ctrlPr>
+                              </m:sSubPr>
+                              <m:e>
+                                <m:r>
+                                  <a:rPr lang="en-US" i="1">
+                                    <a:solidFill>
+                                      <a:srgbClr val="0033CC"/>
+                                    </a:solidFill>
+                                    <a:latin typeface="Cambria Math" panose="02040503050406030204" pitchFamily="18" charset="0"/>
+                                  </a:rPr>
+                                  <m:t>𝑓</m:t>
+                                </m:r>
+                              </m:e>
+                              <m:sub>
+                                <m:r>
+                                  <a:rPr lang="en-US" i="1">
+                                    <a:solidFill>
+                                      <a:srgbClr val="0033CC"/>
+                                    </a:solidFill>
+                                    <a:latin typeface="Cambria Math" panose="02040503050406030204" pitchFamily="18" charset="0"/>
+                                  </a:rPr>
+                                  <m:t>𝑖</m:t>
+                                </m:r>
+                              </m:sub>
+                            </m:sSub>
                           </m:e>
                         </m:d>
                       </m:e>
-                      <m:sup>
+                    </m:nary>
+                  </m:oMath>
+                </a14:m>
+                <a:r>
+                  <a:rPr lang="en-US" dirty="0">
+                    <a:solidFill>
+                      <a:srgbClr val="000000"/>
+                    </a:solidFill>
+                  </a:rPr>
+                  <a:t> by </a:t>
+                </a:r>
+                <a:br>
+                  <a:rPr lang="en-US" dirty="0">
+                    <a:solidFill>
+                      <a:srgbClr val="000000"/>
+                    </a:solidFill>
+                  </a:rPr>
+                </a:br>
+                <a:r>
+                  <a:rPr lang="en-US" dirty="0">
+                    <a:solidFill>
+                      <a:srgbClr val="000000"/>
+                    </a:solidFill>
+                  </a:rPr>
+                  <a:t>using a </a:t>
+                </a:r>
+                <a:r>
+                  <a:rPr lang="en-US" dirty="0"/>
+                  <a:t>batch of training data of</a:t>
+                </a:r>
+                <a:br>
+                  <a:rPr lang="en-US" dirty="0">
+                    <a:solidFill>
+                      <a:srgbClr val="000000"/>
+                    </a:solidFill>
+                  </a:rPr>
+                </a:br>
+                <a:r>
+                  <a:rPr lang="en-US" dirty="0">
+                    <a:solidFill>
+                      <a:srgbClr val="000000"/>
+                    </a:solidFill>
+                  </a:rPr>
+                  <a:t>size </a:t>
+                </a:r>
+                <a14:m>
+                  <m:oMath xmlns:m="http://schemas.openxmlformats.org/officeDocument/2006/math">
+                    <m:r>
+                      <a:rPr lang="en-US" b="0" i="1">
+                        <a:solidFill>
+                          <a:srgbClr val="0033CC"/>
+                        </a:solidFill>
+                        <a:latin typeface="Cambria Math" panose="02040503050406030204" pitchFamily="18" charset="0"/>
+                      </a:rPr>
+                      <m:t>𝑛</m:t>
+                    </m:r>
+                    <m:r>
+                      <a:rPr lang="en-US" b="0" i="1">
+                        <a:solidFill>
+                          <a:srgbClr val="0033CC"/>
+                        </a:solidFill>
+                        <a:latin typeface="Cambria Math" panose="02040503050406030204" pitchFamily="18" charset="0"/>
+                        <a:ea typeface="Cambria Math" panose="02040503050406030204" pitchFamily="18" charset="0"/>
+                      </a:rPr>
+                      <m:t>≪</m:t>
+                    </m:r>
+                    <m:r>
+                      <a:rPr lang="en-US" b="0" i="1">
+                        <a:solidFill>
+                          <a:srgbClr val="0033CC"/>
+                        </a:solidFill>
+                        <a:latin typeface="Cambria Math" panose="02040503050406030204" pitchFamily="18" charset="0"/>
+                        <a:ea typeface="Cambria Math" panose="02040503050406030204" pitchFamily="18" charset="0"/>
+                      </a:rPr>
+                      <m:t>𝑁</m:t>
+                    </m:r>
+                  </m:oMath>
+                </a14:m>
+                <a:r>
+                  <a:rPr lang="en-US" dirty="0"/>
+                  <a:t>.</a:t>
+                </a:r>
+              </a:p>
+              <a:p>
+                <a:pPr marL="457200" indent="-457200">
+                  <a:lnSpc>
+                    <a:spcPct val="90000"/>
+                  </a:lnSpc>
+                  <a:buFont typeface="+mj-lt"/>
+                  <a:buAutoNum type="arabicPeriod"/>
+                </a:pPr>
+                <a:r>
+                  <a:rPr lang="en-US" dirty="0"/>
+                  <a:t>Move to position </a:t>
+                </a:r>
+                <a14:m>
+                  <m:oMath xmlns:m="http://schemas.openxmlformats.org/officeDocument/2006/math">
+                    <m:sSub>
+                      <m:sSubPr>
+                        <m:ctrlPr>
+                          <a:rPr lang="en-US" i="1">
+                            <a:solidFill>
+                              <a:srgbClr val="0033CC"/>
+                            </a:solidFill>
+                            <a:latin typeface="Cambria Math" panose="02040503050406030204" pitchFamily="18" charset="0"/>
+                            <a:ea typeface="Cambria Math" panose="02040503050406030204" pitchFamily="18" charset="0"/>
+                          </a:rPr>
+                        </m:ctrlPr>
+                      </m:sSubPr>
+                      <m:e>
                         <m:r>
                           <a:rPr lang="en-US" i="1">
                             <a:solidFill>
                               <a:srgbClr val="0033CC"/>
                             </a:solidFill>
-                            <a:latin typeface="Cambria Math" charset="0"/>
+                            <a:latin typeface="Cambria Math" panose="02040503050406030204" pitchFamily="18" charset="0"/>
+                            <a:ea typeface="Cambria Math" panose="02040503050406030204" pitchFamily="18" charset="0"/>
                           </a:rPr>
-                          <m:t>2</m:t>
+                          <m:t>𝜔</m:t>
                         </m:r>
-                      </m:sup>
-                    </m:sSup>
+                      </m:e>
+                      <m:sub>
+                        <m:r>
+                          <a:rPr lang="en-US" i="1">
+                            <a:solidFill>
+                              <a:srgbClr val="0033CC"/>
+                            </a:solidFill>
+                            <a:latin typeface="Cambria Math" panose="02040503050406030204" pitchFamily="18" charset="0"/>
+                            <a:ea typeface="Cambria Math" panose="02040503050406030204" pitchFamily="18" charset="0"/>
+                          </a:rPr>
+                          <m:t>𝑗</m:t>
+                        </m:r>
+                        <m:r>
+                          <a:rPr lang="en-US" i="1">
+                            <a:solidFill>
+                              <a:srgbClr val="0033CC"/>
+                            </a:solidFill>
+                            <a:latin typeface="Cambria Math" panose="02040503050406030204" pitchFamily="18" charset="0"/>
+                            <a:ea typeface="Cambria Math" panose="02040503050406030204" pitchFamily="18" charset="0"/>
+                          </a:rPr>
+                          <m:t>+1</m:t>
+                        </m:r>
+                      </m:sub>
+                    </m:sSub>
                   </m:oMath>
                 </a14:m>
                 <a:r>
                   <a:rPr lang="en-US" dirty="0"/>
-                  <a:t> </a:t>
+                  <a:t> in the </a:t>
                 </a:r>
                 <a:br>
                   <a:rPr lang="en-US" dirty="0"/>
                 </a:br>
-                <a:endParaRPr lang="en-US" b="1" dirty="0">
+                <a:r>
+                  <a:rPr lang="en-US" dirty="0"/>
+                  <a:t>landscape using </a:t>
+                </a:r>
+                <a:endParaRPr lang="en-US" i="1" dirty="0">
                   <a:solidFill>
-                    <a:srgbClr val="0033CC"/>
+                    <a:srgbClr val="000000"/>
                   </a:solidFill>
+                  <a:latin typeface="Cambria Math" panose="02040503050406030204" pitchFamily="18" charset="0"/>
+                  <a:ea typeface="Cambria Math" panose="02040503050406030204" pitchFamily="18" charset="0"/>
                 </a:endParaRPr>
               </a:p>
               <a:p>
-                <a:pPr>
-                  <a:buFont typeface="Marlett" pitchFamily="26" charset="0"/>
+                <a:pPr marL="0" indent="0">
+                  <a:lnSpc>
+                    <a:spcPct val="90000"/>
+                  </a:lnSpc>
                   <a:buNone/>
                 </a:pPr>
                 <a14:m>
@@ -11024,6 +11446,9 @@
                         <m:sSubPr>
                           <m:ctrlPr>
                             <a:rPr lang="en-US" i="1">
+                              <a:solidFill>
+                                <a:srgbClr val="000000"/>
+                              </a:solidFill>
                               <a:latin typeface="Cambria Math" panose="02040503050406030204" pitchFamily="18" charset="0"/>
                               <a:ea typeface="Cambria Math" panose="02040503050406030204" pitchFamily="18" charset="0"/>
                             </a:rPr>
@@ -11032,333 +11457,130 @@
                         <m:e>
                           <m:r>
                             <a:rPr lang="en-US" i="1">
+                              <a:solidFill>
+                                <a:srgbClr val="000000"/>
+                              </a:solidFill>
                               <a:latin typeface="Cambria Math" panose="02040503050406030204" pitchFamily="18" charset="0"/>
                               <a:ea typeface="Cambria Math" panose="02040503050406030204" pitchFamily="18" charset="0"/>
                             </a:rPr>
-                            <m:t>    </m:t>
-                          </m:r>
-                          <m:r>
-                            <a:rPr lang="en-US" i="1">
-                              <a:latin typeface="Cambria Math" panose="02040503050406030204" pitchFamily="18" charset="0"/>
-                              <a:ea typeface="Cambria Math" panose="02040503050406030204" pitchFamily="18" charset="0"/>
-                            </a:rPr>
-                            <m:t>𝔼</m:t>
+                            <m:t>𝜔</m:t>
                           </m:r>
                         </m:e>
                         <m:sub>
                           <m:r>
-                            <a:rPr lang="en-US" i="1" smtClean="0">
+                            <a:rPr lang="en-US" i="1">
+                              <a:solidFill>
+                                <a:srgbClr val="000000"/>
+                              </a:solidFill>
                               <a:latin typeface="Cambria Math" panose="02040503050406030204" pitchFamily="18" charset="0"/>
                               <a:ea typeface="Cambria Math" panose="02040503050406030204" pitchFamily="18" charset="0"/>
                             </a:rPr>
-                            <m:t>𝑦</m:t>
+                            <m:t>𝑗</m:t>
                           </m:r>
                           <m:r>
-                            <a:rPr lang="en-US" i="1" smtClean="0">
+                            <a:rPr lang="en-US" i="1">
+                              <a:solidFill>
+                                <a:srgbClr val="000000"/>
+                              </a:solidFill>
                               <a:latin typeface="Cambria Math" panose="02040503050406030204" pitchFamily="18" charset="0"/>
                               <a:ea typeface="Cambria Math" panose="02040503050406030204" pitchFamily="18" charset="0"/>
                             </a:rPr>
-                            <m:t>∼</m:t>
+                            <m:t>+1</m:t>
                           </m:r>
-                          <m:r>
-                            <a:rPr lang="en-US" i="1" smtClean="0">
-                              <a:latin typeface="Cambria Math" panose="02040503050406030204" pitchFamily="18" charset="0"/>
-                              <a:ea typeface="Cambria Math" panose="02040503050406030204" pitchFamily="18" charset="0"/>
-                            </a:rPr>
-                            <m:t>𝑝</m:t>
-                          </m:r>
-                          <m:d>
-                            <m:dPr>
-                              <m:ctrlPr>
-                                <a:rPr lang="en-US" i="1">
-                                  <a:latin typeface="Cambria Math" panose="02040503050406030204" pitchFamily="18" charset="0"/>
-                                  <a:ea typeface="Cambria Math" panose="02040503050406030204" pitchFamily="18" charset="0"/>
-                                </a:rPr>
-                              </m:ctrlPr>
-                            </m:dPr>
-                            <m:e>
-                              <m:r>
-                                <a:rPr lang="en-US" i="1">
-                                  <a:latin typeface="Cambria Math" panose="02040503050406030204" pitchFamily="18" charset="0"/>
-                                  <a:ea typeface="Cambria Math" panose="02040503050406030204" pitchFamily="18" charset="0"/>
-                                </a:rPr>
-                                <m:t>𝑦</m:t>
-                              </m:r>
-                            </m:e>
-                            <m:e>
-                              <m:r>
-                                <a:rPr lang="en-US" i="1">
-                                  <a:latin typeface="Cambria Math" panose="02040503050406030204" pitchFamily="18" charset="0"/>
-                                  <a:ea typeface="Cambria Math" panose="02040503050406030204" pitchFamily="18" charset="0"/>
-                                </a:rPr>
-                                <m:t>𝑥</m:t>
-                              </m:r>
-                            </m:e>
-                          </m:d>
                         </m:sub>
                       </m:sSub>
                       <m:r>
                         <a:rPr lang="en-US" i="1">
-                          <a:latin typeface="Cambria Math" panose="02040503050406030204" pitchFamily="18" charset="0"/>
-                          <a:ea typeface="Cambria Math" panose="02040503050406030204" pitchFamily="18" charset="0"/>
-                        </a:rPr>
-                        <m:t> </m:t>
-                      </m:r>
-                      <m:d>
-                        <m:dPr>
-                          <m:begChr m:val="["/>
-                          <m:endChr m:val="]"/>
-                          <m:ctrlPr>
-                            <a:rPr lang="en-US" i="1">
-                              <a:latin typeface="Cambria Math" panose="02040503050406030204" pitchFamily="18" charset="0"/>
-                            </a:rPr>
-                          </m:ctrlPr>
-                        </m:dPr>
-                        <m:e>
-                          <m:f>
-                            <m:fPr>
-                              <m:ctrlPr>
-                                <a:rPr lang="en-US" i="1">
-                                  <a:latin typeface="Cambria Math" panose="02040503050406030204" pitchFamily="18" charset="0"/>
-                                </a:rPr>
-                              </m:ctrlPr>
-                            </m:fPr>
-                            <m:num>
-                              <m:r>
-                                <a:rPr lang="en-US" i="1">
-                                  <a:latin typeface="Cambria Math" panose="02040503050406030204" pitchFamily="18" charset="0"/>
-                                </a:rPr>
-                                <m:t>𝜕</m:t>
-                              </m:r>
-                              <m:r>
-                                <a:rPr lang="en-US" i="1">
-                                  <a:latin typeface="Cambria Math" panose="02040503050406030204" pitchFamily="18" charset="0"/>
-                                </a:rPr>
-                                <m:t>𝐿</m:t>
-                              </m:r>
-                            </m:num>
-                            <m:den>
-                              <m:r>
-                                <a:rPr lang="en-US" i="1">
-                                  <a:latin typeface="Cambria Math" panose="02040503050406030204" pitchFamily="18" charset="0"/>
-                                </a:rPr>
-                                <m:t>𝜕</m:t>
-                              </m:r>
-                              <m:r>
-                                <a:rPr lang="en-US" i="1">
-                                  <a:latin typeface="Cambria Math" panose="02040503050406030204" pitchFamily="18" charset="0"/>
-                                </a:rPr>
-                                <m:t>𝑓</m:t>
-                              </m:r>
-                            </m:den>
-                          </m:f>
-                        </m:e>
-                      </m:d>
-                      <m:r>
-                        <a:rPr lang="en-US" i="1">
+                          <a:solidFill>
+                            <a:srgbClr val="000000"/>
+                          </a:solidFill>
                           <a:latin typeface="Cambria Math" panose="02040503050406030204" pitchFamily="18" charset="0"/>
                           <a:ea typeface="Cambria Math" panose="02040503050406030204" pitchFamily="18" charset="0"/>
                         </a:rPr>
                         <m:t>=</m:t>
                       </m:r>
+                      <m:sSub>
+                        <m:sSubPr>
+                          <m:ctrlPr>
+                            <a:rPr lang="en-US" i="1">
+                              <a:solidFill>
+                                <a:srgbClr val="000000"/>
+                              </a:solidFill>
+                              <a:latin typeface="Cambria Math" panose="02040503050406030204" pitchFamily="18" charset="0"/>
+                              <a:ea typeface="Cambria Math" panose="02040503050406030204" pitchFamily="18" charset="0"/>
+                            </a:rPr>
+                          </m:ctrlPr>
+                        </m:sSubPr>
+                        <m:e>
+                          <m:r>
+                            <a:rPr lang="en-US" i="1">
+                              <a:solidFill>
+                                <a:srgbClr val="000000"/>
+                              </a:solidFill>
+                              <a:latin typeface="Cambria Math" panose="02040503050406030204" pitchFamily="18" charset="0"/>
+                              <a:ea typeface="Cambria Math" panose="02040503050406030204" pitchFamily="18" charset="0"/>
+                            </a:rPr>
+                            <m:t>𝜔</m:t>
+                          </m:r>
+                        </m:e>
+                        <m:sub>
+                          <m:r>
+                            <a:rPr lang="en-US" i="1">
+                              <a:solidFill>
+                                <a:srgbClr val="000000"/>
+                              </a:solidFill>
+                              <a:latin typeface="Cambria Math" panose="02040503050406030204" pitchFamily="18" charset="0"/>
+                              <a:ea typeface="Cambria Math" panose="02040503050406030204" pitchFamily="18" charset="0"/>
+                            </a:rPr>
+                            <m:t>𝑗</m:t>
+                          </m:r>
+                        </m:sub>
+                      </m:sSub>
                       <m:r>
-                        <a:rPr lang="en-US" b="0" i="1" smtClean="0">
+                        <a:rPr lang="en-US" i="1">
+                          <a:solidFill>
+                            <a:srgbClr val="000000"/>
+                          </a:solidFill>
+                          <a:latin typeface="Cambria Math" charset="0"/>
+                          <a:ea typeface="Cambria Math" charset="0"/>
+                          <a:cs typeface="Cambria Math" charset="0"/>
+                        </a:rPr>
+                        <m:t>−</m:t>
+                      </m:r>
+                      <m:r>
+                        <a:rPr lang="en-US" i="1">
+                          <a:solidFill>
+                            <a:srgbClr val="0033CC"/>
+                          </a:solidFill>
                           <a:latin typeface="Cambria Math" panose="02040503050406030204" pitchFamily="18" charset="0"/>
                           <a:ea typeface="Cambria Math" panose="02040503050406030204" pitchFamily="18" charset="0"/>
+                          <a:cs typeface="Cambria Math" charset="0"/>
                         </a:rPr>
-                        <m:t>0</m:t>
+                        <m:t>𝜂</m:t>
+                      </m:r>
+                      <m:r>
+                        <m:rPr>
+                          <m:sty m:val="p"/>
+                        </m:rPr>
+                        <a:rPr lang="en-US" i="1">
+                          <a:latin typeface="Cambria Math" panose="02040503050406030204" pitchFamily="18" charset="0"/>
+                          <a:ea typeface="Cambria Math" panose="02040503050406030204" pitchFamily="18" charset="0"/>
+                          <a:cs typeface="Cambria Math" charset="0"/>
+                        </a:rPr>
+                        <m:t>∇</m:t>
+                      </m:r>
+                      <m:r>
+                        <a:rPr lang="en-US" i="1">
+                          <a:latin typeface="Cambria Math" panose="02040503050406030204" pitchFamily="18" charset="0"/>
+                          <a:ea typeface="Cambria Math" panose="02040503050406030204" pitchFamily="18" charset="0"/>
+                          <a:cs typeface="Cambria Math" charset="0"/>
+                        </a:rPr>
+                        <m:t>𝑅</m:t>
                       </m:r>
                     </m:oMath>
                   </m:oMathPara>
                 </a14:m>
                 <a:endParaRPr lang="en-US" dirty="0"/>
-              </a:p>
-              <a:p>
-                <a:pPr>
-                  <a:buFont typeface="Marlett" pitchFamily="26" charset="0"/>
-                  <a:buNone/>
-                </a:pPr>
-                <a:r>
-                  <a:rPr lang="en-US" dirty="0"/>
-                  <a:t>Solution</a:t>
-                </a:r>
-              </a:p>
-              <a:p>
-                <a:pPr>
-                  <a:buFont typeface="Marlett" pitchFamily="26" charset="0"/>
-                  <a:buNone/>
-                </a:pPr>
-                <a:endParaRPr lang="en-US" dirty="0"/>
-              </a:p>
-              <a:p>
-                <a:pPr>
-                  <a:buFont typeface="Marlett" pitchFamily="26" charset="0"/>
-                  <a:buNone/>
-                </a:pPr>
-                <a:endParaRPr lang="en-US" dirty="0"/>
-              </a:p>
-              <a:p>
-                <a:pPr>
-                  <a:buFont typeface="Marlett" pitchFamily="26" charset="0"/>
-                  <a:buNone/>
-                </a:pPr>
-                <a:r>
-                  <a:rPr lang="en-US" b="1" dirty="0">
-                    <a:solidFill>
-                      <a:srgbClr val="0033CC"/>
-                    </a:solidFill>
-                  </a:rPr>
-                  <a:t>V</a:t>
-                </a:r>
-                <a:r>
-                  <a:rPr lang="en-US" dirty="0">
-                    <a:solidFill>
-                      <a:srgbClr val="0033CC"/>
-                    </a:solidFill>
-                  </a:rPr>
-                  <a:t>ery </a:t>
-                </a:r>
-                <a:r>
-                  <a:rPr lang="en-US" b="1" dirty="0">
-                    <a:solidFill>
-                      <a:srgbClr val="0033CC"/>
-                    </a:solidFill>
-                  </a:rPr>
-                  <a:t>I</a:t>
-                </a:r>
-                <a:r>
-                  <a:rPr lang="en-US" dirty="0">
-                    <a:solidFill>
-                      <a:srgbClr val="0033CC"/>
-                    </a:solidFill>
-                  </a:rPr>
-                  <a:t>mportant </a:t>
-                </a:r>
-                <a:r>
-                  <a:rPr lang="en-US" b="1" dirty="0">
-                    <a:solidFill>
-                      <a:srgbClr val="0033CC"/>
-                    </a:solidFill>
-                  </a:rPr>
-                  <a:t>P</a:t>
-                </a:r>
-                <a:r>
-                  <a:rPr lang="en-US" dirty="0">
-                    <a:solidFill>
-                      <a:srgbClr val="0033CC"/>
-                    </a:solidFill>
-                  </a:rPr>
-                  <a:t>oint</a:t>
-                </a:r>
-                <a:r>
-                  <a:rPr lang="en-US" dirty="0">
-                    <a:solidFill>
-                      <a:srgbClr val="0033CC"/>
-                    </a:solidFill>
-                    <a:sym typeface="Wingdings" pitchFamily="2" charset="2"/>
-                  </a:rPr>
-                  <a:t> (VIP)</a:t>
-                </a:r>
-                <a:r>
-                  <a:rPr lang="en-US" dirty="0">
-                    <a:sym typeface="Wingdings" pitchFamily="2" charset="2"/>
-                  </a:rPr>
-                  <a:t>: As noted, the result</a:t>
-                </a:r>
-                <a:r>
-                  <a:rPr lang="en-US" dirty="0"/>
-                  <a:t> is independent of the details of </a:t>
-                </a:r>
-                <a14:m>
-                  <m:oMath xmlns:m="http://schemas.openxmlformats.org/officeDocument/2006/math">
-                    <m:r>
-                      <a:rPr lang="en-US" i="1">
-                        <a:solidFill>
-                          <a:srgbClr val="0033CC"/>
-                        </a:solidFill>
-                        <a:latin typeface="Cambria Math" panose="02040503050406030204" pitchFamily="18" charset="0"/>
-                      </a:rPr>
-                      <m:t>𝑓</m:t>
-                    </m:r>
-                    <m:r>
-                      <a:rPr lang="en-US">
-                        <a:latin typeface="Cambria Math" panose="02040503050406030204" pitchFamily="18" charset="0"/>
-                      </a:rPr>
-                      <m:t>.</m:t>
-                    </m:r>
-                  </m:oMath>
-                </a14:m>
-                <a:r>
-                  <a:rPr lang="en-US" dirty="0"/>
-                  <a:t> The result depends solely on the form of the loss function and the conditional probability, </a:t>
-                </a:r>
-                <a14:m>
-                  <m:oMath xmlns:m="http://schemas.openxmlformats.org/officeDocument/2006/math">
-                    <m:r>
-                      <a:rPr lang="en-US" i="1">
-                        <a:solidFill>
-                          <a:srgbClr val="0033CC"/>
-                        </a:solidFill>
-                        <a:latin typeface="Cambria Math" panose="02040503050406030204" pitchFamily="18" charset="0"/>
-                      </a:rPr>
-                      <m:t>𝑝</m:t>
-                    </m:r>
-                    <m:d>
-                      <m:dPr>
-                        <m:ctrlPr>
-                          <a:rPr lang="en-US" b="0" i="1" smtClean="0">
-                            <a:solidFill>
-                              <a:srgbClr val="0033CC"/>
-                            </a:solidFill>
-                            <a:latin typeface="Cambria Math" panose="02040503050406030204" pitchFamily="18" charset="0"/>
-                          </a:rPr>
-                        </m:ctrlPr>
-                      </m:dPr>
-                      <m:e>
-                        <m:r>
-                          <a:rPr lang="en-US" b="0" i="1" smtClean="0">
-                            <a:solidFill>
-                              <a:srgbClr val="0033CC"/>
-                            </a:solidFill>
-                            <a:latin typeface="Cambria Math" panose="02040503050406030204" pitchFamily="18" charset="0"/>
-                          </a:rPr>
-                          <m:t>𝑦</m:t>
-                        </m:r>
-                        <m:r>
-                          <a:rPr lang="en-US" b="0" i="1" smtClean="0">
-                            <a:solidFill>
-                              <a:srgbClr val="0033CC"/>
-                            </a:solidFill>
-                            <a:latin typeface="Cambria Math" panose="02040503050406030204" pitchFamily="18" charset="0"/>
-                          </a:rPr>
-                          <m:t>|</m:t>
-                        </m:r>
-                        <m:r>
-                          <a:rPr lang="en-US" b="0" i="1" smtClean="0">
-                            <a:solidFill>
-                              <a:srgbClr val="0033CC"/>
-                            </a:solidFill>
-                            <a:latin typeface="Cambria Math" panose="02040503050406030204" pitchFamily="18" charset="0"/>
-                          </a:rPr>
-                          <m:t>𝑥</m:t>
-                        </m:r>
-                      </m:e>
-                    </m:d>
-                    <m:r>
-                      <a:rPr lang="en-US" b="0" i="1" smtClean="0">
-                        <a:solidFill>
-                          <a:srgbClr val="0033CC"/>
-                        </a:solidFill>
-                        <a:latin typeface="Cambria Math" panose="02040503050406030204" pitchFamily="18" charset="0"/>
-                      </a:rPr>
-                      <m:t>𝑑𝑦</m:t>
-                    </m:r>
-                  </m:oMath>
-                </a14:m>
-                <a:r>
-                  <a:rPr lang="en-US" dirty="0"/>
-                  <a:t>, of the data.</a:t>
-                </a:r>
               </a:p>
               <a:p>
                 <a:pPr marL="0" indent="0">
@@ -11372,10 +11594,10 @@
         <mc:Fallback>
           <p:sp>
             <p:nvSpPr>
-              <p:cNvPr id="4" name="Content Placeholder 3">
+              <p:cNvPr id="2" name="Content Placeholder 1">
                 <a:extLst>
                   <a:ext uri="{FF2B5EF4-FFF2-40B4-BE49-F238E27FC236}">
-                    <a16:creationId xmlns:a16="http://schemas.microsoft.com/office/drawing/2014/main" id="{C5085120-E763-F128-57A2-3EF60CB80E2F}"/>
+                    <a16:creationId xmlns:a16="http://schemas.microsoft.com/office/drawing/2014/main" id="{6907674D-04C0-896E-ECB0-08F4A9BA3844}"/>
                   </a:ext>
                 </a:extLst>
               </p:cNvPr>
@@ -11388,9 +11610,9 @@
             </p:nvSpPr>
             <p:spPr>
               <a:blipFill>
-                <a:blip r:embed="rId2"/>
+                <a:blip r:embed="rId3"/>
                 <a:stretch>
-                  <a:fillRect l="-1309" t="-1316"/>
+                  <a:fillRect l="-1309" t="-1842" r="-1964" b="-3158"/>
                 </a:stretch>
               </a:blipFill>
             </p:spPr>
@@ -11414,7 +11636,7 @@
           <p:cNvPr id="3" name="Title 2">
             <a:extLst>
               <a:ext uri="{FF2B5EF4-FFF2-40B4-BE49-F238E27FC236}">
-                <a16:creationId xmlns:a16="http://schemas.microsoft.com/office/drawing/2014/main" id="{FD9CF121-6458-511B-7B99-A4DD17060D9D}"/>
+                <a16:creationId xmlns:a16="http://schemas.microsoft.com/office/drawing/2014/main" id="{65997FEB-454C-5C8C-3731-F19D54CE6986}"/>
               </a:ext>
             </a:extLst>
           </p:cNvPr>
@@ -11432,303 +11654,15 @@
           <a:p>
             <a:r>
               <a:rPr lang="en-US" dirty="0"/>
-              <a:t>Quadratic Loss</a:t>
+              <a:t>Empirical Risk Minimization (1)</a:t>
             </a:r>
           </a:p>
         </p:txBody>
       </p:sp>
-      <mc:AlternateContent xmlns:mc="http://schemas.openxmlformats.org/markup-compatibility/2006">
-        <mc:Choice xmlns:a14="http://schemas.microsoft.com/office/drawing/2010/main" Requires="a14">
-          <p:sp>
-            <p:nvSpPr>
-              <p:cNvPr id="5" name="Text Box 6">
-                <a:extLst>
-                  <a:ext uri="{FF2B5EF4-FFF2-40B4-BE49-F238E27FC236}">
-                    <a16:creationId xmlns:a16="http://schemas.microsoft.com/office/drawing/2014/main" id="{27CB3A09-E416-D607-F58B-FB0BA1CDAFF7}"/>
-                  </a:ext>
-                </a:extLst>
-              </p:cNvPr>
-              <p:cNvSpPr txBox="1">
-                <a:spLocks noChangeArrowheads="1"/>
-              </p:cNvSpPr>
-              <p:nvPr/>
-            </p:nvSpPr>
-            <p:spPr bwMode="auto">
-              <a:xfrm>
-                <a:off x="2590800" y="3276600"/>
-                <a:ext cx="3852465" cy="542008"/>
-              </a:xfrm>
-              <a:prstGeom prst="rect">
-                <a:avLst/>
-              </a:prstGeom>
-              <a:solidFill>
-                <a:srgbClr val="FFFFCC"/>
-              </a:solidFill>
-              <a:ln w="38100">
-                <a:solidFill>
-                  <a:schemeClr val="accent1"/>
-                </a:solidFill>
-                <a:miter lim="800000"/>
-                <a:headEnd type="none" w="sm" len="sm"/>
-                <a:tailEnd type="none" w="sm" len="sm"/>
-              </a:ln>
-              <a:effectLst/>
-            </p:spPr>
-            <p:txBody>
-              <a:bodyPr wrap="none">
-                <a:prstTxWarp prst="textNoShape">
-                  <a:avLst/>
-                </a:prstTxWarp>
-                <a:spAutoFit/>
-              </a:bodyPr>
-              <a:lstStyle/>
-              <a:p>
-                <a:pPr/>
-                <a14:m>
-                  <m:oMathPara xmlns:m="http://schemas.openxmlformats.org/officeDocument/2006/math">
-                    <m:oMathParaPr>
-                      <m:jc m:val="left"/>
-                    </m:oMathParaPr>
-                    <m:oMath>
-                      <m:r>
-                        <a:rPr lang="en-US" i="1" dirty="0" smtClean="0">
-                          <a:latin typeface="Cambria Math" panose="02040503050406030204" pitchFamily="18" charset="0"/>
-                        </a:rPr>
-                        <m:t>𝑓</m:t>
-                      </m:r>
-                      <m:r>
-                        <a:rPr lang="en-US" i="1" dirty="0" smtClean="0">
-                          <a:latin typeface="Cambria Math" panose="02040503050406030204" pitchFamily="18" charset="0"/>
-                        </a:rPr>
-                        <m:t>(</m:t>
-                      </m:r>
-                      <m:r>
-                        <a:rPr lang="en-US" i="1" dirty="0" smtClean="0">
-                          <a:latin typeface="Cambria Math" panose="02040503050406030204" pitchFamily="18" charset="0"/>
-                        </a:rPr>
-                        <m:t>𝑥</m:t>
-                      </m:r>
-                      <m:r>
-                        <a:rPr lang="en-US" b="0" i="1" dirty="0" smtClean="0">
-                          <a:latin typeface="Cambria Math" panose="02040503050406030204" pitchFamily="18" charset="0"/>
-                        </a:rPr>
-                        <m:t>, </m:t>
-                      </m:r>
-                      <m:sSup>
-                        <m:sSupPr>
-                          <m:ctrlPr>
-                            <a:rPr lang="en-US" b="0" i="1" dirty="0" smtClean="0">
-                              <a:latin typeface="Cambria Math" panose="02040503050406030204" pitchFamily="18" charset="0"/>
-                            </a:rPr>
-                          </m:ctrlPr>
-                        </m:sSupPr>
-                        <m:e>
-                          <m:r>
-                            <a:rPr lang="en-US" b="0" i="1" dirty="0" smtClean="0">
-                              <a:latin typeface="Cambria Math" panose="02040503050406030204" pitchFamily="18" charset="0"/>
-                            </a:rPr>
-                            <m:t>𝜔</m:t>
-                          </m:r>
-                        </m:e>
-                        <m:sup>
-                          <m:r>
-                            <a:rPr lang="en-US" b="0" i="1" dirty="0" smtClean="0">
-                              <a:latin typeface="Cambria Math" panose="02040503050406030204" pitchFamily="18" charset="0"/>
-                            </a:rPr>
-                            <m:t>∗</m:t>
-                          </m:r>
-                        </m:sup>
-                      </m:sSup>
-                      <m:r>
-                        <a:rPr lang="en-US" i="1" dirty="0">
-                          <a:latin typeface="Cambria Math" panose="02040503050406030204" pitchFamily="18" charset="0"/>
-                        </a:rPr>
-                        <m:t>)</m:t>
-                      </m:r>
-                      <m:r>
-                        <a:rPr lang="en-US" i="1">
-                          <a:latin typeface="Cambria Math" panose="02040503050406030204" pitchFamily="18" charset="0"/>
-                        </a:rPr>
-                        <m:t>=</m:t>
-                      </m:r>
-                      <m:sSub>
-                        <m:sSubPr>
-                          <m:ctrlPr>
-                            <a:rPr lang="en-US" i="1">
-                              <a:latin typeface="Cambria Math" panose="02040503050406030204" pitchFamily="18" charset="0"/>
-                              <a:ea typeface="Cambria Math" panose="02040503050406030204" pitchFamily="18" charset="0"/>
-                            </a:rPr>
-                          </m:ctrlPr>
-                        </m:sSubPr>
-                        <m:e>
-                          <m:r>
-                            <a:rPr lang="en-US" i="1">
-                              <a:latin typeface="Cambria Math" panose="02040503050406030204" pitchFamily="18" charset="0"/>
-                              <a:ea typeface="Cambria Math" panose="02040503050406030204" pitchFamily="18" charset="0"/>
-                            </a:rPr>
-                            <m:t>    </m:t>
-                          </m:r>
-                          <m:r>
-                            <a:rPr lang="en-US" i="1">
-                              <a:latin typeface="Cambria Math" panose="02040503050406030204" pitchFamily="18" charset="0"/>
-                              <a:ea typeface="Cambria Math" panose="02040503050406030204" pitchFamily="18" charset="0"/>
-                            </a:rPr>
-                            <m:t>𝔼</m:t>
-                          </m:r>
-                        </m:e>
-                        <m:sub>
-                          <m:r>
-                            <a:rPr lang="en-US" i="1">
-                              <a:latin typeface="Cambria Math" panose="02040503050406030204" pitchFamily="18" charset="0"/>
-                              <a:ea typeface="Cambria Math" panose="02040503050406030204" pitchFamily="18" charset="0"/>
-                            </a:rPr>
-                            <m:t>𝑦</m:t>
-                          </m:r>
-                          <m:r>
-                            <a:rPr lang="en-US" i="1">
-                              <a:latin typeface="Cambria Math" panose="02040503050406030204" pitchFamily="18" charset="0"/>
-                              <a:ea typeface="Cambria Math" panose="02040503050406030204" pitchFamily="18" charset="0"/>
-                            </a:rPr>
-                            <m:t>∼</m:t>
-                          </m:r>
-                          <m:r>
-                            <a:rPr lang="en-US" i="1">
-                              <a:latin typeface="Cambria Math" panose="02040503050406030204" pitchFamily="18" charset="0"/>
-                              <a:ea typeface="Cambria Math" panose="02040503050406030204" pitchFamily="18" charset="0"/>
-                            </a:rPr>
-                            <m:t>𝑝</m:t>
-                          </m:r>
-                          <m:d>
-                            <m:dPr>
-                              <m:ctrlPr>
-                                <a:rPr lang="en-US" i="1">
-                                  <a:latin typeface="Cambria Math" panose="02040503050406030204" pitchFamily="18" charset="0"/>
-                                  <a:ea typeface="Cambria Math" panose="02040503050406030204" pitchFamily="18" charset="0"/>
-                                </a:rPr>
-                              </m:ctrlPr>
-                            </m:dPr>
-                            <m:e>
-                              <m:r>
-                                <a:rPr lang="en-US" i="1">
-                                  <a:latin typeface="Cambria Math" panose="02040503050406030204" pitchFamily="18" charset="0"/>
-                                  <a:ea typeface="Cambria Math" panose="02040503050406030204" pitchFamily="18" charset="0"/>
-                                </a:rPr>
-                                <m:t>𝑦</m:t>
-                              </m:r>
-                            </m:e>
-                            <m:e>
-                              <m:r>
-                                <a:rPr lang="en-US" i="1">
-                                  <a:latin typeface="Cambria Math" panose="02040503050406030204" pitchFamily="18" charset="0"/>
-                                  <a:ea typeface="Cambria Math" panose="02040503050406030204" pitchFamily="18" charset="0"/>
-                                </a:rPr>
-                                <m:t>𝑥</m:t>
-                              </m:r>
-                            </m:e>
-                          </m:d>
-                        </m:sub>
-                      </m:sSub>
-                      <m:r>
-                        <a:rPr lang="en-US" i="1">
-                          <a:latin typeface="Cambria Math" panose="02040503050406030204" pitchFamily="18" charset="0"/>
-                          <a:ea typeface="Cambria Math" panose="02040503050406030204" pitchFamily="18" charset="0"/>
-                        </a:rPr>
-                        <m:t> </m:t>
-                      </m:r>
-                      <m:d>
-                        <m:dPr>
-                          <m:begChr m:val="["/>
-                          <m:endChr m:val="]"/>
-                          <m:ctrlPr>
-                            <a:rPr lang="en-US" b="0" i="1" smtClean="0">
-                              <a:latin typeface="Cambria Math" panose="02040503050406030204" pitchFamily="18" charset="0"/>
-                            </a:rPr>
-                          </m:ctrlPr>
-                        </m:dPr>
-                        <m:e>
-                          <m:r>
-                            <a:rPr lang="en-US" b="0" i="1" smtClean="0">
-                              <a:latin typeface="Cambria Math" panose="02040503050406030204" pitchFamily="18" charset="0"/>
-                            </a:rPr>
-                            <m:t>𝑦</m:t>
-                          </m:r>
-                        </m:e>
-                      </m:d>
-                    </m:oMath>
-                  </m:oMathPara>
-                </a14:m>
-                <a:endParaRPr lang="en-US" dirty="0">
-                  <a:solidFill>
-                    <a:srgbClr val="0000FF"/>
-                  </a:solidFill>
-                  <a:effectLst>
-                    <a:outerShdw blurRad="38100" dist="38100" dir="2700000" algn="tl">
-                      <a:srgbClr val="DDDDDD"/>
-                    </a:outerShdw>
-                  </a:effectLst>
-                </a:endParaRPr>
-              </a:p>
-            </p:txBody>
-          </p:sp>
-        </mc:Choice>
-        <mc:Fallback>
-          <p:sp>
-            <p:nvSpPr>
-              <p:cNvPr id="5" name="Text Box 6">
-                <a:extLst>
-                  <a:ext uri="{FF2B5EF4-FFF2-40B4-BE49-F238E27FC236}">
-                    <a16:creationId xmlns:a16="http://schemas.microsoft.com/office/drawing/2014/main" id="{27CB3A09-E416-D607-F58B-FB0BA1CDAFF7}"/>
-                  </a:ext>
-                </a:extLst>
-              </p:cNvPr>
-              <p:cNvSpPr txBox="1">
-                <a:spLocks noRot="1" noChangeAspect="1" noMove="1" noResize="1" noEditPoints="1" noAdjustHandles="1" noChangeArrowheads="1" noChangeShapeType="1" noTextEdit="1"/>
-              </p:cNvSpPr>
-              <p:nvPr/>
-            </p:nvSpPr>
-            <p:spPr bwMode="auto">
-              <a:xfrm>
-                <a:off x="2590800" y="3276600"/>
-                <a:ext cx="3852465" cy="542008"/>
-              </a:xfrm>
-              <a:prstGeom prst="rect">
-                <a:avLst/>
-              </a:prstGeom>
-              <a:blipFill>
-                <a:blip r:embed="rId3"/>
-                <a:stretch>
-                  <a:fillRect l="-651" b="-6522"/>
-                </a:stretch>
-              </a:blipFill>
-              <a:ln w="38100">
-                <a:solidFill>
-                  <a:schemeClr val="accent1"/>
-                </a:solidFill>
-                <a:miter lim="800000"/>
-                <a:headEnd type="none" w="sm" len="sm"/>
-                <a:tailEnd type="none" w="sm" len="sm"/>
-              </a:ln>
-              <a:effectLst/>
-            </p:spPr>
-            <p:txBody>
-              <a:bodyPr/>
-              <a:lstStyle/>
-              <a:p>
-                <a:r>
-                  <a:rPr lang="en-US">
-                    <a:noFill/>
-                  </a:rPr>
-                  <a:t> </a:t>
-                </a:r>
-              </a:p>
-            </p:txBody>
-          </p:sp>
-        </mc:Fallback>
-      </mc:AlternateContent>
     </p:spTree>
     <p:extLst>
       <p:ext uri="{BB962C8B-B14F-4D97-AF65-F5344CB8AC3E}">
-        <p14:creationId xmlns:p14="http://schemas.microsoft.com/office/powerpoint/2010/main" val="140662974"/>
+        <p14:creationId xmlns:p14="http://schemas.microsoft.com/office/powerpoint/2010/main" val="1849660238"/>
       </p:ext>
     </p:extLst>
   </p:cSld>
@@ -11747,9 +11681,6 @@
                     <p:cTn id="3" fill="hold">
                       <p:stCondLst>
                         <p:cond delay="indefinite"/>
-                        <p:cond evt="onBegin" delay="0">
-                          <p:tn val="2"/>
-                        </p:cond>
                       </p:stCondLst>
                       <p:childTnLst>
                         <p:par>
@@ -11759,7 +11690,7 @@
                             </p:stCondLst>
                             <p:childTnLst>
                               <p:par>
-                                <p:cTn id="5" presetID="10" presetClass="entr" presetSubtype="0" fill="hold" grpId="0" nodeType="withEffect">
+                                <p:cTn id="5" presetID="10" presetClass="entr" presetSubtype="0" fill="hold" nodeType="clickEffect">
                                   <p:stCondLst>
                                     <p:cond delay="0"/>
                                   </p:stCondLst>
@@ -11772,7 +11703,11 @@
                                           </p:stCondLst>
                                         </p:cTn>
                                         <p:tgtEl>
-                                          <p:spTgt spid="5"/>
+                                          <p:spTgt spid="2">
+                                            <p:txEl>
+                                              <p:pRg st="2" end="2"/>
+                                            </p:txEl>
+                                          </p:spTgt>
                                         </p:tgtEl>
                                         <p:attrNameLst>
                                           <p:attrName>style.visibility</p:attrName>
@@ -11786,7 +11721,54 @@
                                       <p:cBhvr>
                                         <p:cTn id="7" dur="500"/>
                                         <p:tgtEl>
-                                          <p:spTgt spid="5"/>
+                                          <p:spTgt spid="2">
+                                            <p:txEl>
+                                              <p:pRg st="2" end="2"/>
+                                            </p:txEl>
+                                          </p:spTgt>
+                                        </p:tgtEl>
+                                      </p:cBhvr>
+                                    </p:animEffect>
+                                  </p:childTnLst>
+                                </p:cTn>
+                              </p:par>
+                              <p:par>
+                                <p:cTn id="8" presetID="10" presetClass="entr" presetSubtype="0" fill="hold" nodeType="withEffect">
+                                  <p:stCondLst>
+                                    <p:cond delay="0"/>
+                                  </p:stCondLst>
+                                  <p:childTnLst>
+                                    <p:set>
+                                      <p:cBhvr>
+                                        <p:cTn id="9" dur="1" fill="hold">
+                                          <p:stCondLst>
+                                            <p:cond delay="0"/>
+                                          </p:stCondLst>
+                                        </p:cTn>
+                                        <p:tgtEl>
+                                          <p:spTgt spid="2">
+                                            <p:txEl>
+                                              <p:pRg st="3" end="3"/>
+                                            </p:txEl>
+                                          </p:spTgt>
+                                        </p:tgtEl>
+                                        <p:attrNameLst>
+                                          <p:attrName>style.visibility</p:attrName>
+                                        </p:attrNameLst>
+                                      </p:cBhvr>
+                                      <p:to>
+                                        <p:strVal val="visible"/>
+                                      </p:to>
+                                    </p:set>
+                                    <p:animEffect transition="in" filter="fade">
+                                      <p:cBhvr>
+                                        <p:cTn id="10" dur="500"/>
+                                        <p:tgtEl>
+                                          <p:spTgt spid="2">
+                                            <p:txEl>
+                                              <p:pRg st="3" end="3"/>
+                                            </p:txEl>
+                                          </p:spTgt>
                                         </p:tgtEl>
                                       </p:cBhvr>
                                     </p:animEffect>
@@ -11800,32 +11782,75 @@
                     </p:cTn>
                   </p:par>
                   <p:par>
-                    <p:cTn id="8" fill="hold">
+                    <p:cTn id="11" fill="hold">
                       <p:stCondLst>
                         <p:cond delay="indefinite"/>
                       </p:stCondLst>
                       <p:childTnLst>
                         <p:par>
-                          <p:cTn id="9" fill="hold">
+                          <p:cTn id="12" fill="hold">
                             <p:stCondLst>
                               <p:cond delay="0"/>
                             </p:stCondLst>
                             <p:childTnLst>
                               <p:par>
-                                <p:cTn id="10" presetID="1" presetClass="entr" presetSubtype="0" fill="hold" nodeType="clickEffect">
+                                <p:cTn id="13" presetID="10" presetClass="entr" presetSubtype="0" fill="hold" nodeType="clickEffect">
                                   <p:stCondLst>
                                     <p:cond delay="0"/>
                                   </p:stCondLst>
                                   <p:childTnLst>
                                     <p:set>
                                       <p:cBhvr>
-                                        <p:cTn id="11" dur="1" fill="hold">
+                                        <p:cTn id="14" dur="1" fill="hold">
                                           <p:stCondLst>
                                             <p:cond delay="0"/>
                                           </p:stCondLst>
                                         </p:cTn>
                                         <p:tgtEl>
-                                          <p:spTgt spid="4">
+                                          <p:spTgt spid="2">
+                                            <p:txEl>
+                                              <p:pRg st="4" end="4"/>
+                                            </p:txEl>
+                                          </p:spTgt>
+                                        </p:tgtEl>
+                                        <p:attrNameLst>
+                                          <p:attrName>style.visibility</p:attrName>
+                                        </p:attrNameLst>
+                                      </p:cBhvr>
+                                      <p:to>
+                                        <p:strVal val="visible"/>
+                                      </p:to>
+                                    </p:set>
+                                    <p:animEffect transition="in" filter="fade">
+                                      <p:cBhvr>
+                                        <p:cTn id="15" dur="500"/>
+                                        <p:tgtEl>
+                                          <p:spTgt spid="2">
+                                            <p:txEl>
+                                              <p:pRg st="4" end="4"/>
+                                            </p:txEl>
+                                          </p:spTgt>
+                                        </p:tgtEl>
+                                      </p:cBhvr>
+                                    </p:animEffect>
+                                  </p:childTnLst>
+                                </p:cTn>
+                              </p:par>
+                              <p:par>
+                                <p:cTn id="16" presetID="10" presetClass="entr" presetSubtype="0" fill="hold" nodeType="withEffect">
+                                  <p:stCondLst>
+                                    <p:cond delay="0"/>
+                                  </p:stCondLst>
+                                  <p:childTnLst>
+                                    <p:set>
+                                      <p:cBhvr>
+                                        <p:cTn id="17" dur="1" fill="hold">
+                                          <p:stCondLst>
+                                            <p:cond delay="0"/>
+                                          </p:stCondLst>
+                                        </p:cTn>
+                                        <p:tgtEl>
+                                          <p:spTgt spid="2">
                                             <p:txEl>
                                               <p:pRg st="5" end="5"/>
                                             </p:txEl>
@@ -11839,6 +11864,18 @@
                                         <p:strVal val="visible"/>
                                       </p:to>
                                     </p:set>
+                                    <p:animEffect transition="in" filter="fade">
+                                      <p:cBhvr>
+                                        <p:cTn id="18" dur="500"/>
+                                        <p:tgtEl>
+                                          <p:spTgt spid="2">
+                                            <p:txEl>
+                                              <p:pRg st="5" end="5"/>
+                                            </p:txEl>
+                                          </p:spTgt>
+                                        </p:tgtEl>
+                                      </p:cBhvr>
+                                    </p:animEffect>
                                   </p:childTnLst>
                                 </p:cTn>
                               </p:par>
@@ -11869,9 +11906,6 @@
         </p:cTn>
       </p:par>
     </p:tnLst>
-    <p:bldLst>
-      <p:bldP spid="5" grpId="0" animBg="1"/>
-    </p:bldLst>
   </p:timing>
 </p:sld>
 </file>
@@ -11921,8 +11955,8 @@
           </a:p>
         </p:txBody>
       </p:sp>
-      <mc:AlternateContent xmlns:mc="http://schemas.openxmlformats.org/markup-compatibility/2006" xmlns:a14="http://schemas.microsoft.com/office/drawing/2010/main">
-        <mc:Choice Requires="a14">
+      <mc:AlternateContent xmlns:mc="http://schemas.openxmlformats.org/markup-compatibility/2006">
+        <mc:Choice xmlns:a14="http://schemas.microsoft.com/office/drawing/2010/main" Requires="a14">
           <p:sp>
             <p:nvSpPr>
               <p:cNvPr id="8" name="Content Placeholder 7">
@@ -11954,7 +11988,7 @@
                 </a:pPr>
                 <a:r>
                   <a:rPr lang="en-US" dirty="0"/>
-                  <a:t>Last time we introduced the multi-node, multi-layer perceptron (MLP). This is also known as a </a:t>
+                  <a:t>Last time we introduced the multi-node, multi-layer perceptron (MLP), which is also known as a </a:t>
                 </a:r>
                 <a:r>
                   <a:rPr lang="en-US" b="1" dirty="0">
@@ -11966,7 +12000,7 @@
                 </a:r>
                 <a:r>
                   <a:rPr lang="en-US" dirty="0"/>
-                  <a:t> (FCNN)</a:t>
+                  <a:t> (FCNN).</a:t>
                 </a:r>
                 <a:endParaRPr lang="en-US" sz="2400" dirty="0"/>
               </a:p>
@@ -12181,10 +12215,10 @@
                   <m:oMathPara xmlns:m="http://schemas.openxmlformats.org/officeDocument/2006/math">
                     <m:oMath>
                       <m:r>
-                        <a:rPr lang="en-US" i="1">
+                        <a:rPr lang="en-US" b="0" i="1" smtClean="0">
                           <a:latin typeface="Cambria Math" panose="02040503050406030204" pitchFamily="18" charset="0"/>
                         </a:rPr>
-                        <m:t>𝑓</m:t>
+                        <m:t>ℎ</m:t>
                       </m:r>
                       <m:d>
                         <m:dPr>
@@ -12288,7 +12322,7 @@
             </p:txBody>
           </p:sp>
         </mc:Choice>
-        <mc:Fallback xmlns="">
+        <mc:Fallback>
           <p:sp>
             <p:nvSpPr>
               <p:cNvPr id="8" name="Content Placeholder 7">
@@ -12313,7 +12347,7 @@
               <a:blipFill>
                 <a:blip r:embed="rId3"/>
                 <a:stretch>
-                  <a:fillRect l="-2508" t="-1316" r="-1567"/>
+                  <a:fillRect l="-2508" t="-1316" r="-940"/>
                 </a:stretch>
               </a:blipFill>
             </p:spPr>
@@ -13568,8 +13602,8 @@
           </a:p>
         </p:txBody>
       </p:sp>
-      <mc:AlternateContent xmlns:mc="http://schemas.openxmlformats.org/markup-compatibility/2006">
-        <mc:Choice xmlns:a14="http://schemas.microsoft.com/office/drawing/2010/main" Requires="a14">
+      <mc:AlternateContent xmlns:mc="http://schemas.openxmlformats.org/markup-compatibility/2006" xmlns:a14="http://schemas.microsoft.com/office/drawing/2010/main">
+        <mc:Choice Requires="a14">
           <p:sp>
             <p:nvSpPr>
               <p:cNvPr id="4" name="Rectangle 3">
@@ -13712,7 +13746,7 @@
             </p:txBody>
           </p:sp>
         </mc:Choice>
-        <mc:Fallback>
+        <mc:Fallback xmlns="">
           <p:sp>
             <p:nvSpPr>
               <p:cNvPr id="4" name="Rectangle 3">
@@ -13806,7 +13840,7 @@
         <p:cNvPr id="1" name="">
           <a:extLst>
             <a:ext uri="{FF2B5EF4-FFF2-40B4-BE49-F238E27FC236}">
-              <a16:creationId xmlns:a16="http://schemas.microsoft.com/office/drawing/2014/main" id="{23B0A66F-0B72-66CA-D036-8B3BA08698C2}"/>
+              <a16:creationId xmlns:a16="http://schemas.microsoft.com/office/drawing/2014/main" id="{01763A2D-5754-2FAF-C4D1-4F4BC643010C}"/>
             </a:ext>
           </a:extLst>
         </p:cNvPr>
@@ -13821,14 +13855,44 @@
           <a:chExt cx="0" cy="0"/>
         </a:xfrm>
       </p:grpSpPr>
+      <p:pic>
+        <p:nvPicPr>
+          <p:cNvPr id="4" name="Picture 3" descr="A map of a mountain&#10;&#10;Description automatically generated">
+            <a:extLst>
+              <a:ext uri="{FF2B5EF4-FFF2-40B4-BE49-F238E27FC236}">
+                <a16:creationId xmlns:a16="http://schemas.microsoft.com/office/drawing/2014/main" id="{9E54FDF4-4C20-75CD-A55C-2128FB104199}"/>
+              </a:ext>
+            </a:extLst>
+          </p:cNvPr>
+          <p:cNvPicPr>
+            <a:picLocks noChangeAspect="1"/>
+          </p:cNvPicPr>
+          <p:nvPr/>
+        </p:nvPicPr>
+        <p:blipFill>
+          <a:blip r:embed="rId2"/>
+          <a:stretch>
+            <a:fillRect/>
+          </a:stretch>
+        </p:blipFill>
+        <p:spPr>
+          <a:xfrm>
+            <a:off x="5297518" y="2514600"/>
+            <a:ext cx="3846482" cy="3922200"/>
+          </a:xfrm>
+          <a:prstGeom prst="rect">
+            <a:avLst/>
+          </a:prstGeom>
+        </p:spPr>
+      </p:pic>
       <mc:AlternateContent xmlns:mc="http://schemas.openxmlformats.org/markup-compatibility/2006">
         <mc:Choice xmlns:a14="http://schemas.microsoft.com/office/drawing/2010/main" Requires="a14">
           <p:sp>
             <p:nvSpPr>
-              <p:cNvPr id="4" name="Content Placeholder 3">
+              <p:cNvPr id="2" name="Content Placeholder 1">
                 <a:extLst>
                   <a:ext uri="{FF2B5EF4-FFF2-40B4-BE49-F238E27FC236}">
-                    <a16:creationId xmlns:a16="http://schemas.microsoft.com/office/drawing/2014/main" id="{BCD71358-E7C4-4011-A59E-755828C26D73}"/>
+                    <a16:creationId xmlns:a16="http://schemas.microsoft.com/office/drawing/2014/main" id="{715839D9-08FB-02BE-91C0-05B1224A6521}"/>
                   </a:ext>
                 </a:extLst>
               </p:cNvPr>
@@ -13845,218 +13909,47 @@
               <a:lstStyle/>
               <a:p>
                 <a:pPr>
+                  <a:lnSpc>
+                    <a:spcPct val="90000"/>
+                  </a:lnSpc>
+                  <a:buFont typeface="Marlett" pitchFamily="26" charset="0"/>
                   <a:buNone/>
                 </a:pPr>
                 <a:r>
-                  <a:rPr lang="en-US" b="1" dirty="0">
+                  <a:rPr lang="en-US" dirty="0"/>
+                  <a:t>Why does </a:t>
+                </a:r>
+                <a:r>
+                  <a:rPr lang="en-US" dirty="0">
                     <a:solidFill>
-                      <a:srgbClr val="0033CC"/>
+                      <a:srgbClr val="000000"/>
                     </a:solidFill>
                   </a:rPr>
-                  <a:t>Binary cross entropy loss : </a:t>
+                  <a:t>this (1</a:t>
                 </a:r>
-                <a14:m>
-                  <m:oMath xmlns:m="http://schemas.openxmlformats.org/officeDocument/2006/math">
-                    <m:r>
-                      <a:rPr lang="en-US" smtClean="0">
-                        <a:solidFill>
-                          <a:srgbClr val="0033CC"/>
-                        </a:solidFill>
-                        <a:latin typeface="Cambria Math" panose="02040503050406030204" pitchFamily="18" charset="0"/>
-                        <a:ea typeface="Cambria Math" charset="0"/>
-                        <a:cs typeface="Cambria Math" charset="0"/>
-                      </a:rPr>
-                      <m:t>−[</m:t>
-                    </m:r>
-                    <m:r>
-                      <a:rPr lang="en-US" i="1">
-                        <a:solidFill>
-                          <a:srgbClr val="0033CC"/>
-                        </a:solidFill>
-                        <a:latin typeface="Cambria Math" panose="02040503050406030204" pitchFamily="18" charset="0"/>
-                        <a:ea typeface="Cambria Math" charset="0"/>
-                        <a:cs typeface="Cambria Math" charset="0"/>
-                      </a:rPr>
-                      <m:t>𝑦</m:t>
-                    </m:r>
-                    <m:func>
-                      <m:funcPr>
-                        <m:ctrlPr>
-                          <a:rPr lang="en-US">
-                            <a:solidFill>
-                              <a:srgbClr val="0033CC"/>
-                            </a:solidFill>
-                            <a:latin typeface="Cambria Math" panose="02040503050406030204" pitchFamily="18" charset="0"/>
-                            <a:ea typeface="Cambria Math" charset="0"/>
-                            <a:cs typeface="Cambria Math" charset="0"/>
-                          </a:rPr>
-                        </m:ctrlPr>
-                      </m:funcPr>
-                      <m:fName>
-                        <m:r>
-                          <m:rPr>
-                            <m:sty m:val="p"/>
-                          </m:rPr>
-                          <a:rPr lang="en-US">
-                            <a:solidFill>
-                              <a:srgbClr val="0033CC"/>
-                            </a:solidFill>
-                            <a:latin typeface="Cambria Math" panose="02040503050406030204" pitchFamily="18" charset="0"/>
-                            <a:ea typeface="Cambria Math" charset="0"/>
-                            <a:cs typeface="Cambria Math" charset="0"/>
-                          </a:rPr>
-                          <m:t>log</m:t>
-                        </m:r>
-                      </m:fName>
-                      <m:e>
-                        <m:r>
-                          <a:rPr lang="en-US" i="1">
-                            <a:solidFill>
-                              <a:srgbClr val="0033CC"/>
-                            </a:solidFill>
-                            <a:latin typeface="Cambria Math" panose="02040503050406030204" pitchFamily="18" charset="0"/>
-                            <a:ea typeface="Cambria Math" charset="0"/>
-                            <a:cs typeface="Cambria Math" charset="0"/>
-                          </a:rPr>
-                          <m:t>𝑓</m:t>
-                        </m:r>
-                        <m:r>
-                          <a:rPr lang="en-US" i="1">
-                            <a:solidFill>
-                              <a:srgbClr val="0033CC"/>
-                            </a:solidFill>
-                            <a:latin typeface="Cambria Math" panose="02040503050406030204" pitchFamily="18" charset="0"/>
-                            <a:ea typeface="Cambria Math" charset="0"/>
-                            <a:cs typeface="Cambria Math" charset="0"/>
-                          </a:rPr>
-                          <m:t>+</m:t>
-                        </m:r>
-                        <m:d>
-                          <m:dPr>
-                            <m:ctrlPr>
-                              <a:rPr lang="en-US" i="1">
-                                <a:solidFill>
-                                  <a:srgbClr val="0033CC"/>
-                                </a:solidFill>
-                                <a:latin typeface="Cambria Math" panose="02040503050406030204" pitchFamily="18" charset="0"/>
-                                <a:ea typeface="Cambria Math" charset="0"/>
-                                <a:cs typeface="Cambria Math" charset="0"/>
-                              </a:rPr>
-                            </m:ctrlPr>
-                          </m:dPr>
-                          <m:e>
-                            <m:r>
-                              <a:rPr lang="en-US" i="1">
-                                <a:solidFill>
-                                  <a:srgbClr val="0033CC"/>
-                                </a:solidFill>
-                                <a:latin typeface="Cambria Math" panose="02040503050406030204" pitchFamily="18" charset="0"/>
-                                <a:ea typeface="Cambria Math" charset="0"/>
-                                <a:cs typeface="Cambria Math" charset="0"/>
-                              </a:rPr>
-                              <m:t>1−</m:t>
-                            </m:r>
-                            <m:r>
-                              <a:rPr lang="en-US" i="1">
-                                <a:solidFill>
-                                  <a:srgbClr val="0033CC"/>
-                                </a:solidFill>
-                                <a:latin typeface="Cambria Math" panose="02040503050406030204" pitchFamily="18" charset="0"/>
-                                <a:ea typeface="Cambria Math" charset="0"/>
-                                <a:cs typeface="Cambria Math" charset="0"/>
-                              </a:rPr>
-                              <m:t>𝑦</m:t>
-                            </m:r>
-                          </m:e>
-                        </m:d>
-                        <m:func>
-                          <m:funcPr>
-                            <m:ctrlPr>
-                              <a:rPr lang="en-US">
-                                <a:solidFill>
-                                  <a:srgbClr val="0033CC"/>
-                                </a:solidFill>
-                                <a:latin typeface="Cambria Math" panose="02040503050406030204" pitchFamily="18" charset="0"/>
-                                <a:ea typeface="Cambria Math" charset="0"/>
-                                <a:cs typeface="Cambria Math" charset="0"/>
-                              </a:rPr>
-                            </m:ctrlPr>
-                          </m:funcPr>
-                          <m:fName>
-                            <m:r>
-                              <m:rPr>
-                                <m:sty m:val="p"/>
-                              </m:rPr>
-                              <a:rPr lang="en-US">
-                                <a:solidFill>
-                                  <a:srgbClr val="0033CC"/>
-                                </a:solidFill>
-                                <a:latin typeface="Cambria Math" panose="02040503050406030204" pitchFamily="18" charset="0"/>
-                                <a:ea typeface="Cambria Math" charset="0"/>
-                                <a:cs typeface="Cambria Math" charset="0"/>
-                              </a:rPr>
-                              <m:t>log</m:t>
-                            </m:r>
-                          </m:fName>
-                          <m:e>
-                            <m:r>
-                              <a:rPr lang="en-US" i="1">
-                                <a:solidFill>
-                                  <a:srgbClr val="0033CC"/>
-                                </a:solidFill>
-                                <a:latin typeface="Cambria Math" panose="02040503050406030204" pitchFamily="18" charset="0"/>
-                                <a:ea typeface="Cambria Math" charset="0"/>
-                                <a:cs typeface="Cambria Math" charset="0"/>
-                              </a:rPr>
-                              <m:t>(1−</m:t>
-                            </m:r>
-                            <m:r>
-                              <a:rPr lang="en-US" i="1">
-                                <a:solidFill>
-                                  <a:srgbClr val="0033CC"/>
-                                </a:solidFill>
-                                <a:latin typeface="Cambria Math" panose="02040503050406030204" pitchFamily="18" charset="0"/>
-                                <a:ea typeface="Cambria Math" charset="0"/>
-                                <a:cs typeface="Cambria Math" charset="0"/>
-                              </a:rPr>
-                              <m:t>𝑓</m:t>
-                            </m:r>
-                            <m:r>
-                              <a:rPr lang="en-US" i="1">
-                                <a:solidFill>
-                                  <a:srgbClr val="0033CC"/>
-                                </a:solidFill>
-                                <a:latin typeface="Cambria Math" panose="02040503050406030204" pitchFamily="18" charset="0"/>
-                                <a:ea typeface="Cambria Math" charset="0"/>
-                                <a:cs typeface="Cambria Math" charset="0"/>
-                              </a:rPr>
-                              <m:t>)</m:t>
-                            </m:r>
-                          </m:e>
-                        </m:func>
-                      </m:e>
-                    </m:func>
-                    <m:r>
-                      <a:rPr lang="en-US">
-                        <a:solidFill>
-                          <a:srgbClr val="0033CC"/>
-                        </a:solidFill>
-                        <a:latin typeface="Cambria Math" panose="02040503050406030204" pitchFamily="18" charset="0"/>
-                        <a:ea typeface="Cambria Math" charset="0"/>
-                        <a:cs typeface="Cambria Math" charset="0"/>
-                      </a:rPr>
-                      <m:t>]</m:t>
-                    </m:r>
-                  </m:oMath>
-                </a14:m>
-                <a:endParaRPr lang="en-US" b="1" dirty="0">
-                  <a:solidFill>
-                    <a:srgbClr val="0033CC"/>
-                  </a:solidFill>
-                </a:endParaRPr>
+                <a:r>
+                  <a:rPr lang="en-US" baseline="30000" dirty="0">
+                    <a:solidFill>
+                      <a:srgbClr val="000000"/>
+                    </a:solidFill>
+                  </a:rPr>
+                  <a:t>st</a:t>
+                </a:r>
+                <a:r>
+                  <a:rPr lang="en-US" dirty="0">
+                    <a:solidFill>
+                      <a:srgbClr val="000000"/>
+                    </a:solidFill>
+                  </a:rPr>
+                  <a:t>-order) algorithm </a:t>
+                </a:r>
               </a:p>
               <a:p>
                 <a:pPr>
+                  <a:lnSpc>
+                    <a:spcPct val="90000"/>
+                  </a:lnSpc>
+                  <a:buFont typeface="Marlett" pitchFamily="26" charset="0"/>
                   <a:buNone/>
                 </a:pPr>
                 <a14:m>
@@ -14066,6 +13959,9 @@
                         <m:sSubPr>
                           <m:ctrlPr>
                             <a:rPr lang="en-US" i="1">
+                              <a:solidFill>
+                                <a:srgbClr val="000000"/>
+                              </a:solidFill>
                               <a:latin typeface="Cambria Math" panose="02040503050406030204" pitchFamily="18" charset="0"/>
                               <a:ea typeface="Cambria Math" panose="02040503050406030204" pitchFamily="18" charset="0"/>
                             </a:rPr>
@@ -14074,164 +13970,55 @@
                         <m:e>
                           <m:r>
                             <a:rPr lang="en-US" i="1">
+                              <a:solidFill>
+                                <a:srgbClr val="000000"/>
+                              </a:solidFill>
                               <a:latin typeface="Cambria Math" panose="02040503050406030204" pitchFamily="18" charset="0"/>
                               <a:ea typeface="Cambria Math" panose="02040503050406030204" pitchFamily="18" charset="0"/>
                             </a:rPr>
-                            <m:t>    </m:t>
-                          </m:r>
-                          <m:r>
-                            <a:rPr lang="en-US" i="1">
-                              <a:latin typeface="Cambria Math" panose="02040503050406030204" pitchFamily="18" charset="0"/>
-                              <a:ea typeface="Cambria Math" panose="02040503050406030204" pitchFamily="18" charset="0"/>
-                            </a:rPr>
-                            <m:t>𝔼</m:t>
+                            <m:t>𝜔</m:t>
                           </m:r>
                         </m:e>
                         <m:sub>
                           <m:r>
                             <a:rPr lang="en-US" i="1">
+                              <a:solidFill>
+                                <a:srgbClr val="000000"/>
+                              </a:solidFill>
                               <a:latin typeface="Cambria Math" panose="02040503050406030204" pitchFamily="18" charset="0"/>
                               <a:ea typeface="Cambria Math" panose="02040503050406030204" pitchFamily="18" charset="0"/>
                             </a:rPr>
-                            <m:t>𝑦</m:t>
+                            <m:t>𝑗</m:t>
                           </m:r>
                           <m:r>
                             <a:rPr lang="en-US" i="1">
+                              <a:solidFill>
+                                <a:srgbClr val="000000"/>
+                              </a:solidFill>
                               <a:latin typeface="Cambria Math" panose="02040503050406030204" pitchFamily="18" charset="0"/>
                               <a:ea typeface="Cambria Math" panose="02040503050406030204" pitchFamily="18" charset="0"/>
                             </a:rPr>
-                            <m:t>∼</m:t>
+                            <m:t>+1</m:t>
                           </m:r>
-                          <m:r>
-                            <a:rPr lang="en-US" i="1">
-                              <a:latin typeface="Cambria Math" panose="02040503050406030204" pitchFamily="18" charset="0"/>
-                              <a:ea typeface="Cambria Math" panose="02040503050406030204" pitchFamily="18" charset="0"/>
-                            </a:rPr>
-                            <m:t>𝑝</m:t>
-                          </m:r>
-                          <m:d>
-                            <m:dPr>
-                              <m:ctrlPr>
-                                <a:rPr lang="en-US" i="1">
-                                  <a:latin typeface="Cambria Math" panose="02040503050406030204" pitchFamily="18" charset="0"/>
-                                  <a:ea typeface="Cambria Math" panose="02040503050406030204" pitchFamily="18" charset="0"/>
-                                </a:rPr>
-                              </m:ctrlPr>
-                            </m:dPr>
-                            <m:e>
-                              <m:r>
-                                <a:rPr lang="en-US" i="1">
-                                  <a:latin typeface="Cambria Math" panose="02040503050406030204" pitchFamily="18" charset="0"/>
-                                  <a:ea typeface="Cambria Math" panose="02040503050406030204" pitchFamily="18" charset="0"/>
-                                </a:rPr>
-                                <m:t>𝑦</m:t>
-                              </m:r>
-                            </m:e>
-                            <m:e>
-                              <m:r>
-                                <a:rPr lang="en-US" i="1">
-                                  <a:latin typeface="Cambria Math" panose="02040503050406030204" pitchFamily="18" charset="0"/>
-                                  <a:ea typeface="Cambria Math" panose="02040503050406030204" pitchFamily="18" charset="0"/>
-                                </a:rPr>
-                                <m:t>𝑥</m:t>
-                              </m:r>
-                            </m:e>
-                          </m:d>
                         </m:sub>
                       </m:sSub>
                       <m:r>
                         <a:rPr lang="en-US" i="1">
-                          <a:latin typeface="Cambria Math" panose="02040503050406030204" pitchFamily="18" charset="0"/>
-                          <a:ea typeface="Cambria Math" panose="02040503050406030204" pitchFamily="18" charset="0"/>
-                        </a:rPr>
-                        <m:t> </m:t>
-                      </m:r>
-                      <m:d>
-                        <m:dPr>
-                          <m:begChr m:val="["/>
-                          <m:endChr m:val="]"/>
-                          <m:ctrlPr>
-                            <a:rPr lang="en-US" i="1">
-                              <a:latin typeface="Cambria Math" panose="02040503050406030204" pitchFamily="18" charset="0"/>
-                            </a:rPr>
-                          </m:ctrlPr>
-                        </m:dPr>
-                        <m:e>
-                          <m:f>
-                            <m:fPr>
-                              <m:ctrlPr>
-                                <a:rPr lang="en-US" i="1">
-                                  <a:latin typeface="Cambria Math" panose="02040503050406030204" pitchFamily="18" charset="0"/>
-                                </a:rPr>
-                              </m:ctrlPr>
-                            </m:fPr>
-                            <m:num>
-                              <m:r>
-                                <a:rPr lang="en-US" i="1">
-                                  <a:latin typeface="Cambria Math" panose="02040503050406030204" pitchFamily="18" charset="0"/>
-                                </a:rPr>
-                                <m:t>𝜕</m:t>
-                              </m:r>
-                              <m:r>
-                                <a:rPr lang="en-US" i="1">
-                                  <a:latin typeface="Cambria Math" panose="02040503050406030204" pitchFamily="18" charset="0"/>
-                                </a:rPr>
-                                <m:t>𝐿</m:t>
-                              </m:r>
-                            </m:num>
-                            <m:den>
-                              <m:r>
-                                <a:rPr lang="en-US" i="1">
-                                  <a:latin typeface="Cambria Math" panose="02040503050406030204" pitchFamily="18" charset="0"/>
-                                </a:rPr>
-                                <m:t>𝜕</m:t>
-                              </m:r>
-                              <m:r>
-                                <a:rPr lang="en-US" i="1">
-                                  <a:latin typeface="Cambria Math" panose="02040503050406030204" pitchFamily="18" charset="0"/>
-                                </a:rPr>
-                                <m:t>𝑓</m:t>
-                              </m:r>
-                            </m:den>
-                          </m:f>
-                        </m:e>
-                      </m:d>
-                      <m:r>
-                        <a:rPr lang="en-US" i="1">
+                          <a:solidFill>
+                            <a:srgbClr val="000000"/>
+                          </a:solidFill>
                           <a:latin typeface="Cambria Math" panose="02040503050406030204" pitchFamily="18" charset="0"/>
                           <a:ea typeface="Cambria Math" panose="02040503050406030204" pitchFamily="18" charset="0"/>
                         </a:rPr>
                         <m:t>=</m:t>
                       </m:r>
-                      <m:r>
-                        <a:rPr lang="en-US" i="1">
-                          <a:latin typeface="Cambria Math" panose="02040503050406030204" pitchFamily="18" charset="0"/>
-                          <a:ea typeface="Cambria Math" panose="02040503050406030204" pitchFamily="18" charset="0"/>
-                        </a:rPr>
-                        <m:t>0</m:t>
-                      </m:r>
-                    </m:oMath>
-                  </m:oMathPara>
-                </a14:m>
-                <a:endParaRPr lang="en-US" dirty="0"/>
-              </a:p>
-              <a:p>
-                <a:pPr>
-                  <a:buNone/>
-                </a:pPr>
-                <a:endParaRPr lang="en-US" dirty="0"/>
-              </a:p>
-              <a:p>
-                <a:pPr>
-                  <a:buNone/>
-                </a:pPr>
-                <a14:m>
-                  <m:oMathPara xmlns:m="http://schemas.openxmlformats.org/officeDocument/2006/math">
-                    <m:oMath>
                       <m:sSub>
                         <m:sSubPr>
                           <m:ctrlPr>
                             <a:rPr lang="en-US" i="1">
+                              <a:solidFill>
+                                <a:srgbClr val="000000"/>
+                              </a:solidFill>
                               <a:latin typeface="Cambria Math" panose="02040503050406030204" pitchFamily="18" charset="0"/>
                               <a:ea typeface="Cambria Math" panose="02040503050406030204" pitchFamily="18" charset="0"/>
                             </a:rPr>
@@ -14240,189 +14027,92 @@
                         <m:e>
                           <m:r>
                             <a:rPr lang="en-US" i="1">
+                              <a:solidFill>
+                                <a:srgbClr val="000000"/>
+                              </a:solidFill>
                               <a:latin typeface="Cambria Math" panose="02040503050406030204" pitchFamily="18" charset="0"/>
                               <a:ea typeface="Cambria Math" panose="02040503050406030204" pitchFamily="18" charset="0"/>
                             </a:rPr>
-                            <m:t>    </m:t>
-                          </m:r>
-                          <m:r>
-                            <a:rPr lang="en-US" i="1">
-                              <a:latin typeface="Cambria Math" panose="02040503050406030204" pitchFamily="18" charset="0"/>
-                              <a:ea typeface="Cambria Math" panose="02040503050406030204" pitchFamily="18" charset="0"/>
-                            </a:rPr>
-                            <m:t>𝔼</m:t>
+                            <m:t>𝜔</m:t>
                           </m:r>
                         </m:e>
                         <m:sub>
                           <m:r>
                             <a:rPr lang="en-US" i="1">
+                              <a:solidFill>
+                                <a:srgbClr val="000000"/>
+                              </a:solidFill>
                               <a:latin typeface="Cambria Math" panose="02040503050406030204" pitchFamily="18" charset="0"/>
                               <a:ea typeface="Cambria Math" panose="02040503050406030204" pitchFamily="18" charset="0"/>
                             </a:rPr>
-                            <m:t>𝑦</m:t>
+                            <m:t>𝑗</m:t>
                           </m:r>
-                          <m:r>
-                            <a:rPr lang="en-US" i="1">
-                              <a:latin typeface="Cambria Math" panose="02040503050406030204" pitchFamily="18" charset="0"/>
-                              <a:ea typeface="Cambria Math" panose="02040503050406030204" pitchFamily="18" charset="0"/>
-                            </a:rPr>
-                            <m:t>∼</m:t>
-                          </m:r>
-                          <m:r>
-                            <a:rPr lang="en-US" i="1">
-                              <a:latin typeface="Cambria Math" panose="02040503050406030204" pitchFamily="18" charset="0"/>
-                              <a:ea typeface="Cambria Math" panose="02040503050406030204" pitchFamily="18" charset="0"/>
-                            </a:rPr>
-                            <m:t>𝑝</m:t>
-                          </m:r>
-                          <m:d>
-                            <m:dPr>
-                              <m:ctrlPr>
-                                <a:rPr lang="en-US" i="1">
-                                  <a:latin typeface="Cambria Math" panose="02040503050406030204" pitchFamily="18" charset="0"/>
-                                  <a:ea typeface="Cambria Math" panose="02040503050406030204" pitchFamily="18" charset="0"/>
-                                </a:rPr>
-                              </m:ctrlPr>
-                            </m:dPr>
-                            <m:e>
-                              <m:r>
-                                <a:rPr lang="en-US" i="1">
-                                  <a:latin typeface="Cambria Math" panose="02040503050406030204" pitchFamily="18" charset="0"/>
-                                  <a:ea typeface="Cambria Math" panose="02040503050406030204" pitchFamily="18" charset="0"/>
-                                </a:rPr>
-                                <m:t>𝑦</m:t>
-                              </m:r>
-                            </m:e>
-                            <m:e>
-                              <m:r>
-                                <a:rPr lang="en-US" i="1">
-                                  <a:latin typeface="Cambria Math" panose="02040503050406030204" pitchFamily="18" charset="0"/>
-                                  <a:ea typeface="Cambria Math" panose="02040503050406030204" pitchFamily="18" charset="0"/>
-                                </a:rPr>
-                                <m:t>𝑥</m:t>
-                              </m:r>
-                            </m:e>
-                          </m:d>
                         </m:sub>
                       </m:sSub>
                       <m:r>
                         <a:rPr lang="en-US" i="1">
+                          <a:solidFill>
+                            <a:srgbClr val="000000"/>
+                          </a:solidFill>
+                          <a:latin typeface="Cambria Math" charset="0"/>
+                          <a:ea typeface="Cambria Math" charset="0"/>
+                          <a:cs typeface="Cambria Math" charset="0"/>
+                        </a:rPr>
+                        <m:t>−</m:t>
+                      </m:r>
+                      <m:r>
+                        <a:rPr lang="en-US" i="1">
+                          <a:solidFill>
+                            <a:srgbClr val="0033CC"/>
+                          </a:solidFill>
                           <a:latin typeface="Cambria Math" panose="02040503050406030204" pitchFamily="18" charset="0"/>
                           <a:ea typeface="Cambria Math" panose="02040503050406030204" pitchFamily="18" charset="0"/>
+                          <a:cs typeface="Cambria Math" charset="0"/>
                         </a:rPr>
-                        <m:t> </m:t>
+                        <m:t>𝜂</m:t>
                       </m:r>
-                      <m:d>
-                        <m:dPr>
-                          <m:begChr m:val="["/>
-                          <m:endChr m:val="]"/>
-                          <m:ctrlPr>
-                            <a:rPr lang="en-US" i="1">
-                              <a:latin typeface="Cambria Math" panose="02040503050406030204" pitchFamily="18" charset="0"/>
-                            </a:rPr>
-                          </m:ctrlPr>
-                        </m:dPr>
-                        <m:e>
-                          <m:f>
-                            <m:fPr>
-                              <m:ctrlPr>
-                                <a:rPr lang="en-US" i="1">
-                                  <a:latin typeface="Cambria Math" panose="02040503050406030204" pitchFamily="18" charset="0"/>
-                                </a:rPr>
-                              </m:ctrlPr>
-                            </m:fPr>
-                            <m:num>
-                              <m:r>
-                                <a:rPr lang="en-US" i="1">
-                                  <a:latin typeface="Cambria Math" panose="02040503050406030204" pitchFamily="18" charset="0"/>
-                                </a:rPr>
-                                <m:t>𝑦</m:t>
-                              </m:r>
-                            </m:num>
-                            <m:den>
-                              <m:r>
-                                <a:rPr lang="en-US" i="1">
-                                  <a:latin typeface="Cambria Math" panose="02040503050406030204" pitchFamily="18" charset="0"/>
-                                </a:rPr>
-                                <m:t>𝑓</m:t>
-                              </m:r>
-                            </m:den>
-                          </m:f>
-                          <m:r>
-                            <a:rPr lang="en-US" i="1">
-                              <a:latin typeface="Cambria Math" panose="02040503050406030204" pitchFamily="18" charset="0"/>
-                            </a:rPr>
-                            <m:t>−</m:t>
-                          </m:r>
-                          <m:f>
-                            <m:fPr>
-                              <m:ctrlPr>
-                                <a:rPr lang="en-US" i="1">
-                                  <a:latin typeface="Cambria Math" panose="02040503050406030204" pitchFamily="18" charset="0"/>
-                                </a:rPr>
-                              </m:ctrlPr>
-                            </m:fPr>
-                            <m:num>
-                              <m:d>
-                                <m:dPr>
-                                  <m:ctrlPr>
-                                    <a:rPr lang="en-US" i="1">
-                                      <a:latin typeface="Cambria Math" panose="02040503050406030204" pitchFamily="18" charset="0"/>
-                                    </a:rPr>
-                                  </m:ctrlPr>
-                                </m:dPr>
-                                <m:e>
-                                  <m:r>
-                                    <a:rPr lang="en-US" i="1">
-                                      <a:latin typeface="Cambria Math" panose="02040503050406030204" pitchFamily="18" charset="0"/>
-                                    </a:rPr>
-                                    <m:t>1−</m:t>
-                                  </m:r>
-                                  <m:r>
-                                    <a:rPr lang="en-US" i="1">
-                                      <a:latin typeface="Cambria Math" panose="02040503050406030204" pitchFamily="18" charset="0"/>
-                                    </a:rPr>
-                                    <m:t>𝑦</m:t>
-                                  </m:r>
-                                </m:e>
-                              </m:d>
-                            </m:num>
-                            <m:den>
-                              <m:r>
-                                <a:rPr lang="en-US" i="1">
-                                  <a:latin typeface="Cambria Math" panose="02040503050406030204" pitchFamily="18" charset="0"/>
-                                </a:rPr>
-                                <m:t>1−</m:t>
-                              </m:r>
-                              <m:r>
-                                <a:rPr lang="en-US" i="1">
-                                  <a:latin typeface="Cambria Math" panose="02040503050406030204" pitchFamily="18" charset="0"/>
-                                </a:rPr>
-                                <m:t>𝑓</m:t>
-                              </m:r>
-                            </m:den>
-                          </m:f>
-                        </m:e>
-                      </m:d>
+                      <m:r>
+                        <m:rPr>
+                          <m:sty m:val="p"/>
+                        </m:rPr>
+                        <a:rPr lang="en-US" i="1">
+                          <a:latin typeface="Cambria Math" panose="02040503050406030204" pitchFamily="18" charset="0"/>
+                          <a:ea typeface="Cambria Math" panose="02040503050406030204" pitchFamily="18" charset="0"/>
+                          <a:cs typeface="Cambria Math" charset="0"/>
+                        </a:rPr>
+                        <m:t>∇</m:t>
+                      </m:r>
                       <m:r>
                         <a:rPr lang="en-US" i="1">
                           <a:latin typeface="Cambria Math" panose="02040503050406030204" pitchFamily="18" charset="0"/>
                           <a:ea typeface="Cambria Math" panose="02040503050406030204" pitchFamily="18" charset="0"/>
+                          <a:cs typeface="Cambria Math" charset="0"/>
                         </a:rPr>
-                        <m:t>=0</m:t>
+                        <m:t>𝑅</m:t>
                       </m:r>
                     </m:oMath>
                   </m:oMathPara>
                 </a14:m>
-                <a:endParaRPr lang="en-US" dirty="0"/>
+                <a:endParaRPr lang="en-US" dirty="0">
+                  <a:ea typeface="Cambria Math" panose="02040503050406030204" pitchFamily="18" charset="0"/>
+                  <a:cs typeface="Cambria Math" charset="0"/>
+                </a:endParaRPr>
               </a:p>
               <a:p>
-                <a:pPr marL="0" indent="0">
+                <a:pPr>
+                  <a:lnSpc>
+                    <a:spcPct val="90000"/>
+                  </a:lnSpc>
+                  <a:buFont typeface="Marlett" pitchFamily="26" charset="0"/>
                   <a:buNone/>
                 </a:pPr>
                 <a:r>
-                  <a:rPr lang="en-US" dirty="0"/>
-                  <a:t>Therefore, for </a:t>
+                  <a:rPr lang="en-US" dirty="0">
+                    <a:solidFill>
+                      <a:srgbClr val="000000"/>
+                    </a:solidFill>
+                  </a:rPr>
+                  <a:t>work? 		(</a:t>
                 </a:r>
                 <a14:m>
                   <m:oMath xmlns:m="http://schemas.openxmlformats.org/officeDocument/2006/math">
@@ -14432,218 +14122,544 @@
                           <a:srgbClr val="0033CC"/>
                         </a:solidFill>
                         <a:latin typeface="Cambria Math" panose="02040503050406030204" pitchFamily="18" charset="0"/>
+                        <a:ea typeface="Cambria Math" panose="02040503050406030204" pitchFamily="18" charset="0"/>
+                        <a:cs typeface="Cambria Math" charset="0"/>
                       </a:rPr>
-                      <m:t>𝑦</m:t>
+                      <m:t>𝜂</m:t>
                     </m:r>
                   </m:oMath>
                 </a14:m>
                 <a:r>
-                  <a:rPr lang="en-US" dirty="0"/>
-                  <a:t> in the unit interval</a:t>
+                  <a:rPr lang="en-US" dirty="0">
+                    <a:solidFill>
+                      <a:srgbClr val="000000"/>
+                    </a:solidFill>
+                  </a:rPr>
+                  <a:t> is called the </a:t>
+                </a:r>
+                <a:r>
+                  <a:rPr lang="en-US" b="1" dirty="0">
+                    <a:solidFill>
+                      <a:srgbClr val="0033CC"/>
+                    </a:solidFill>
+                  </a:rPr>
+                  <a:t>learning rate</a:t>
+                </a:r>
+                <a:r>
+                  <a:rPr lang="en-US" dirty="0">
+                    <a:solidFill>
+                      <a:srgbClr val="000000"/>
+                    </a:solidFill>
+                  </a:rPr>
+                  <a:t>.)</a:t>
                 </a:r>
               </a:p>
               <a:p>
-                <a:pPr marL="0" indent="0">
+                <a:pPr>
+                  <a:lnSpc>
+                    <a:spcPct val="90000"/>
+                  </a:lnSpc>
+                  <a:buFont typeface="Marlett" pitchFamily="26" charset="0"/>
+                  <a:buNone/>
+                </a:pPr>
+                <a:r>
+                  <a:rPr lang="en-US" dirty="0">
+                    <a:solidFill>
+                      <a:srgbClr val="000000"/>
+                    </a:solidFill>
+                  </a:rPr>
+                  <a:t>Consider</a:t>
+                </a:r>
+              </a:p>
+              <a:p>
+                <a:pPr>
+                  <a:lnSpc>
+                    <a:spcPct val="90000"/>
+                  </a:lnSpc>
+                  <a:buFont typeface="Marlett" pitchFamily="26" charset="0"/>
+                  <a:buNone/>
+                </a:pPr>
+                <a14:m>
+                  <m:oMathPara xmlns:m="http://schemas.openxmlformats.org/officeDocument/2006/math">
+                    <m:oMathParaPr>
+                      <m:jc m:val="left"/>
+                    </m:oMathParaPr>
+                    <m:oMath>
+                      <m:r>
+                        <a:rPr lang="en-US" i="1">
+                          <a:latin typeface="Cambria Math" panose="02040503050406030204" pitchFamily="18" charset="0"/>
+                        </a:rPr>
+                        <m:t>𝑅</m:t>
+                      </m:r>
+                      <m:d>
+                        <m:dPr>
+                          <m:ctrlPr>
+                            <a:rPr lang="en-US" i="1">
+                              <a:solidFill>
+                                <a:srgbClr val="000000"/>
+                              </a:solidFill>
+                              <a:latin typeface="Cambria Math" panose="02040503050406030204" pitchFamily="18" charset="0"/>
+                              <a:ea typeface="Cambria Math" panose="02040503050406030204" pitchFamily="18" charset="0"/>
+                            </a:rPr>
+                          </m:ctrlPr>
+                        </m:dPr>
+                        <m:e>
+                          <m:sSub>
+                            <m:sSubPr>
+                              <m:ctrlPr>
+                                <a:rPr lang="en-US" i="1">
+                                  <a:solidFill>
+                                    <a:srgbClr val="000000"/>
+                                  </a:solidFill>
+                                  <a:latin typeface="Cambria Math" panose="02040503050406030204" pitchFamily="18" charset="0"/>
+                                  <a:ea typeface="Cambria Math" panose="02040503050406030204" pitchFamily="18" charset="0"/>
+                                </a:rPr>
+                              </m:ctrlPr>
+                            </m:sSubPr>
+                            <m:e>
+                              <m:r>
+                                <a:rPr lang="en-US" i="1">
+                                  <a:solidFill>
+                                    <a:srgbClr val="000000"/>
+                                  </a:solidFill>
+                                  <a:latin typeface="Cambria Math" panose="02040503050406030204" pitchFamily="18" charset="0"/>
+                                  <a:ea typeface="Cambria Math" panose="02040503050406030204" pitchFamily="18" charset="0"/>
+                                </a:rPr>
+                                <m:t>𝜔</m:t>
+                              </m:r>
+                            </m:e>
+                            <m:sub>
+                              <m:r>
+                                <a:rPr lang="en-US" i="1">
+                                  <a:solidFill>
+                                    <a:srgbClr val="000000"/>
+                                  </a:solidFill>
+                                  <a:latin typeface="Cambria Math" panose="02040503050406030204" pitchFamily="18" charset="0"/>
+                                  <a:ea typeface="Cambria Math" panose="02040503050406030204" pitchFamily="18" charset="0"/>
+                                </a:rPr>
+                                <m:t>𝑗</m:t>
+                              </m:r>
+                              <m:r>
+                                <a:rPr lang="en-US" i="1">
+                                  <a:solidFill>
+                                    <a:srgbClr val="000000"/>
+                                  </a:solidFill>
+                                  <a:latin typeface="Cambria Math" panose="02040503050406030204" pitchFamily="18" charset="0"/>
+                                  <a:ea typeface="Cambria Math" panose="02040503050406030204" pitchFamily="18" charset="0"/>
+                                </a:rPr>
+                                <m:t>+1</m:t>
+                              </m:r>
+                            </m:sub>
+                          </m:sSub>
+                        </m:e>
+                      </m:d>
+                      <m:r>
+                        <a:rPr lang="en-US">
+                          <a:solidFill>
+                            <a:srgbClr val="000000"/>
+                          </a:solidFill>
+                          <a:latin typeface="Cambria Math" panose="02040503050406030204" pitchFamily="18" charset="0"/>
+                          <a:ea typeface="Cambria Math" panose="02040503050406030204" pitchFamily="18" charset="0"/>
+                        </a:rPr>
+                        <m:t>=</m:t>
+                      </m:r>
+                      <m:r>
+                        <a:rPr lang="en-US" i="1">
+                          <a:latin typeface="Cambria Math" panose="02040503050406030204" pitchFamily="18" charset="0"/>
+                        </a:rPr>
+                        <m:t>𝑅</m:t>
+                      </m:r>
+                      <m:d>
+                        <m:dPr>
+                          <m:ctrlPr>
+                            <a:rPr lang="en-US" i="1">
+                              <a:solidFill>
+                                <a:srgbClr val="000000"/>
+                              </a:solidFill>
+                              <a:latin typeface="Cambria Math" panose="02040503050406030204" pitchFamily="18" charset="0"/>
+                              <a:ea typeface="Cambria Math" panose="02040503050406030204" pitchFamily="18" charset="0"/>
+                            </a:rPr>
+                          </m:ctrlPr>
+                        </m:dPr>
+                        <m:e>
+                          <m:sSub>
+                            <m:sSubPr>
+                              <m:ctrlPr>
+                                <a:rPr lang="en-US" i="1">
+                                  <a:solidFill>
+                                    <a:srgbClr val="000000"/>
+                                  </a:solidFill>
+                                  <a:latin typeface="Cambria Math" panose="02040503050406030204" pitchFamily="18" charset="0"/>
+                                  <a:ea typeface="Cambria Math" panose="02040503050406030204" pitchFamily="18" charset="0"/>
+                                </a:rPr>
+                              </m:ctrlPr>
+                            </m:sSubPr>
+                            <m:e>
+                              <m:r>
+                                <a:rPr lang="en-US" i="1">
+                                  <a:solidFill>
+                                    <a:srgbClr val="000000"/>
+                                  </a:solidFill>
+                                  <a:latin typeface="Cambria Math" panose="02040503050406030204" pitchFamily="18" charset="0"/>
+                                  <a:ea typeface="Cambria Math" panose="02040503050406030204" pitchFamily="18" charset="0"/>
+                                </a:rPr>
+                                <m:t>𝜔</m:t>
+                              </m:r>
+                            </m:e>
+                            <m:sub>
+                              <m:r>
+                                <a:rPr lang="en-US" i="1">
+                                  <a:solidFill>
+                                    <a:srgbClr val="000000"/>
+                                  </a:solidFill>
+                                  <a:latin typeface="Cambria Math" panose="02040503050406030204" pitchFamily="18" charset="0"/>
+                                  <a:ea typeface="Cambria Math" panose="02040503050406030204" pitchFamily="18" charset="0"/>
+                                </a:rPr>
+                                <m:t>𝑗</m:t>
+                              </m:r>
+                            </m:sub>
+                          </m:sSub>
+                          <m:r>
+                            <a:rPr lang="en-US" i="1">
+                              <a:solidFill>
+                                <a:srgbClr val="000000"/>
+                              </a:solidFill>
+                              <a:latin typeface="Cambria Math" charset="0"/>
+                              <a:ea typeface="Cambria Math" charset="0"/>
+                              <a:cs typeface="Cambria Math" charset="0"/>
+                            </a:rPr>
+                            <m:t>−</m:t>
+                          </m:r>
+                          <m:r>
+                            <a:rPr lang="en-US" i="1">
+                              <a:solidFill>
+                                <a:srgbClr val="0033CC"/>
+                              </a:solidFill>
+                              <a:latin typeface="Cambria Math" panose="02040503050406030204" pitchFamily="18" charset="0"/>
+                              <a:ea typeface="Cambria Math" panose="02040503050406030204" pitchFamily="18" charset="0"/>
+                              <a:cs typeface="Cambria Math" charset="0"/>
+                            </a:rPr>
+                            <m:t>𝜂</m:t>
+                          </m:r>
+                          <m:r>
+                            <m:rPr>
+                              <m:sty m:val="p"/>
+                            </m:rPr>
+                            <a:rPr lang="en-US" i="1">
+                              <a:latin typeface="Cambria Math" panose="02040503050406030204" pitchFamily="18" charset="0"/>
+                              <a:ea typeface="Cambria Math" panose="02040503050406030204" pitchFamily="18" charset="0"/>
+                              <a:cs typeface="Cambria Math" charset="0"/>
+                            </a:rPr>
+                            <m:t>∇</m:t>
+                          </m:r>
+                          <m:r>
+                            <a:rPr lang="en-US" i="1">
+                              <a:latin typeface="Cambria Math" panose="02040503050406030204" pitchFamily="18" charset="0"/>
+                              <a:ea typeface="Cambria Math" panose="02040503050406030204" pitchFamily="18" charset="0"/>
+                              <a:cs typeface="Cambria Math" charset="0"/>
+                            </a:rPr>
+                            <m:t>𝑅</m:t>
+                          </m:r>
+                          <m:r>
+                            <m:rPr>
+                              <m:nor/>
+                            </m:rPr>
+                            <a:rPr lang="en-US" i="0" dirty="0">
+                              <a:solidFill>
+                                <a:srgbClr val="000000"/>
+                              </a:solidFill>
+                            </a:rPr>
+                            <m:t> </m:t>
+                          </m:r>
+                        </m:e>
+                      </m:d>
+                    </m:oMath>
+                  </m:oMathPara>
+                </a14:m>
+                <a:endParaRPr lang="en-US" i="1" dirty="0">
+                  <a:solidFill>
+                    <a:srgbClr val="000000"/>
+                  </a:solidFill>
+                  <a:latin typeface="Cambria Math" panose="02040503050406030204" pitchFamily="18" charset="0"/>
+                </a:endParaRPr>
+              </a:p>
+              <a:p>
+                <a:pPr>
+                  <a:lnSpc>
+                    <a:spcPct val="90000"/>
+                  </a:lnSpc>
+                  <a:buFont typeface="Marlett" pitchFamily="26" charset="0"/>
+                  <a:buNone/>
+                </a:pPr>
+                <a:r>
+                  <a:rPr lang="en-US" dirty="0">
+                    <a:solidFill>
+                      <a:srgbClr val="000000"/>
+                    </a:solidFill>
+                    <a:ea typeface="Cambria Math" panose="02040503050406030204" pitchFamily="18" charset="0"/>
+                  </a:rPr>
+                  <a:t>  		 </a:t>
+                </a:r>
+                <a14:m>
+                  <m:oMath xmlns:m="http://schemas.openxmlformats.org/officeDocument/2006/math">
+                    <m:r>
+                      <a:rPr lang="en-US" i="1">
+                        <a:solidFill>
+                          <a:srgbClr val="000000"/>
+                        </a:solidFill>
+                        <a:latin typeface="Cambria Math" panose="02040503050406030204" pitchFamily="18" charset="0"/>
+                        <a:ea typeface="Cambria Math" panose="02040503050406030204" pitchFamily="18" charset="0"/>
+                      </a:rPr>
+                      <m:t>=</m:t>
+                    </m:r>
+                    <m:r>
+                      <a:rPr lang="en-US" i="1">
+                        <a:solidFill>
+                          <a:srgbClr val="000000"/>
+                        </a:solidFill>
+                        <a:latin typeface="Cambria Math" panose="02040503050406030204" pitchFamily="18" charset="0"/>
+                        <a:ea typeface="Cambria Math" panose="02040503050406030204" pitchFamily="18" charset="0"/>
+                      </a:rPr>
+                      <m:t>𝑅</m:t>
+                    </m:r>
+                    <m:d>
+                      <m:dPr>
+                        <m:ctrlPr>
+                          <a:rPr lang="en-US" i="1">
+                            <a:solidFill>
+                              <a:srgbClr val="000000"/>
+                            </a:solidFill>
+                            <a:latin typeface="Cambria Math" panose="02040503050406030204" pitchFamily="18" charset="0"/>
+                            <a:ea typeface="Cambria Math" panose="02040503050406030204" pitchFamily="18" charset="0"/>
+                          </a:rPr>
+                        </m:ctrlPr>
+                      </m:dPr>
+                      <m:e>
+                        <m:sSub>
+                          <m:sSubPr>
+                            <m:ctrlPr>
+                              <a:rPr lang="en-US" i="1">
+                                <a:solidFill>
+                                  <a:srgbClr val="000000"/>
+                                </a:solidFill>
+                                <a:latin typeface="Cambria Math" panose="02040503050406030204" pitchFamily="18" charset="0"/>
+                                <a:ea typeface="Cambria Math" panose="02040503050406030204" pitchFamily="18" charset="0"/>
+                              </a:rPr>
+                            </m:ctrlPr>
+                          </m:sSubPr>
+                          <m:e>
+                            <m:r>
+                              <a:rPr lang="en-US" i="1">
+                                <a:solidFill>
+                                  <a:srgbClr val="000000"/>
+                                </a:solidFill>
+                                <a:latin typeface="Cambria Math" panose="02040503050406030204" pitchFamily="18" charset="0"/>
+                                <a:ea typeface="Cambria Math" panose="02040503050406030204" pitchFamily="18" charset="0"/>
+                              </a:rPr>
+                              <m:t>𝜔</m:t>
+                            </m:r>
+                          </m:e>
+                          <m:sub>
+                            <m:r>
+                              <a:rPr lang="en-US" i="1">
+                                <a:solidFill>
+                                  <a:srgbClr val="000000"/>
+                                </a:solidFill>
+                                <a:latin typeface="Cambria Math" panose="02040503050406030204" pitchFamily="18" charset="0"/>
+                                <a:ea typeface="Cambria Math" panose="02040503050406030204" pitchFamily="18" charset="0"/>
+                              </a:rPr>
+                              <m:t>𝑗</m:t>
+                            </m:r>
+                          </m:sub>
+                        </m:sSub>
+                      </m:e>
+                    </m:d>
+                    <m:r>
+                      <a:rPr lang="en-US" i="1">
+                        <a:solidFill>
+                          <a:srgbClr val="000000"/>
+                        </a:solidFill>
+                        <a:latin typeface="Cambria Math" panose="02040503050406030204" pitchFamily="18" charset="0"/>
+                        <a:ea typeface="Cambria Math" panose="02040503050406030204" pitchFamily="18" charset="0"/>
+                      </a:rPr>
+                      <m:t>−</m:t>
+                    </m:r>
+                    <m:r>
+                      <m:rPr>
+                        <m:nor/>
+                      </m:rPr>
+                      <a:rPr lang="en-US" i="0" dirty="0">
+                        <a:solidFill>
+                          <a:srgbClr val="0033CC"/>
+                        </a:solidFill>
+                        <a:ea typeface="Cambria Math" panose="02040503050406030204" pitchFamily="18" charset="0"/>
+                        <a:cs typeface="Cambria Math" charset="0"/>
+                      </a:rPr>
+                      <m:t> </m:t>
+                    </m:r>
+                    <m:r>
+                      <a:rPr lang="en-US" i="1">
+                        <a:solidFill>
+                          <a:srgbClr val="0033CC"/>
+                        </a:solidFill>
+                        <a:latin typeface="Cambria Math" panose="02040503050406030204" pitchFamily="18" charset="0"/>
+                        <a:ea typeface="Cambria Math" panose="02040503050406030204" pitchFamily="18" charset="0"/>
+                        <a:cs typeface="Cambria Math" charset="0"/>
+                      </a:rPr>
+                      <m:t>𝜂</m:t>
+                    </m:r>
+                    <m:r>
+                      <m:rPr>
+                        <m:sty m:val="p"/>
+                      </m:rPr>
+                      <a:rPr lang="en-US" i="1">
+                        <a:latin typeface="Cambria Math" panose="02040503050406030204" pitchFamily="18" charset="0"/>
+                        <a:ea typeface="Cambria Math" panose="02040503050406030204" pitchFamily="18" charset="0"/>
+                        <a:cs typeface="Cambria Math" charset="0"/>
+                      </a:rPr>
+                      <m:t>∇</m:t>
+                    </m:r>
+                    <m:r>
+                      <a:rPr lang="en-US" i="1">
+                        <a:latin typeface="Cambria Math" panose="02040503050406030204" pitchFamily="18" charset="0"/>
+                        <a:ea typeface="Cambria Math" panose="02040503050406030204" pitchFamily="18" charset="0"/>
+                        <a:cs typeface="Cambria Math" charset="0"/>
+                      </a:rPr>
+                      <m:t>𝑅</m:t>
+                    </m:r>
+                    <m:r>
+                      <a:rPr lang="en-US" i="1">
+                        <a:latin typeface="Cambria Math" panose="02040503050406030204" pitchFamily="18" charset="0"/>
+                        <a:ea typeface="Cambria Math" panose="02040503050406030204" pitchFamily="18" charset="0"/>
+                        <a:cs typeface="Cambria Math" charset="0"/>
+                      </a:rPr>
+                      <m:t>∙</m:t>
+                    </m:r>
+                    <m:r>
+                      <m:rPr>
+                        <m:sty m:val="p"/>
+                      </m:rPr>
+                      <a:rPr lang="en-US" i="1">
+                        <a:latin typeface="Cambria Math" panose="02040503050406030204" pitchFamily="18" charset="0"/>
+                        <a:ea typeface="Cambria Math" panose="02040503050406030204" pitchFamily="18" charset="0"/>
+                        <a:cs typeface="Cambria Math" charset="0"/>
+                      </a:rPr>
+                      <m:t>∇</m:t>
+                    </m:r>
+                    <m:r>
+                      <a:rPr lang="en-US" i="1">
+                        <a:latin typeface="Cambria Math" panose="02040503050406030204" pitchFamily="18" charset="0"/>
+                        <a:ea typeface="Cambria Math" panose="02040503050406030204" pitchFamily="18" charset="0"/>
+                        <a:cs typeface="Cambria Math" charset="0"/>
+                      </a:rPr>
+                      <m:t>𝑅</m:t>
+                    </m:r>
+                    <m:r>
+                      <a:rPr lang="en-US" i="1">
+                        <a:latin typeface="Cambria Math" panose="02040503050406030204" pitchFamily="18" charset="0"/>
+                        <a:ea typeface="Cambria Math" panose="02040503050406030204" pitchFamily="18" charset="0"/>
+                        <a:cs typeface="Cambria Math" charset="0"/>
+                      </a:rPr>
+                      <m:t>+</m:t>
+                    </m:r>
+                    <m:r>
+                      <a:rPr lang="en-US" i="1">
+                        <a:latin typeface="Cambria Math" panose="02040503050406030204" pitchFamily="18" charset="0"/>
+                        <a:ea typeface="Cambria Math" panose="02040503050406030204" pitchFamily="18" charset="0"/>
+                        <a:cs typeface="Cambria Math" charset="0"/>
+                      </a:rPr>
+                      <m:t>𝑂</m:t>
+                    </m:r>
+                    <m:r>
+                      <a:rPr lang="en-US" i="1">
+                        <a:latin typeface="Cambria Math" panose="02040503050406030204" pitchFamily="18" charset="0"/>
+                        <a:ea typeface="Cambria Math" panose="02040503050406030204" pitchFamily="18" charset="0"/>
+                        <a:cs typeface="Cambria Math" charset="0"/>
+                      </a:rPr>
+                      <m:t>(</m:t>
+                    </m:r>
+                    <m:sSup>
+                      <m:sSupPr>
+                        <m:ctrlPr>
+                          <a:rPr lang="en-US" i="1">
+                            <a:latin typeface="Cambria Math" panose="02040503050406030204" pitchFamily="18" charset="0"/>
+                            <a:ea typeface="Cambria Math" panose="02040503050406030204" pitchFamily="18" charset="0"/>
+                          </a:rPr>
+                        </m:ctrlPr>
+                      </m:sSupPr>
+                      <m:e>
+                        <m:r>
+                          <a:rPr lang="en-US" i="1">
+                            <a:latin typeface="Cambria Math" panose="02040503050406030204" pitchFamily="18" charset="0"/>
+                            <a:ea typeface="Cambria Math" panose="02040503050406030204" pitchFamily="18" charset="0"/>
+                          </a:rPr>
+                          <m:t>𝜂</m:t>
+                        </m:r>
+                      </m:e>
+                      <m:sup>
+                        <m:r>
+                          <a:rPr lang="en-US" i="1">
+                            <a:latin typeface="Cambria Math" panose="02040503050406030204" pitchFamily="18" charset="0"/>
+                            <a:ea typeface="Cambria Math" panose="02040503050406030204" pitchFamily="18" charset="0"/>
+                          </a:rPr>
+                          <m:t>2</m:t>
+                        </m:r>
+                      </m:sup>
+                    </m:sSup>
+                    <m:r>
+                      <a:rPr lang="en-US" i="1">
+                        <a:latin typeface="Cambria Math" panose="02040503050406030204" pitchFamily="18" charset="0"/>
+                        <a:ea typeface="Cambria Math" panose="02040503050406030204" pitchFamily="18" charset="0"/>
+                      </a:rPr>
+                      <m:t>)</m:t>
+                    </m:r>
+                  </m:oMath>
+                </a14:m>
+                <a:endParaRPr lang="en-US" i="1" dirty="0">
+                  <a:solidFill>
+                    <a:srgbClr val="000000"/>
+                  </a:solidFill>
+                  <a:latin typeface="Cambria Math" panose="02040503050406030204" pitchFamily="18" charset="0"/>
+                  <a:ea typeface="Cambria Math" panose="02040503050406030204" pitchFamily="18" charset="0"/>
+                </a:endParaRPr>
+              </a:p>
+              <a:p>
+                <a:pPr>
+                  <a:lnSpc>
+                    <a:spcPct val="90000"/>
+                  </a:lnSpc>
+                  <a:buFont typeface="Marlett" pitchFamily="26" charset="0"/>
                   <a:buNone/>
                 </a:pPr>
                 <a14:m>
                   <m:oMathPara xmlns:m="http://schemas.openxmlformats.org/officeDocument/2006/math">
                     <m:oMath>
                       <m:r>
-                        <a:rPr lang="en-US" i="1" dirty="0">
+                        <a:rPr lang="en-US" i="1">
+                          <a:solidFill>
+                            <a:srgbClr val="000000"/>
+                          </a:solidFill>
                           <a:latin typeface="Cambria Math" panose="02040503050406030204" pitchFamily="18" charset="0"/>
+                          <a:ea typeface="Cambria Math" panose="02040503050406030204" pitchFamily="18" charset="0"/>
                         </a:rPr>
-                        <m:t>𝑓</m:t>
+                        <m:t> </m:t>
                       </m:r>
-                      <m:d>
-                        <m:dPr>
-                          <m:ctrlPr>
-                            <a:rPr lang="en-US" i="1" dirty="0">
-                              <a:latin typeface="Cambria Math" panose="02040503050406030204" pitchFamily="18" charset="0"/>
-                            </a:rPr>
-                          </m:ctrlPr>
-                        </m:dPr>
-                        <m:e>
-                          <m:r>
-                            <a:rPr lang="en-US" i="1" dirty="0">
-                              <a:latin typeface="Cambria Math" panose="02040503050406030204" pitchFamily="18" charset="0"/>
-                            </a:rPr>
-                            <m:t>𝑥</m:t>
-                          </m:r>
-                          <m:r>
-                            <a:rPr lang="en-US" i="1" dirty="0">
-                              <a:latin typeface="Cambria Math" panose="02040503050406030204" pitchFamily="18" charset="0"/>
-                            </a:rPr>
-                            <m:t>, </m:t>
-                          </m:r>
-                          <m:sSup>
-                            <m:sSupPr>
-                              <m:ctrlPr>
-                                <a:rPr lang="en-US" i="1" dirty="0">
-                                  <a:latin typeface="Cambria Math" panose="02040503050406030204" pitchFamily="18" charset="0"/>
-                                </a:rPr>
-                              </m:ctrlPr>
-                            </m:sSupPr>
-                            <m:e>
-                              <m:r>
-                                <a:rPr lang="en-US" i="1" dirty="0">
-                                  <a:latin typeface="Cambria Math" panose="02040503050406030204" pitchFamily="18" charset="0"/>
-                                </a:rPr>
-                                <m:t>𝜔</m:t>
-                              </m:r>
-                            </m:e>
-                            <m:sup>
-                              <m:r>
-                                <a:rPr lang="en-US" i="1" dirty="0">
-                                  <a:latin typeface="Cambria Math" panose="02040503050406030204" pitchFamily="18" charset="0"/>
-                                </a:rPr>
-                                <m:t>∗</m:t>
-                              </m:r>
-                            </m:sup>
-                          </m:sSup>
-                        </m:e>
-                      </m:d>
-                      <m:r>
-                        <a:rPr lang="en-US" i="1">
-                          <a:latin typeface="Cambria Math" panose="02040503050406030204" pitchFamily="18" charset="0"/>
-                        </a:rPr>
-                        <m:t>=</m:t>
-                      </m:r>
-                      <m:sSub>
-                        <m:sSubPr>
-                          <m:ctrlPr>
-                            <a:rPr lang="en-US" i="1">
-                              <a:latin typeface="Cambria Math" panose="02040503050406030204" pitchFamily="18" charset="0"/>
-                              <a:ea typeface="Cambria Math" panose="02040503050406030204" pitchFamily="18" charset="0"/>
-                            </a:rPr>
-                          </m:ctrlPr>
-                        </m:sSubPr>
-                        <m:e>
-                          <m:r>
-                            <a:rPr lang="en-US" i="1">
-                              <a:latin typeface="Cambria Math" panose="02040503050406030204" pitchFamily="18" charset="0"/>
-                              <a:ea typeface="Cambria Math" panose="02040503050406030204" pitchFamily="18" charset="0"/>
-                            </a:rPr>
-                            <m:t> </m:t>
-                          </m:r>
-                          <m:r>
-                            <a:rPr lang="en-US" i="1">
-                              <a:latin typeface="Cambria Math" panose="02040503050406030204" pitchFamily="18" charset="0"/>
-                              <a:ea typeface="Cambria Math" panose="02040503050406030204" pitchFamily="18" charset="0"/>
-                            </a:rPr>
-                            <m:t>𝔼</m:t>
-                          </m:r>
-                        </m:e>
-                        <m:sub>
-                          <m:r>
-                            <a:rPr lang="en-US" i="1">
-                              <a:latin typeface="Cambria Math" panose="02040503050406030204" pitchFamily="18" charset="0"/>
-                              <a:ea typeface="Cambria Math" panose="02040503050406030204" pitchFamily="18" charset="0"/>
-                            </a:rPr>
-                            <m:t>𝑦</m:t>
-                          </m:r>
-                          <m:r>
-                            <a:rPr lang="en-US" i="1">
-                              <a:latin typeface="Cambria Math" panose="02040503050406030204" pitchFamily="18" charset="0"/>
-                              <a:ea typeface="Cambria Math" panose="02040503050406030204" pitchFamily="18" charset="0"/>
-                            </a:rPr>
-                            <m:t>∼</m:t>
-                          </m:r>
-                          <m:r>
-                            <a:rPr lang="en-US" i="1">
-                              <a:latin typeface="Cambria Math" panose="02040503050406030204" pitchFamily="18" charset="0"/>
-                              <a:ea typeface="Cambria Math" panose="02040503050406030204" pitchFamily="18" charset="0"/>
-                            </a:rPr>
-                            <m:t>𝑝</m:t>
-                          </m:r>
-                          <m:d>
-                            <m:dPr>
-                              <m:ctrlPr>
-                                <a:rPr lang="en-US" i="1">
-                                  <a:latin typeface="Cambria Math" panose="02040503050406030204" pitchFamily="18" charset="0"/>
-                                  <a:ea typeface="Cambria Math" panose="02040503050406030204" pitchFamily="18" charset="0"/>
-                                </a:rPr>
-                              </m:ctrlPr>
-                            </m:dPr>
-                            <m:e>
-                              <m:r>
-                                <a:rPr lang="en-US" i="1">
-                                  <a:latin typeface="Cambria Math" panose="02040503050406030204" pitchFamily="18" charset="0"/>
-                                  <a:ea typeface="Cambria Math" panose="02040503050406030204" pitchFamily="18" charset="0"/>
-                                </a:rPr>
-                                <m:t>𝑦</m:t>
-                              </m:r>
-                            </m:e>
-                            <m:e>
-                              <m:r>
-                                <a:rPr lang="en-US" i="1">
-                                  <a:latin typeface="Cambria Math" panose="02040503050406030204" pitchFamily="18" charset="0"/>
-                                  <a:ea typeface="Cambria Math" panose="02040503050406030204" pitchFamily="18" charset="0"/>
-                                </a:rPr>
-                                <m:t>𝑥</m:t>
-                              </m:r>
-                            </m:e>
-                          </m:d>
-                        </m:sub>
-                      </m:sSub>
-                      <m:d>
-                        <m:dPr>
-                          <m:begChr m:val="["/>
-                          <m:endChr m:val="]"/>
-                          <m:ctrlPr>
-                            <a:rPr lang="en-US" i="1">
-                              <a:latin typeface="Cambria Math" panose="02040503050406030204" pitchFamily="18" charset="0"/>
-                            </a:rPr>
-                          </m:ctrlPr>
-                        </m:dPr>
-                        <m:e>
-                          <m:r>
-                            <a:rPr lang="en-US" i="1">
-                              <a:latin typeface="Cambria Math" panose="02040503050406030204" pitchFamily="18" charset="0"/>
-                            </a:rPr>
-                            <m:t>𝑦</m:t>
-                          </m:r>
-                        </m:e>
-                      </m:d>
                     </m:oMath>
                   </m:oMathPara>
                 </a14:m>
-                <a:br>
-                  <a:rPr lang="en-US" dirty="0">
-                    <a:solidFill>
-                      <a:srgbClr val="0000FF"/>
-                    </a:solidFill>
-                    <a:effectLst>
-                      <a:outerShdw blurRad="38100" dist="38100" dir="2700000" algn="tl">
-                        <a:srgbClr val="DDDDDD"/>
-                      </a:outerShdw>
-                    </a:effectLst>
-                  </a:rPr>
-                </a:br>
-                <a:endParaRPr lang="en-US" dirty="0">
-                  <a:solidFill>
-                    <a:srgbClr val="0000FF"/>
-                  </a:solidFill>
-                  <a:effectLst>
-                    <a:outerShdw blurRad="38100" dist="38100" dir="2700000" algn="tl">
-                      <a:srgbClr val="DDDDDD"/>
-                    </a:outerShdw>
-                  </a:effectLst>
-                </a:endParaRPr>
-              </a:p>
-              <a:p>
-                <a:pPr marL="0" indent="0">
-                  <a:buNone/>
-                </a:pPr>
                 <a:endParaRPr lang="en-US" dirty="0"/>
               </a:p>
               <a:p>
-                <a:pPr marL="0" indent="0">
+                <a:pPr>
+                  <a:lnSpc>
+                    <a:spcPct val="90000"/>
+                  </a:lnSpc>
+                  <a:buFont typeface="Marlett" pitchFamily="26" charset="0"/>
                   <a:buNone/>
                 </a:pPr>
                 <a:r>
                   <a:rPr lang="en-US" dirty="0"/>
-                  <a:t>But when </a:t>
+                  <a:t>If the </a:t>
                 </a:r>
                 <a14:m>
                   <m:oMath xmlns:m="http://schemas.openxmlformats.org/officeDocument/2006/math">
@@ -14653,8 +14669,10 @@
                           <a:srgbClr val="0033CC"/>
                         </a:solidFill>
                         <a:latin typeface="Cambria Math" panose="02040503050406030204" pitchFamily="18" charset="0"/>
+                        <a:ea typeface="Cambria Math" panose="02040503050406030204" pitchFamily="18" charset="0"/>
+                        <a:cs typeface="Cambria Math" charset="0"/>
                       </a:rPr>
-                      <m:t>𝑦</m:t>
+                      <m:t>𝑂</m:t>
                     </m:r>
                     <m:r>
                       <a:rPr lang="en-US" i="1">
@@ -14662,22 +14680,23 @@
                           <a:srgbClr val="0033CC"/>
                         </a:solidFill>
                         <a:latin typeface="Cambria Math" panose="02040503050406030204" pitchFamily="18" charset="0"/>
+                        <a:ea typeface="Cambria Math" panose="02040503050406030204" pitchFamily="18" charset="0"/>
+                        <a:cs typeface="Cambria Math" charset="0"/>
                       </a:rPr>
-                      <m:t>=</m:t>
+                      <m:t>(</m:t>
                     </m:r>
-                    <m:d>
-                      <m:dPr>
-                        <m:begChr m:val="{"/>
-                        <m:endChr m:val="}"/>
+                    <m:sSup>
+                      <m:sSupPr>
                         <m:ctrlPr>
                           <a:rPr lang="en-US" i="1">
                             <a:solidFill>
                               <a:srgbClr val="0033CC"/>
                             </a:solidFill>
                             <a:latin typeface="Cambria Math" panose="02040503050406030204" pitchFamily="18" charset="0"/>
+                            <a:ea typeface="Cambria Math" panose="02040503050406030204" pitchFamily="18" charset="0"/>
                           </a:rPr>
                         </m:ctrlPr>
-                      </m:dPr>
+                      </m:sSupPr>
                       <m:e>
                         <m:r>
                           <a:rPr lang="en-US" i="1">
@@ -14685,16 +14704,292 @@
                               <a:srgbClr val="0033CC"/>
                             </a:solidFill>
                             <a:latin typeface="Cambria Math" panose="02040503050406030204" pitchFamily="18" charset="0"/>
+                            <a:ea typeface="Cambria Math" panose="02040503050406030204" pitchFamily="18" charset="0"/>
                           </a:rPr>
-                          <m:t>0, 1</m:t>
+                          <m:t>𝜂</m:t>
                         </m:r>
+                      </m:e>
+                      <m:sup>
+                        <m:r>
+                          <a:rPr lang="en-US" i="1">
+                            <a:solidFill>
+                              <a:srgbClr val="0033CC"/>
+                            </a:solidFill>
+                            <a:latin typeface="Cambria Math" panose="02040503050406030204" pitchFamily="18" charset="0"/>
+                            <a:ea typeface="Cambria Math" panose="02040503050406030204" pitchFamily="18" charset="0"/>
+                          </a:rPr>
+                          <m:t>2</m:t>
+                        </m:r>
+                      </m:sup>
+                    </m:sSup>
+                    <m:r>
+                      <a:rPr lang="en-US" i="1">
+                        <a:solidFill>
+                          <a:srgbClr val="0033CC"/>
+                        </a:solidFill>
+                        <a:latin typeface="Cambria Math" panose="02040503050406030204" pitchFamily="18" charset="0"/>
+                        <a:ea typeface="Cambria Math" panose="02040503050406030204" pitchFamily="18" charset="0"/>
+                      </a:rPr>
+                      <m:t>)</m:t>
+                    </m:r>
+                  </m:oMath>
+                </a14:m>
+                <a:r>
+                  <a:rPr lang="en-US" dirty="0">
+                    <a:solidFill>
+                      <a:srgbClr val="0033CC"/>
+                    </a:solidFill>
+                  </a:rPr>
+                  <a:t> </a:t>
+                </a:r>
+                <a:r>
+                  <a:rPr lang="en-US" dirty="0"/>
+                  <a:t>can be neglected, and </a:t>
+                </a:r>
+              </a:p>
+              <a:p>
+                <a:pPr>
+                  <a:lnSpc>
+                    <a:spcPct val="90000"/>
+                  </a:lnSpc>
+                  <a:buFont typeface="Marlett" pitchFamily="26" charset="0"/>
+                  <a:buNone/>
+                </a:pPr>
+                <a:r>
+                  <a:rPr lang="en-US" dirty="0"/>
+                  <a:t>given that the </a:t>
+                </a:r>
+                <a14:m>
+                  <m:oMath xmlns:m="http://schemas.openxmlformats.org/officeDocument/2006/math">
+                    <m:r>
+                      <a:rPr lang="en-US" i="1">
+                        <a:solidFill>
+                          <a:srgbClr val="0033CC"/>
+                        </a:solidFill>
+                        <a:latin typeface="Cambria Math" panose="02040503050406030204" pitchFamily="18" charset="0"/>
+                        <a:ea typeface="Cambria Math" panose="02040503050406030204" pitchFamily="18" charset="0"/>
+                        <a:cs typeface="Cambria Math" charset="0"/>
+                      </a:rPr>
+                      <m:t>𝑂</m:t>
+                    </m:r>
+                    <m:r>
+                      <a:rPr lang="en-US" i="1">
+                        <a:solidFill>
+                          <a:srgbClr val="0033CC"/>
+                        </a:solidFill>
+                        <a:latin typeface="Cambria Math" panose="02040503050406030204" pitchFamily="18" charset="0"/>
+                        <a:ea typeface="Cambria Math" panose="02040503050406030204" pitchFamily="18" charset="0"/>
+                        <a:cs typeface="Cambria Math" charset="0"/>
+                      </a:rPr>
+                      <m:t>(</m:t>
+                    </m:r>
+                    <m:r>
+                      <a:rPr lang="en-US" i="1">
+                        <a:solidFill>
+                          <a:srgbClr val="0033CC"/>
+                        </a:solidFill>
+                        <a:latin typeface="Cambria Math" panose="02040503050406030204" pitchFamily="18" charset="0"/>
+                        <a:ea typeface="Cambria Math" panose="02040503050406030204" pitchFamily="18" charset="0"/>
+                        <a:cs typeface="Cambria Math" charset="0"/>
+                      </a:rPr>
+                      <m:t>𝜂</m:t>
+                    </m:r>
+                    <m:r>
+                      <a:rPr lang="en-US" i="1">
+                        <a:solidFill>
+                          <a:srgbClr val="0033CC"/>
+                        </a:solidFill>
+                        <a:latin typeface="Cambria Math" panose="02040503050406030204" pitchFamily="18" charset="0"/>
+                        <a:ea typeface="Cambria Math" panose="02040503050406030204" pitchFamily="18" charset="0"/>
+                      </a:rPr>
+                      <m:t>)</m:t>
+                    </m:r>
+                  </m:oMath>
+                </a14:m>
+                <a:r>
+                  <a:rPr lang="en-US" dirty="0">
+                    <a:solidFill>
+                      <a:srgbClr val="0033CC"/>
+                    </a:solidFill>
+                  </a:rPr>
+                  <a:t> </a:t>
+                </a:r>
+                <a:r>
+                  <a:rPr lang="en-US" dirty="0"/>
+                  <a:t>term is always</a:t>
+                </a:r>
+              </a:p>
+              <a:p>
+                <a:pPr>
+                  <a:lnSpc>
+                    <a:spcPct val="90000"/>
+                  </a:lnSpc>
+                  <a:buFont typeface="Marlett" pitchFamily="26" charset="0"/>
+                  <a:buNone/>
+                </a:pPr>
+                <a:r>
+                  <a:rPr lang="en-US" dirty="0"/>
+                  <a:t>negative, it follows that</a:t>
+                </a:r>
+              </a:p>
+              <a:p>
+                <a:pPr>
+                  <a:lnSpc>
+                    <a:spcPct val="90000"/>
+                  </a:lnSpc>
+                  <a:buFont typeface="Marlett" pitchFamily="26" charset="0"/>
+                  <a:buNone/>
+                </a:pPr>
+                <a:br>
+                  <a:rPr lang="en-US" dirty="0"/>
+                </a:br>
+                <a:r>
+                  <a:rPr lang="en-US" dirty="0"/>
+                  <a:t>	 </a:t>
+                </a:r>
+                <a14:m>
+                  <m:oMath xmlns:m="http://schemas.openxmlformats.org/officeDocument/2006/math">
+                    <m:r>
+                      <a:rPr lang="en-US" i="1">
+                        <a:latin typeface="Cambria Math" panose="02040503050406030204" pitchFamily="18" charset="0"/>
+                      </a:rPr>
+                      <m:t>𝑅</m:t>
+                    </m:r>
+                    <m:d>
+                      <m:dPr>
+                        <m:ctrlPr>
+                          <a:rPr lang="en-US" i="1">
+                            <a:solidFill>
+                              <a:srgbClr val="000000"/>
+                            </a:solidFill>
+                            <a:latin typeface="Cambria Math" panose="02040503050406030204" pitchFamily="18" charset="0"/>
+                            <a:ea typeface="Cambria Math" panose="02040503050406030204" pitchFamily="18" charset="0"/>
+                          </a:rPr>
+                        </m:ctrlPr>
+                      </m:dPr>
+                      <m:e>
+                        <m:sSub>
+                          <m:sSubPr>
+                            <m:ctrlPr>
+                              <a:rPr lang="en-US" i="1">
+                                <a:solidFill>
+                                  <a:srgbClr val="000000"/>
+                                </a:solidFill>
+                                <a:latin typeface="Cambria Math" panose="02040503050406030204" pitchFamily="18" charset="0"/>
+                                <a:ea typeface="Cambria Math" panose="02040503050406030204" pitchFamily="18" charset="0"/>
+                              </a:rPr>
+                            </m:ctrlPr>
+                          </m:sSubPr>
+                          <m:e>
+                            <m:r>
+                              <a:rPr lang="en-US" i="1">
+                                <a:solidFill>
+                                  <a:srgbClr val="000000"/>
+                                </a:solidFill>
+                                <a:latin typeface="Cambria Math" panose="02040503050406030204" pitchFamily="18" charset="0"/>
+                                <a:ea typeface="Cambria Math" panose="02040503050406030204" pitchFamily="18" charset="0"/>
+                              </a:rPr>
+                              <m:t>𝜔</m:t>
+                            </m:r>
+                          </m:e>
+                          <m:sub>
+                            <m:r>
+                              <a:rPr lang="en-US" i="1">
+                                <a:solidFill>
+                                  <a:srgbClr val="000000"/>
+                                </a:solidFill>
+                                <a:latin typeface="Cambria Math" panose="02040503050406030204" pitchFamily="18" charset="0"/>
+                                <a:ea typeface="Cambria Math" panose="02040503050406030204" pitchFamily="18" charset="0"/>
+                              </a:rPr>
+                              <m:t>𝑗</m:t>
+                            </m:r>
+                            <m:r>
+                              <a:rPr lang="en-US" i="1">
+                                <a:solidFill>
+                                  <a:srgbClr val="000000"/>
+                                </a:solidFill>
+                                <a:latin typeface="Cambria Math" panose="02040503050406030204" pitchFamily="18" charset="0"/>
+                                <a:ea typeface="Cambria Math" panose="02040503050406030204" pitchFamily="18" charset="0"/>
+                              </a:rPr>
+                              <m:t>+1</m:t>
+                            </m:r>
+                          </m:sub>
+                        </m:sSub>
+                      </m:e>
+                    </m:d>
+                    <m:r>
+                      <a:rPr lang="en-US">
+                        <a:solidFill>
+                          <a:srgbClr val="000000"/>
+                        </a:solidFill>
+                        <a:latin typeface="Cambria Math" panose="02040503050406030204" pitchFamily="18" charset="0"/>
+                        <a:ea typeface="Cambria Math" panose="02040503050406030204" pitchFamily="18" charset="0"/>
+                      </a:rPr>
+                      <m:t>&lt;</m:t>
+                    </m:r>
+                    <m:r>
+                      <a:rPr lang="en-US" i="1">
+                        <a:latin typeface="Cambria Math" panose="02040503050406030204" pitchFamily="18" charset="0"/>
+                      </a:rPr>
+                      <m:t>𝑅</m:t>
+                    </m:r>
+                    <m:d>
+                      <m:dPr>
+                        <m:ctrlPr>
+                          <a:rPr lang="en-US" i="1">
+                            <a:solidFill>
+                              <a:srgbClr val="000000"/>
+                            </a:solidFill>
+                            <a:latin typeface="Cambria Math" panose="02040503050406030204" pitchFamily="18" charset="0"/>
+                            <a:ea typeface="Cambria Math" panose="02040503050406030204" pitchFamily="18" charset="0"/>
+                          </a:rPr>
+                        </m:ctrlPr>
+                      </m:dPr>
+                      <m:e>
+                        <m:sSub>
+                          <m:sSubPr>
+                            <m:ctrlPr>
+                              <a:rPr lang="en-US" i="1">
+                                <a:solidFill>
+                                  <a:srgbClr val="000000"/>
+                                </a:solidFill>
+                                <a:latin typeface="Cambria Math" panose="02040503050406030204" pitchFamily="18" charset="0"/>
+                                <a:ea typeface="Cambria Math" panose="02040503050406030204" pitchFamily="18" charset="0"/>
+                              </a:rPr>
+                            </m:ctrlPr>
+                          </m:sSubPr>
+                          <m:e>
+                            <m:r>
+                              <a:rPr lang="en-US" i="1">
+                                <a:solidFill>
+                                  <a:srgbClr val="000000"/>
+                                </a:solidFill>
+                                <a:latin typeface="Cambria Math" panose="02040503050406030204" pitchFamily="18" charset="0"/>
+                                <a:ea typeface="Cambria Math" panose="02040503050406030204" pitchFamily="18" charset="0"/>
+                              </a:rPr>
+                              <m:t>𝜔</m:t>
+                            </m:r>
+                          </m:e>
+                          <m:sub>
+                            <m:r>
+                              <a:rPr lang="en-US" i="1">
+                                <a:solidFill>
+                                  <a:srgbClr val="000000"/>
+                                </a:solidFill>
+                                <a:latin typeface="Cambria Math" panose="02040503050406030204" pitchFamily="18" charset="0"/>
+                                <a:ea typeface="Cambria Math" panose="02040503050406030204" pitchFamily="18" charset="0"/>
+                              </a:rPr>
+                              <m:t>𝑗</m:t>
+                            </m:r>
+                          </m:sub>
+                        </m:sSub>
                       </m:e>
                     </m:d>
                   </m:oMath>
                 </a14:m>
                 <a:r>
                   <a:rPr lang="en-US" dirty="0"/>
-                  <a:t> this yields</a:t>
+                  <a:t>.</a:t>
                 </a:r>
               </a:p>
               <a:p>
@@ -14709,10 +15004,10 @@
         <mc:Fallback>
           <p:sp>
             <p:nvSpPr>
-              <p:cNvPr id="4" name="Content Placeholder 3">
+              <p:cNvPr id="2" name="Content Placeholder 1">
                 <a:extLst>
                   <a:ext uri="{FF2B5EF4-FFF2-40B4-BE49-F238E27FC236}">
-                    <a16:creationId xmlns:a16="http://schemas.microsoft.com/office/drawing/2014/main" id="{BCD71358-E7C4-4011-A59E-755828C26D73}"/>
+                    <a16:creationId xmlns:a16="http://schemas.microsoft.com/office/drawing/2014/main" id="{715839D9-08FB-02BE-91C0-05B1224A6521}"/>
                   </a:ext>
                 </a:extLst>
               </p:cNvPr>
@@ -14725,9 +15020,9 @@
             </p:nvSpPr>
             <p:spPr>
               <a:blipFill>
-                <a:blip r:embed="rId2"/>
+                <a:blip r:embed="rId3"/>
                 <a:stretch>
-                  <a:fillRect l="-1309" t="-1316" r="-491"/>
+                  <a:fillRect l="-1309" t="-1842" b="-1053"/>
                 </a:stretch>
               </a:blipFill>
             </p:spPr>
@@ -14751,7 +15046,7 @@
           <p:cNvPr id="3" name="Title 2">
             <a:extLst>
               <a:ext uri="{FF2B5EF4-FFF2-40B4-BE49-F238E27FC236}">
-                <a16:creationId xmlns:a16="http://schemas.microsoft.com/office/drawing/2014/main" id="{9159F6C5-C484-EC79-5C75-AB8B30630520}"/>
+                <a16:creationId xmlns:a16="http://schemas.microsoft.com/office/drawing/2014/main" id="{5B48CDEA-88F8-3CA5-B26A-0F384AAF6DAD}"/>
               </a:ext>
             </a:extLst>
           </p:cNvPr>
@@ -14769,248 +15064,15 @@
           <a:p>
             <a:r>
               <a:rPr lang="en-US" dirty="0"/>
-              <a:t>Binary Cross Entropy Loss (1)</a:t>
+              <a:t>Empirical Risk Minimization (2)</a:t>
             </a:r>
           </a:p>
         </p:txBody>
       </p:sp>
-      <mc:AlternateContent xmlns:mc="http://schemas.openxmlformats.org/markup-compatibility/2006">
-        <mc:Choice xmlns:a14="http://schemas.microsoft.com/office/drawing/2010/main" Requires="a14">
-          <p:sp>
-            <p:nvSpPr>
-              <p:cNvPr id="2" name="Text Box 6">
-                <a:extLst>
-                  <a:ext uri="{FF2B5EF4-FFF2-40B4-BE49-F238E27FC236}">
-                    <a16:creationId xmlns:a16="http://schemas.microsoft.com/office/drawing/2014/main" id="{A3808B84-E83B-8E89-855D-7F898634738C}"/>
-                  </a:ext>
-                </a:extLst>
-              </p:cNvPr>
-              <p:cNvSpPr txBox="1">
-                <a:spLocks noChangeArrowheads="1"/>
-              </p:cNvSpPr>
-              <p:nvPr/>
-            </p:nvSpPr>
-            <p:spPr bwMode="auto">
-              <a:xfrm>
-                <a:off x="2895600" y="5638800"/>
-                <a:ext cx="2741200" cy="461665"/>
-              </a:xfrm>
-              <a:prstGeom prst="rect">
-                <a:avLst/>
-              </a:prstGeom>
-              <a:solidFill>
-                <a:srgbClr val="FFFFCC"/>
-              </a:solidFill>
-              <a:ln w="38100">
-                <a:solidFill>
-                  <a:schemeClr val="accent1"/>
-                </a:solidFill>
-                <a:miter lim="800000"/>
-                <a:headEnd type="none" w="sm" len="sm"/>
-                <a:tailEnd type="none" w="sm" len="sm"/>
-              </a:ln>
-              <a:effectLst/>
-            </p:spPr>
-            <p:txBody>
-              <a:bodyPr wrap="none">
-                <a:prstTxWarp prst="textNoShape">
-                  <a:avLst/>
-                </a:prstTxWarp>
-                <a:spAutoFit/>
-              </a:bodyPr>
-              <a:lstStyle/>
-              <a:p>
-                <a:pPr/>
-                <a14:m>
-                  <m:oMathPara xmlns:m="http://schemas.openxmlformats.org/officeDocument/2006/math">
-                    <m:oMathParaPr>
-                      <m:jc m:val="left"/>
-                    </m:oMathParaPr>
-                    <m:oMath>
-                      <m:r>
-                        <a:rPr lang="en-US" i="1" dirty="0" smtClean="0">
-                          <a:latin typeface="Cambria Math" panose="02040503050406030204" pitchFamily="18" charset="0"/>
-                        </a:rPr>
-                        <m:t>𝑓</m:t>
-                      </m:r>
-                      <m:r>
-                        <a:rPr lang="en-US" i="1" dirty="0" smtClean="0">
-                          <a:latin typeface="Cambria Math" panose="02040503050406030204" pitchFamily="18" charset="0"/>
-                        </a:rPr>
-                        <m:t>(</m:t>
-                      </m:r>
-                      <m:r>
-                        <a:rPr lang="en-US" i="1" dirty="0" smtClean="0">
-                          <a:latin typeface="Cambria Math" panose="02040503050406030204" pitchFamily="18" charset="0"/>
-                        </a:rPr>
-                        <m:t>𝑥</m:t>
-                      </m:r>
-                      <m:r>
-                        <a:rPr lang="en-US" b="0" i="1" dirty="0" smtClean="0">
-                          <a:latin typeface="Cambria Math" panose="02040503050406030204" pitchFamily="18" charset="0"/>
-                        </a:rPr>
-                        <m:t>, </m:t>
-                      </m:r>
-                      <m:sSup>
-                        <m:sSupPr>
-                          <m:ctrlPr>
-                            <a:rPr lang="en-US" b="0" i="1" dirty="0" smtClean="0">
-                              <a:latin typeface="Cambria Math" panose="02040503050406030204" pitchFamily="18" charset="0"/>
-                            </a:rPr>
-                          </m:ctrlPr>
-                        </m:sSupPr>
-                        <m:e>
-                          <m:r>
-                            <a:rPr lang="en-US" b="0" i="1" dirty="0" smtClean="0">
-                              <a:latin typeface="Cambria Math" panose="02040503050406030204" pitchFamily="18" charset="0"/>
-                            </a:rPr>
-                            <m:t>𝜔</m:t>
-                          </m:r>
-                        </m:e>
-                        <m:sup>
-                          <m:r>
-                            <a:rPr lang="en-US" b="0" i="1" dirty="0" smtClean="0">
-                              <a:latin typeface="Cambria Math" panose="02040503050406030204" pitchFamily="18" charset="0"/>
-                            </a:rPr>
-                            <m:t>∗</m:t>
-                          </m:r>
-                        </m:sup>
-                      </m:sSup>
-                      <m:r>
-                        <a:rPr lang="en-US" i="1" dirty="0">
-                          <a:latin typeface="Cambria Math" panose="02040503050406030204" pitchFamily="18" charset="0"/>
-                        </a:rPr>
-                        <m:t>)</m:t>
-                      </m:r>
-                      <m:r>
-                        <a:rPr lang="en-US" i="1">
-                          <a:latin typeface="Cambria Math" panose="02040503050406030204" pitchFamily="18" charset="0"/>
-                        </a:rPr>
-                        <m:t>=</m:t>
-                      </m:r>
-                      <m:r>
-                        <a:rPr lang="en-US" b="0" i="1" smtClean="0">
-                          <a:latin typeface="Cambria Math" panose="02040503050406030204" pitchFamily="18" charset="0"/>
-                        </a:rPr>
-                        <m:t>𝑝</m:t>
-                      </m:r>
-                      <m:d>
-                        <m:dPr>
-                          <m:endChr m:val="|"/>
-                          <m:ctrlPr>
-                            <a:rPr lang="en-US" b="0" i="1" smtClean="0">
-                              <a:latin typeface="Cambria Math" panose="02040503050406030204" pitchFamily="18" charset="0"/>
-                            </a:rPr>
-                          </m:ctrlPr>
-                        </m:dPr>
-                        <m:e>
-                          <m:r>
-                            <a:rPr lang="en-US" b="0" i="1" smtClean="0">
-                              <a:latin typeface="Cambria Math" panose="02040503050406030204" pitchFamily="18" charset="0"/>
-                            </a:rPr>
-                            <m:t>1</m:t>
-                          </m:r>
-                          <m:r>
-                            <a:rPr lang="en-US" b="0" i="1" smtClean="0">
-                              <a:latin typeface="Cambria Math" panose="02040503050406030204" pitchFamily="18" charset="0"/>
-                            </a:rPr>
-                            <m:t> </m:t>
-                          </m:r>
-                        </m:e>
-                      </m:d>
-                      <m:r>
-                        <a:rPr lang="en-US" b="0" i="1" smtClean="0">
-                          <a:latin typeface="Cambria Math" panose="02040503050406030204" pitchFamily="18" charset="0"/>
-                        </a:rPr>
-                        <m:t> </m:t>
-                      </m:r>
-                      <m:r>
-                        <a:rPr lang="en-US" b="0" i="1" smtClean="0">
-                          <a:latin typeface="Cambria Math" panose="02040503050406030204" pitchFamily="18" charset="0"/>
-                        </a:rPr>
-                        <m:t>𝑥</m:t>
-                      </m:r>
-                      <m:r>
-                        <a:rPr lang="en-US" b="0" i="1" smtClean="0">
-                          <a:latin typeface="Cambria Math" panose="02040503050406030204" pitchFamily="18" charset="0"/>
-                        </a:rPr>
-                        <m:t>)</m:t>
-                      </m:r>
-                    </m:oMath>
-                  </m:oMathPara>
-                </a14:m>
-                <a:endParaRPr lang="en-US" dirty="0">
-                  <a:solidFill>
-                    <a:srgbClr val="0000FF"/>
-                  </a:solidFill>
-                  <a:effectLst>
-                    <a:outerShdw blurRad="38100" dist="38100" dir="2700000" algn="tl">
-                      <a:srgbClr val="DDDDDD"/>
-                    </a:outerShdw>
-                  </a:effectLst>
-                </a:endParaRPr>
-              </a:p>
-            </p:txBody>
-          </p:sp>
-        </mc:Choice>
-        <mc:Fallback>
-          <p:sp>
-            <p:nvSpPr>
-              <p:cNvPr id="2" name="Text Box 6">
-                <a:extLst>
-                  <a:ext uri="{FF2B5EF4-FFF2-40B4-BE49-F238E27FC236}">
-                    <a16:creationId xmlns:a16="http://schemas.microsoft.com/office/drawing/2014/main" id="{A3808B84-E83B-8E89-855D-7F898634738C}"/>
-                  </a:ext>
-                </a:extLst>
-              </p:cNvPr>
-              <p:cNvSpPr txBox="1">
-                <a:spLocks noRot="1" noChangeAspect="1" noMove="1" noResize="1" noEditPoints="1" noAdjustHandles="1" noChangeArrowheads="1" noChangeShapeType="1" noTextEdit="1"/>
-              </p:cNvSpPr>
-              <p:nvPr/>
-            </p:nvSpPr>
-            <p:spPr bwMode="auto">
-              <a:xfrm>
-                <a:off x="2895600" y="5638800"/>
-                <a:ext cx="2741200" cy="461665"/>
-              </a:xfrm>
-              <a:prstGeom prst="rect">
-                <a:avLst/>
-              </a:prstGeom>
-              <a:blipFill>
-                <a:blip r:embed="rId3"/>
-                <a:stretch>
-                  <a:fillRect l="-909" b="-17500"/>
-                </a:stretch>
-              </a:blipFill>
-              <a:ln w="38100">
-                <a:solidFill>
-                  <a:schemeClr val="accent1"/>
-                </a:solidFill>
-                <a:miter lim="800000"/>
-                <a:headEnd type="none" w="sm" len="sm"/>
-                <a:tailEnd type="none" w="sm" len="sm"/>
-              </a:ln>
-              <a:effectLst/>
-            </p:spPr>
-            <p:txBody>
-              <a:bodyPr/>
-              <a:lstStyle/>
-              <a:p>
-                <a:r>
-                  <a:rPr lang="en-US">
-                    <a:noFill/>
-                  </a:rPr>
-                  <a:t> </a:t>
-                </a:r>
-              </a:p>
-            </p:txBody>
-          </p:sp>
-        </mc:Fallback>
-      </mc:AlternateContent>
     </p:spTree>
     <p:extLst>
       <p:ext uri="{BB962C8B-B14F-4D97-AF65-F5344CB8AC3E}">
-        <p14:creationId xmlns:p14="http://schemas.microsoft.com/office/powerpoint/2010/main" val="2471689771"/>
+        <p14:creationId xmlns:p14="http://schemas.microsoft.com/office/powerpoint/2010/main" val="710313575"/>
       </p:ext>
     </p:extLst>
   </p:cSld>
@@ -15038,7 +15100,7 @@
                             </p:stCondLst>
                             <p:childTnLst>
                               <p:par>
-                                <p:cTn id="5" presetID="1" presetClass="entr" presetSubtype="0" fill="hold" nodeType="clickEffect">
+                                <p:cTn id="5" presetID="10" presetClass="entr" presetSubtype="0" fill="hold" nodeType="clickEffect">
                                   <p:stCondLst>
                                     <p:cond delay="0"/>
                                   </p:stCondLst>
@@ -15051,7 +15113,7 @@
                                           </p:stCondLst>
                                         </p:cTn>
                                         <p:tgtEl>
-                                          <p:spTgt spid="4">
+                                          <p:spTgt spid="2">
                                             <p:txEl>
                                               <p:pRg st="3" end="3"/>
                                             </p:txEl>
@@ -15065,42 +15127,36 @@
                                         <p:strVal val="visible"/>
                                       </p:to>
                                     </p:set>
+                                    <p:animEffect transition="in" filter="fade">
+                                      <p:cBhvr>
+                                        <p:cTn id="7" dur="500"/>
+                                        <p:tgtEl>
+                                          <p:spTgt spid="2">
+                                            <p:txEl>
+                                              <p:pRg st="3" end="3"/>
+                                            </p:txEl>
+                                          </p:spTgt>
+                                        </p:tgtEl>
+                                      </p:cBhvr>
+                                    </p:animEffect>
                                   </p:childTnLst>
                                 </p:cTn>
                               </p:par>
-                            </p:childTnLst>
-                          </p:cTn>
-                        </p:par>
-                      </p:childTnLst>
-                    </p:cTn>
-                  </p:par>
-                  <p:par>
-                    <p:cTn id="7" fill="hold">
-                      <p:stCondLst>
-                        <p:cond delay="indefinite"/>
-                      </p:stCondLst>
-                      <p:childTnLst>
-                        <p:par>
-                          <p:cTn id="8" fill="hold">
-                            <p:stCondLst>
-                              <p:cond delay="0"/>
-                            </p:stCondLst>
-                            <p:childTnLst>
                               <p:par>
-                                <p:cTn id="9" presetID="1" presetClass="entr" presetSubtype="0" fill="hold" nodeType="clickEffect">
+                                <p:cTn id="8" presetID="10" presetClass="entr" presetSubtype="0" fill="hold" nodeType="withEffect">
                                   <p:stCondLst>
                                     <p:cond delay="0"/>
                                   </p:stCondLst>
                                   <p:childTnLst>
                                     <p:set>
                                       <p:cBhvr>
-                                        <p:cTn id="10" dur="1" fill="hold">
+                                        <p:cTn id="9" dur="1" fill="hold">
                                           <p:stCondLst>
                                             <p:cond delay="0"/>
                                           </p:stCondLst>
                                         </p:cTn>
                                         <p:tgtEl>
-                                          <p:spTgt spid="4">
+                                          <p:spTgt spid="2">
                                             <p:txEl>
                                               <p:pRg st="4" end="4"/>
                                             </p:txEl>
@@ -15114,11 +15170,23 @@
                                         <p:strVal val="visible"/>
                                       </p:to>
                                     </p:set>
+                                    <p:animEffect transition="in" filter="fade">
+                                      <p:cBhvr>
+                                        <p:cTn id="10" dur="500"/>
+                                        <p:tgtEl>
+                                          <p:spTgt spid="2">
+                                            <p:txEl>
+                                              <p:pRg st="4" end="4"/>
+                                            </p:txEl>
+                                          </p:spTgt>
+                                        </p:tgtEl>
+                                      </p:cBhvr>
+                                    </p:animEffect>
                                   </p:childTnLst>
                                 </p:cTn>
                               </p:par>
                               <p:par>
-                                <p:cTn id="11" presetID="1" presetClass="entr" presetSubtype="0" fill="hold" nodeType="withEffect">
+                                <p:cTn id="11" presetID="10" presetClass="entr" presetSubtype="0" fill="hold" nodeType="withEffect">
                                   <p:stCondLst>
                                     <p:cond delay="0"/>
                                   </p:stCondLst>
@@ -15131,7 +15199,7 @@
                                           </p:stCondLst>
                                         </p:cTn>
                                         <p:tgtEl>
-                                          <p:spTgt spid="4">
+                                          <p:spTgt spid="2">
                                             <p:txEl>
                                               <p:pRg st="5" end="5"/>
                                             </p:txEl>
@@ -15145,6 +15213,18 @@
                                         <p:strVal val="visible"/>
                                       </p:to>
                                     </p:set>
+                                    <p:animEffect transition="in" filter="fade">
+                                      <p:cBhvr>
+                                        <p:cTn id="13" dur="500"/>
+                                        <p:tgtEl>
+                                          <p:spTgt spid="2">
+                                            <p:txEl>
+                                              <p:pRg st="5" end="5"/>
+                                            </p:txEl>
+                                          </p:spTgt>
+                                        </p:tgtEl>
+                                      </p:cBhvr>
+                                    </p:animEffect>
                                   </p:childTnLst>
                                 </p:cTn>
                               </p:par>
@@ -15155,32 +15235,32 @@
                     </p:cTn>
                   </p:par>
                   <p:par>
-                    <p:cTn id="13" fill="hold">
+                    <p:cTn id="14" fill="hold">
                       <p:stCondLst>
                         <p:cond delay="indefinite"/>
                       </p:stCondLst>
                       <p:childTnLst>
                         <p:par>
-                          <p:cTn id="14" fill="hold">
+                          <p:cTn id="15" fill="hold">
                             <p:stCondLst>
                               <p:cond delay="0"/>
                             </p:stCondLst>
                             <p:childTnLst>
                               <p:par>
-                                <p:cTn id="15" presetID="1" presetClass="entr" presetSubtype="0" fill="hold" nodeType="clickEffect">
+                                <p:cTn id="16" presetID="10" presetClass="entr" presetSubtype="0" fill="hold" nodeType="clickEffect">
                                   <p:stCondLst>
                                     <p:cond delay="0"/>
                                   </p:stCondLst>
                                   <p:childTnLst>
                                     <p:set>
                                       <p:cBhvr>
-                                        <p:cTn id="16" dur="1" fill="hold">
+                                        <p:cTn id="17" dur="1" fill="hold">
                                           <p:stCondLst>
                                             <p:cond delay="0"/>
                                           </p:stCondLst>
                                         </p:cTn>
                                         <p:tgtEl>
-                                          <p:spTgt spid="4">
+                                          <p:spTgt spid="2">
                                             <p:txEl>
                                               <p:pRg st="7" end="7"/>
                                             </p:txEl>
@@ -15194,2250 +15274,23 @@
                                         <p:strVal val="visible"/>
                                       </p:to>
                                     </p:set>
-                                  </p:childTnLst>
-                                </p:cTn>
-                              </p:par>
-                              <p:par>
-                                <p:cTn id="17" presetID="10" presetClass="entr" presetSubtype="0" fill="hold" grpId="1" nodeType="withEffect">
-                                  <p:stCondLst>
-                                    <p:cond delay="0"/>
-                                  </p:stCondLst>
-                                  <p:childTnLst>
-                                    <p:set>
-                                      <p:cBhvr>
-                                        <p:cTn id="18" dur="1" fill="hold">
-                                          <p:stCondLst>
-                                            <p:cond delay="0"/>
-                                          </p:stCondLst>
-                                        </p:cTn>
-                                        <p:tgtEl>
-                                          <p:spTgt spid="2"/>
-                                        </p:tgtEl>
-                                        <p:attrNameLst>
-                                          <p:attrName>style.visibility</p:attrName>
-                                        </p:attrNameLst>
-                                      </p:cBhvr>
-                                      <p:to>
-                                        <p:strVal val="visible"/>
-                                      </p:to>
-                                    </p:set>
                                     <p:animEffect transition="in" filter="fade">
                                       <p:cBhvr>
-                                        <p:cTn id="19" dur="500"/>
+                                        <p:cTn id="18" dur="500"/>
                                         <p:tgtEl>
-                                          <p:spTgt spid="2"/>
+                                          <p:spTgt spid="2">
+                                            <p:txEl>
+                                              <p:pRg st="7" end="7"/>
+                                            </p:txEl>
+                                          </p:spTgt>
                                         </p:tgtEl>
                                       </p:cBhvr>
                                     </p:animEffect>
                                   </p:childTnLst>
                                 </p:cTn>
                               </p:par>
-                            </p:childTnLst>
-                          </p:cTn>
-                        </p:par>
-                      </p:childTnLst>
-                    </p:cTn>
-                  </p:par>
-                </p:childTnLst>
-              </p:cTn>
-              <p:prevCondLst>
-                <p:cond evt="onPrev" delay="0">
-                  <p:tgtEl>
-                    <p:sldTgt/>
-                  </p:tgtEl>
-                </p:cond>
-              </p:prevCondLst>
-              <p:nextCondLst>
-                <p:cond evt="onNext" delay="0">
-                  <p:tgtEl>
-                    <p:sldTgt/>
-                  </p:tgtEl>
-                </p:cond>
-              </p:nextCondLst>
-            </p:seq>
-          </p:childTnLst>
-        </p:cTn>
-      </p:par>
-    </p:tnLst>
-    <p:bldLst>
-      <p:bldP spid="2" grpId="1" animBg="1"/>
-    </p:bldLst>
-  </p:timing>
-</p:sld>
-</file>
-
-<file path=ppt/slides/slide21.xml><?xml version="1.0" encoding="utf-8"?>
-<p:sld xmlns:a="http://schemas.openxmlformats.org/drawingml/2006/main" xmlns:r="http://schemas.openxmlformats.org/officeDocument/2006/relationships" xmlns:p="http://schemas.openxmlformats.org/presentationml/2006/main">
-  <p:cSld>
-    <p:spTree>
-      <p:nvGrpSpPr>
-        <p:cNvPr id="1" name="">
-          <a:extLst>
-            <a:ext uri="{FF2B5EF4-FFF2-40B4-BE49-F238E27FC236}">
-              <a16:creationId xmlns:a16="http://schemas.microsoft.com/office/drawing/2014/main" id="{6319EFD6-8AF9-3AC0-A772-0C5780E4E81E}"/>
-            </a:ext>
-          </a:extLst>
-        </p:cNvPr>
-        <p:cNvGrpSpPr/>
-        <p:nvPr/>
-      </p:nvGrpSpPr>
-      <p:grpSpPr>
-        <a:xfrm>
-          <a:off x="0" y="0"/>
-          <a:ext cx="0" cy="0"/>
-          <a:chOff x="0" y="0"/>
-          <a:chExt cx="0" cy="0"/>
-        </a:xfrm>
-      </p:grpSpPr>
-      <mc:AlternateContent xmlns:mc="http://schemas.openxmlformats.org/markup-compatibility/2006">
-        <mc:Choice xmlns:a14="http://schemas.microsoft.com/office/drawing/2010/main" Requires="a14">
-          <p:sp>
-            <p:nvSpPr>
-              <p:cNvPr id="4" name="Content Placeholder 3">
-                <a:extLst>
-                  <a:ext uri="{FF2B5EF4-FFF2-40B4-BE49-F238E27FC236}">
-                    <a16:creationId xmlns:a16="http://schemas.microsoft.com/office/drawing/2014/main" id="{CA5FF234-6F7F-A2E8-4C2B-8C41E7CF3A52}"/>
-                  </a:ext>
-                </a:extLst>
-              </p:cNvPr>
-              <p:cNvSpPr>
-                <a:spLocks noGrp="1"/>
-              </p:cNvSpPr>
-              <p:nvPr>
-                <p:ph sz="half" idx="1"/>
-              </p:nvPr>
-            </p:nvSpPr>
-            <p:spPr/>
-            <p:txBody>
-              <a:bodyPr/>
-              <a:lstStyle/>
-              <a:p>
-                <a:pPr marL="0" indent="0">
-                  <a:buNone/>
-                </a:pPr>
-                <a:r>
-                  <a:rPr lang="en-US" dirty="0"/>
-                  <a:t>According to Bayes’ theorem</a:t>
-                </a:r>
-              </a:p>
-              <a:p>
-                <a:pPr marL="0" indent="0">
-                  <a:buNone/>
-                </a:pPr>
-                <a14:m>
-                  <m:oMathPara xmlns:m="http://schemas.openxmlformats.org/officeDocument/2006/math">
-                    <m:oMath>
-                      <m:r>
-                        <a:rPr lang="en-US" i="1" dirty="0">
-                          <a:latin typeface="Cambria Math" panose="02040503050406030204" pitchFamily="18" charset="0"/>
-                        </a:rPr>
-                        <m:t>𝑓</m:t>
-                      </m:r>
-                      <m:d>
-                        <m:dPr>
-                          <m:ctrlPr>
-                            <a:rPr lang="en-US" i="1" dirty="0">
-                              <a:latin typeface="Cambria Math" panose="02040503050406030204" pitchFamily="18" charset="0"/>
-                            </a:rPr>
-                          </m:ctrlPr>
-                        </m:dPr>
-                        <m:e>
-                          <m:r>
-                            <a:rPr lang="en-US" i="1" dirty="0">
-                              <a:latin typeface="Cambria Math" panose="02040503050406030204" pitchFamily="18" charset="0"/>
-                            </a:rPr>
-                            <m:t>𝑥</m:t>
-                          </m:r>
-                          <m:r>
-                            <a:rPr lang="en-US" i="1" dirty="0">
-                              <a:latin typeface="Cambria Math" panose="02040503050406030204" pitchFamily="18" charset="0"/>
-                            </a:rPr>
-                            <m:t>, </m:t>
-                          </m:r>
-                          <m:sSup>
-                            <m:sSupPr>
-                              <m:ctrlPr>
-                                <a:rPr lang="en-US" i="1" dirty="0">
-                                  <a:latin typeface="Cambria Math" panose="02040503050406030204" pitchFamily="18" charset="0"/>
-                                </a:rPr>
-                              </m:ctrlPr>
-                            </m:sSupPr>
-                            <m:e>
-                              <m:r>
-                                <a:rPr lang="en-US" i="1" dirty="0">
-                                  <a:latin typeface="Cambria Math" panose="02040503050406030204" pitchFamily="18" charset="0"/>
-                                </a:rPr>
-                                <m:t>𝜔</m:t>
-                              </m:r>
-                            </m:e>
-                            <m:sup>
-                              <m:r>
-                                <a:rPr lang="en-US" i="1" dirty="0">
-                                  <a:latin typeface="Cambria Math" panose="02040503050406030204" pitchFamily="18" charset="0"/>
-                                </a:rPr>
-                                <m:t>∗</m:t>
-                              </m:r>
-                            </m:sup>
-                          </m:sSup>
-                        </m:e>
-                      </m:d>
-                      <m:r>
-                        <a:rPr lang="en-US" i="1">
-                          <a:latin typeface="Cambria Math" panose="02040503050406030204" pitchFamily="18" charset="0"/>
-                        </a:rPr>
-                        <m:t>=</m:t>
-                      </m:r>
-                      <m:r>
-                        <a:rPr lang="en-US" i="1" smtClean="0">
-                          <a:solidFill>
-                            <a:srgbClr val="0033CC"/>
-                          </a:solidFill>
-                          <a:latin typeface="Cambria Math" panose="02040503050406030204" pitchFamily="18" charset="0"/>
-                        </a:rPr>
-                        <m:t>𝑝</m:t>
-                      </m:r>
-                      <m:d>
-                        <m:dPr>
-                          <m:ctrlPr>
-                            <a:rPr lang="en-US" i="1">
-                              <a:solidFill>
-                                <a:srgbClr val="0033CC"/>
-                              </a:solidFill>
-                              <a:latin typeface="Cambria Math" panose="02040503050406030204" pitchFamily="18" charset="0"/>
-                            </a:rPr>
-                          </m:ctrlPr>
-                        </m:dPr>
-                        <m:e>
-                          <m:r>
-                            <a:rPr lang="en-US" i="1">
-                              <a:solidFill>
-                                <a:srgbClr val="0033CC"/>
-                              </a:solidFill>
-                              <a:latin typeface="Cambria Math" panose="02040503050406030204" pitchFamily="18" charset="0"/>
-                            </a:rPr>
-                            <m:t>1</m:t>
-                          </m:r>
-                        </m:e>
-                        <m:e>
-                          <m:r>
-                            <a:rPr lang="en-US" b="0" i="1" smtClean="0">
-                              <a:solidFill>
-                                <a:srgbClr val="0033CC"/>
-                              </a:solidFill>
-                              <a:latin typeface="Cambria Math" panose="02040503050406030204" pitchFamily="18" charset="0"/>
-                            </a:rPr>
-                            <m:t> </m:t>
-                          </m:r>
-                          <m:r>
-                            <a:rPr lang="en-US" i="1">
-                              <a:solidFill>
-                                <a:srgbClr val="0033CC"/>
-                              </a:solidFill>
-                              <a:latin typeface="Cambria Math" panose="02040503050406030204" pitchFamily="18" charset="0"/>
-                            </a:rPr>
-                            <m:t>𝑥</m:t>
-                          </m:r>
-                        </m:e>
-                      </m:d>
-                      <m:r>
-                        <a:rPr lang="en-US" b="0" i="1" smtClean="0">
-                          <a:solidFill>
-                            <a:srgbClr val="0033CC"/>
-                          </a:solidFill>
-                          <a:latin typeface="Cambria Math" panose="02040503050406030204" pitchFamily="18" charset="0"/>
-                        </a:rPr>
-                        <m:t>=</m:t>
-                      </m:r>
-                      <m:f>
-                        <m:fPr>
-                          <m:ctrlPr>
-                            <a:rPr lang="en-US" b="0" i="1" smtClean="0">
-                              <a:solidFill>
-                                <a:srgbClr val="0033CC"/>
-                              </a:solidFill>
-                              <a:latin typeface="Cambria Math" panose="02040503050406030204" pitchFamily="18" charset="0"/>
-                            </a:rPr>
-                          </m:ctrlPr>
-                        </m:fPr>
-                        <m:num>
-                          <m:r>
-                            <a:rPr lang="en-US" b="0" i="1" smtClean="0">
-                              <a:solidFill>
-                                <a:srgbClr val="0033CC"/>
-                              </a:solidFill>
-                              <a:latin typeface="Cambria Math" panose="02040503050406030204" pitchFamily="18" charset="0"/>
-                            </a:rPr>
-                            <m:t>𝑝</m:t>
-                          </m:r>
-                          <m:d>
-                            <m:dPr>
-                              <m:ctrlPr>
-                                <a:rPr lang="en-US" b="0" i="1" smtClean="0">
-                                  <a:solidFill>
-                                    <a:srgbClr val="0033CC"/>
-                                  </a:solidFill>
-                                  <a:latin typeface="Cambria Math" panose="02040503050406030204" pitchFamily="18" charset="0"/>
-                                </a:rPr>
-                              </m:ctrlPr>
-                            </m:dPr>
-                            <m:e>
-                              <m:r>
-                                <a:rPr lang="en-US" b="0" i="1" smtClean="0">
-                                  <a:solidFill>
-                                    <a:srgbClr val="0033CC"/>
-                                  </a:solidFill>
-                                  <a:latin typeface="Cambria Math" panose="02040503050406030204" pitchFamily="18" charset="0"/>
-                                </a:rPr>
-                                <m:t>𝑥</m:t>
-                              </m:r>
-                              <m:r>
-                                <a:rPr lang="en-US" b="0" i="1" smtClean="0">
-                                  <a:solidFill>
-                                    <a:srgbClr val="0033CC"/>
-                                  </a:solidFill>
-                                  <a:latin typeface="Cambria Math" panose="02040503050406030204" pitchFamily="18" charset="0"/>
-                                </a:rPr>
-                                <m:t> </m:t>
-                              </m:r>
-                            </m:e>
-                            <m:e>
-                              <m:r>
-                                <a:rPr lang="en-US" b="0" i="1" smtClean="0">
-                                  <a:solidFill>
-                                    <a:srgbClr val="0033CC"/>
-                                  </a:solidFill>
-                                  <a:latin typeface="Cambria Math" panose="02040503050406030204" pitchFamily="18" charset="0"/>
-                                </a:rPr>
-                                <m:t> </m:t>
-                              </m:r>
-                              <m:r>
-                                <a:rPr lang="en-US" b="0" i="1" smtClean="0">
-                                  <a:solidFill>
-                                    <a:srgbClr val="0033CC"/>
-                                  </a:solidFill>
-                                  <a:latin typeface="Cambria Math" panose="02040503050406030204" pitchFamily="18" charset="0"/>
-                                </a:rPr>
-                                <m:t>1</m:t>
-                              </m:r>
-                            </m:e>
-                          </m:d>
-                          <m:r>
-                            <a:rPr lang="en-US" b="0" i="1" smtClean="0">
-                              <a:solidFill>
-                                <a:srgbClr val="0033CC"/>
-                              </a:solidFill>
-                              <a:latin typeface="Cambria Math" panose="02040503050406030204" pitchFamily="18" charset="0"/>
-                            </a:rPr>
-                            <m:t> </m:t>
-                          </m:r>
-                          <m:r>
-                            <a:rPr lang="en-US" b="0" i="1" smtClean="0">
-                              <a:solidFill>
-                                <a:srgbClr val="0033CC"/>
-                              </a:solidFill>
-                              <a:latin typeface="Cambria Math" panose="02040503050406030204" pitchFamily="18" charset="0"/>
-                            </a:rPr>
-                            <m:t>𝜋</m:t>
-                          </m:r>
-                          <m:r>
-                            <a:rPr lang="en-US" b="0" i="1" smtClean="0">
-                              <a:solidFill>
-                                <a:srgbClr val="0033CC"/>
-                              </a:solidFill>
-                              <a:latin typeface="Cambria Math" panose="02040503050406030204" pitchFamily="18" charset="0"/>
-                            </a:rPr>
-                            <m:t>(1)</m:t>
-                          </m:r>
-                        </m:num>
-                        <m:den>
-                          <m:r>
-                            <a:rPr lang="en-US" b="0" i="1" smtClean="0">
-                              <a:solidFill>
-                                <a:srgbClr val="0033CC"/>
-                              </a:solidFill>
-                              <a:latin typeface="Cambria Math" panose="02040503050406030204" pitchFamily="18" charset="0"/>
-                            </a:rPr>
-                            <m:t>𝑝</m:t>
-                          </m:r>
-                          <m:r>
-                            <a:rPr lang="en-US" b="0" i="1" smtClean="0">
-                              <a:solidFill>
-                                <a:srgbClr val="0033CC"/>
-                              </a:solidFill>
-                              <a:latin typeface="Cambria Math" panose="02040503050406030204" pitchFamily="18" charset="0"/>
-                            </a:rPr>
-                            <m:t>(</m:t>
-                          </m:r>
-                          <m:r>
-                            <a:rPr lang="en-US" b="0" i="1" smtClean="0">
-                              <a:solidFill>
-                                <a:srgbClr val="0033CC"/>
-                              </a:solidFill>
-                              <a:latin typeface="Cambria Math" panose="02040503050406030204" pitchFamily="18" charset="0"/>
-                            </a:rPr>
-                            <m:t>𝑥</m:t>
-                          </m:r>
-                          <m:r>
-                            <a:rPr lang="en-US" b="0" i="1" smtClean="0">
-                              <a:solidFill>
-                                <a:srgbClr val="0033CC"/>
-                              </a:solidFill>
-                              <a:latin typeface="Cambria Math" panose="02040503050406030204" pitchFamily="18" charset="0"/>
-                            </a:rPr>
-                            <m:t>)</m:t>
-                          </m:r>
-                        </m:den>
-                      </m:f>
-                    </m:oMath>
-                  </m:oMathPara>
-                </a14:m>
-                <a:br>
-                  <a:rPr lang="en-US" dirty="0">
-                    <a:effectLst>
-                      <a:outerShdw blurRad="38100" dist="38100" dir="2700000" algn="tl">
-                        <a:srgbClr val="DDDDDD"/>
-                      </a:outerShdw>
-                    </a:effectLst>
-                  </a:rPr>
-                </a:br>
-                <a:endParaRPr lang="en-US" dirty="0">
-                  <a:latin typeface="+mn-lt"/>
-                </a:endParaRPr>
-              </a:p>
-              <a:p>
-                <a:pPr marL="0" indent="0">
-                  <a:buNone/>
-                </a:pPr>
-                <a:r>
-                  <a:rPr lang="en-US" dirty="0">
-                    <a:latin typeface="+mn-lt"/>
-                  </a:rPr>
-                  <a:t>with </a:t>
-                </a:r>
-                <a14:m>
-                  <m:oMath xmlns:m="http://schemas.openxmlformats.org/officeDocument/2006/math">
-                    <m:r>
-                      <a:rPr lang="en-US" b="0" i="1" smtClean="0">
-                        <a:solidFill>
-                          <a:srgbClr val="0033CC"/>
-                        </a:solidFill>
-                        <a:latin typeface="Cambria Math" panose="02040503050406030204" pitchFamily="18" charset="0"/>
-                      </a:rPr>
-                      <m:t>𝑝</m:t>
-                    </m:r>
-                    <m:d>
-                      <m:dPr>
-                        <m:ctrlPr>
-                          <a:rPr lang="en-US" b="0" i="1" smtClean="0">
-                            <a:solidFill>
-                              <a:srgbClr val="0033CC"/>
-                            </a:solidFill>
-                            <a:latin typeface="Cambria Math" panose="02040503050406030204" pitchFamily="18" charset="0"/>
-                          </a:rPr>
-                        </m:ctrlPr>
-                      </m:dPr>
-                      <m:e>
-                        <m:r>
-                          <a:rPr lang="en-US" b="0" i="1" smtClean="0">
-                            <a:solidFill>
-                              <a:srgbClr val="0033CC"/>
-                            </a:solidFill>
-                            <a:latin typeface="Cambria Math" panose="02040503050406030204" pitchFamily="18" charset="0"/>
-                          </a:rPr>
-                          <m:t>𝑥</m:t>
-                        </m:r>
-                      </m:e>
-                    </m:d>
-                    <m:r>
-                      <a:rPr lang="en-US" b="0" i="1" smtClean="0">
-                        <a:solidFill>
-                          <a:srgbClr val="0033CC"/>
-                        </a:solidFill>
-                        <a:latin typeface="Cambria Math" panose="02040503050406030204" pitchFamily="18" charset="0"/>
-                      </a:rPr>
-                      <m:t>=</m:t>
-                    </m:r>
-                    <m:r>
-                      <a:rPr lang="en-US" i="1">
-                        <a:solidFill>
-                          <a:srgbClr val="0033CC"/>
-                        </a:solidFill>
-                        <a:latin typeface="Cambria Math" panose="02040503050406030204" pitchFamily="18" charset="0"/>
-                      </a:rPr>
-                      <m:t>𝑝</m:t>
-                    </m:r>
-                    <m:d>
-                      <m:dPr>
-                        <m:ctrlPr>
-                          <a:rPr lang="en-US" i="1">
-                            <a:solidFill>
-                              <a:srgbClr val="0033CC"/>
-                            </a:solidFill>
-                            <a:latin typeface="Cambria Math" panose="02040503050406030204" pitchFamily="18" charset="0"/>
-                          </a:rPr>
-                        </m:ctrlPr>
-                      </m:dPr>
-                      <m:e>
-                        <m:r>
-                          <a:rPr lang="en-US" i="1">
-                            <a:solidFill>
-                              <a:srgbClr val="0033CC"/>
-                            </a:solidFill>
-                            <a:latin typeface="Cambria Math" panose="02040503050406030204" pitchFamily="18" charset="0"/>
-                          </a:rPr>
-                          <m:t>𝑥</m:t>
-                        </m:r>
-                      </m:e>
-                      <m:e>
-                        <m:r>
-                          <a:rPr lang="en-US" i="1">
-                            <a:solidFill>
-                              <a:srgbClr val="0033CC"/>
-                            </a:solidFill>
-                            <a:latin typeface="Cambria Math" panose="02040503050406030204" pitchFamily="18" charset="0"/>
-                          </a:rPr>
-                          <m:t>1 </m:t>
-                        </m:r>
-                      </m:e>
-                    </m:d>
-                    <m:r>
-                      <a:rPr lang="en-US" i="1">
-                        <a:solidFill>
-                          <a:srgbClr val="0033CC"/>
-                        </a:solidFill>
-                        <a:latin typeface="Cambria Math" panose="02040503050406030204" pitchFamily="18" charset="0"/>
-                      </a:rPr>
-                      <m:t> </m:t>
-                    </m:r>
-                    <m:r>
-                      <a:rPr lang="en-US" i="1">
-                        <a:solidFill>
-                          <a:srgbClr val="0033CC"/>
-                        </a:solidFill>
-                        <a:latin typeface="Cambria Math" panose="02040503050406030204" pitchFamily="18" charset="0"/>
-                      </a:rPr>
-                      <m:t>𝜋</m:t>
-                    </m:r>
-                    <m:d>
-                      <m:dPr>
-                        <m:ctrlPr>
-                          <a:rPr lang="en-US" i="1">
-                            <a:solidFill>
-                              <a:srgbClr val="0033CC"/>
-                            </a:solidFill>
-                            <a:latin typeface="Cambria Math" panose="02040503050406030204" pitchFamily="18" charset="0"/>
-                          </a:rPr>
-                        </m:ctrlPr>
-                      </m:dPr>
-                      <m:e>
-                        <m:r>
-                          <a:rPr lang="en-US" i="1">
-                            <a:solidFill>
-                              <a:srgbClr val="0033CC"/>
-                            </a:solidFill>
-                            <a:latin typeface="Cambria Math" panose="02040503050406030204" pitchFamily="18" charset="0"/>
-                          </a:rPr>
-                          <m:t>1</m:t>
-                        </m:r>
-                      </m:e>
-                    </m:d>
-                    <m:r>
-                      <a:rPr lang="en-US" i="1">
-                        <a:solidFill>
-                          <a:srgbClr val="0033CC"/>
-                        </a:solidFill>
-                        <a:latin typeface="Cambria Math" panose="02040503050406030204" pitchFamily="18" charset="0"/>
-                      </a:rPr>
-                      <m:t>+</m:t>
-                    </m:r>
-                    <m:r>
-                      <a:rPr lang="en-US" i="1">
-                        <a:solidFill>
-                          <a:srgbClr val="0033CC"/>
-                        </a:solidFill>
-                        <a:latin typeface="Cambria Math" panose="02040503050406030204" pitchFamily="18" charset="0"/>
-                      </a:rPr>
-                      <m:t>𝑝</m:t>
-                    </m:r>
-                    <m:d>
-                      <m:dPr>
-                        <m:ctrlPr>
-                          <a:rPr lang="en-US" i="1">
-                            <a:solidFill>
-                              <a:srgbClr val="0033CC"/>
-                            </a:solidFill>
-                            <a:latin typeface="Cambria Math" panose="02040503050406030204" pitchFamily="18" charset="0"/>
-                          </a:rPr>
-                        </m:ctrlPr>
-                      </m:dPr>
-                      <m:e>
-                        <m:r>
-                          <a:rPr lang="en-US" i="1">
-                            <a:solidFill>
-                              <a:srgbClr val="0033CC"/>
-                            </a:solidFill>
-                            <a:latin typeface="Cambria Math" panose="02040503050406030204" pitchFamily="18" charset="0"/>
-                          </a:rPr>
-                          <m:t>𝑥</m:t>
-                        </m:r>
-                      </m:e>
-                      <m:e>
-                        <m:r>
-                          <a:rPr lang="en-US" i="1">
-                            <a:solidFill>
-                              <a:srgbClr val="0033CC"/>
-                            </a:solidFill>
-                            <a:latin typeface="Cambria Math" panose="02040503050406030204" pitchFamily="18" charset="0"/>
-                          </a:rPr>
-                          <m:t>0 </m:t>
-                        </m:r>
-                      </m:e>
-                    </m:d>
-                    <m:r>
-                      <a:rPr lang="en-US" i="1">
-                        <a:solidFill>
-                          <a:srgbClr val="0033CC"/>
-                        </a:solidFill>
-                        <a:latin typeface="Cambria Math" panose="02040503050406030204" pitchFamily="18" charset="0"/>
-                      </a:rPr>
-                      <m:t> </m:t>
-                    </m:r>
-                    <m:r>
-                      <a:rPr lang="en-US" i="1">
-                        <a:solidFill>
-                          <a:srgbClr val="0033CC"/>
-                        </a:solidFill>
-                        <a:latin typeface="Cambria Math" panose="02040503050406030204" pitchFamily="18" charset="0"/>
-                      </a:rPr>
-                      <m:t>𝜋</m:t>
-                    </m:r>
-                    <m:r>
-                      <a:rPr lang="en-US" i="1">
-                        <a:solidFill>
-                          <a:srgbClr val="0033CC"/>
-                        </a:solidFill>
-                        <a:latin typeface="Cambria Math" panose="02040503050406030204" pitchFamily="18" charset="0"/>
-                      </a:rPr>
-                      <m:t>(0)</m:t>
-                    </m:r>
-                  </m:oMath>
-                </a14:m>
-                <a:r>
-                  <a:rPr lang="en-US" dirty="0">
-                    <a:ea typeface="Cambria Math" panose="02040503050406030204" pitchFamily="18" charset="0"/>
-                  </a:rPr>
-                  <a:t>. </a:t>
-                </a:r>
-                <a:br>
-                  <a:rPr lang="en-US" dirty="0">
-                    <a:ea typeface="Cambria Math" panose="02040503050406030204" pitchFamily="18" charset="0"/>
-                  </a:rPr>
-                </a:br>
-                <a:endParaRPr lang="en-US" dirty="0">
-                  <a:effectLst>
-                    <a:outerShdw blurRad="38100" dist="38100" dir="2700000" algn="tl">
-                      <a:srgbClr val="DDDDDD"/>
-                    </a:outerShdw>
-                  </a:effectLst>
-                </a:endParaRPr>
-              </a:p>
-              <a:p>
-                <a:pPr lvl="1"/>
-                <a14:m>
-                  <m:oMath xmlns:m="http://schemas.openxmlformats.org/officeDocument/2006/math">
-                    <m:r>
-                      <a:rPr lang="en-US" i="1" smtClean="0">
-                        <a:solidFill>
-                          <a:srgbClr val="0033CC"/>
-                        </a:solidFill>
-                        <a:latin typeface="Cambria Math" panose="02040503050406030204" pitchFamily="18" charset="0"/>
-                      </a:rPr>
-                      <m:t>𝑝</m:t>
-                    </m:r>
-                    <m:d>
-                      <m:dPr>
-                        <m:ctrlPr>
-                          <a:rPr lang="en-US" i="1">
-                            <a:solidFill>
-                              <a:srgbClr val="0033CC"/>
-                            </a:solidFill>
-                            <a:latin typeface="Cambria Math" panose="02040503050406030204" pitchFamily="18" charset="0"/>
-                          </a:rPr>
-                        </m:ctrlPr>
-                      </m:dPr>
-                      <m:e>
-                        <m:r>
-                          <a:rPr lang="en-US" i="1">
-                            <a:solidFill>
-                              <a:srgbClr val="0033CC"/>
-                            </a:solidFill>
-                            <a:latin typeface="Cambria Math" panose="02040503050406030204" pitchFamily="18" charset="0"/>
-                          </a:rPr>
-                          <m:t>𝑥</m:t>
-                        </m:r>
-                        <m:r>
-                          <a:rPr lang="en-US" b="0" i="1" smtClean="0">
-                            <a:solidFill>
-                              <a:srgbClr val="0033CC"/>
-                            </a:solidFill>
-                            <a:latin typeface="Cambria Math" panose="02040503050406030204" pitchFamily="18" charset="0"/>
-                          </a:rPr>
-                          <m:t> </m:t>
-                        </m:r>
-                      </m:e>
-                      <m:e>
-                        <m:r>
-                          <a:rPr lang="en-US" b="0" i="1" smtClean="0">
-                            <a:solidFill>
-                              <a:srgbClr val="0033CC"/>
-                            </a:solidFill>
-                            <a:latin typeface="Cambria Math" panose="02040503050406030204" pitchFamily="18" charset="0"/>
-                          </a:rPr>
-                          <m:t> </m:t>
-                        </m:r>
-                        <m:r>
-                          <a:rPr lang="en-US" b="0" i="1" smtClean="0">
-                            <a:solidFill>
-                              <a:srgbClr val="0033CC"/>
-                            </a:solidFill>
-                            <a:latin typeface="Cambria Math" panose="02040503050406030204" pitchFamily="18" charset="0"/>
-                          </a:rPr>
-                          <m:t>𝑘</m:t>
-                        </m:r>
-                      </m:e>
-                    </m:d>
-                  </m:oMath>
-                </a14:m>
-                <a:r>
-                  <a:rPr lang="en-US" dirty="0">
-                    <a:effectLst>
-                      <a:outerShdw blurRad="38100" dist="38100" dir="2700000" algn="tl">
-                        <a:srgbClr val="DDDDDD"/>
-                      </a:outerShdw>
-                    </a:effectLst>
-                  </a:rPr>
-                  <a:t> is the probability density of </a:t>
-                </a:r>
-                <a14:m>
-                  <m:oMath xmlns:m="http://schemas.openxmlformats.org/officeDocument/2006/math">
-                    <m:r>
-                      <a:rPr lang="en-US" i="1">
-                        <a:solidFill>
-                          <a:srgbClr val="0033CC"/>
-                        </a:solidFill>
-                        <a:effectLst>
-                          <a:outerShdw blurRad="38100" dist="38100" dir="2700000" algn="tl">
-                            <a:srgbClr val="DDDDDD"/>
-                          </a:outerShdw>
-                        </a:effectLst>
-                        <a:latin typeface="Cambria Math" panose="02040503050406030204" pitchFamily="18" charset="0"/>
-                      </a:rPr>
-                      <m:t>𝑥</m:t>
-                    </m:r>
-                  </m:oMath>
-                </a14:m>
-                <a:r>
-                  <a:rPr lang="en-US" dirty="0">
-                    <a:effectLst>
-                      <a:outerShdw blurRad="38100" dist="38100" dir="2700000" algn="tl">
-                        <a:srgbClr val="DDDDDD"/>
-                      </a:outerShdw>
-                    </a:effectLst>
-                  </a:rPr>
-                  <a:t> for the class labeled  </a:t>
-                </a:r>
-                <a14:m>
-                  <m:oMath xmlns:m="http://schemas.openxmlformats.org/officeDocument/2006/math">
-                    <m:r>
-                      <a:rPr lang="en-US" i="1">
-                        <a:latin typeface="Cambria Math" panose="02040503050406030204" pitchFamily="18" charset="0"/>
-                      </a:rPr>
-                      <m:t>𝑦</m:t>
-                    </m:r>
-                    <m:r>
-                      <a:rPr lang="en-US" i="1">
-                        <a:latin typeface="Cambria Math" panose="02040503050406030204" pitchFamily="18" charset="0"/>
-                      </a:rPr>
-                      <m:t>=</m:t>
-                    </m:r>
-                    <m:r>
-                      <a:rPr lang="en-US" b="0" i="1" smtClean="0">
-                        <a:latin typeface="Cambria Math" panose="02040503050406030204" pitchFamily="18" charset="0"/>
-                      </a:rPr>
-                      <m:t>𝑘</m:t>
-                    </m:r>
-                  </m:oMath>
-                </a14:m>
-                <a:r>
-                  <a:rPr lang="en-US" dirty="0">
-                    <a:effectLst>
-                      <a:outerShdw blurRad="38100" dist="38100" dir="2700000" algn="tl">
-                        <a:srgbClr val="DDDDDD"/>
-                      </a:outerShdw>
-                    </a:effectLst>
-                  </a:rPr>
-                  <a:t>.</a:t>
-                </a:r>
-              </a:p>
-              <a:p>
-                <a:pPr lvl="1"/>
-                <a14:m>
-                  <m:oMath xmlns:m="http://schemas.openxmlformats.org/officeDocument/2006/math">
-                    <m:r>
-                      <a:rPr lang="en-US" b="0" i="1" smtClean="0">
-                        <a:solidFill>
-                          <a:srgbClr val="0033CC"/>
-                        </a:solidFill>
-                        <a:latin typeface="Cambria Math" panose="02040503050406030204" pitchFamily="18" charset="0"/>
-                      </a:rPr>
-                      <m:t>𝜋</m:t>
-                    </m:r>
-                    <m:r>
-                      <a:rPr lang="en-US" b="0" i="1" smtClean="0">
-                        <a:solidFill>
-                          <a:srgbClr val="0033CC"/>
-                        </a:solidFill>
-                        <a:latin typeface="Cambria Math" panose="02040503050406030204" pitchFamily="18" charset="0"/>
-                      </a:rPr>
-                      <m:t>(</m:t>
-                    </m:r>
-                    <m:r>
-                      <a:rPr lang="en-US" b="0" i="1" smtClean="0">
-                        <a:solidFill>
-                          <a:srgbClr val="0033CC"/>
-                        </a:solidFill>
-                        <a:latin typeface="Cambria Math" panose="02040503050406030204" pitchFamily="18" charset="0"/>
-                      </a:rPr>
-                      <m:t>𝑘</m:t>
-                    </m:r>
-                    <m:r>
-                      <a:rPr lang="en-US" b="0" i="1">
-                        <a:solidFill>
-                          <a:srgbClr val="0033CC"/>
-                        </a:solidFill>
-                        <a:latin typeface="Cambria Math" panose="02040503050406030204" pitchFamily="18" charset="0"/>
-                      </a:rPr>
-                      <m:t>)</m:t>
-                    </m:r>
-                  </m:oMath>
-                </a14:m>
-                <a:r>
-                  <a:rPr lang="en-US" dirty="0">
-                    <a:solidFill>
-                      <a:srgbClr val="0033CC"/>
-                    </a:solidFill>
-                    <a:effectLst>
-                      <a:outerShdw blurRad="38100" dist="38100" dir="2700000" algn="tl">
-                        <a:srgbClr val="DDDDDD"/>
-                      </a:outerShdw>
-                    </a:effectLst>
-                  </a:rPr>
-                  <a:t> </a:t>
-                </a:r>
-                <a:r>
-                  <a:rPr lang="en-US" dirty="0">
-                    <a:effectLst>
-                      <a:outerShdw blurRad="38100" dist="38100" dir="2700000" algn="tl">
-                        <a:srgbClr val="DDDDDD"/>
-                      </a:outerShdw>
-                    </a:effectLst>
-                  </a:rPr>
-                  <a:t>is the prior probability of the class labeled </a:t>
-                </a:r>
-                <a14:m>
-                  <m:oMath xmlns:m="http://schemas.openxmlformats.org/officeDocument/2006/math">
-                    <m:r>
-                      <a:rPr lang="en-US" i="1">
-                        <a:latin typeface="Cambria Math" panose="02040503050406030204" pitchFamily="18" charset="0"/>
-                      </a:rPr>
-                      <m:t>𝑦</m:t>
-                    </m:r>
-                    <m:r>
-                      <a:rPr lang="en-US" i="1">
-                        <a:latin typeface="Cambria Math" panose="02040503050406030204" pitchFamily="18" charset="0"/>
-                      </a:rPr>
-                      <m:t>=</m:t>
-                    </m:r>
-                    <m:r>
-                      <a:rPr lang="en-US" i="1">
-                        <a:latin typeface="Cambria Math" panose="02040503050406030204" pitchFamily="18" charset="0"/>
-                      </a:rPr>
-                      <m:t>𝑘</m:t>
-                    </m:r>
-                  </m:oMath>
-                </a14:m>
-                <a:r>
-                  <a:rPr lang="en-US" dirty="0">
-                    <a:effectLst>
-                      <a:outerShdw blurRad="38100" dist="38100" dir="2700000" algn="tl">
-                        <a:srgbClr val="DDDDDD"/>
-                      </a:outerShdw>
-                    </a:effectLst>
-                  </a:rPr>
-                  <a:t>.</a:t>
-                </a:r>
-              </a:p>
-              <a:p>
-                <a:pPr marL="457200" lvl="1" indent="0">
-                  <a:buNone/>
-                </a:pPr>
-                <a:endParaRPr lang="en-US" dirty="0">
-                  <a:effectLst>
-                    <a:outerShdw blurRad="38100" dist="38100" dir="2700000" algn="tl">
-                      <a:srgbClr val="DDDDDD"/>
-                    </a:outerShdw>
-                  </a:effectLst>
-                </a:endParaRPr>
-              </a:p>
-              <a:p>
-                <a:pPr marL="0" indent="0">
-                  <a:buNone/>
-                </a:pPr>
-                <a:r>
-                  <a:rPr lang="en-US" dirty="0">
-                    <a:effectLst>
-                      <a:outerShdw blurRad="38100" dist="38100" dir="2700000" algn="tl">
-                        <a:srgbClr val="DDDDDD"/>
-                      </a:outerShdw>
-                    </a:effectLst>
-                  </a:rPr>
-                  <a:t>Any model trained with binary cross entropy necessarily approximates </a:t>
-                </a:r>
-                <a14:m>
-                  <m:oMath xmlns:m="http://schemas.openxmlformats.org/officeDocument/2006/math">
-                    <m:r>
-                      <a:rPr lang="en-US" i="1">
-                        <a:solidFill>
-                          <a:srgbClr val="0033CC"/>
-                        </a:solidFill>
-                        <a:latin typeface="Cambria Math" panose="02040503050406030204" pitchFamily="18" charset="0"/>
-                      </a:rPr>
-                      <m:t>𝑝</m:t>
-                    </m:r>
-                    <m:d>
-                      <m:dPr>
-                        <m:ctrlPr>
-                          <a:rPr lang="en-US" i="1">
-                            <a:solidFill>
-                              <a:srgbClr val="0033CC"/>
-                            </a:solidFill>
-                            <a:latin typeface="Cambria Math" panose="02040503050406030204" pitchFamily="18" charset="0"/>
-                          </a:rPr>
-                        </m:ctrlPr>
-                      </m:dPr>
-                      <m:e>
-                        <m:r>
-                          <a:rPr lang="en-US" i="1">
-                            <a:solidFill>
-                              <a:srgbClr val="0033CC"/>
-                            </a:solidFill>
-                            <a:latin typeface="Cambria Math" panose="02040503050406030204" pitchFamily="18" charset="0"/>
-                          </a:rPr>
-                          <m:t>1</m:t>
-                        </m:r>
-                        <m:r>
-                          <a:rPr lang="en-US" b="0" i="1" smtClean="0">
-                            <a:solidFill>
-                              <a:srgbClr val="0033CC"/>
-                            </a:solidFill>
-                            <a:latin typeface="Cambria Math" panose="02040503050406030204" pitchFamily="18" charset="0"/>
-                          </a:rPr>
-                          <m:t> </m:t>
-                        </m:r>
-                      </m:e>
-                      <m:e>
-                        <m:r>
-                          <a:rPr lang="en-US" i="1">
-                            <a:solidFill>
-                              <a:srgbClr val="0033CC"/>
-                            </a:solidFill>
-                            <a:latin typeface="Cambria Math" panose="02040503050406030204" pitchFamily="18" charset="0"/>
-                          </a:rPr>
-                          <m:t> </m:t>
-                        </m:r>
-                        <m:r>
-                          <a:rPr lang="en-US" i="1">
-                            <a:solidFill>
-                              <a:srgbClr val="0033CC"/>
-                            </a:solidFill>
-                            <a:latin typeface="Cambria Math" panose="02040503050406030204" pitchFamily="18" charset="0"/>
-                          </a:rPr>
-                          <m:t>𝑥</m:t>
-                        </m:r>
-                      </m:e>
-                    </m:d>
-                  </m:oMath>
-                </a14:m>
-                <a:r>
-                  <a:rPr lang="en-US" dirty="0">
-                    <a:effectLst>
-                      <a:outerShdw blurRad="38100" dist="38100" dir="2700000" algn="tl">
-                        <a:srgbClr val="DDDDDD"/>
-                      </a:outerShdw>
-                    </a:effectLst>
-                  </a:rPr>
-                  <a:t>. </a:t>
-                </a:r>
-              </a:p>
-              <a:p>
-                <a:pPr marL="0" indent="0">
-                  <a:buNone/>
-                </a:pPr>
-                <a:endParaRPr lang="en-US" dirty="0"/>
-              </a:p>
-              <a:p>
-                <a:pPr marL="0" indent="0">
-                  <a:buNone/>
-                </a:pPr>
-                <a:endParaRPr lang="en-US" dirty="0"/>
-              </a:p>
-            </p:txBody>
-          </p:sp>
-        </mc:Choice>
-        <mc:Fallback>
-          <p:sp>
-            <p:nvSpPr>
-              <p:cNvPr id="4" name="Content Placeholder 3">
-                <a:extLst>
-                  <a:ext uri="{FF2B5EF4-FFF2-40B4-BE49-F238E27FC236}">
-                    <a16:creationId xmlns:a16="http://schemas.microsoft.com/office/drawing/2014/main" id="{CA5FF234-6F7F-A2E8-4C2B-8C41E7CF3A52}"/>
-                  </a:ext>
-                </a:extLst>
-              </p:cNvPr>
-              <p:cNvSpPr>
-                <a:spLocks noGrp="1" noRot="1" noChangeAspect="1" noMove="1" noResize="1" noEditPoints="1" noAdjustHandles="1" noChangeArrowheads="1" noChangeShapeType="1" noTextEdit="1"/>
-              </p:cNvSpPr>
-              <p:nvPr>
-                <p:ph sz="half" idx="1"/>
-              </p:nvPr>
-            </p:nvSpPr>
-            <p:spPr>
-              <a:blipFill>
-                <a:blip r:embed="rId2"/>
-                <a:stretch>
-                  <a:fillRect l="-1309" t="-1316" r="-327"/>
-                </a:stretch>
-              </a:blipFill>
-            </p:spPr>
-            <p:txBody>
-              <a:bodyPr/>
-              <a:lstStyle/>
-              <a:p>
-                <a:r>
-                  <a:rPr lang="en-US">
-                    <a:noFill/>
-                  </a:rPr>
-                  <a:t> </a:t>
-                </a:r>
-              </a:p>
-            </p:txBody>
-          </p:sp>
-        </mc:Fallback>
-      </mc:AlternateContent>
-      <p:sp>
-        <p:nvSpPr>
-          <p:cNvPr id="3" name="Title 2">
-            <a:extLst>
-              <a:ext uri="{FF2B5EF4-FFF2-40B4-BE49-F238E27FC236}">
-                <a16:creationId xmlns:a16="http://schemas.microsoft.com/office/drawing/2014/main" id="{32840FCC-D5A4-4372-6695-0E20A32EC113}"/>
-              </a:ext>
-            </a:extLst>
-          </p:cNvPr>
-          <p:cNvSpPr>
-            <a:spLocks noGrp="1"/>
-          </p:cNvSpPr>
-          <p:nvPr>
-            <p:ph type="title"/>
-          </p:nvPr>
-        </p:nvSpPr>
-        <p:spPr/>
-        <p:txBody>
-          <a:bodyPr/>
-          <a:lstStyle/>
-          <a:p>
-            <a:r>
-              <a:rPr lang="en-US" dirty="0"/>
-              <a:t>Binary Cross Entropy Loss (2)</a:t>
-            </a:r>
-          </a:p>
-        </p:txBody>
-      </p:sp>
-    </p:spTree>
-    <p:extLst>
-      <p:ext uri="{BB962C8B-B14F-4D97-AF65-F5344CB8AC3E}">
-        <p14:creationId xmlns:p14="http://schemas.microsoft.com/office/powerpoint/2010/main" val="2050482392"/>
-      </p:ext>
-    </p:extLst>
-  </p:cSld>
-  <p:clrMapOvr>
-    <a:masterClrMapping/>
-  </p:clrMapOvr>
-</p:sld>
-</file>
-
-<file path=ppt/slides/slide22.xml><?xml version="1.0" encoding="utf-8"?>
-<p:sld xmlns:a="http://schemas.openxmlformats.org/drawingml/2006/main" xmlns:r="http://schemas.openxmlformats.org/officeDocument/2006/relationships" xmlns:p="http://schemas.openxmlformats.org/presentationml/2006/main">
-  <p:cSld>
-    <p:spTree>
-      <p:nvGrpSpPr>
-        <p:cNvPr id="1" name="">
-          <a:extLst>
-            <a:ext uri="{FF2B5EF4-FFF2-40B4-BE49-F238E27FC236}">
-              <a16:creationId xmlns:a16="http://schemas.microsoft.com/office/drawing/2014/main" id="{FE62805C-33FE-C4E0-A043-BAEEFB252968}"/>
-            </a:ext>
-          </a:extLst>
-        </p:cNvPr>
-        <p:cNvGrpSpPr/>
-        <p:nvPr/>
-      </p:nvGrpSpPr>
-      <p:grpSpPr>
-        <a:xfrm>
-          <a:off x="0" y="0"/>
-          <a:ext cx="0" cy="0"/>
-          <a:chOff x="0" y="0"/>
-          <a:chExt cx="0" cy="0"/>
-        </a:xfrm>
-      </p:grpSpPr>
-      <mc:AlternateContent xmlns:mc="http://schemas.openxmlformats.org/markup-compatibility/2006">
-        <mc:Choice xmlns:a14="http://schemas.microsoft.com/office/drawing/2010/main" Requires="a14">
-          <p:sp>
-            <p:nvSpPr>
-              <p:cNvPr id="4" name="Content Placeholder 3">
-                <a:extLst>
-                  <a:ext uri="{FF2B5EF4-FFF2-40B4-BE49-F238E27FC236}">
-                    <a16:creationId xmlns:a16="http://schemas.microsoft.com/office/drawing/2014/main" id="{255DEE06-32D2-1EC4-196B-00B030238D4F}"/>
-                  </a:ext>
-                </a:extLst>
-              </p:cNvPr>
-              <p:cNvSpPr>
-                <a:spLocks noGrp="1"/>
-              </p:cNvSpPr>
-              <p:nvPr>
-                <p:ph sz="half" idx="1"/>
-              </p:nvPr>
-            </p:nvSpPr>
-            <p:spPr>
-              <a:xfrm>
-                <a:off x="711200" y="1123950"/>
-                <a:ext cx="7747000" cy="4819650"/>
-              </a:xfrm>
-            </p:spPr>
-            <p:txBody>
-              <a:bodyPr/>
-              <a:lstStyle/>
-              <a:p>
-                <a:pPr marL="0" indent="0">
-                  <a:buNone/>
-                </a:pPr>
-                <a:r>
-                  <a:rPr lang="en-US" dirty="0">
-                    <a:solidFill>
-                      <a:srgbClr val="0033CC"/>
-                    </a:solidFill>
-                    <a:latin typeface="+mn-lt"/>
-                    <a:ea typeface="Cambria Math" charset="0"/>
-                    <a:cs typeface="Cambria Math" charset="0"/>
-                  </a:rPr>
-                  <a:t>Exponential loss</a:t>
-                </a:r>
-                <a:r>
-                  <a:rPr lang="en-US" b="1" dirty="0">
-                    <a:solidFill>
-                      <a:srgbClr val="0033CC"/>
-                    </a:solidFill>
-                    <a:latin typeface="Cambria Math" panose="02040503050406030204" pitchFamily="18" charset="0"/>
-                    <a:ea typeface="Cambria Math" charset="0"/>
-                    <a:cs typeface="Cambria Math" charset="0"/>
-                  </a:rPr>
-                  <a:t>		</a:t>
-                </a:r>
-              </a:p>
-              <a:p>
-                <a:pPr marL="0" indent="0">
-                  <a:buNone/>
-                </a:pPr>
-                <a:r>
-                  <a:rPr lang="en-US" dirty="0">
-                    <a:ea typeface="Cambria Math" charset="0"/>
-                    <a:cs typeface="Cambria Math" charset="0"/>
-                  </a:rPr>
-                  <a:t>	</a:t>
-                </a:r>
-                <a14:m>
-                  <m:oMath xmlns:m="http://schemas.openxmlformats.org/officeDocument/2006/math">
-                    <m:r>
-                      <a:rPr lang="en-US" i="1">
-                        <a:latin typeface="Cambria Math" panose="02040503050406030204" pitchFamily="18" charset="0"/>
-                        <a:ea typeface="Cambria Math" charset="0"/>
-                        <a:cs typeface="Cambria Math" charset="0"/>
-                      </a:rPr>
-                      <m:t>𝐿</m:t>
-                    </m:r>
-                    <m:d>
-                      <m:dPr>
-                        <m:ctrlPr>
-                          <a:rPr lang="en-US" i="1">
-                            <a:latin typeface="Cambria Math" panose="02040503050406030204" pitchFamily="18" charset="0"/>
-                            <a:ea typeface="Cambria Math" charset="0"/>
-                            <a:cs typeface="Cambria Math" charset="0"/>
-                          </a:rPr>
-                        </m:ctrlPr>
-                      </m:dPr>
-                      <m:e>
-                        <m:r>
-                          <a:rPr lang="en-US" i="1">
-                            <a:latin typeface="Cambria Math" panose="02040503050406030204" pitchFamily="18" charset="0"/>
-                            <a:ea typeface="Cambria Math" charset="0"/>
-                            <a:cs typeface="Cambria Math" charset="0"/>
-                          </a:rPr>
-                          <m:t>𝑦</m:t>
-                        </m:r>
-                        <m:r>
-                          <a:rPr lang="en-US" i="1">
-                            <a:latin typeface="Cambria Math" panose="02040503050406030204" pitchFamily="18" charset="0"/>
-                            <a:ea typeface="Cambria Math" charset="0"/>
-                            <a:cs typeface="Cambria Math" charset="0"/>
-                          </a:rPr>
-                          <m:t>, </m:t>
-                        </m:r>
-                        <m:r>
-                          <a:rPr lang="en-US" i="1">
-                            <a:latin typeface="Cambria Math" panose="02040503050406030204" pitchFamily="18" charset="0"/>
-                            <a:ea typeface="Cambria Math" charset="0"/>
-                            <a:cs typeface="Cambria Math" charset="0"/>
-                          </a:rPr>
-                          <m:t>𝑓</m:t>
-                        </m:r>
-                      </m:e>
-                    </m:d>
-                    <m:r>
-                      <a:rPr lang="en-US" i="1">
-                        <a:latin typeface="Cambria Math" panose="02040503050406030204" pitchFamily="18" charset="0"/>
-                        <a:ea typeface="Cambria Math" charset="0"/>
-                        <a:cs typeface="Cambria Math" charset="0"/>
-                      </a:rPr>
-                      <m:t>=</m:t>
-                    </m:r>
-                    <m:func>
-                      <m:funcPr>
-                        <m:ctrlPr>
-                          <a:rPr lang="en-US">
-                            <a:latin typeface="Cambria Math" panose="02040503050406030204" pitchFamily="18" charset="0"/>
-                            <a:ea typeface="Cambria Math" charset="0"/>
-                            <a:cs typeface="Cambria Math" charset="0"/>
-                          </a:rPr>
-                        </m:ctrlPr>
-                      </m:funcPr>
-                      <m:fName>
-                        <m:r>
-                          <m:rPr>
-                            <m:sty m:val="p"/>
-                          </m:rPr>
-                          <a:rPr lang="en-US">
-                            <a:latin typeface="Cambria Math" panose="02040503050406030204" pitchFamily="18" charset="0"/>
-                            <a:ea typeface="Cambria Math" charset="0"/>
-                            <a:cs typeface="Cambria Math" charset="0"/>
-                          </a:rPr>
-                          <m:t>exp</m:t>
-                        </m:r>
-                      </m:fName>
-                      <m:e>
-                        <m:d>
-                          <m:dPr>
-                            <m:ctrlPr>
-                              <a:rPr lang="en-US" i="1">
-                                <a:latin typeface="Cambria Math" panose="02040503050406030204" pitchFamily="18" charset="0"/>
-                                <a:ea typeface="Cambria Math" charset="0"/>
-                                <a:cs typeface="Cambria Math" charset="0"/>
-                              </a:rPr>
-                            </m:ctrlPr>
-                          </m:dPr>
-                          <m:e>
-                            <m:r>
-                              <a:rPr lang="en-US" i="1">
-                                <a:latin typeface="Cambria Math" panose="02040503050406030204" pitchFamily="18" charset="0"/>
-                                <a:ea typeface="Cambria Math" charset="0"/>
-                                <a:cs typeface="Cambria Math" charset="0"/>
-                              </a:rPr>
-                              <m:t>−</m:t>
-                            </m:r>
-                            <m:f>
-                              <m:fPr>
-                                <m:ctrlPr>
-                                  <a:rPr lang="en-US" i="1">
-                                    <a:latin typeface="Cambria Math" panose="02040503050406030204" pitchFamily="18" charset="0"/>
-                                    <a:ea typeface="Cambria Math" charset="0"/>
-                                    <a:cs typeface="Cambria Math" charset="0"/>
-                                  </a:rPr>
-                                </m:ctrlPr>
-                              </m:fPr>
-                              <m:num>
-                                <m:r>
-                                  <a:rPr lang="en-US" i="1">
-                                    <a:latin typeface="Cambria Math" panose="02040503050406030204" pitchFamily="18" charset="0"/>
-                                    <a:ea typeface="Cambria Math" charset="0"/>
-                                    <a:cs typeface="Cambria Math" charset="0"/>
-                                  </a:rPr>
-                                  <m:t>𝑤𝑦𝑓</m:t>
-                                </m:r>
-                              </m:num>
-                              <m:den>
-                                <m:r>
-                                  <a:rPr lang="en-US" i="1">
-                                    <a:latin typeface="Cambria Math" panose="02040503050406030204" pitchFamily="18" charset="0"/>
-                                    <a:ea typeface="Cambria Math" charset="0"/>
-                                    <a:cs typeface="Cambria Math" charset="0"/>
-                                  </a:rPr>
-                                  <m:t>2</m:t>
-                                </m:r>
-                              </m:den>
-                            </m:f>
-                          </m:e>
-                        </m:d>
-                        <m:r>
-                          <a:rPr lang="en-US" b="0" i="1" smtClean="0">
-                            <a:latin typeface="Cambria Math" panose="02040503050406030204" pitchFamily="18" charset="0"/>
-                            <a:ea typeface="Cambria Math" charset="0"/>
-                            <a:cs typeface="Cambria Math" charset="0"/>
-                          </a:rPr>
-                          <m:t>,      </m:t>
-                        </m:r>
-                        <m:r>
-                          <a:rPr lang="en-US" b="0" i="1" smtClean="0">
-                            <a:latin typeface="Cambria Math" panose="02040503050406030204" pitchFamily="18" charset="0"/>
-                            <a:ea typeface="Cambria Math" charset="0"/>
-                            <a:cs typeface="Cambria Math" charset="0"/>
-                          </a:rPr>
-                          <m:t>𝑦</m:t>
-                        </m:r>
-                        <m:r>
-                          <a:rPr lang="en-US" b="0" i="1" smtClean="0">
-                            <a:latin typeface="Cambria Math" panose="02040503050406030204" pitchFamily="18" charset="0"/>
-                            <a:ea typeface="Cambria Math" charset="0"/>
-                            <a:cs typeface="Cambria Math" charset="0"/>
-                          </a:rPr>
-                          <m:t>∈ </m:t>
-                        </m:r>
-                        <m:d>
-                          <m:dPr>
-                            <m:begChr m:val="{"/>
-                            <m:endChr m:val="}"/>
-                            <m:ctrlPr>
-                              <a:rPr lang="en-US" b="0" i="1" smtClean="0">
-                                <a:latin typeface="Cambria Math" panose="02040503050406030204" pitchFamily="18" charset="0"/>
-                                <a:ea typeface="Cambria Math" charset="0"/>
-                              </a:rPr>
-                            </m:ctrlPr>
-                          </m:dPr>
-                          <m:e>
-                            <m:r>
-                              <a:rPr lang="en-US" b="0" i="1" smtClean="0">
-                                <a:latin typeface="Cambria Math" panose="02040503050406030204" pitchFamily="18" charset="0"/>
-                                <a:ea typeface="Cambria Math" charset="0"/>
-                              </a:rPr>
-                              <m:t>−1, +1</m:t>
-                            </m:r>
-                          </m:e>
-                        </m:d>
-                        <m:r>
-                          <a:rPr lang="en-US" b="0" i="1" smtClean="0">
-                            <a:latin typeface="Cambria Math" panose="02040503050406030204" pitchFamily="18" charset="0"/>
-                            <a:ea typeface="Cambria Math" charset="0"/>
-                            <a:cs typeface="Cambria Math" charset="0"/>
-                          </a:rPr>
-                          <m:t> </m:t>
-                        </m:r>
-                      </m:e>
-                    </m:func>
-                  </m:oMath>
-                </a14:m>
-                <a:endParaRPr lang="en-US" dirty="0">
-                  <a:latin typeface="Cambria Math" panose="02040503050406030204" pitchFamily="18" charset="0"/>
-                  <a:ea typeface="Cambria Math" charset="0"/>
-                  <a:cs typeface="Cambria Math" charset="0"/>
-                </a:endParaRPr>
-              </a:p>
-              <a:p>
-                <a:pPr marL="0" indent="0">
-                  <a:buNone/>
-                </a:pPr>
-                <a:endParaRPr lang="en-US" dirty="0">
-                  <a:latin typeface="Cambria Math" panose="02040503050406030204" pitchFamily="18" charset="0"/>
-                  <a:ea typeface="Cambria Math" charset="0"/>
-                  <a:cs typeface="Cambria Math" charset="0"/>
-                </a:endParaRPr>
-              </a:p>
-              <a:p>
-                <a:pPr marL="0" indent="0">
-                  <a:buNone/>
-                </a:pPr>
-                <a:r>
-                  <a:rPr lang="en-US" dirty="0">
-                    <a:solidFill>
-                      <a:srgbClr val="0033CC"/>
-                    </a:solidFill>
-                    <a:latin typeface="+mn-lt"/>
-                    <a:ea typeface="Cambria Math" charset="0"/>
-                  </a:rPr>
-                  <a:t>Quantile loss (</a:t>
-                </a:r>
-                <a14:m>
-                  <m:oMath xmlns:m="http://schemas.openxmlformats.org/officeDocument/2006/math">
-                    <m:r>
-                      <a:rPr lang="en-US" b="0" i="1">
-                        <a:solidFill>
-                          <a:srgbClr val="0033CC"/>
-                        </a:solidFill>
-                        <a:latin typeface="+mn-lt"/>
-                        <a:ea typeface="Cambria Math" charset="0"/>
-                      </a:rPr>
-                      <m:t>0</m:t>
-                    </m:r>
-                    <m:r>
-                      <a:rPr lang="en-US" b="0" i="1">
-                        <a:solidFill>
-                          <a:srgbClr val="0033CC"/>
-                        </a:solidFill>
-                        <a:latin typeface="+mn-lt"/>
-                        <a:ea typeface="Cambria Math" panose="02040503050406030204" pitchFamily="18" charset="0"/>
-                      </a:rPr>
-                      <m:t>≤</m:t>
-                    </m:r>
-                    <m:r>
-                      <a:rPr lang="en-US" b="0" i="1">
-                        <a:solidFill>
-                          <a:srgbClr val="0033CC"/>
-                        </a:solidFill>
-                        <a:latin typeface="+mn-lt"/>
-                        <a:ea typeface="Cambria Math" panose="02040503050406030204" pitchFamily="18" charset="0"/>
-                      </a:rPr>
-                      <m:t>𝜏</m:t>
-                    </m:r>
-                    <m:r>
-                      <a:rPr lang="en-US" b="0" i="1">
-                        <a:solidFill>
-                          <a:srgbClr val="0033CC"/>
-                        </a:solidFill>
-                        <a:latin typeface="+mn-lt"/>
-                        <a:ea typeface="Cambria Math" panose="02040503050406030204" pitchFamily="18" charset="0"/>
-                      </a:rPr>
-                      <m:t>≤1</m:t>
-                    </m:r>
-                  </m:oMath>
-                </a14:m>
-                <a:r>
-                  <a:rPr lang="en-US" dirty="0">
-                    <a:solidFill>
-                      <a:srgbClr val="0033CC"/>
-                    </a:solidFill>
-                    <a:latin typeface="+mn-lt"/>
-                    <a:ea typeface="Cambria Math" charset="0"/>
-                  </a:rPr>
-                  <a:t>)</a:t>
-                </a:r>
-                <a:r>
-                  <a:rPr lang="en-US" dirty="0">
-                    <a:solidFill>
-                      <a:srgbClr val="0033CC"/>
-                    </a:solidFill>
-                    <a:latin typeface="Cambria Math" panose="02040503050406030204" pitchFamily="18" charset="0"/>
-                    <a:ea typeface="Cambria Math" charset="0"/>
-                  </a:rPr>
-                  <a:t>	</a:t>
-                </a:r>
-              </a:p>
-              <a:p>
-                <a:pPr marL="0" indent="0">
-                  <a:buNone/>
-                </a:pPr>
-                <a:r>
-                  <a:rPr lang="en-US" dirty="0">
-                    <a:latin typeface="Cambria Math" panose="02040503050406030204" pitchFamily="18" charset="0"/>
-                    <a:ea typeface="Cambria Math" charset="0"/>
-                  </a:rPr>
-                  <a:t>	</a:t>
-                </a:r>
-                <a14:m>
-                  <m:oMath xmlns:m="http://schemas.openxmlformats.org/officeDocument/2006/math">
-                    <m:r>
-                      <a:rPr lang="en-US" i="1">
-                        <a:latin typeface="Cambria Math" panose="02040503050406030204" pitchFamily="18" charset="0"/>
-                        <a:ea typeface="Cambria Math" charset="0"/>
-                        <a:cs typeface="Cambria Math" charset="0"/>
-                      </a:rPr>
-                      <m:t>𝐿</m:t>
-                    </m:r>
-                    <m:d>
-                      <m:dPr>
-                        <m:ctrlPr>
-                          <a:rPr lang="en-US" i="1">
-                            <a:latin typeface="Cambria Math" panose="02040503050406030204" pitchFamily="18" charset="0"/>
-                            <a:ea typeface="Cambria Math" charset="0"/>
-                            <a:cs typeface="Cambria Math" charset="0"/>
-                          </a:rPr>
-                        </m:ctrlPr>
-                      </m:dPr>
-                      <m:e>
-                        <m:r>
-                          <a:rPr lang="en-US" i="1">
-                            <a:latin typeface="Cambria Math" panose="02040503050406030204" pitchFamily="18" charset="0"/>
-                            <a:ea typeface="Cambria Math" charset="0"/>
-                            <a:cs typeface="Cambria Math" charset="0"/>
-                          </a:rPr>
-                          <m:t>𝑦</m:t>
-                        </m:r>
-                        <m:r>
-                          <a:rPr lang="en-US" i="1">
-                            <a:latin typeface="Cambria Math" panose="02040503050406030204" pitchFamily="18" charset="0"/>
-                            <a:ea typeface="Cambria Math" charset="0"/>
-                            <a:cs typeface="Cambria Math" charset="0"/>
-                          </a:rPr>
-                          <m:t>, </m:t>
-                        </m:r>
-                        <m:r>
-                          <a:rPr lang="en-US" i="1">
-                            <a:latin typeface="Cambria Math" panose="02040503050406030204" pitchFamily="18" charset="0"/>
-                            <a:ea typeface="Cambria Math" charset="0"/>
-                            <a:cs typeface="Cambria Math" charset="0"/>
-                          </a:rPr>
-                          <m:t>𝑓</m:t>
-                        </m:r>
-                      </m:e>
-                    </m:d>
-                    <m:r>
-                      <a:rPr lang="en-US" i="1">
-                        <a:latin typeface="Cambria Math" panose="02040503050406030204" pitchFamily="18" charset="0"/>
-                        <a:ea typeface="Cambria Math" charset="0"/>
-                        <a:cs typeface="Cambria Math" charset="0"/>
-                      </a:rPr>
-                      <m:t>=</m:t>
-                    </m:r>
-                    <m:d>
-                      <m:dPr>
-                        <m:begChr m:val="{"/>
-                        <m:endChr m:val=""/>
-                        <m:ctrlPr>
-                          <a:rPr lang="en-US" i="1">
-                            <a:latin typeface="Cambria Math" panose="02040503050406030204" pitchFamily="18" charset="0"/>
-                            <a:ea typeface="Cambria Math" charset="0"/>
-                          </a:rPr>
-                        </m:ctrlPr>
-                      </m:dPr>
-                      <m:e>
-                        <m:eqArr>
-                          <m:eqArrPr>
-                            <m:ctrlPr>
-                              <a:rPr lang="en-US" i="1">
-                                <a:latin typeface="Cambria Math" panose="02040503050406030204" pitchFamily="18" charset="0"/>
-                                <a:ea typeface="Cambria Math" charset="0"/>
-                              </a:rPr>
-                            </m:ctrlPr>
-                          </m:eqArrPr>
-                          <m:e>
-                            <m:r>
-                              <a:rPr lang="en-US" i="1">
-                                <a:latin typeface="Cambria Math" panose="02040503050406030204" pitchFamily="18" charset="0"/>
-                                <a:ea typeface="Cambria Math" charset="0"/>
-                              </a:rPr>
-                              <m:t>𝜏</m:t>
-                            </m:r>
-                            <m:d>
-                              <m:dPr>
-                                <m:ctrlPr>
-                                  <a:rPr lang="en-US" i="1">
-                                    <a:latin typeface="Cambria Math" panose="02040503050406030204" pitchFamily="18" charset="0"/>
-                                    <a:ea typeface="Cambria Math" charset="0"/>
-                                  </a:rPr>
-                                </m:ctrlPr>
-                              </m:dPr>
-                              <m:e>
-                                <m:r>
-                                  <a:rPr lang="en-US" i="1">
-                                    <a:latin typeface="Cambria Math" panose="02040503050406030204" pitchFamily="18" charset="0"/>
-                                    <a:ea typeface="Cambria Math" charset="0"/>
-                                  </a:rPr>
-                                  <m:t>𝑦</m:t>
-                                </m:r>
-                                <m:r>
-                                  <a:rPr lang="en-US" i="1">
-                                    <a:latin typeface="Cambria Math" panose="02040503050406030204" pitchFamily="18" charset="0"/>
-                                    <a:ea typeface="Cambria Math" charset="0"/>
-                                  </a:rPr>
-                                  <m:t>−</m:t>
-                                </m:r>
-                                <m:r>
-                                  <a:rPr lang="en-US" i="1">
-                                    <a:latin typeface="Cambria Math" panose="02040503050406030204" pitchFamily="18" charset="0"/>
-                                    <a:ea typeface="Cambria Math" charset="0"/>
-                                  </a:rPr>
-                                  <m:t>𝑓</m:t>
-                                </m:r>
-                              </m:e>
-                            </m:d>
-                            <m:r>
-                              <a:rPr lang="en-US" i="1">
-                                <a:latin typeface="Cambria Math" panose="02040503050406030204" pitchFamily="18" charset="0"/>
-                                <a:ea typeface="Cambria Math" charset="0"/>
-                              </a:rPr>
-                              <m:t>              </m:t>
-                            </m:r>
-                            <m:r>
-                              <a:rPr lang="en-US" i="1">
-                                <a:latin typeface="Cambria Math" panose="02040503050406030204" pitchFamily="18" charset="0"/>
-                                <a:ea typeface="Cambria Math" charset="0"/>
-                              </a:rPr>
-                              <m:t>𝑦</m:t>
-                            </m:r>
-                            <m:r>
-                              <a:rPr lang="en-US" i="1">
-                                <a:latin typeface="Cambria Math" panose="02040503050406030204" pitchFamily="18" charset="0"/>
-                                <a:ea typeface="Cambria Math" panose="02040503050406030204" pitchFamily="18" charset="0"/>
-                              </a:rPr>
-                              <m:t>≥</m:t>
-                            </m:r>
-                            <m:r>
-                              <a:rPr lang="en-US" i="1">
-                                <a:latin typeface="Cambria Math" panose="02040503050406030204" pitchFamily="18" charset="0"/>
-                                <a:ea typeface="Cambria Math" panose="02040503050406030204" pitchFamily="18" charset="0"/>
-                              </a:rPr>
-                              <m:t>𝑓</m:t>
-                            </m:r>
-                            <m:r>
-                              <a:rPr lang="en-US" i="1">
-                                <a:latin typeface="Cambria Math" panose="02040503050406030204" pitchFamily="18" charset="0"/>
-                                <a:ea typeface="Cambria Math" charset="0"/>
-                              </a:rPr>
-                              <m:t> </m:t>
-                            </m:r>
-                          </m:e>
-                          <m:e>
-                            <m:d>
-                              <m:dPr>
-                                <m:ctrlPr>
-                                  <a:rPr lang="en-US" i="1">
-                                    <a:latin typeface="Cambria Math" panose="02040503050406030204" pitchFamily="18" charset="0"/>
-                                  </a:rPr>
-                                </m:ctrlPr>
-                              </m:dPr>
-                              <m:e>
-                                <m:r>
-                                  <a:rPr lang="en-US" i="1">
-                                    <a:latin typeface="Cambria Math" panose="02040503050406030204" pitchFamily="18" charset="0"/>
-                                  </a:rPr>
-                                  <m:t>1−</m:t>
-                                </m:r>
-                                <m:r>
-                                  <a:rPr lang="en-US" i="1">
-                                    <a:latin typeface="Cambria Math" panose="02040503050406030204" pitchFamily="18" charset="0"/>
-                                  </a:rPr>
-                                  <m:t>𝜏</m:t>
-                                </m:r>
-                              </m:e>
-                            </m:d>
-                            <m:d>
-                              <m:dPr>
-                                <m:ctrlPr>
-                                  <a:rPr lang="en-US" i="1">
-                                    <a:latin typeface="Cambria Math" panose="02040503050406030204" pitchFamily="18" charset="0"/>
-                                  </a:rPr>
-                                </m:ctrlPr>
-                              </m:dPr>
-                              <m:e>
-                                <m:r>
-                                  <a:rPr lang="en-US" i="1">
-                                    <a:latin typeface="Cambria Math" panose="02040503050406030204" pitchFamily="18" charset="0"/>
-                                  </a:rPr>
-                                  <m:t>𝑓</m:t>
-                                </m:r>
-                                <m:r>
-                                  <a:rPr lang="en-US" i="1">
-                                    <a:latin typeface="Cambria Math" panose="02040503050406030204" pitchFamily="18" charset="0"/>
-                                  </a:rPr>
-                                  <m:t>−</m:t>
-                                </m:r>
-                                <m:r>
-                                  <a:rPr lang="en-US" i="1">
-                                    <a:latin typeface="Cambria Math" panose="02040503050406030204" pitchFamily="18" charset="0"/>
-                                  </a:rPr>
-                                  <m:t>𝑦</m:t>
-                                </m:r>
-                              </m:e>
-                            </m:d>
-                            <m:r>
-                              <a:rPr lang="en-US" i="1">
-                                <a:latin typeface="Cambria Math" panose="02040503050406030204" pitchFamily="18" charset="0"/>
-                              </a:rPr>
-                              <m:t>  </m:t>
-                            </m:r>
-                            <m:r>
-                              <a:rPr lang="en-US" i="1">
-                                <a:latin typeface="Cambria Math" panose="02040503050406030204" pitchFamily="18" charset="0"/>
-                              </a:rPr>
-                              <m:t>𝑦</m:t>
-                            </m:r>
-                            <m:r>
-                              <a:rPr lang="en-US" i="1">
-                                <a:latin typeface="Cambria Math" panose="02040503050406030204" pitchFamily="18" charset="0"/>
-                              </a:rPr>
-                              <m:t>&lt;</m:t>
-                            </m:r>
-                            <m:r>
-                              <a:rPr lang="en-US" i="1">
-                                <a:latin typeface="Cambria Math" panose="02040503050406030204" pitchFamily="18" charset="0"/>
-                              </a:rPr>
-                              <m:t>𝑓</m:t>
-                            </m:r>
-                          </m:e>
-                        </m:eqArr>
-                      </m:e>
-                    </m:d>
-                  </m:oMath>
-                </a14:m>
-                <a:endParaRPr lang="en-US" dirty="0">
-                  <a:latin typeface="Cambria Math" panose="02040503050406030204" pitchFamily="18" charset="0"/>
-                </a:endParaRPr>
-              </a:p>
-              <a:p>
-                <a:pPr marL="0" indent="0">
-                  <a:buNone/>
-                </a:pPr>
-                <a:endParaRPr lang="en-US" dirty="0"/>
-              </a:p>
-              <a:p>
-                <a:pPr marL="0" indent="0">
-                  <a:buNone/>
-                </a:pPr>
-                <a:r>
-                  <a:rPr lang="en-US" dirty="0">
-                    <a:solidFill>
-                      <a:srgbClr val="0033CC"/>
-                    </a:solidFill>
-                    <a:latin typeface="+mn-lt"/>
-                  </a:rPr>
-                  <a:t>Zero-One loss</a:t>
-                </a:r>
-              </a:p>
-              <a:p>
-                <a:pPr marL="0" indent="0">
-                  <a:buNone/>
-                </a:pPr>
-                <a14:m>
-                  <m:oMathPara xmlns:m="http://schemas.openxmlformats.org/officeDocument/2006/math">
-                    <m:oMath>
-                      <m:r>
-                        <a:rPr lang="en-US" i="1">
-                          <a:latin typeface="Cambria Math" panose="02040503050406030204" pitchFamily="18" charset="0"/>
-                          <a:ea typeface="Cambria Math" charset="0"/>
-                          <a:cs typeface="Cambria Math" charset="0"/>
-                        </a:rPr>
-                        <m:t>𝐿</m:t>
-                      </m:r>
-                      <m:d>
-                        <m:dPr>
-                          <m:ctrlPr>
-                            <a:rPr lang="en-US" i="1">
-                              <a:latin typeface="Cambria Math" panose="02040503050406030204" pitchFamily="18" charset="0"/>
-                              <a:ea typeface="Cambria Math" charset="0"/>
-                              <a:cs typeface="Cambria Math" charset="0"/>
-                            </a:rPr>
-                          </m:ctrlPr>
-                        </m:dPr>
-                        <m:e>
-                          <m:r>
-                            <a:rPr lang="en-US" i="1">
-                              <a:latin typeface="Cambria Math" panose="02040503050406030204" pitchFamily="18" charset="0"/>
-                              <a:ea typeface="Cambria Math" charset="0"/>
-                              <a:cs typeface="Cambria Math" charset="0"/>
-                            </a:rPr>
-                            <m:t>𝑦</m:t>
-                          </m:r>
-                          <m:r>
-                            <a:rPr lang="en-US" i="1">
-                              <a:latin typeface="Cambria Math" panose="02040503050406030204" pitchFamily="18" charset="0"/>
-                              <a:ea typeface="Cambria Math" charset="0"/>
-                              <a:cs typeface="Cambria Math" charset="0"/>
-                            </a:rPr>
-                            <m:t>, </m:t>
-                          </m:r>
-                          <m:r>
-                            <a:rPr lang="en-US" i="1">
-                              <a:latin typeface="Cambria Math" panose="02040503050406030204" pitchFamily="18" charset="0"/>
-                              <a:ea typeface="Cambria Math" charset="0"/>
-                              <a:cs typeface="Cambria Math" charset="0"/>
-                            </a:rPr>
-                            <m:t>𝑓</m:t>
-                          </m:r>
-                        </m:e>
-                      </m:d>
-                      <m:r>
-                        <a:rPr lang="en-US" i="1">
-                          <a:latin typeface="Cambria Math" panose="02040503050406030204" pitchFamily="18" charset="0"/>
-                          <a:ea typeface="Cambria Math" charset="0"/>
-                          <a:cs typeface="Cambria Math" charset="0"/>
-                        </a:rPr>
-                        <m:t>=</m:t>
-                      </m:r>
-                      <m:d>
-                        <m:dPr>
-                          <m:begChr m:val="{"/>
-                          <m:endChr m:val=""/>
-                          <m:ctrlPr>
-                            <a:rPr lang="en-US" b="0" i="1" smtClean="0">
-                              <a:latin typeface="Cambria Math" panose="02040503050406030204" pitchFamily="18" charset="0"/>
-                              <a:ea typeface="Cambria Math" charset="0"/>
-                            </a:rPr>
-                          </m:ctrlPr>
-                        </m:dPr>
-                        <m:e>
-                          <m:eqArr>
-                            <m:eqArrPr>
-                              <m:ctrlPr>
-                                <a:rPr lang="en-US" b="0" i="1" smtClean="0">
-                                  <a:latin typeface="Cambria Math" panose="02040503050406030204" pitchFamily="18" charset="0"/>
-                                  <a:ea typeface="Cambria Math" charset="0"/>
-                                </a:rPr>
-                              </m:ctrlPr>
-                            </m:eqArrPr>
-                            <m:e>
-                              <m:r>
-                                <a:rPr lang="en-US" b="0" i="1" smtClean="0">
-                                  <a:latin typeface="Cambria Math" panose="02040503050406030204" pitchFamily="18" charset="0"/>
-                                  <a:ea typeface="Cambria Math" charset="0"/>
-                                </a:rPr>
-                                <m:t>0          |</m:t>
-                              </m:r>
-                              <m:r>
-                                <a:rPr lang="en-US" b="0" i="1" smtClean="0">
-                                  <a:latin typeface="Cambria Math" panose="02040503050406030204" pitchFamily="18" charset="0"/>
-                                  <a:ea typeface="Cambria Math" charset="0"/>
-                                </a:rPr>
-                                <m:t>𝑦</m:t>
-                              </m:r>
-                              <m:r>
-                                <a:rPr lang="en-US" b="0" i="1" smtClean="0">
-                                  <a:latin typeface="Cambria Math" panose="02040503050406030204" pitchFamily="18" charset="0"/>
-                                  <a:ea typeface="Cambria Math" charset="0"/>
-                                </a:rPr>
-                                <m:t>−</m:t>
-                              </m:r>
-                              <m:r>
-                                <a:rPr lang="en-US" b="0" i="1" smtClean="0">
-                                  <a:latin typeface="Cambria Math" panose="02040503050406030204" pitchFamily="18" charset="0"/>
-                                  <a:ea typeface="Cambria Math" charset="0"/>
-                                </a:rPr>
-                                <m:t>𝑓</m:t>
-                              </m:r>
-                              <m:r>
-                                <a:rPr lang="en-US" b="0" i="1" smtClean="0">
-                                  <a:latin typeface="Cambria Math" panose="02040503050406030204" pitchFamily="18" charset="0"/>
-                                  <a:ea typeface="Cambria Math" charset="0"/>
-                                </a:rPr>
-                                <m:t>|≤</m:t>
-                              </m:r>
-                              <m:r>
-                                <a:rPr lang="en-US" b="0" i="1" smtClean="0">
-                                  <a:latin typeface="Cambria Math" panose="02040503050406030204" pitchFamily="18" charset="0"/>
-                                  <a:ea typeface="Cambria Math" panose="02040503050406030204" pitchFamily="18" charset="0"/>
-                                </a:rPr>
-                                <m:t>𝑏</m:t>
-                              </m:r>
-                            </m:e>
-                            <m:e>
-                              <m:r>
-                                <a:rPr lang="en-US" b="0" i="1" smtClean="0">
-                                  <a:latin typeface="Cambria Math" panose="02040503050406030204" pitchFamily="18" charset="0"/>
-                                  <a:ea typeface="Cambria Math" charset="0"/>
-                                </a:rPr>
-                                <m:t> 1          </m:t>
-                              </m:r>
-                              <m:d>
-                                <m:dPr>
-                                  <m:begChr m:val="|"/>
-                                  <m:endChr m:val="|"/>
-                                  <m:ctrlPr>
-                                    <a:rPr lang="en-US" b="0" i="1" smtClean="0">
-                                      <a:latin typeface="Cambria Math" panose="02040503050406030204" pitchFamily="18" charset="0"/>
-                                      <a:ea typeface="Cambria Math" charset="0"/>
-                                    </a:rPr>
-                                  </m:ctrlPr>
-                                </m:dPr>
-                                <m:e>
-                                  <m:r>
-                                    <a:rPr lang="en-US" b="0" i="1" smtClean="0">
-                                      <a:latin typeface="Cambria Math" panose="02040503050406030204" pitchFamily="18" charset="0"/>
-                                      <a:ea typeface="Cambria Math" charset="0"/>
-                                    </a:rPr>
-                                    <m:t>𝑦</m:t>
-                                  </m:r>
-                                  <m:r>
-                                    <a:rPr lang="en-US" b="0" i="1" smtClean="0">
-                                      <a:latin typeface="Cambria Math" panose="02040503050406030204" pitchFamily="18" charset="0"/>
-                                      <a:ea typeface="Cambria Math" charset="0"/>
-                                    </a:rPr>
-                                    <m:t>−</m:t>
-                                  </m:r>
-                                  <m:r>
-                                    <a:rPr lang="en-US" b="0" i="1" smtClean="0">
-                                      <a:latin typeface="Cambria Math" panose="02040503050406030204" pitchFamily="18" charset="0"/>
-                                      <a:ea typeface="Cambria Math" charset="0"/>
-                                    </a:rPr>
-                                    <m:t>𝑓</m:t>
-                                  </m:r>
-                                </m:e>
-                              </m:d>
-                              <m:r>
-                                <a:rPr lang="en-US" b="0" i="1" smtClean="0">
-                                  <a:latin typeface="Cambria Math" panose="02040503050406030204" pitchFamily="18" charset="0"/>
-                                  <a:ea typeface="Cambria Math" charset="0"/>
-                                </a:rPr>
-                                <m:t>&gt;</m:t>
-                              </m:r>
-                              <m:r>
-                                <a:rPr lang="en-US" b="0" i="1" smtClean="0">
-                                  <a:latin typeface="Cambria Math" panose="02040503050406030204" pitchFamily="18" charset="0"/>
-                                  <a:ea typeface="Cambria Math" charset="0"/>
-                                </a:rPr>
-                                <m:t>𝑏</m:t>
-                              </m:r>
-                              <m:r>
-                                <a:rPr lang="en-US" b="0" i="1" smtClean="0">
-                                  <a:latin typeface="Cambria Math" panose="02040503050406030204" pitchFamily="18" charset="0"/>
-                                  <a:ea typeface="Cambria Math" charset="0"/>
-                                </a:rPr>
-                                <m:t> </m:t>
-                              </m:r>
-                            </m:e>
-                          </m:eqArr>
-                        </m:e>
-                      </m:d>
-                    </m:oMath>
-                  </m:oMathPara>
-                </a14:m>
-                <a:endParaRPr lang="en-US" dirty="0"/>
-              </a:p>
-              <a:p>
-                <a:pPr marL="0" indent="0">
-                  <a:buNone/>
-                </a:pPr>
-                <a:endParaRPr lang="en-US" dirty="0"/>
-              </a:p>
-              <a:p>
-                <a:pPr marL="0" indent="0">
-                  <a:buNone/>
-                </a:pPr>
-                <a:endParaRPr lang="en-US" dirty="0"/>
-              </a:p>
-              <a:p>
-                <a:pPr marL="0" indent="0">
-                  <a:buNone/>
-                </a:pPr>
-                <a:endParaRPr lang="en-US" dirty="0"/>
-              </a:p>
-            </p:txBody>
-          </p:sp>
-        </mc:Choice>
-        <mc:Fallback>
-          <p:sp>
-            <p:nvSpPr>
-              <p:cNvPr id="4" name="Content Placeholder 3">
-                <a:extLst>
-                  <a:ext uri="{FF2B5EF4-FFF2-40B4-BE49-F238E27FC236}">
-                    <a16:creationId xmlns:a16="http://schemas.microsoft.com/office/drawing/2014/main" id="{255DEE06-32D2-1EC4-196B-00B030238D4F}"/>
-                  </a:ext>
-                </a:extLst>
-              </p:cNvPr>
-              <p:cNvSpPr>
-                <a:spLocks noGrp="1" noRot="1" noChangeAspect="1" noMove="1" noResize="1" noEditPoints="1" noAdjustHandles="1" noChangeArrowheads="1" noChangeShapeType="1" noTextEdit="1"/>
-              </p:cNvSpPr>
-              <p:nvPr>
-                <p:ph sz="half" idx="1"/>
-              </p:nvPr>
-            </p:nvSpPr>
-            <p:spPr>
-              <a:xfrm>
-                <a:off x="711200" y="1123950"/>
-                <a:ext cx="7747000" cy="4819650"/>
-              </a:xfrm>
-              <a:blipFill>
-                <a:blip r:embed="rId2"/>
-                <a:stretch>
-                  <a:fillRect l="-1309" t="-1050" b="-52231"/>
-                </a:stretch>
-              </a:blipFill>
-            </p:spPr>
-            <p:txBody>
-              <a:bodyPr/>
-              <a:lstStyle/>
-              <a:p>
-                <a:r>
-                  <a:rPr lang="en-US">
-                    <a:noFill/>
-                  </a:rPr>
-                  <a:t> </a:t>
-                </a:r>
-              </a:p>
-            </p:txBody>
-          </p:sp>
-        </mc:Fallback>
-      </mc:AlternateContent>
-      <p:sp>
-        <p:nvSpPr>
-          <p:cNvPr id="3" name="Title 2">
-            <a:extLst>
-              <a:ext uri="{FF2B5EF4-FFF2-40B4-BE49-F238E27FC236}">
-                <a16:creationId xmlns:a16="http://schemas.microsoft.com/office/drawing/2014/main" id="{60E6CDD5-5F74-FC26-FB76-AE145174BADC}"/>
-              </a:ext>
-            </a:extLst>
-          </p:cNvPr>
-          <p:cNvSpPr>
-            <a:spLocks noGrp="1"/>
-          </p:cNvSpPr>
-          <p:nvPr>
-            <p:ph type="title"/>
-          </p:nvPr>
-        </p:nvSpPr>
-        <p:spPr/>
-        <p:txBody>
-          <a:bodyPr/>
-          <a:lstStyle/>
-          <a:p>
-            <a:r>
-              <a:rPr lang="en-US" dirty="0">
-                <a:solidFill>
-                  <a:srgbClr val="0033CC"/>
-                </a:solidFill>
-              </a:rPr>
-              <a:t>Other Loss Functions</a:t>
-            </a:r>
-          </a:p>
-        </p:txBody>
-      </p:sp>
-    </p:spTree>
-    <p:extLst>
-      <p:ext uri="{BB962C8B-B14F-4D97-AF65-F5344CB8AC3E}">
-        <p14:creationId xmlns:p14="http://schemas.microsoft.com/office/powerpoint/2010/main" val="2125969678"/>
-      </p:ext>
-    </p:extLst>
-  </p:cSld>
-  <p:clrMapOvr>
-    <a:masterClrMapping/>
-  </p:clrMapOvr>
-  <p:timing>
-    <p:tnLst>
-      <p:par>
-        <p:cTn id="1" dur="indefinite" restart="never" nodeType="tmRoot">
-          <p:childTnLst>
-            <p:seq concurrent="1" nextAc="seek">
-              <p:cTn id="2" dur="indefinite" nodeType="mainSeq">
-                <p:childTnLst>
-                  <p:par>
-                    <p:cTn id="3" fill="hold">
-                      <p:stCondLst>
-                        <p:cond delay="indefinite"/>
-                        <p:cond evt="onBegin" delay="0">
-                          <p:tn val="2"/>
-                        </p:cond>
-                      </p:stCondLst>
-                      <p:childTnLst>
-                        <p:par>
-                          <p:cTn id="4" fill="hold">
-                            <p:stCondLst>
-                              <p:cond delay="0"/>
-                            </p:stCondLst>
-                            <p:childTnLst>
                               <p:par>
-                                <p:cTn id="5" presetID="1" presetClass="entr" presetSubtype="0" fill="hold" nodeType="withEffect">
-                                  <p:stCondLst>
-                                    <p:cond delay="0"/>
-                                  </p:stCondLst>
-                                  <p:childTnLst>
-                                    <p:set>
-                                      <p:cBhvr>
-                                        <p:cTn id="6" dur="1" fill="hold">
-                                          <p:stCondLst>
-                                            <p:cond delay="0"/>
-                                          </p:stCondLst>
-                                        </p:cTn>
-                                        <p:tgtEl>
-                                          <p:spTgt spid="4">
-                                            <p:txEl>
-                                              <p:pRg st="0" end="0"/>
-                                            </p:txEl>
-                                          </p:spTgt>
-                                        </p:tgtEl>
-                                        <p:attrNameLst>
-                                          <p:attrName>style.visibility</p:attrName>
-                                        </p:attrNameLst>
-                                      </p:cBhvr>
-                                      <p:to>
-                                        <p:strVal val="visible"/>
-                                      </p:to>
-                                    </p:set>
-                                  </p:childTnLst>
-                                </p:cTn>
-                              </p:par>
-                              <p:par>
-                                <p:cTn id="7" presetID="1" presetClass="entr" presetSubtype="0" fill="hold" nodeType="withEffect">
-                                  <p:stCondLst>
-                                    <p:cond delay="0"/>
-                                  </p:stCondLst>
-                                  <p:childTnLst>
-                                    <p:set>
-                                      <p:cBhvr>
-                                        <p:cTn id="8" dur="1" fill="hold">
-                                          <p:stCondLst>
-                                            <p:cond delay="0"/>
-                                          </p:stCondLst>
-                                        </p:cTn>
-                                        <p:tgtEl>
-                                          <p:spTgt spid="4">
-                                            <p:txEl>
-                                              <p:pRg st="1" end="1"/>
-                                            </p:txEl>
-                                          </p:spTgt>
-                                        </p:tgtEl>
-                                        <p:attrNameLst>
-                                          <p:attrName>style.visibility</p:attrName>
-                                        </p:attrNameLst>
-                                      </p:cBhvr>
-                                      <p:to>
-                                        <p:strVal val="visible"/>
-                                      </p:to>
-                                    </p:set>
-                                  </p:childTnLst>
-                                </p:cTn>
-                              </p:par>
-                            </p:childTnLst>
-                          </p:cTn>
-                        </p:par>
-                      </p:childTnLst>
-                    </p:cTn>
-                  </p:par>
-                  <p:par>
-                    <p:cTn id="9" fill="hold">
-                      <p:stCondLst>
-                        <p:cond delay="indefinite"/>
-                      </p:stCondLst>
-                      <p:childTnLst>
-                        <p:par>
-                          <p:cTn id="10" fill="hold">
-                            <p:stCondLst>
-                              <p:cond delay="0"/>
-                            </p:stCondLst>
-                            <p:childTnLst>
-                              <p:par>
-                                <p:cTn id="11" presetID="1" presetClass="entr" presetSubtype="0" fill="hold" nodeType="clickEffect">
-                                  <p:stCondLst>
-                                    <p:cond delay="0"/>
-                                  </p:stCondLst>
-                                  <p:childTnLst>
-                                    <p:set>
-                                      <p:cBhvr>
-                                        <p:cTn id="12" dur="1" fill="hold">
-                                          <p:stCondLst>
-                                            <p:cond delay="0"/>
-                                          </p:stCondLst>
-                                        </p:cTn>
-                                        <p:tgtEl>
-                                          <p:spTgt spid="4">
-                                            <p:txEl>
-                                              <p:pRg st="3" end="3"/>
-                                            </p:txEl>
-                                          </p:spTgt>
-                                        </p:tgtEl>
-                                        <p:attrNameLst>
-                                          <p:attrName>style.visibility</p:attrName>
-                                        </p:attrNameLst>
-                                      </p:cBhvr>
-                                      <p:to>
-                                        <p:strVal val="visible"/>
-                                      </p:to>
-                                    </p:set>
-                                  </p:childTnLst>
-                                </p:cTn>
-                              </p:par>
-                              <p:par>
-                                <p:cTn id="13" presetID="1" presetClass="entr" presetSubtype="0" fill="hold" nodeType="withEffect">
-                                  <p:stCondLst>
-                                    <p:cond delay="0"/>
-                                  </p:stCondLst>
-                                  <p:childTnLst>
-                                    <p:set>
-                                      <p:cBhvr>
-                                        <p:cTn id="14" dur="1" fill="hold">
-                                          <p:stCondLst>
-                                            <p:cond delay="0"/>
-                                          </p:stCondLst>
-                                        </p:cTn>
-                                        <p:tgtEl>
-                                          <p:spTgt spid="4">
-                                            <p:txEl>
-                                              <p:pRg st="4" end="4"/>
-                                            </p:txEl>
-                                          </p:spTgt>
-                                        </p:tgtEl>
-                                        <p:attrNameLst>
-                                          <p:attrName>style.visibility</p:attrName>
-                                        </p:attrNameLst>
-                                      </p:cBhvr>
-                                      <p:to>
-                                        <p:strVal val="visible"/>
-                                      </p:to>
-                                    </p:set>
-                                  </p:childTnLst>
-                                </p:cTn>
-                              </p:par>
-                            </p:childTnLst>
-                          </p:cTn>
-                        </p:par>
-                      </p:childTnLst>
-                    </p:cTn>
-                  </p:par>
-                  <p:par>
-                    <p:cTn id="15" fill="hold">
-                      <p:stCondLst>
-                        <p:cond delay="indefinite"/>
-                      </p:stCondLst>
-                      <p:childTnLst>
-                        <p:par>
-                          <p:cTn id="16" fill="hold">
-                            <p:stCondLst>
-                              <p:cond delay="0"/>
-                            </p:stCondLst>
-                            <p:childTnLst>
-                              <p:par>
-                                <p:cTn id="17" presetID="1" presetClass="entr" presetSubtype="0" fill="hold" nodeType="clickEffect">
-                                  <p:stCondLst>
-                                    <p:cond delay="0"/>
-                                  </p:stCondLst>
-                                  <p:childTnLst>
-                                    <p:set>
-                                      <p:cBhvr>
-                                        <p:cTn id="18" dur="1" fill="hold">
-                                          <p:stCondLst>
-                                            <p:cond delay="0"/>
-                                          </p:stCondLst>
-                                        </p:cTn>
-                                        <p:tgtEl>
-                                          <p:spTgt spid="4">
-                                            <p:txEl>
-                                              <p:pRg st="6" end="6"/>
-                                            </p:txEl>
-                                          </p:spTgt>
-                                        </p:tgtEl>
-                                        <p:attrNameLst>
-                                          <p:attrName>style.visibility</p:attrName>
-                                        </p:attrNameLst>
-                                      </p:cBhvr>
-                                      <p:to>
-                                        <p:strVal val="visible"/>
-                                      </p:to>
-                                    </p:set>
-                                  </p:childTnLst>
-                                </p:cTn>
-                              </p:par>
-                              <p:par>
-                                <p:cTn id="19" presetID="1" presetClass="entr" presetSubtype="0" fill="hold" nodeType="withEffect">
+                                <p:cTn id="19" presetID="10" presetClass="entr" presetSubtype="0" fill="hold" nodeType="withEffect">
                                   <p:stCondLst>
                                     <p:cond delay="0"/>
                                   </p:stCondLst>
@@ -17450,9 +15303,9 @@
                                           </p:stCondLst>
                                         </p:cTn>
                                         <p:tgtEl>
-                                          <p:spTgt spid="4">
+                                          <p:spTgt spid="2">
                                             <p:txEl>
-                                              <p:pRg st="7" end="7"/>
+                                              <p:pRg st="8" end="8"/>
                                             </p:txEl>
                                           </p:spTgt>
                                         </p:tgtEl>
@@ -17464,6 +15317,104 @@
                                         <p:strVal val="visible"/>
                                       </p:to>
                                     </p:set>
+                                    <p:animEffect transition="in" filter="fade">
+                                      <p:cBhvr>
+                                        <p:cTn id="21" dur="500"/>
+                                        <p:tgtEl>
+                                          <p:spTgt spid="2">
+                                            <p:txEl>
+                                              <p:pRg st="8" end="8"/>
+                                            </p:txEl>
+                                          </p:spTgt>
+                                        </p:tgtEl>
+                                      </p:cBhvr>
+                                    </p:animEffect>
+                                  </p:childTnLst>
+                                </p:cTn>
+                              </p:par>
+                              <p:par>
+                                <p:cTn id="22" presetID="10" presetClass="entr" presetSubtype="0" fill="hold" nodeType="withEffect">
+                                  <p:stCondLst>
+                                    <p:cond delay="0"/>
+                                  </p:stCondLst>
+                                  <p:childTnLst>
+                                    <p:set>
+                                      <p:cBhvr>
+                                        <p:cTn id="23" dur="1" fill="hold">
+                                          <p:stCondLst>
+                                            <p:cond delay="0"/>
+                                          </p:stCondLst>
+                                        </p:cTn>
+                                        <p:tgtEl>
+                                          <p:spTgt spid="2">
+                                            <p:txEl>
+                                              <p:pRg st="9" end="9"/>
+                                            </p:txEl>
+                                          </p:spTgt>
+                                        </p:tgtEl>
+                                        <p:attrNameLst>
+                                          <p:attrName>style.visibility</p:attrName>
+                                        </p:attrNameLst>
+                                      </p:cBhvr>
+                                      <p:to>
+                                        <p:strVal val="visible"/>
+                                      </p:to>
+                                    </p:set>
+                                    <p:animEffect transition="in" filter="fade">
+                                      <p:cBhvr>
+                                        <p:cTn id="24" dur="500"/>
+                                        <p:tgtEl>
+                                          <p:spTgt spid="2">
+                                            <p:txEl>
+                                              <p:pRg st="9" end="9"/>
+                                            </p:txEl>
+                                          </p:spTgt>
+                                        </p:tgtEl>
+                                      </p:cBhvr>
+                                    </p:animEffect>
+                                  </p:childTnLst>
+                                </p:cTn>
+                              </p:par>
+                              <p:par>
+                                <p:cTn id="25" presetID="10" presetClass="entr" presetSubtype="0" fill="hold" nodeType="withEffect">
+                                  <p:stCondLst>
+                                    <p:cond delay="0"/>
+                                  </p:stCondLst>
+                                  <p:childTnLst>
+                                    <p:set>
+                                      <p:cBhvr>
+                                        <p:cTn id="26" dur="1" fill="hold">
+                                          <p:stCondLst>
+                                            <p:cond delay="0"/>
+                                          </p:stCondLst>
+                                        </p:cTn>
+                                        <p:tgtEl>
+                                          <p:spTgt spid="2">
+                                            <p:txEl>
+                                              <p:pRg st="10" end="10"/>
+                                            </p:txEl>
+                                          </p:spTgt>
+                                        </p:tgtEl>
+                                        <p:attrNameLst>
+                                          <p:attrName>style.visibility</p:attrName>
+                                        </p:attrNameLst>
+                                      </p:cBhvr>
+                                      <p:to>
+                                        <p:strVal val="visible"/>
+                                      </p:to>
+                                    </p:set>
+                                    <p:animEffect transition="in" filter="fade">
+                                      <p:cBhvr>
+                                        <p:cTn id="27" dur="500"/>
+                                        <p:tgtEl>
+                                          <p:spTgt spid="2">
+                                            <p:txEl>
+                                              <p:pRg st="10" end="10"/>
+                                            </p:txEl>
+                                          </p:spTgt>
+                                        </p:tgtEl>
+                                      </p:cBhvr>
+                                    </p:animEffect>
                                   </p:childTnLst>
                                 </p:cTn>
                               </p:par>
@@ -17498,139 +15449,7 @@
 </p:sld>
 </file>
 
-<file path=ppt/slides/slide23.xml><?xml version="1.0" encoding="utf-8"?>
-<p:sld xmlns:a="http://schemas.openxmlformats.org/drawingml/2006/main" xmlns:r="http://schemas.openxmlformats.org/officeDocument/2006/relationships" xmlns:p="http://schemas.openxmlformats.org/presentationml/2006/main">
-  <p:cSld>
-    <p:spTree>
-      <p:nvGrpSpPr>
-        <p:cNvPr id="1" name="">
-          <a:extLst>
-            <a:ext uri="{FF2B5EF4-FFF2-40B4-BE49-F238E27FC236}">
-              <a16:creationId xmlns:a16="http://schemas.microsoft.com/office/drawing/2014/main" id="{61ECB4C0-80C8-07F9-C349-10ACCC49952E}"/>
-            </a:ext>
-          </a:extLst>
-        </p:cNvPr>
-        <p:cNvGrpSpPr/>
-        <p:nvPr/>
-      </p:nvGrpSpPr>
-      <p:grpSpPr>
-        <a:xfrm>
-          <a:off x="0" y="0"/>
-          <a:ext cx="0" cy="0"/>
-          <a:chOff x="0" y="0"/>
-          <a:chExt cx="0" cy="0"/>
-        </a:xfrm>
-      </p:grpSpPr>
-      <p:pic>
-        <p:nvPicPr>
-          <p:cNvPr id="11" name="Picture 10">
-            <a:extLst>
-              <a:ext uri="{FF2B5EF4-FFF2-40B4-BE49-F238E27FC236}">
-                <a16:creationId xmlns:a16="http://schemas.microsoft.com/office/drawing/2014/main" id="{351E33F5-BBCF-6CD6-6E9E-6FD680B452EB}"/>
-              </a:ext>
-            </a:extLst>
-          </p:cNvPr>
-          <p:cNvPicPr>
-            <a:picLocks noChangeAspect="1"/>
-          </p:cNvPicPr>
-          <p:nvPr/>
-        </p:nvPicPr>
-        <p:blipFill>
-          <a:blip r:embed="rId2"/>
-          <a:stretch>
-            <a:fillRect/>
-          </a:stretch>
-        </p:blipFill>
-        <p:spPr>
-          <a:xfrm>
-            <a:off x="946150" y="457200"/>
-            <a:ext cx="7251700" cy="5791200"/>
-          </a:xfrm>
-          <a:prstGeom prst="rect">
-            <a:avLst/>
-          </a:prstGeom>
-        </p:spPr>
-      </p:pic>
-    </p:spTree>
-    <p:extLst>
-      <p:ext uri="{BB962C8B-B14F-4D97-AF65-F5344CB8AC3E}">
-        <p14:creationId xmlns:p14="http://schemas.microsoft.com/office/powerpoint/2010/main" val="782288326"/>
-      </p:ext>
-    </p:extLst>
-  </p:cSld>
-  <p:clrMapOvr>
-    <a:masterClrMapping/>
-  </p:clrMapOvr>
-</p:sld>
-</file>
-
-<file path=ppt/slides/slide24.xml><?xml version="1.0" encoding="utf-8"?>
-<p:sld xmlns:a="http://schemas.openxmlformats.org/drawingml/2006/main" xmlns:r="http://schemas.openxmlformats.org/officeDocument/2006/relationships" xmlns:p="http://schemas.openxmlformats.org/presentationml/2006/main">
-  <p:cSld>
-    <p:spTree>
-      <p:nvGrpSpPr>
-        <p:cNvPr id="1" name="">
-          <a:extLst>
-            <a:ext uri="{FF2B5EF4-FFF2-40B4-BE49-F238E27FC236}">
-              <a16:creationId xmlns:a16="http://schemas.microsoft.com/office/drawing/2014/main" id="{4CA98269-3DD1-62B3-A440-2DC62FE9527E}"/>
-            </a:ext>
-          </a:extLst>
-        </p:cNvPr>
-        <p:cNvGrpSpPr/>
-        <p:nvPr/>
-      </p:nvGrpSpPr>
-      <p:grpSpPr>
-        <a:xfrm>
-          <a:off x="0" y="0"/>
-          <a:ext cx="0" cy="0"/>
-          <a:chOff x="0" y="0"/>
-          <a:chExt cx="0" cy="0"/>
-        </a:xfrm>
-      </p:grpSpPr>
-      <p:pic>
-        <p:nvPicPr>
-          <p:cNvPr id="3" name="Picture 2">
-            <a:extLst>
-              <a:ext uri="{FF2B5EF4-FFF2-40B4-BE49-F238E27FC236}">
-                <a16:creationId xmlns:a16="http://schemas.microsoft.com/office/drawing/2014/main" id="{A7F23B5B-2925-0F05-2F6A-4DC2A84C3EBD}"/>
-              </a:ext>
-            </a:extLst>
-          </p:cNvPr>
-          <p:cNvPicPr>
-            <a:picLocks noChangeAspect="1"/>
-          </p:cNvPicPr>
-          <p:nvPr/>
-        </p:nvPicPr>
-        <p:blipFill>
-          <a:blip r:embed="rId2"/>
-          <a:stretch>
-            <a:fillRect/>
-          </a:stretch>
-        </p:blipFill>
-        <p:spPr>
-          <a:xfrm>
-            <a:off x="977900" y="527050"/>
-            <a:ext cx="7188200" cy="5803900"/>
-          </a:xfrm>
-          <a:prstGeom prst="rect">
-            <a:avLst/>
-          </a:prstGeom>
-        </p:spPr>
-      </p:pic>
-    </p:spTree>
-    <p:extLst>
-      <p:ext uri="{BB962C8B-B14F-4D97-AF65-F5344CB8AC3E}">
-        <p14:creationId xmlns:p14="http://schemas.microsoft.com/office/powerpoint/2010/main" val="71968830"/>
-      </p:ext>
-    </p:extLst>
-  </p:cSld>
-  <p:clrMapOvr>
-    <a:masterClrMapping/>
-  </p:clrMapOvr>
-</p:sld>
-</file>
-
-<file path=ppt/slides/slide25.xml><?xml version="1.0" encoding="utf-8"?>
+<file path=ppt/slides/slide21.xml><?xml version="1.0" encoding="utf-8"?>
 <p:sld xmlns:a="http://schemas.openxmlformats.org/drawingml/2006/main" xmlns:r="http://schemas.openxmlformats.org/officeDocument/2006/relationships" xmlns:p="http://schemas.openxmlformats.org/presentationml/2006/main">
   <p:cSld>
     <p:spTree>
@@ -17681,7 +15500,512 @@
                 </a:pPr>
                 <a:r>
                   <a:rPr lang="en-US" b="1" dirty="0"/>
-                  <a:t>Stochastic Gradient Descent</a:t>
+                  <a:t>Risk Minimization</a:t>
+                </a:r>
+              </a:p>
+              <a:p>
+                <a:r>
+                  <a:rPr lang="en-US" dirty="0"/>
+                  <a:t>Given a data set </a:t>
+                </a:r>
+                <a14:m>
+                  <m:oMath xmlns:m="http://schemas.openxmlformats.org/officeDocument/2006/math">
+                    <m:r>
+                      <a:rPr lang="en-US" i="1">
+                        <a:solidFill>
+                          <a:srgbClr val="0033CC"/>
+                        </a:solidFill>
+                        <a:latin typeface="Cambria Math" panose="02040503050406030204" pitchFamily="18" charset="0"/>
+                      </a:rPr>
+                      <m:t>𝐷</m:t>
+                    </m:r>
+                    <m:r>
+                      <a:rPr lang="en-US" i="1">
+                        <a:solidFill>
+                          <a:srgbClr val="0033CC"/>
+                        </a:solidFill>
+                        <a:latin typeface="Cambria Math" panose="02040503050406030204" pitchFamily="18" charset="0"/>
+                      </a:rPr>
+                      <m:t>=</m:t>
+                    </m:r>
+                    <m:sSubSup>
+                      <m:sSubSupPr>
+                        <m:ctrlPr>
+                          <a:rPr lang="en-US" i="1">
+                            <a:solidFill>
+                              <a:srgbClr val="0033CC"/>
+                            </a:solidFill>
+                            <a:latin typeface="Cambria Math" panose="02040503050406030204" pitchFamily="18" charset="0"/>
+                          </a:rPr>
+                        </m:ctrlPr>
+                      </m:sSubSupPr>
+                      <m:e>
+                        <m:d>
+                          <m:dPr>
+                            <m:begChr m:val="{"/>
+                            <m:endChr m:val="}"/>
+                            <m:ctrlPr>
+                              <a:rPr lang="en-US" i="1">
+                                <a:solidFill>
+                                  <a:srgbClr val="0033CC"/>
+                                </a:solidFill>
+                                <a:latin typeface="Cambria Math" panose="02040503050406030204" pitchFamily="18" charset="0"/>
+                              </a:rPr>
+                            </m:ctrlPr>
+                          </m:dPr>
+                          <m:e>
+                            <m:d>
+                              <m:dPr>
+                                <m:ctrlPr>
+                                  <a:rPr lang="en-US" i="1">
+                                    <a:solidFill>
+                                      <a:srgbClr val="0033CC"/>
+                                    </a:solidFill>
+                                    <a:latin typeface="Cambria Math" panose="02040503050406030204" pitchFamily="18" charset="0"/>
+                                  </a:rPr>
+                                </m:ctrlPr>
+                              </m:dPr>
+                              <m:e>
+                                <m:r>
+                                  <a:rPr lang="en-US" i="1">
+                                    <a:solidFill>
+                                      <a:srgbClr val="0033CC"/>
+                                    </a:solidFill>
+                                    <a:latin typeface="Cambria Math" panose="02040503050406030204" pitchFamily="18" charset="0"/>
+                                  </a:rPr>
+                                  <m:t>𝑥</m:t>
+                                </m:r>
+                                <m:r>
+                                  <a:rPr lang="en-US" i="1">
+                                    <a:solidFill>
+                                      <a:srgbClr val="0033CC"/>
+                                    </a:solidFill>
+                                    <a:latin typeface="Cambria Math" panose="02040503050406030204" pitchFamily="18" charset="0"/>
+                                  </a:rPr>
+                                  <m:t>,</m:t>
+                                </m:r>
+                                <m:r>
+                                  <a:rPr lang="en-US" i="1">
+                                    <a:solidFill>
+                                      <a:srgbClr val="0033CC"/>
+                                    </a:solidFill>
+                                    <a:latin typeface="Cambria Math" panose="02040503050406030204" pitchFamily="18" charset="0"/>
+                                  </a:rPr>
+                                  <m:t>𝑦</m:t>
+                                </m:r>
+                              </m:e>
+                            </m:d>
+                          </m:e>
+                        </m:d>
+                      </m:e>
+                      <m:sub>
+                        <m:r>
+                          <a:rPr lang="en-US" i="1">
+                            <a:solidFill>
+                              <a:srgbClr val="0033CC"/>
+                            </a:solidFill>
+                            <a:latin typeface="Cambria Math" panose="02040503050406030204" pitchFamily="18" charset="0"/>
+                          </a:rPr>
+                          <m:t>𝑖</m:t>
+                        </m:r>
+                        <m:r>
+                          <a:rPr lang="en-US" i="1">
+                            <a:solidFill>
+                              <a:srgbClr val="0033CC"/>
+                            </a:solidFill>
+                            <a:latin typeface="Cambria Math" panose="02040503050406030204" pitchFamily="18" charset="0"/>
+                          </a:rPr>
+                          <m:t>=1</m:t>
+                        </m:r>
+                      </m:sub>
+                      <m:sup>
+                        <m:r>
+                          <a:rPr lang="en-US" i="1">
+                            <a:solidFill>
+                              <a:srgbClr val="0033CC"/>
+                            </a:solidFill>
+                            <a:latin typeface="Cambria Math" panose="02040503050406030204" pitchFamily="18" charset="0"/>
+                          </a:rPr>
+                          <m:t>𝑁</m:t>
+                        </m:r>
+                      </m:sup>
+                    </m:sSubSup>
+                  </m:oMath>
+                </a14:m>
+                <a:r>
+                  <a:rPr lang="en-US" dirty="0"/>
+                  <a:t>, a model </a:t>
+                </a:r>
+                <a14:m>
+                  <m:oMath xmlns:m="http://schemas.openxmlformats.org/officeDocument/2006/math">
+                    <m:sSub>
+                      <m:sSubPr>
+                        <m:ctrlPr>
+                          <a:rPr lang="en-US" i="1">
+                            <a:solidFill>
+                              <a:srgbClr val="0033CC"/>
+                            </a:solidFill>
+                            <a:latin typeface="Cambria Math" panose="02040503050406030204" pitchFamily="18" charset="0"/>
+                          </a:rPr>
+                        </m:ctrlPr>
+                      </m:sSubPr>
+                      <m:e>
+                        <m:r>
+                          <a:rPr lang="en-US" i="1">
+                            <a:solidFill>
+                              <a:srgbClr val="0033CC"/>
+                            </a:solidFill>
+                            <a:latin typeface="Cambria Math" panose="02040503050406030204" pitchFamily="18" charset="0"/>
+                          </a:rPr>
+                          <m:t>𝑓</m:t>
+                        </m:r>
+                      </m:e>
+                      <m:sub>
+                        <m:r>
+                          <a:rPr lang="en-US" i="1">
+                            <a:solidFill>
+                              <a:srgbClr val="0033CC"/>
+                            </a:solidFill>
+                            <a:latin typeface="Cambria Math" panose="02040503050406030204" pitchFamily="18" charset="0"/>
+                          </a:rPr>
+                          <m:t>𝜔</m:t>
+                        </m:r>
+                      </m:sub>
+                    </m:sSub>
+                    <m:d>
+                      <m:dPr>
+                        <m:ctrlPr>
+                          <a:rPr lang="en-US" i="1">
+                            <a:solidFill>
+                              <a:srgbClr val="0033CC"/>
+                            </a:solidFill>
+                            <a:latin typeface="Cambria Math" panose="02040503050406030204" pitchFamily="18" charset="0"/>
+                          </a:rPr>
+                        </m:ctrlPr>
+                      </m:dPr>
+                      <m:e>
+                        <m:r>
+                          <a:rPr lang="en-US" i="1">
+                            <a:solidFill>
+                              <a:srgbClr val="0033CC"/>
+                            </a:solidFill>
+                            <a:latin typeface="Cambria Math" panose="02040503050406030204" pitchFamily="18" charset="0"/>
+                          </a:rPr>
+                          <m:t>𝑥</m:t>
+                        </m:r>
+                      </m:e>
+                    </m:d>
+                  </m:oMath>
+                </a14:m>
+                <a:r>
+                  <a:rPr lang="en-US" dirty="0"/>
+                  <a:t>, and a loss function </a:t>
+                </a:r>
+                <a14:m>
+                  <m:oMath xmlns:m="http://schemas.openxmlformats.org/officeDocument/2006/math">
+                    <m:r>
+                      <a:rPr lang="en-US" i="1">
+                        <a:solidFill>
+                          <a:srgbClr val="0033CC"/>
+                        </a:solidFill>
+                        <a:latin typeface="Cambria Math" panose="02040503050406030204" pitchFamily="18" charset="0"/>
+                      </a:rPr>
+                      <m:t>𝐿</m:t>
+                    </m:r>
+                    <m:r>
+                      <a:rPr lang="en-US" i="1">
+                        <a:solidFill>
+                          <a:srgbClr val="0033CC"/>
+                        </a:solidFill>
+                        <a:latin typeface="Cambria Math" panose="02040503050406030204" pitchFamily="18" charset="0"/>
+                      </a:rPr>
+                      <m:t>(</m:t>
+                    </m:r>
+                    <m:r>
+                      <a:rPr lang="en-US" i="1">
+                        <a:solidFill>
+                          <a:srgbClr val="0033CC"/>
+                        </a:solidFill>
+                        <a:latin typeface="Cambria Math" panose="02040503050406030204" pitchFamily="18" charset="0"/>
+                      </a:rPr>
+                      <m:t>𝑦</m:t>
+                    </m:r>
+                    <m:r>
+                      <a:rPr lang="en-US" i="1">
+                        <a:solidFill>
+                          <a:srgbClr val="0033CC"/>
+                        </a:solidFill>
+                        <a:latin typeface="Cambria Math" panose="02040503050406030204" pitchFamily="18" charset="0"/>
+                      </a:rPr>
+                      <m:t>, </m:t>
+                    </m:r>
+                    <m:r>
+                      <a:rPr lang="en-US" i="1">
+                        <a:solidFill>
+                          <a:srgbClr val="0033CC"/>
+                        </a:solidFill>
+                        <a:latin typeface="Cambria Math" panose="02040503050406030204" pitchFamily="18" charset="0"/>
+                      </a:rPr>
+                      <m:t>𝑓</m:t>
+                    </m:r>
+                    <m:r>
+                      <a:rPr lang="en-US" i="1">
+                        <a:solidFill>
+                          <a:srgbClr val="0033CC"/>
+                        </a:solidFill>
+                        <a:latin typeface="Cambria Math" panose="02040503050406030204" pitchFamily="18" charset="0"/>
+                      </a:rPr>
+                      <m:t>)</m:t>
+                    </m:r>
+                  </m:oMath>
+                </a14:m>
+                <a:r>
+                  <a:rPr lang="en-US" dirty="0"/>
+                  <a:t>, the optimal function </a:t>
+                </a:r>
+                <a14:m>
+                  <m:oMath xmlns:m="http://schemas.openxmlformats.org/officeDocument/2006/math">
+                    <m:sSub>
+                      <m:sSubPr>
+                        <m:ctrlPr>
+                          <a:rPr lang="en-US" i="1">
+                            <a:solidFill>
+                              <a:srgbClr val="0033CC"/>
+                            </a:solidFill>
+                            <a:latin typeface="Cambria Math" panose="02040503050406030204" pitchFamily="18" charset="0"/>
+                          </a:rPr>
+                        </m:ctrlPr>
+                      </m:sSubPr>
+                      <m:e>
+                        <m:r>
+                          <a:rPr lang="en-US" i="1">
+                            <a:solidFill>
+                              <a:srgbClr val="0033CC"/>
+                            </a:solidFill>
+                            <a:latin typeface="Cambria Math" panose="02040503050406030204" pitchFamily="18" charset="0"/>
+                          </a:rPr>
+                          <m:t>𝑓</m:t>
+                        </m:r>
+                      </m:e>
+                      <m:sub>
+                        <m:acc>
+                          <m:accPr>
+                            <m:chr m:val="̂"/>
+                            <m:ctrlPr>
+                              <a:rPr lang="en-US" b="1" i="1">
+                                <a:solidFill>
+                                  <a:srgbClr val="0033CC"/>
+                                </a:solidFill>
+                                <a:latin typeface="Cambria Math" panose="02040503050406030204" pitchFamily="18" charset="0"/>
+                              </a:rPr>
+                            </m:ctrlPr>
+                          </m:accPr>
+                          <m:e>
+                            <m:r>
+                              <a:rPr lang="en-US" b="1" i="1">
+                                <a:solidFill>
+                                  <a:srgbClr val="0033CC"/>
+                                </a:solidFill>
+                                <a:latin typeface="Cambria Math" panose="02040503050406030204" pitchFamily="18" charset="0"/>
+                              </a:rPr>
+                              <m:t>𝝎</m:t>
+                            </m:r>
+                          </m:e>
+                        </m:acc>
+                      </m:sub>
+                    </m:sSub>
+                    <m:r>
+                      <a:rPr lang="en-US" i="1">
+                        <a:solidFill>
+                          <a:srgbClr val="0033CC"/>
+                        </a:solidFill>
+                        <a:latin typeface="Cambria Math" panose="02040503050406030204" pitchFamily="18" charset="0"/>
+                      </a:rPr>
+                      <m:t>(</m:t>
+                    </m:r>
+                    <m:r>
+                      <a:rPr lang="en-US" i="1">
+                        <a:solidFill>
+                          <a:srgbClr val="0033CC"/>
+                        </a:solidFill>
+                        <a:latin typeface="Cambria Math" panose="02040503050406030204" pitchFamily="18" charset="0"/>
+                      </a:rPr>
+                      <m:t>𝑥</m:t>
+                    </m:r>
+                    <m:r>
+                      <a:rPr lang="en-US" i="1">
+                        <a:solidFill>
+                          <a:srgbClr val="0033CC"/>
+                        </a:solidFill>
+                        <a:latin typeface="Cambria Math" panose="02040503050406030204" pitchFamily="18" charset="0"/>
+                      </a:rPr>
+                      <m:t>)</m:t>
+                    </m:r>
+                  </m:oMath>
+                </a14:m>
+                <a:r>
+                  <a:rPr lang="en-US" dirty="0">
+                    <a:solidFill>
+                      <a:srgbClr val="0033CC"/>
+                    </a:solidFill>
+                  </a:rPr>
+                  <a:t> </a:t>
+                </a:r>
+                <a:r>
+                  <a:rPr lang="en-US" dirty="0"/>
+                  <a:t>satisfies: </a:t>
+                </a:r>
+                <a:endParaRPr lang="en-US" i="1" dirty="0">
+                  <a:latin typeface="Cambria Math" panose="02040503050406030204" pitchFamily="18" charset="0"/>
+                </a:endParaRPr>
+              </a:p>
+              <a:p>
+                <a:pPr marL="0" indent="0">
+                  <a:buNone/>
+                </a:pPr>
+                <a14:m>
+                  <m:oMathPara xmlns:m="http://schemas.openxmlformats.org/officeDocument/2006/math">
+                    <m:oMath>
+                      <m:nary>
+                        <m:naryPr>
+                          <m:limLoc m:val="undOvr"/>
+                          <m:subHide m:val="on"/>
+                          <m:supHide m:val="on"/>
+                          <m:ctrlPr>
+                            <a:rPr lang="en-US" i="1">
+                              <a:latin typeface="Cambria Math" panose="02040503050406030204" pitchFamily="18" charset="0"/>
+                            </a:rPr>
+                          </m:ctrlPr>
+                        </m:naryPr>
+                        <m:sub/>
+                        <m:sup/>
+                        <m:e>
+                          <m:r>
+                            <a:rPr lang="en-US" i="1">
+                              <a:latin typeface="Cambria Math" panose="02040503050406030204" pitchFamily="18" charset="0"/>
+                            </a:rPr>
+                            <m:t> </m:t>
+                          </m:r>
+                          <m:f>
+                            <m:fPr>
+                              <m:ctrlPr>
+                                <a:rPr lang="en-US" i="1">
+                                  <a:latin typeface="Cambria Math" panose="02040503050406030204" pitchFamily="18" charset="0"/>
+                                </a:rPr>
+                              </m:ctrlPr>
+                            </m:fPr>
+                            <m:num>
+                              <m:r>
+                                <a:rPr lang="en-US" i="1">
+                                  <a:latin typeface="Cambria Math" panose="02040503050406030204" pitchFamily="18" charset="0"/>
+                                </a:rPr>
+                                <m:t>𝜕</m:t>
+                              </m:r>
+                              <m:r>
+                                <a:rPr lang="en-US" i="1">
+                                  <a:latin typeface="Cambria Math" panose="02040503050406030204" pitchFamily="18" charset="0"/>
+                                </a:rPr>
+                                <m:t>𝐿</m:t>
+                              </m:r>
+                            </m:num>
+                            <m:den>
+                              <m:r>
+                                <a:rPr lang="en-US" i="1">
+                                  <a:latin typeface="Cambria Math" panose="02040503050406030204" pitchFamily="18" charset="0"/>
+                                </a:rPr>
+                                <m:t>𝜕</m:t>
+                              </m:r>
+                              <m:r>
+                                <a:rPr lang="en-US" i="1">
+                                  <a:latin typeface="Cambria Math" panose="02040503050406030204" pitchFamily="18" charset="0"/>
+                                </a:rPr>
+                                <m:t>𝑓</m:t>
+                              </m:r>
+                            </m:den>
+                          </m:f>
+                          <m:r>
+                            <a:rPr lang="en-US" i="1">
+                              <a:latin typeface="Cambria Math" panose="02040503050406030204" pitchFamily="18" charset="0"/>
+                            </a:rPr>
+                            <m:t>𝑝</m:t>
+                          </m:r>
+                          <m:d>
+                            <m:dPr>
+                              <m:ctrlPr>
+                                <a:rPr lang="en-US" i="1">
+                                  <a:latin typeface="Cambria Math" panose="02040503050406030204" pitchFamily="18" charset="0"/>
+                                </a:rPr>
+                              </m:ctrlPr>
+                            </m:dPr>
+                            <m:e>
+                              <m:r>
+                                <a:rPr lang="en-US" i="1">
+                                  <a:latin typeface="Cambria Math" panose="02040503050406030204" pitchFamily="18" charset="0"/>
+                                </a:rPr>
+                                <m:t>𝑦</m:t>
+                              </m:r>
+                              <m:r>
+                                <a:rPr lang="en-US" i="1">
+                                  <a:latin typeface="Cambria Math" panose="02040503050406030204" pitchFamily="18" charset="0"/>
+                                </a:rPr>
+                                <m:t> | </m:t>
+                              </m:r>
+                              <m:r>
+                                <a:rPr lang="en-US" i="1">
+                                  <a:latin typeface="Cambria Math" panose="02040503050406030204" pitchFamily="18" charset="0"/>
+                                </a:rPr>
+                                <m:t>𝑥</m:t>
+                              </m:r>
+                            </m:e>
+                          </m:d>
+                          <m:r>
+                            <a:rPr lang="en-US" i="1">
+                              <a:latin typeface="Cambria Math" panose="02040503050406030204" pitchFamily="18" charset="0"/>
+                            </a:rPr>
+                            <m:t>𝑑𝑦</m:t>
+                          </m:r>
+                          <m:r>
+                            <a:rPr lang="en-US" i="1">
+                              <a:latin typeface="Cambria Math" panose="02040503050406030204" pitchFamily="18" charset="0"/>
+                            </a:rPr>
+                            <m:t>=0</m:t>
+                          </m:r>
+                        </m:e>
+                      </m:nary>
+                    </m:oMath>
+                  </m:oMathPara>
+                </a14:m>
+                <a:endParaRPr lang="en-US" dirty="0"/>
+              </a:p>
+              <a:p>
+                <a:pPr marL="0" indent="0">
+                  <a:buNone/>
+                </a:pPr>
+                <a:r>
+                  <a:rPr lang="en-US" i="1" dirty="0"/>
+                  <a:t>     </a:t>
+                </a:r>
+                <a:r>
+                  <a:rPr lang="en-US" dirty="0"/>
+                  <a:t>at least </a:t>
+                </a:r>
+                <a:r>
+                  <a:rPr lang="en-US" i="1" dirty="0"/>
+                  <a:t>approximately</a:t>
+                </a:r>
+                <a:r>
+                  <a:rPr lang="en-US" dirty="0"/>
+                  <a:t>.</a:t>
+                </a:r>
+                <a:endParaRPr lang="en-US" b="1" dirty="0"/>
+              </a:p>
+              <a:p>
+                <a:pPr marL="0" indent="0">
+                  <a:buNone/>
+                </a:pPr>
+                <a:r>
+                  <a:rPr lang="en-US" b="1" dirty="0"/>
+                  <a:t>Empirical Risk Minimization</a:t>
                 </a:r>
               </a:p>
               <a:p>
@@ -17884,502 +16208,6 @@
                 <a:pPr marL="0" indent="0">
                   <a:buNone/>
                 </a:pPr>
-                <a:r>
-                  <a:rPr lang="en-US" b="1" dirty="0"/>
-                  <a:t>Risk Minimization</a:t>
-                </a:r>
-              </a:p>
-              <a:p>
-                <a:r>
-                  <a:rPr lang="en-US" dirty="0"/>
-                  <a:t>Given a data set </a:t>
-                </a:r>
-                <a14:m>
-                  <m:oMath xmlns:m="http://schemas.openxmlformats.org/officeDocument/2006/math">
-                    <m:r>
-                      <a:rPr lang="en-US" i="1">
-                        <a:solidFill>
-                          <a:srgbClr val="0033CC"/>
-                        </a:solidFill>
-                        <a:latin typeface="Cambria Math" panose="02040503050406030204" pitchFamily="18" charset="0"/>
-                      </a:rPr>
-                      <m:t>𝐷</m:t>
-                    </m:r>
-                    <m:r>
-                      <a:rPr lang="en-US" i="1">
-                        <a:solidFill>
-                          <a:srgbClr val="0033CC"/>
-                        </a:solidFill>
-                        <a:latin typeface="Cambria Math" panose="02040503050406030204" pitchFamily="18" charset="0"/>
-                      </a:rPr>
-                      <m:t>=</m:t>
-                    </m:r>
-                    <m:sSubSup>
-                      <m:sSubSupPr>
-                        <m:ctrlPr>
-                          <a:rPr lang="en-US" i="1">
-                            <a:solidFill>
-                              <a:srgbClr val="0033CC"/>
-                            </a:solidFill>
-                            <a:latin typeface="Cambria Math" panose="02040503050406030204" pitchFamily="18" charset="0"/>
-                          </a:rPr>
-                        </m:ctrlPr>
-                      </m:sSubSupPr>
-                      <m:e>
-                        <m:d>
-                          <m:dPr>
-                            <m:begChr m:val="{"/>
-                            <m:endChr m:val="}"/>
-                            <m:ctrlPr>
-                              <a:rPr lang="en-US" i="1">
-                                <a:solidFill>
-                                  <a:srgbClr val="0033CC"/>
-                                </a:solidFill>
-                                <a:latin typeface="Cambria Math" panose="02040503050406030204" pitchFamily="18" charset="0"/>
-                              </a:rPr>
-                            </m:ctrlPr>
-                          </m:dPr>
-                          <m:e>
-                            <m:d>
-                              <m:dPr>
-                                <m:ctrlPr>
-                                  <a:rPr lang="en-US" i="1">
-                                    <a:solidFill>
-                                      <a:srgbClr val="0033CC"/>
-                                    </a:solidFill>
-                                    <a:latin typeface="Cambria Math" panose="02040503050406030204" pitchFamily="18" charset="0"/>
-                                  </a:rPr>
-                                </m:ctrlPr>
-                              </m:dPr>
-                              <m:e>
-                                <m:r>
-                                  <a:rPr lang="en-US" i="1">
-                                    <a:solidFill>
-                                      <a:srgbClr val="0033CC"/>
-                                    </a:solidFill>
-                                    <a:latin typeface="Cambria Math" panose="02040503050406030204" pitchFamily="18" charset="0"/>
-                                  </a:rPr>
-                                  <m:t>𝑥</m:t>
-                                </m:r>
-                                <m:r>
-                                  <a:rPr lang="en-US" i="1">
-                                    <a:solidFill>
-                                      <a:srgbClr val="0033CC"/>
-                                    </a:solidFill>
-                                    <a:latin typeface="Cambria Math" panose="02040503050406030204" pitchFamily="18" charset="0"/>
-                                  </a:rPr>
-                                  <m:t>,</m:t>
-                                </m:r>
-                                <m:r>
-                                  <a:rPr lang="en-US" i="1">
-                                    <a:solidFill>
-                                      <a:srgbClr val="0033CC"/>
-                                    </a:solidFill>
-                                    <a:latin typeface="Cambria Math" panose="02040503050406030204" pitchFamily="18" charset="0"/>
-                                  </a:rPr>
-                                  <m:t>𝑦</m:t>
-                                </m:r>
-                              </m:e>
-                            </m:d>
-                          </m:e>
-                        </m:d>
-                      </m:e>
-                      <m:sub>
-                        <m:r>
-                          <a:rPr lang="en-US" i="1">
-                            <a:solidFill>
-                              <a:srgbClr val="0033CC"/>
-                            </a:solidFill>
-                            <a:latin typeface="Cambria Math" panose="02040503050406030204" pitchFamily="18" charset="0"/>
-                          </a:rPr>
-                          <m:t>𝑖</m:t>
-                        </m:r>
-                        <m:r>
-                          <a:rPr lang="en-US" i="1">
-                            <a:solidFill>
-                              <a:srgbClr val="0033CC"/>
-                            </a:solidFill>
-                            <a:latin typeface="Cambria Math" panose="02040503050406030204" pitchFamily="18" charset="0"/>
-                          </a:rPr>
-                          <m:t>=1</m:t>
-                        </m:r>
-                      </m:sub>
-                      <m:sup>
-                        <m:r>
-                          <a:rPr lang="en-US" i="1">
-                            <a:solidFill>
-                              <a:srgbClr val="0033CC"/>
-                            </a:solidFill>
-                            <a:latin typeface="Cambria Math" panose="02040503050406030204" pitchFamily="18" charset="0"/>
-                          </a:rPr>
-                          <m:t>𝑁</m:t>
-                        </m:r>
-                      </m:sup>
-                    </m:sSubSup>
-                  </m:oMath>
-                </a14:m>
-                <a:r>
-                  <a:rPr lang="en-US" dirty="0"/>
-                  <a:t>, a model </a:t>
-                </a:r>
-                <a14:m>
-                  <m:oMath xmlns:m="http://schemas.openxmlformats.org/officeDocument/2006/math">
-                    <m:sSub>
-                      <m:sSubPr>
-                        <m:ctrlPr>
-                          <a:rPr lang="en-US" i="1">
-                            <a:solidFill>
-                              <a:srgbClr val="0033CC"/>
-                            </a:solidFill>
-                            <a:latin typeface="Cambria Math" panose="02040503050406030204" pitchFamily="18" charset="0"/>
-                          </a:rPr>
-                        </m:ctrlPr>
-                      </m:sSubPr>
-                      <m:e>
-                        <m:r>
-                          <a:rPr lang="en-US" i="1">
-                            <a:solidFill>
-                              <a:srgbClr val="0033CC"/>
-                            </a:solidFill>
-                            <a:latin typeface="Cambria Math" panose="02040503050406030204" pitchFamily="18" charset="0"/>
-                          </a:rPr>
-                          <m:t>𝑓</m:t>
-                        </m:r>
-                      </m:e>
-                      <m:sub>
-                        <m:r>
-                          <a:rPr lang="en-US" b="0" i="1" smtClean="0">
-                            <a:solidFill>
-                              <a:srgbClr val="0033CC"/>
-                            </a:solidFill>
-                            <a:latin typeface="Cambria Math" panose="02040503050406030204" pitchFamily="18" charset="0"/>
-                          </a:rPr>
-                          <m:t>𝜔</m:t>
-                        </m:r>
-                      </m:sub>
-                    </m:sSub>
-                    <m:d>
-                      <m:dPr>
-                        <m:ctrlPr>
-                          <a:rPr lang="en-US" i="1">
-                            <a:solidFill>
-                              <a:srgbClr val="0033CC"/>
-                            </a:solidFill>
-                            <a:latin typeface="Cambria Math" panose="02040503050406030204" pitchFamily="18" charset="0"/>
-                          </a:rPr>
-                        </m:ctrlPr>
-                      </m:dPr>
-                      <m:e>
-                        <m:r>
-                          <a:rPr lang="en-US" i="1">
-                            <a:solidFill>
-                              <a:srgbClr val="0033CC"/>
-                            </a:solidFill>
-                            <a:latin typeface="Cambria Math" panose="02040503050406030204" pitchFamily="18" charset="0"/>
-                          </a:rPr>
-                          <m:t>𝑥</m:t>
-                        </m:r>
-                      </m:e>
-                    </m:d>
-                  </m:oMath>
-                </a14:m>
-                <a:r>
-                  <a:rPr lang="en-US" dirty="0"/>
-                  <a:t>, and a loss function </a:t>
-                </a:r>
-                <a14:m>
-                  <m:oMath xmlns:m="http://schemas.openxmlformats.org/officeDocument/2006/math">
-                    <m:r>
-                      <a:rPr lang="en-US" i="1">
-                        <a:solidFill>
-                          <a:srgbClr val="0033CC"/>
-                        </a:solidFill>
-                        <a:latin typeface="Cambria Math" panose="02040503050406030204" pitchFamily="18" charset="0"/>
-                      </a:rPr>
-                      <m:t>𝐿</m:t>
-                    </m:r>
-                    <m:r>
-                      <a:rPr lang="en-US" i="1">
-                        <a:solidFill>
-                          <a:srgbClr val="0033CC"/>
-                        </a:solidFill>
-                        <a:latin typeface="Cambria Math" panose="02040503050406030204" pitchFamily="18" charset="0"/>
-                      </a:rPr>
-                      <m:t>(</m:t>
-                    </m:r>
-                    <m:r>
-                      <a:rPr lang="en-US" i="1">
-                        <a:solidFill>
-                          <a:srgbClr val="0033CC"/>
-                        </a:solidFill>
-                        <a:latin typeface="Cambria Math" panose="02040503050406030204" pitchFamily="18" charset="0"/>
-                      </a:rPr>
-                      <m:t>𝑦</m:t>
-                    </m:r>
-                    <m:r>
-                      <a:rPr lang="en-US" i="1">
-                        <a:solidFill>
-                          <a:srgbClr val="0033CC"/>
-                        </a:solidFill>
-                        <a:latin typeface="Cambria Math" panose="02040503050406030204" pitchFamily="18" charset="0"/>
-                      </a:rPr>
-                      <m:t>, </m:t>
-                    </m:r>
-                    <m:r>
-                      <a:rPr lang="en-US" i="1">
-                        <a:solidFill>
-                          <a:srgbClr val="0033CC"/>
-                        </a:solidFill>
-                        <a:latin typeface="Cambria Math" panose="02040503050406030204" pitchFamily="18" charset="0"/>
-                      </a:rPr>
-                      <m:t>𝑓</m:t>
-                    </m:r>
-                    <m:r>
-                      <a:rPr lang="en-US" i="1">
-                        <a:solidFill>
-                          <a:srgbClr val="0033CC"/>
-                        </a:solidFill>
-                        <a:latin typeface="Cambria Math" panose="02040503050406030204" pitchFamily="18" charset="0"/>
-                      </a:rPr>
-                      <m:t>)</m:t>
-                    </m:r>
-                  </m:oMath>
-                </a14:m>
-                <a:r>
-                  <a:rPr lang="en-US" dirty="0"/>
-                  <a:t>, the optimal function </a:t>
-                </a:r>
-                <a14:m>
-                  <m:oMath xmlns:m="http://schemas.openxmlformats.org/officeDocument/2006/math">
-                    <m:sSub>
-                      <m:sSubPr>
-                        <m:ctrlPr>
-                          <a:rPr lang="en-US" b="0" i="1" smtClean="0">
-                            <a:solidFill>
-                              <a:srgbClr val="0033CC"/>
-                            </a:solidFill>
-                            <a:latin typeface="Cambria Math" panose="02040503050406030204" pitchFamily="18" charset="0"/>
-                          </a:rPr>
-                        </m:ctrlPr>
-                      </m:sSubPr>
-                      <m:e>
-                        <m:r>
-                          <a:rPr lang="en-US" b="0" i="1" smtClean="0">
-                            <a:solidFill>
-                              <a:srgbClr val="0033CC"/>
-                            </a:solidFill>
-                            <a:latin typeface="Cambria Math" panose="02040503050406030204" pitchFamily="18" charset="0"/>
-                          </a:rPr>
-                          <m:t>𝑓</m:t>
-                        </m:r>
-                      </m:e>
-                      <m:sub>
-                        <m:acc>
-                          <m:accPr>
-                            <m:chr m:val="̂"/>
-                            <m:ctrlPr>
-                              <a:rPr lang="en-US" b="1" i="1" smtClean="0">
-                                <a:solidFill>
-                                  <a:srgbClr val="0033CC"/>
-                                </a:solidFill>
-                                <a:latin typeface="Cambria Math" panose="02040503050406030204" pitchFamily="18" charset="0"/>
-                              </a:rPr>
-                            </m:ctrlPr>
-                          </m:accPr>
-                          <m:e>
-                            <m:r>
-                              <a:rPr lang="en-US" b="1" i="1" smtClean="0">
-                                <a:solidFill>
-                                  <a:srgbClr val="0033CC"/>
-                                </a:solidFill>
-                                <a:latin typeface="Cambria Math" panose="02040503050406030204" pitchFamily="18" charset="0"/>
-                              </a:rPr>
-                              <m:t>𝝎</m:t>
-                            </m:r>
-                          </m:e>
-                        </m:acc>
-                      </m:sub>
-                    </m:sSub>
-                    <m:r>
-                      <a:rPr lang="en-US" i="1">
-                        <a:solidFill>
-                          <a:srgbClr val="0033CC"/>
-                        </a:solidFill>
-                        <a:latin typeface="Cambria Math" panose="02040503050406030204" pitchFamily="18" charset="0"/>
-                      </a:rPr>
-                      <m:t>(</m:t>
-                    </m:r>
-                    <m:r>
-                      <a:rPr lang="en-US" i="1">
-                        <a:solidFill>
-                          <a:srgbClr val="0033CC"/>
-                        </a:solidFill>
-                        <a:latin typeface="Cambria Math" panose="02040503050406030204" pitchFamily="18" charset="0"/>
-                      </a:rPr>
-                      <m:t>𝑥</m:t>
-                    </m:r>
-                    <m:r>
-                      <a:rPr lang="en-US" i="1">
-                        <a:solidFill>
-                          <a:srgbClr val="0033CC"/>
-                        </a:solidFill>
-                        <a:latin typeface="Cambria Math" panose="02040503050406030204" pitchFamily="18" charset="0"/>
-                      </a:rPr>
-                      <m:t>)</m:t>
-                    </m:r>
-                  </m:oMath>
-                </a14:m>
-                <a:r>
-                  <a:rPr lang="en-US" dirty="0">
-                    <a:solidFill>
-                      <a:srgbClr val="0033CC"/>
-                    </a:solidFill>
-                  </a:rPr>
-                  <a:t> </a:t>
-                </a:r>
-                <a:r>
-                  <a:rPr lang="en-US" dirty="0"/>
-                  <a:t>satisfies: </a:t>
-                </a:r>
-                <a:endParaRPr lang="en-US" i="1" dirty="0">
-                  <a:latin typeface="Cambria Math" panose="02040503050406030204" pitchFamily="18" charset="0"/>
-                </a:endParaRPr>
-              </a:p>
-              <a:p>
-                <a:pPr marL="0" indent="0">
-                  <a:buNone/>
-                </a:pPr>
-                <a14:m>
-                  <m:oMathPara xmlns:m="http://schemas.openxmlformats.org/officeDocument/2006/math">
-                    <m:oMath>
-                      <m:nary>
-                        <m:naryPr>
-                          <m:limLoc m:val="undOvr"/>
-                          <m:subHide m:val="on"/>
-                          <m:supHide m:val="on"/>
-                          <m:ctrlPr>
-                            <a:rPr lang="en-US" i="1">
-                              <a:latin typeface="Cambria Math" panose="02040503050406030204" pitchFamily="18" charset="0"/>
-                            </a:rPr>
-                          </m:ctrlPr>
-                        </m:naryPr>
-                        <m:sub/>
-                        <m:sup/>
-                        <m:e>
-                          <m:r>
-                            <a:rPr lang="en-US" i="1">
-                              <a:latin typeface="Cambria Math" panose="02040503050406030204" pitchFamily="18" charset="0"/>
-                            </a:rPr>
-                            <m:t> </m:t>
-                          </m:r>
-                          <m:f>
-                            <m:fPr>
-                              <m:ctrlPr>
-                                <a:rPr lang="en-US" i="1">
-                                  <a:latin typeface="Cambria Math" panose="02040503050406030204" pitchFamily="18" charset="0"/>
-                                </a:rPr>
-                              </m:ctrlPr>
-                            </m:fPr>
-                            <m:num>
-                              <m:r>
-                                <a:rPr lang="en-US" i="1">
-                                  <a:latin typeface="Cambria Math" panose="02040503050406030204" pitchFamily="18" charset="0"/>
-                                </a:rPr>
-                                <m:t>𝜕</m:t>
-                              </m:r>
-                              <m:r>
-                                <a:rPr lang="en-US" i="1">
-                                  <a:latin typeface="Cambria Math" panose="02040503050406030204" pitchFamily="18" charset="0"/>
-                                </a:rPr>
-                                <m:t>𝐿</m:t>
-                              </m:r>
-                            </m:num>
-                            <m:den>
-                              <m:r>
-                                <a:rPr lang="en-US" i="1">
-                                  <a:latin typeface="Cambria Math" panose="02040503050406030204" pitchFamily="18" charset="0"/>
-                                </a:rPr>
-                                <m:t>𝜕</m:t>
-                              </m:r>
-                              <m:r>
-                                <a:rPr lang="en-US" i="1">
-                                  <a:latin typeface="Cambria Math" panose="02040503050406030204" pitchFamily="18" charset="0"/>
-                                </a:rPr>
-                                <m:t>𝑓</m:t>
-                              </m:r>
-                            </m:den>
-                          </m:f>
-                          <m:r>
-                            <a:rPr lang="en-US" i="1">
-                              <a:latin typeface="Cambria Math" panose="02040503050406030204" pitchFamily="18" charset="0"/>
-                            </a:rPr>
-                            <m:t>𝑝</m:t>
-                          </m:r>
-                          <m:d>
-                            <m:dPr>
-                              <m:ctrlPr>
-                                <a:rPr lang="en-US" i="1">
-                                  <a:latin typeface="Cambria Math" panose="02040503050406030204" pitchFamily="18" charset="0"/>
-                                </a:rPr>
-                              </m:ctrlPr>
-                            </m:dPr>
-                            <m:e>
-                              <m:r>
-                                <a:rPr lang="en-US" i="1">
-                                  <a:latin typeface="Cambria Math" panose="02040503050406030204" pitchFamily="18" charset="0"/>
-                                </a:rPr>
-                                <m:t>𝑦</m:t>
-                              </m:r>
-                              <m:r>
-                                <a:rPr lang="en-US" i="1">
-                                  <a:latin typeface="Cambria Math" panose="02040503050406030204" pitchFamily="18" charset="0"/>
-                                </a:rPr>
-                                <m:t> | </m:t>
-                              </m:r>
-                              <m:r>
-                                <a:rPr lang="en-US" i="1">
-                                  <a:latin typeface="Cambria Math" panose="02040503050406030204" pitchFamily="18" charset="0"/>
-                                </a:rPr>
-                                <m:t>𝑥</m:t>
-                              </m:r>
-                            </m:e>
-                          </m:d>
-                          <m:r>
-                            <a:rPr lang="en-US" i="1">
-                              <a:latin typeface="Cambria Math" panose="02040503050406030204" pitchFamily="18" charset="0"/>
-                            </a:rPr>
-                            <m:t>𝑑𝑦</m:t>
-                          </m:r>
-                          <m:r>
-                            <a:rPr lang="en-US" i="1">
-                              <a:latin typeface="Cambria Math" panose="02040503050406030204" pitchFamily="18" charset="0"/>
-                            </a:rPr>
-                            <m:t>=0</m:t>
-                          </m:r>
-                        </m:e>
-                      </m:nary>
-                    </m:oMath>
-                  </m:oMathPara>
-                </a14:m>
-                <a:endParaRPr lang="en-US" dirty="0"/>
-              </a:p>
-              <a:p>
-                <a:pPr marL="0" indent="0">
-                  <a:buNone/>
-                </a:pPr>
-                <a:r>
-                  <a:rPr lang="en-US" i="1" dirty="0"/>
-                  <a:t>     approximately</a:t>
-                </a:r>
-                <a:r>
-                  <a:rPr lang="en-US" dirty="0"/>
-                  <a:t>.</a:t>
-                </a:r>
-              </a:p>
-              <a:p>
-                <a:pPr marL="0" indent="0">
-                  <a:buNone/>
-                </a:pPr>
                 <a:endParaRPr lang="en-US" dirty="0"/>
               </a:p>
             </p:txBody>
@@ -18406,7 +16234,7 @@
               <a:blipFill>
                 <a:blip r:embed="rId2"/>
                 <a:stretch>
-                  <a:fillRect l="-1309" t="-1316" r="-655" b="-32895"/>
+                  <a:fillRect l="-1309" t="-6316" r="-655" b="-1842"/>
                 </a:stretch>
               </a:blipFill>
             </p:spPr>
@@ -18572,8 +16400,8 @@
           </a:p>
         </p:txBody>
       </p:sp>
-      <mc:AlternateContent xmlns:mc="http://schemas.openxmlformats.org/markup-compatibility/2006" xmlns:a14="http://schemas.microsoft.com/office/drawing/2010/main">
-        <mc:Choice Requires="a14">
+      <mc:AlternateContent xmlns:mc="http://schemas.openxmlformats.org/markup-compatibility/2006">
+        <mc:Choice xmlns:a14="http://schemas.microsoft.com/office/drawing/2010/main" Requires="a14">
           <p:sp>
             <p:nvSpPr>
               <p:cNvPr id="4" name="Content Placeholder 3">
@@ -18600,7 +16428,7 @@
                 </a:pPr>
                 <a:r>
                   <a:rPr lang="en-US" dirty="0"/>
-                  <a:t>Suppose our goal is to approximate an unknown function </a:t>
+                  <a:t>Suppose our goal is to approximate a function </a:t>
                 </a:r>
               </a:p>
               <a:p>
@@ -19132,7 +16960,19 @@
                 </a14:m>
                 <a:r>
                   <a:rPr lang="en-US" dirty="0"/>
-                  <a:t>, that is, a model, where </a:t>
+                  <a:t>, that is, a </a:t>
+                </a:r>
+                <a:r>
+                  <a:rPr lang="en-US" b="1" dirty="0">
+                    <a:solidFill>
+                      <a:srgbClr val="0033CC"/>
+                    </a:solidFill>
+                  </a:rPr>
+                  <a:t>model</a:t>
+                </a:r>
+                <a:r>
+                  <a:rPr lang="en-US" dirty="0"/>
+                  <a:t>, where </a:t>
                 </a:r>
                 <a14:m>
                   <m:oMath xmlns:m="http://schemas.openxmlformats.org/officeDocument/2006/math">
@@ -19155,7 +16995,7 @@
             </p:txBody>
           </p:sp>
         </mc:Choice>
-        <mc:Fallback xmlns="">
+        <mc:Fallback>
           <p:sp>
             <p:nvSpPr>
               <p:cNvPr id="4" name="Content Placeholder 3">
@@ -20170,6 +18010,85 @@
   <p:clrMapOvr>
     <a:masterClrMapping/>
   </p:clrMapOvr>
+  <p:timing>
+    <p:tnLst>
+      <p:par>
+        <p:cTn id="1" dur="indefinite" restart="never" nodeType="tmRoot">
+          <p:childTnLst>
+            <p:seq concurrent="1" nextAc="seek">
+              <p:cTn id="2" dur="indefinite" nodeType="mainSeq">
+                <p:childTnLst>
+                  <p:par>
+                    <p:cTn id="3" fill="hold">
+                      <p:stCondLst>
+                        <p:cond delay="indefinite"/>
+                      </p:stCondLst>
+                      <p:childTnLst>
+                        <p:par>
+                          <p:cTn id="4" fill="hold">
+                            <p:stCondLst>
+                              <p:cond delay="0"/>
+                            </p:stCondLst>
+                            <p:childTnLst>
+                              <p:par>
+                                <p:cTn id="5" presetID="1" presetClass="entr" presetSubtype="0" fill="hold" nodeType="clickEffect">
+                                  <p:stCondLst>
+                                    <p:cond delay="0"/>
+                                  </p:stCondLst>
+                                  <p:childTnLst>
+                                    <p:set>
+                                      <p:cBhvr>
+                                        <p:cTn id="6" dur="1" fill="hold">
+                                          <p:stCondLst>
+                                            <p:cond delay="0"/>
+                                          </p:stCondLst>
+                                        </p:cTn>
+                                        <p:tgtEl>
+                                          <p:spTgt spid="4">
+                                            <p:txEl>
+                                              <p:pRg st="6" end="6"/>
+                                            </p:txEl>
+                                          </p:spTgt>
+                                        </p:tgtEl>
+                                        <p:attrNameLst>
+                                          <p:attrName>style.visibility</p:attrName>
+                                        </p:attrNameLst>
+                                      </p:cBhvr>
+                                      <p:to>
+                                        <p:strVal val="visible"/>
+                                      </p:to>
+                                    </p:set>
+                                  </p:childTnLst>
+                                </p:cTn>
+                              </p:par>
+                            </p:childTnLst>
+                          </p:cTn>
+                        </p:par>
+                      </p:childTnLst>
+                    </p:cTn>
+                  </p:par>
+                </p:childTnLst>
+              </p:cTn>
+              <p:prevCondLst>
+                <p:cond evt="onPrev" delay="0">
+                  <p:tgtEl>
+                    <p:sldTgt/>
+                  </p:tgtEl>
+                </p:cond>
+              </p:prevCondLst>
+              <p:nextCondLst>
+                <p:cond evt="onNext" delay="0">
+                  <p:tgtEl>
+                    <p:sldTgt/>
+                  </p:tgtEl>
+                </p:cond>
+              </p:nextCondLst>
+            </p:seq>
+          </p:childTnLst>
+        </p:cTn>
+      </p:par>
+    </p:tnLst>
+  </p:timing>
 </p:sld>
 </file>
 
@@ -20224,8 +18143,8 @@
           </a:p>
         </p:txBody>
       </p:sp>
-      <mc:AlternateContent xmlns:mc="http://schemas.openxmlformats.org/markup-compatibility/2006">
-        <mc:Choice xmlns:a14="http://schemas.microsoft.com/office/drawing/2010/main" Requires="a14">
+      <mc:AlternateContent xmlns:mc="http://schemas.openxmlformats.org/markup-compatibility/2006" xmlns:a14="http://schemas.microsoft.com/office/drawing/2010/main">
+        <mc:Choice Requires="a14">
           <p:sp>
             <p:nvSpPr>
               <p:cNvPr id="4" name="Content Placeholder 3">
@@ -20900,7 +18819,7 @@
             </p:txBody>
           </p:sp>
         </mc:Choice>
-        <mc:Fallback>
+        <mc:Fallback xmlns="">
           <p:sp>
             <p:nvSpPr>
               <p:cNvPr id="4" name="Content Placeholder 3">
@@ -23505,6 +21424,85 @@
   <p:clrMapOvr>
     <a:masterClrMapping/>
   </p:clrMapOvr>
+  <p:timing>
+    <p:tnLst>
+      <p:par>
+        <p:cTn id="1" dur="indefinite" restart="never" nodeType="tmRoot">
+          <p:childTnLst>
+            <p:seq concurrent="1" nextAc="seek">
+              <p:cTn id="2" dur="indefinite" nodeType="mainSeq">
+                <p:childTnLst>
+                  <p:par>
+                    <p:cTn id="3" fill="hold">
+                      <p:stCondLst>
+                        <p:cond delay="indefinite"/>
+                      </p:stCondLst>
+                      <p:childTnLst>
+                        <p:par>
+                          <p:cTn id="4" fill="hold">
+                            <p:stCondLst>
+                              <p:cond delay="0"/>
+                            </p:stCondLst>
+                            <p:childTnLst>
+                              <p:par>
+                                <p:cTn id="5" presetID="1" presetClass="entr" presetSubtype="0" fill="hold" nodeType="clickEffect">
+                                  <p:stCondLst>
+                                    <p:cond delay="0"/>
+                                  </p:stCondLst>
+                                  <p:childTnLst>
+                                    <p:set>
+                                      <p:cBhvr>
+                                        <p:cTn id="6" dur="1" fill="hold">
+                                          <p:stCondLst>
+                                            <p:cond delay="0"/>
+                                          </p:stCondLst>
+                                        </p:cTn>
+                                        <p:tgtEl>
+                                          <p:spTgt spid="4">
+                                            <p:txEl>
+                                              <p:pRg st="4" end="4"/>
+                                            </p:txEl>
+                                          </p:spTgt>
+                                        </p:tgtEl>
+                                        <p:attrNameLst>
+                                          <p:attrName>style.visibility</p:attrName>
+                                        </p:attrNameLst>
+                                      </p:cBhvr>
+                                      <p:to>
+                                        <p:strVal val="visible"/>
+                                      </p:to>
+                                    </p:set>
+                                  </p:childTnLst>
+                                </p:cTn>
+                              </p:par>
+                            </p:childTnLst>
+                          </p:cTn>
+                        </p:par>
+                      </p:childTnLst>
+                    </p:cTn>
+                  </p:par>
+                </p:childTnLst>
+              </p:cTn>
+              <p:prevCondLst>
+                <p:cond evt="onPrev" delay="0">
+                  <p:tgtEl>
+                    <p:sldTgt/>
+                  </p:tgtEl>
+                </p:cond>
+              </p:prevCondLst>
+              <p:nextCondLst>
+                <p:cond evt="onNext" delay="0">
+                  <p:tgtEl>
+                    <p:sldTgt/>
+                  </p:tgtEl>
+                </p:cond>
+              </p:nextCondLst>
+            </p:seq>
+          </p:childTnLst>
+        </p:cTn>
+      </p:par>
+    </p:tnLst>
+  </p:timing>
 </p:sld>
 </file>
 
@@ -23658,7 +21656,7 @@
             </a:pPr>
             <a:r>
               <a:rPr lang="en-US" dirty="0"/>
-              <a:t>be formed if we if we had an </a:t>
+              <a:t>be formed if we had an </a:t>
             </a:r>
             <a:r>
               <a:rPr lang="en-US" i="1" u="sng" dirty="0">
@@ -23679,7 +21677,7 @@
             </a:pPr>
             <a:r>
               <a:rPr lang="en-US" dirty="0"/>
-              <a:t>amount of data and the correct model.</a:t>
+              <a:t>amount of data.</a:t>
             </a:r>
           </a:p>
           <a:p>
@@ -23763,6 +21761,289 @@
   <p:clrMapOvr>
     <a:masterClrMapping/>
   </p:clrMapOvr>
+  <p:timing>
+    <p:tnLst>
+      <p:par>
+        <p:cTn id="1" dur="indefinite" restart="never" nodeType="tmRoot">
+          <p:childTnLst>
+            <p:seq concurrent="1" nextAc="seek">
+              <p:cTn id="2" dur="indefinite" nodeType="mainSeq">
+                <p:childTnLst>
+                  <p:par>
+                    <p:cTn id="3" fill="hold">
+                      <p:stCondLst>
+                        <p:cond delay="indefinite"/>
+                      </p:stCondLst>
+                      <p:childTnLst>
+                        <p:par>
+                          <p:cTn id="4" fill="hold">
+                            <p:stCondLst>
+                              <p:cond delay="0"/>
+                            </p:stCondLst>
+                            <p:childTnLst>
+                              <p:par>
+                                <p:cTn id="5" presetID="1" presetClass="entr" presetSubtype="0" fill="hold" nodeType="clickEffect">
+                                  <p:stCondLst>
+                                    <p:cond delay="0"/>
+                                  </p:stCondLst>
+                                  <p:childTnLst>
+                                    <p:set>
+                                      <p:cBhvr>
+                                        <p:cTn id="6" dur="1" fill="hold">
+                                          <p:stCondLst>
+                                            <p:cond delay="0"/>
+                                          </p:stCondLst>
+                                        </p:cTn>
+                                        <p:tgtEl>
+                                          <p:spTgt spid="2">
+                                            <p:txEl>
+                                              <p:pRg st="2" end="2"/>
+                                            </p:txEl>
+                                          </p:spTgt>
+                                        </p:tgtEl>
+                                        <p:attrNameLst>
+                                          <p:attrName>style.visibility</p:attrName>
+                                        </p:attrNameLst>
+                                      </p:cBhvr>
+                                      <p:to>
+                                        <p:strVal val="visible"/>
+                                      </p:to>
+                                    </p:set>
+                                  </p:childTnLst>
+                                </p:cTn>
+                              </p:par>
+                              <p:par>
+                                <p:cTn id="7" presetID="1" presetClass="entr" presetSubtype="0" fill="hold" nodeType="withEffect">
+                                  <p:stCondLst>
+                                    <p:cond delay="0"/>
+                                  </p:stCondLst>
+                                  <p:childTnLst>
+                                    <p:set>
+                                      <p:cBhvr>
+                                        <p:cTn id="8" dur="1" fill="hold">
+                                          <p:stCondLst>
+                                            <p:cond delay="0"/>
+                                          </p:stCondLst>
+                                        </p:cTn>
+                                        <p:tgtEl>
+                                          <p:spTgt spid="2">
+                                            <p:txEl>
+                                              <p:pRg st="3" end="3"/>
+                                            </p:txEl>
+                                          </p:spTgt>
+                                        </p:tgtEl>
+                                        <p:attrNameLst>
+                                          <p:attrName>style.visibility</p:attrName>
+                                        </p:attrNameLst>
+                                      </p:cBhvr>
+                                      <p:to>
+                                        <p:strVal val="visible"/>
+                                      </p:to>
+                                    </p:set>
+                                  </p:childTnLst>
+                                </p:cTn>
+                              </p:par>
+                              <p:par>
+                                <p:cTn id="9" presetID="1" presetClass="entr" presetSubtype="0" fill="hold" nodeType="withEffect">
+                                  <p:stCondLst>
+                                    <p:cond delay="0"/>
+                                  </p:stCondLst>
+                                  <p:childTnLst>
+                                    <p:set>
+                                      <p:cBhvr>
+                                        <p:cTn id="10" dur="1" fill="hold">
+                                          <p:stCondLst>
+                                            <p:cond delay="0"/>
+                                          </p:stCondLst>
+                                        </p:cTn>
+                                        <p:tgtEl>
+                                          <p:spTgt spid="2">
+                                            <p:txEl>
+                                              <p:pRg st="4" end="4"/>
+                                            </p:txEl>
+                                          </p:spTgt>
+                                        </p:tgtEl>
+                                        <p:attrNameLst>
+                                          <p:attrName>style.visibility</p:attrName>
+                                        </p:attrNameLst>
+                                      </p:cBhvr>
+                                      <p:to>
+                                        <p:strVal val="visible"/>
+                                      </p:to>
+                                    </p:set>
+                                  </p:childTnLst>
+                                </p:cTn>
+                              </p:par>
+                              <p:par>
+                                <p:cTn id="11" presetID="1" presetClass="entr" presetSubtype="0" fill="hold" nodeType="withEffect">
+                                  <p:stCondLst>
+                                    <p:cond delay="0"/>
+                                  </p:stCondLst>
+                                  <p:childTnLst>
+                                    <p:set>
+                                      <p:cBhvr>
+                                        <p:cTn id="12" dur="1" fill="hold">
+                                          <p:stCondLst>
+                                            <p:cond delay="0"/>
+                                          </p:stCondLst>
+                                        </p:cTn>
+                                        <p:tgtEl>
+                                          <p:spTgt spid="2">
+                                            <p:txEl>
+                                              <p:pRg st="5" end="5"/>
+                                            </p:txEl>
+                                          </p:spTgt>
+                                        </p:tgtEl>
+                                        <p:attrNameLst>
+                                          <p:attrName>style.visibility</p:attrName>
+                                        </p:attrNameLst>
+                                      </p:cBhvr>
+                                      <p:to>
+                                        <p:strVal val="visible"/>
+                                      </p:to>
+                                    </p:set>
+                                  </p:childTnLst>
+                                </p:cTn>
+                              </p:par>
+                              <p:par>
+                                <p:cTn id="13" presetID="1" presetClass="entr" presetSubtype="0" fill="hold" nodeType="withEffect">
+                                  <p:stCondLst>
+                                    <p:cond delay="0"/>
+                                  </p:stCondLst>
+                                  <p:childTnLst>
+                                    <p:set>
+                                      <p:cBhvr>
+                                        <p:cTn id="14" dur="1" fill="hold">
+                                          <p:stCondLst>
+                                            <p:cond delay="0"/>
+                                          </p:stCondLst>
+                                        </p:cTn>
+                                        <p:tgtEl>
+                                          <p:spTgt spid="2">
+                                            <p:txEl>
+                                              <p:pRg st="6" end="6"/>
+                                            </p:txEl>
+                                          </p:spTgt>
+                                        </p:tgtEl>
+                                        <p:attrNameLst>
+                                          <p:attrName>style.visibility</p:attrName>
+                                        </p:attrNameLst>
+                                      </p:cBhvr>
+                                      <p:to>
+                                        <p:strVal val="visible"/>
+                                      </p:to>
+                                    </p:set>
+                                  </p:childTnLst>
+                                </p:cTn>
+                              </p:par>
+                              <p:par>
+                                <p:cTn id="15" presetID="1" presetClass="entr" presetSubtype="0" fill="hold" nodeType="withEffect">
+                                  <p:stCondLst>
+                                    <p:cond delay="0"/>
+                                  </p:stCondLst>
+                                  <p:childTnLst>
+                                    <p:set>
+                                      <p:cBhvr>
+                                        <p:cTn id="16" dur="1" fill="hold">
+                                          <p:stCondLst>
+                                            <p:cond delay="0"/>
+                                          </p:stCondLst>
+                                        </p:cTn>
+                                        <p:tgtEl>
+                                          <p:spTgt spid="2">
+                                            <p:txEl>
+                                              <p:pRg st="7" end="7"/>
+                                            </p:txEl>
+                                          </p:spTgt>
+                                        </p:tgtEl>
+                                        <p:attrNameLst>
+                                          <p:attrName>style.visibility</p:attrName>
+                                        </p:attrNameLst>
+                                      </p:cBhvr>
+                                      <p:to>
+                                        <p:strVal val="visible"/>
+                                      </p:to>
+                                    </p:set>
+                                  </p:childTnLst>
+                                </p:cTn>
+                              </p:par>
+                            </p:childTnLst>
+                          </p:cTn>
+                        </p:par>
+                      </p:childTnLst>
+                    </p:cTn>
+                  </p:par>
+                  <p:par>
+                    <p:cTn id="17" fill="hold">
+                      <p:stCondLst>
+                        <p:cond delay="indefinite"/>
+                      </p:stCondLst>
+                      <p:childTnLst>
+                        <p:par>
+                          <p:cTn id="18" fill="hold">
+                            <p:stCondLst>
+                              <p:cond delay="0"/>
+                            </p:stCondLst>
+                            <p:childTnLst>
+                              <p:par>
+                                <p:cTn id="19" presetID="1" presetClass="entr" presetSubtype="0" fill="hold" nodeType="clickEffect">
+                                  <p:stCondLst>
+                                    <p:cond delay="0"/>
+                                  </p:stCondLst>
+                                  <p:childTnLst>
+                                    <p:set>
+                                      <p:cBhvr>
+                                        <p:cTn id="20" dur="1" fill="hold">
+                                          <p:stCondLst>
+                                            <p:cond delay="0"/>
+                                          </p:stCondLst>
+                                        </p:cTn>
+                                        <p:tgtEl>
+                                          <p:spTgt spid="2">
+                                            <p:txEl>
+                                              <p:pRg st="9" end="9"/>
+                                            </p:txEl>
+                                          </p:spTgt>
+                                        </p:tgtEl>
+                                        <p:attrNameLst>
+                                          <p:attrName>style.visibility</p:attrName>
+                                        </p:attrNameLst>
+                                      </p:cBhvr>
+                                      <p:to>
+                                        <p:strVal val="visible"/>
+                                      </p:to>
+                                    </p:set>
+                                  </p:childTnLst>
+                                </p:cTn>
+                              </p:par>
+                            </p:childTnLst>
+                          </p:cTn>
+                        </p:par>
+                      </p:childTnLst>
+                    </p:cTn>
+                  </p:par>
+                </p:childTnLst>
+              </p:cTn>
+              <p:prevCondLst>
+                <p:cond evt="onPrev" delay="0">
+                  <p:tgtEl>
+                    <p:sldTgt/>
+                  </p:tgtEl>
+                </p:cond>
+              </p:prevCondLst>
+              <p:nextCondLst>
+                <p:cond evt="onNext" delay="0">
+                  <p:tgtEl>
+                    <p:sldTgt/>
+                  </p:tgtEl>
+                </p:cond>
+              </p:nextCondLst>
+            </p:seq>
+          </p:childTnLst>
+        </p:cTn>
+      </p:par>
+    </p:tnLst>
+  </p:timing>
 </p:sld>
 </file>
 
@@ -24391,7 +22672,7 @@
           <a:p>
             <a:r>
               <a:rPr lang="en-US" dirty="0"/>
-              <a:t>Risk Functional</a:t>
+              <a:t>The Risk Functional</a:t>
             </a:r>
           </a:p>
         </p:txBody>

--- a/Lectures/01.Foundations/Lecture02.pptx
+++ b/Lectures/01.Foundations/Lecture02.pptx
@@ -3053,8 +3053,8 @@
           <a:chExt cx="0" cy="0"/>
         </a:xfrm>
       </p:grpSpPr>
-      <mc:AlternateContent xmlns:mc="http://schemas.openxmlformats.org/markup-compatibility/2006">
-        <mc:Choice xmlns:a14="http://schemas.microsoft.com/office/drawing/2010/main" Requires="a14">
+      <mc:AlternateContent xmlns:mc="http://schemas.openxmlformats.org/markup-compatibility/2006" xmlns:a14="http://schemas.microsoft.com/office/drawing/2010/main">
+        <mc:Choice Requires="a14">
           <p:sp>
             <p:nvSpPr>
               <p:cNvPr id="5" name="Content Placeholder 4">
@@ -3633,7 +3633,7 @@
             </p:txBody>
           </p:sp>
         </mc:Choice>
-        <mc:Fallback>
+        <mc:Fallback xmlns="">
           <p:sp>
             <p:nvSpPr>
               <p:cNvPr id="5" name="Content Placeholder 4">
@@ -3909,8 +3909,8 @@
           <a:chExt cx="0" cy="0"/>
         </a:xfrm>
       </p:grpSpPr>
-      <mc:AlternateContent xmlns:mc="http://schemas.openxmlformats.org/markup-compatibility/2006">
-        <mc:Choice xmlns:a14="http://schemas.microsoft.com/office/drawing/2010/main" Requires="a14">
+      <mc:AlternateContent xmlns:mc="http://schemas.openxmlformats.org/markup-compatibility/2006" xmlns:a14="http://schemas.microsoft.com/office/drawing/2010/main">
+        <mc:Choice Requires="a14">
           <p:sp>
             <p:nvSpPr>
               <p:cNvPr id="4" name="Content Placeholder 3">
@@ -4341,7 +4341,7 @@
             </p:txBody>
           </p:sp>
         </mc:Choice>
-        <mc:Fallback>
+        <mc:Fallback xmlns="">
           <p:sp>
             <p:nvSpPr>
               <p:cNvPr id="4" name="Content Placeholder 3">
@@ -5637,8 +5637,8 @@
           <a:chExt cx="0" cy="0"/>
         </a:xfrm>
       </p:grpSpPr>
-      <mc:AlternateContent xmlns:mc="http://schemas.openxmlformats.org/markup-compatibility/2006">
-        <mc:Choice xmlns:a14="http://schemas.microsoft.com/office/drawing/2010/main" Requires="a14">
+      <mc:AlternateContent xmlns:mc="http://schemas.openxmlformats.org/markup-compatibility/2006" xmlns:a14="http://schemas.microsoft.com/office/drawing/2010/main">
+        <mc:Choice Requires="a14">
           <p:sp>
             <p:nvSpPr>
               <p:cNvPr id="4" name="Content Placeholder 3">
@@ -6581,7 +6581,7 @@
             </p:txBody>
           </p:sp>
         </mc:Choice>
-        <mc:Fallback>
+        <mc:Fallback xmlns="">
           <p:sp>
             <p:nvSpPr>
               <p:cNvPr id="4" name="Content Placeholder 3">
@@ -10742,8 +10742,8 @@
           </a:prstGeom>
         </p:spPr>
       </p:pic>
-      <mc:AlternateContent xmlns:mc="http://schemas.openxmlformats.org/markup-compatibility/2006">
-        <mc:Choice xmlns:a14="http://schemas.microsoft.com/office/drawing/2010/main" Requires="a14">
+      <mc:AlternateContent xmlns:mc="http://schemas.openxmlformats.org/markup-compatibility/2006" xmlns:a14="http://schemas.microsoft.com/office/drawing/2010/main">
+        <mc:Choice Requires="a14">
           <p:sp>
             <p:nvSpPr>
               <p:cNvPr id="2" name="Content Placeholder 1">
@@ -11591,7 +11591,7 @@
             </p:txBody>
           </p:sp>
         </mc:Choice>
-        <mc:Fallback>
+        <mc:Fallback xmlns="">
           <p:sp>
             <p:nvSpPr>
               <p:cNvPr id="2" name="Content Placeholder 1">
@@ -12000,7 +12000,7 @@
                 </a:r>
                 <a:r>
                   <a:rPr lang="en-US" dirty="0"/>
-                  <a:t> (FCNN).</a:t>
+                  <a:t> (FFNN).</a:t>
                 </a:r>
                 <a:endParaRPr lang="en-US" sz="2400" dirty="0"/>
               </a:p>
@@ -13885,8 +13885,8 @@
           </a:prstGeom>
         </p:spPr>
       </p:pic>
-      <mc:AlternateContent xmlns:mc="http://schemas.openxmlformats.org/markup-compatibility/2006">
-        <mc:Choice xmlns:a14="http://schemas.microsoft.com/office/drawing/2010/main" Requires="a14">
+      <mc:AlternateContent xmlns:mc="http://schemas.openxmlformats.org/markup-compatibility/2006" xmlns:a14="http://schemas.microsoft.com/office/drawing/2010/main">
+        <mc:Choice Requires="a14">
           <p:sp>
             <p:nvSpPr>
               <p:cNvPr id="2" name="Content Placeholder 1">
@@ -15001,7 +15001,7 @@
             </p:txBody>
           </p:sp>
         </mc:Choice>
-        <mc:Fallback>
+        <mc:Fallback xmlns="">
           <p:sp>
             <p:nvSpPr>
               <p:cNvPr id="2" name="Content Placeholder 1">
@@ -15472,8 +15472,8 @@
           <a:chExt cx="0" cy="0"/>
         </a:xfrm>
       </p:grpSpPr>
-      <mc:AlternateContent xmlns:mc="http://schemas.openxmlformats.org/markup-compatibility/2006">
-        <mc:Choice xmlns:a14="http://schemas.microsoft.com/office/drawing/2010/main" Requires="a14">
+      <mc:AlternateContent xmlns:mc="http://schemas.openxmlformats.org/markup-compatibility/2006" xmlns:a14="http://schemas.microsoft.com/office/drawing/2010/main">
+        <mc:Choice Requires="a14">
           <p:sp>
             <p:nvSpPr>
               <p:cNvPr id="4" name="Content Placeholder 3">
@@ -16213,7 +16213,7 @@
             </p:txBody>
           </p:sp>
         </mc:Choice>
-        <mc:Fallback>
+        <mc:Fallback xmlns="">
           <p:sp>
             <p:nvSpPr>
               <p:cNvPr id="4" name="Content Placeholder 3">
@@ -16400,8 +16400,8 @@
           </a:p>
         </p:txBody>
       </p:sp>
-      <mc:AlternateContent xmlns:mc="http://schemas.openxmlformats.org/markup-compatibility/2006">
-        <mc:Choice xmlns:a14="http://schemas.microsoft.com/office/drawing/2010/main" Requires="a14">
+      <mc:AlternateContent xmlns:mc="http://schemas.openxmlformats.org/markup-compatibility/2006" xmlns:a14="http://schemas.microsoft.com/office/drawing/2010/main">
+        <mc:Choice Requires="a14">
           <p:sp>
             <p:nvSpPr>
               <p:cNvPr id="4" name="Content Placeholder 3">
@@ -16995,7 +16995,7 @@
             </p:txBody>
           </p:sp>
         </mc:Choice>
-        <mc:Fallback>
+        <mc:Fallback xmlns="">
           <p:sp>
             <p:nvSpPr>
               <p:cNvPr id="4" name="Content Placeholder 3">
